--- a/output/wordlabs-pre-prefix-3day.pptx
+++ b/output/wordlabs-pre-prefix-3day.pptx
@@ -4240,7 +4240,7 @@
                 <a:ea typeface="Calibri" pitchFamily="34" charset="-122"/>
                 <a:cs typeface="Calibri" pitchFamily="34" charset="-120"/>
               </a:rPr>
-              <a:t>"before, in front of"</a:t>
+              <a:t>"before, in advance"</a:t>
             </a:r>
             <a:endParaRPr lang="en-US" sz="2200" dirty="0"/>
           </a:p>
@@ -5288,7 +5288,7 @@
                 <a:ea typeface="Calibri" pitchFamily="34" charset="-122"/>
                 <a:cs typeface="Calibri" pitchFamily="34" charset="-120"/>
               </a:rPr>
-              <a:t>Word Labs  •  wordlabs.app  •  Prefix: 'pre-' = before, in front of</a:t>
+              <a:t>Word Labs  •  wordlabs.app  •  Prefix: 'pre-' = before, in advance</a:t>
             </a:r>
             <a:endParaRPr lang="en-US" sz="800" dirty="0"/>
           </a:p>
@@ -5928,7 +5928,7 @@
                 <a:ea typeface="Calibri" pitchFamily="34" charset="-122"/>
                 <a:cs typeface="Calibri" pitchFamily="34" charset="-120"/>
               </a:rPr>
-              <a:t>Word Labs  •  wordlabs.app  •  Prefix: 'pre-' = before, in front of</a:t>
+              <a:t>Word Labs  •  wordlabs.app  •  Prefix: 'pre-' = before, in advance</a:t>
             </a:r>
             <a:endParaRPr lang="en-US" sz="800" dirty="0"/>
           </a:p>
@@ -6040,7 +6040,7 @@
                 <a:ea typeface="Calibri" pitchFamily="34" charset="-122"/>
                 <a:cs typeface="Calibri" pitchFamily="34" charset="-120"/>
               </a:rPr>
-              <a:t>Can you </a:t>
+              <a:t>We need to </a:t>
             </a:r>
             <a:pPr algn="l" indent="0" marL="0">
               <a:buNone/>
@@ -6057,7 +6057,7 @@
                 <a:ea typeface="Calibri" pitchFamily="34" charset="-122"/>
                 <a:cs typeface="Calibri" pitchFamily="34" charset="-120"/>
               </a:rPr>
-              <a:t>predict</a:t>
+              <a:t>prepare</a:t>
             </a:r>
             <a:pPr algn="l" indent="0" marL="0">
               <a:buNone/>
@@ -6071,7 +6071,7 @@
                 <a:ea typeface="Calibri" pitchFamily="34" charset="-122"/>
                 <a:cs typeface="Calibri" pitchFamily="34" charset="-120"/>
               </a:rPr>
-              <a:t> what will happen if we </a:t>
+              <a:t> our costumes before the school </a:t>
             </a:r>
             <a:pPr algn="l" indent="0" marL="0">
               <a:buNone/>
@@ -6088,7 +6088,7 @@
                 <a:ea typeface="Calibri" pitchFamily="34" charset="-122"/>
                 <a:cs typeface="Calibri" pitchFamily="34" charset="-120"/>
               </a:rPr>
-              <a:t>preheat</a:t>
+              <a:t>preview</a:t>
             </a:r>
             <a:pPr algn="l" indent="0" marL="0">
               <a:buNone/>
@@ -6102,7 +6102,7 @@
                 <a:ea typeface="Calibri" pitchFamily="34" charset="-122"/>
                 <a:cs typeface="Calibri" pitchFamily="34" charset="-120"/>
               </a:rPr>
-              <a:t> the pan?</a:t>
+              <a:t> next week.</a:t>
             </a:r>
             <a:endParaRPr lang="en-US" sz="1800" dirty="0"/>
           </a:p>
@@ -6257,7 +6257,7 @@
                 <a:ea typeface="Trebuchet MS" pitchFamily="34" charset="-122"/>
                 <a:cs typeface="Trebuchet MS" pitchFamily="34" charset="-120"/>
               </a:rPr>
-              <a:t>predict</a:t>
+              <a:t>prepare</a:t>
             </a:r>
             <a:endParaRPr lang="en-US" sz="1400" dirty="0"/>
           </a:p>
@@ -6385,7 +6385,7 @@
                 <a:ea typeface="Trebuchet MS" pitchFamily="34" charset="-122"/>
                 <a:cs typeface="Trebuchet MS" pitchFamily="34" charset="-120"/>
               </a:rPr>
-              <a:t>preheat</a:t>
+              <a:t>preview</a:t>
             </a:r>
             <a:endParaRPr lang="en-US" sz="1400" dirty="0"/>
           </a:p>
@@ -6716,7 +6716,7 @@
                 <a:ea typeface="Calibri" pitchFamily="34" charset="-122"/>
                 <a:cs typeface="Calibri" pitchFamily="34" charset="-120"/>
               </a:rPr>
-              <a:t>Word Labs  •  wordlabs.app  •  Prefix: 'pre-' = before, in front of</a:t>
+              <a:t>Word Labs  •  wordlabs.app  •  Prefix: 'pre-' = before, in advance</a:t>
             </a:r>
             <a:endParaRPr lang="en-US" sz="800" dirty="0"/>
           </a:p>
@@ -6855,7 +6855,7 @@
                 <a:ea typeface="Trebuchet MS" pitchFamily="34" charset="-122"/>
                 <a:cs typeface="Trebuchet MS" pitchFamily="34" charset="-120"/>
               </a:rPr>
-              <a:t>predict</a:t>
+              <a:t>prepare</a:t>
             </a:r>
             <a:endParaRPr lang="en-US" sz="2800" dirty="0"/>
           </a:p>
@@ -7543,7 +7543,7 @@
                 <a:ea typeface="Calibri" pitchFamily="34" charset="-122"/>
                 <a:cs typeface="Calibri" pitchFamily="34" charset="-120"/>
               </a:rPr>
-              <a:t>Word Labs  •  wordlabs.app  •  Prefix: 'pre-' = before, in front of</a:t>
+              <a:t>Word Labs  •  wordlabs.app  •  Prefix: 'pre-' = before, in advance</a:t>
             </a:r>
             <a:endParaRPr lang="en-US" sz="800" dirty="0"/>
           </a:p>
@@ -7682,7 +7682,7 @@
                 <a:ea typeface="Trebuchet MS" pitchFamily="34" charset="-122"/>
                 <a:cs typeface="Trebuchet MS" pitchFamily="34" charset="-120"/>
               </a:rPr>
-              <a:t>predict</a:t>
+              <a:t>prepare</a:t>
             </a:r>
             <a:endParaRPr lang="en-US" sz="2800" dirty="0"/>
           </a:p>
@@ -7933,7 +7933,7 @@
                 <a:ea typeface="Trebuchet MS" pitchFamily="34" charset="-122"/>
                 <a:cs typeface="Trebuchet MS" pitchFamily="34" charset="-120"/>
               </a:rPr>
-              <a:t>dict</a:t>
+              <a:t>pare</a:t>
             </a:r>
             <a:endParaRPr lang="en-US" sz="1300" dirty="0"/>
           </a:p>
@@ -7972,7 +7972,7 @@
                 <a:ea typeface="Calibri" pitchFamily="34" charset="-122"/>
                 <a:cs typeface="Calibri" pitchFamily="34" charset="-120"/>
               </a:rPr>
-              <a:t>say, tell</a:t>
+              <a:t>to make ready</a:t>
             </a:r>
             <a:endParaRPr lang="en-US" sz="850" dirty="0"/>
           </a:p>
@@ -8528,7 +8528,7 @@
                 <a:ea typeface="Calibri" pitchFamily="34" charset="-122"/>
                 <a:cs typeface="Calibri" pitchFamily="34" charset="-120"/>
               </a:rPr>
-              <a:t>Word Labs  •  wordlabs.app  •  Prefix: 'pre-' = before, in front of</a:t>
+              <a:t>Word Labs  •  wordlabs.app  •  Prefix: 'pre-' = before, in advance</a:t>
             </a:r>
             <a:endParaRPr lang="en-US" sz="800" dirty="0"/>
           </a:p>
@@ -8667,7 +8667,7 @@
                 <a:ea typeface="Trebuchet MS" pitchFamily="34" charset="-122"/>
                 <a:cs typeface="Trebuchet MS" pitchFamily="34" charset="-120"/>
               </a:rPr>
-              <a:t>predict</a:t>
+              <a:t>prepare</a:t>
             </a:r>
             <a:endParaRPr lang="en-US" sz="2800" dirty="0"/>
           </a:p>
@@ -8918,7 +8918,7 @@
                 <a:ea typeface="Trebuchet MS" pitchFamily="34" charset="-122"/>
                 <a:cs typeface="Trebuchet MS" pitchFamily="34" charset="-120"/>
               </a:rPr>
-              <a:t>dict</a:t>
+              <a:t>pare</a:t>
             </a:r>
             <a:endParaRPr lang="en-US" sz="1300" dirty="0"/>
           </a:p>
@@ -8957,7 +8957,7 @@
                 <a:ea typeface="Calibri" pitchFamily="34" charset="-122"/>
                 <a:cs typeface="Calibri" pitchFamily="34" charset="-120"/>
               </a:rPr>
-              <a:t>say, tell</a:t>
+              <a:t>to make ready</a:t>
             </a:r>
             <a:endParaRPr lang="en-US" sz="850" dirty="0"/>
           </a:p>
@@ -9221,7 +9221,7 @@
                 <a:ea typeface="Trebuchet MS" pitchFamily="34" charset="-122"/>
                 <a:cs typeface="Trebuchet MS" pitchFamily="34" charset="-120"/>
               </a:rPr>
-              <a:t>dict</a:t>
+              <a:t>pare</a:t>
             </a:r>
             <a:endParaRPr lang="en-US" sz="1400" dirty="0"/>
           </a:p>
@@ -9645,7 +9645,7 @@
                 <a:ea typeface="Calibri" pitchFamily="34" charset="-122"/>
                 <a:cs typeface="Calibri" pitchFamily="34" charset="-120"/>
               </a:rPr>
-              <a:t>Word Labs  •  wordlabs.app  •  Prefix: 'pre-' = before, in front of</a:t>
+              <a:t>Word Labs  •  wordlabs.app  •  Prefix: 'pre-' = before, in advance</a:t>
             </a:r>
             <a:endParaRPr lang="en-US" sz="800" dirty="0"/>
           </a:p>
@@ -9784,7 +9784,7 @@
                 <a:ea typeface="Trebuchet MS" pitchFamily="34" charset="-122"/>
                 <a:cs typeface="Trebuchet MS" pitchFamily="34" charset="-120"/>
               </a:rPr>
-              <a:t>predict</a:t>
+              <a:t>prepare</a:t>
             </a:r>
             <a:endParaRPr lang="en-US" sz="2800" dirty="0"/>
           </a:p>
@@ -10035,7 +10035,7 @@
                 <a:ea typeface="Trebuchet MS" pitchFamily="34" charset="-122"/>
                 <a:cs typeface="Trebuchet MS" pitchFamily="34" charset="-120"/>
               </a:rPr>
-              <a:t>dict</a:t>
+              <a:t>pare</a:t>
             </a:r>
             <a:endParaRPr lang="en-US" sz="1300" dirty="0"/>
           </a:p>
@@ -10074,7 +10074,7 @@
                 <a:ea typeface="Calibri" pitchFamily="34" charset="-122"/>
                 <a:cs typeface="Calibri" pitchFamily="34" charset="-120"/>
               </a:rPr>
-              <a:t>say, tell</a:t>
+              <a:t>to make ready</a:t>
             </a:r>
             <a:endParaRPr lang="en-US" sz="850" dirty="0"/>
           </a:p>
@@ -10338,7 +10338,7 @@
                 <a:ea typeface="Trebuchet MS" pitchFamily="34" charset="-122"/>
                 <a:cs typeface="Trebuchet MS" pitchFamily="34" charset="-120"/>
               </a:rPr>
-              <a:t>dict</a:t>
+              <a:t>pare</a:t>
             </a:r>
             <a:endParaRPr lang="en-US" sz="1400" dirty="0"/>
           </a:p>
@@ -10445,7 +10445,7 @@
         </p:nvSpPr>
         <p:spPr>
           <a:xfrm>
-            <a:off x="2124837" y="4169664"/>
+            <a:off x="2670048" y="4169664"/>
             <a:ext cx="685800" cy="384048"/>
           </a:xfrm>
           <a:prstGeom prst="rect">
@@ -10472,7 +10472,7 @@
         </p:nvSpPr>
         <p:spPr>
           <a:xfrm>
-            <a:off x="2124837" y="4169664"/>
+            <a:off x="2670048" y="4169664"/>
             <a:ext cx="685800" cy="384048"/>
           </a:xfrm>
           <a:prstGeom prst="rect">
@@ -10497,7 +10497,7 @@
                 <a:ea typeface="Trebuchet MS" pitchFamily="34" charset="-122"/>
                 <a:cs typeface="Trebuchet MS" pitchFamily="34" charset="-120"/>
               </a:rPr>
-              <a:t>p</a:t>
+              <a:t>pr</a:t>
             </a:r>
             <a:endParaRPr lang="en-US" sz="900" dirty="0"/>
           </a:p>
@@ -10511,7 +10511,7 @@
         </p:nvSpPr>
         <p:spPr>
           <a:xfrm>
-            <a:off x="3033522" y="4169664"/>
+            <a:off x="4123944" y="4169664"/>
             <a:ext cx="685800" cy="384048"/>
           </a:xfrm>
           <a:prstGeom prst="rect">
@@ -10538,7 +10538,7 @@
         </p:nvSpPr>
         <p:spPr>
           <a:xfrm>
-            <a:off x="3033522" y="4169664"/>
+            <a:off x="4123944" y="4169664"/>
             <a:ext cx="685800" cy="384048"/>
           </a:xfrm>
           <a:prstGeom prst="rect">
@@ -10563,7 +10563,7 @@
                 <a:ea typeface="Trebuchet MS" pitchFamily="34" charset="-122"/>
                 <a:cs typeface="Trebuchet MS" pitchFamily="34" charset="-120"/>
               </a:rPr>
-              <a:t>r</a:t>
+              <a:t>e</a:t>
             </a:r>
             <a:endParaRPr lang="en-US" sz="900" dirty="0"/>
           </a:p>
@@ -10577,7 +10577,7 @@
         </p:nvSpPr>
         <p:spPr>
           <a:xfrm>
-            <a:off x="3942207" y="4169664"/>
+            <a:off x="5577840" y="4169664"/>
             <a:ext cx="685800" cy="384048"/>
           </a:xfrm>
           <a:prstGeom prst="rect">
@@ -10604,7 +10604,7 @@
         </p:nvSpPr>
         <p:spPr>
           <a:xfrm>
-            <a:off x="3942207" y="4169664"/>
+            <a:off x="5577840" y="4169664"/>
             <a:ext cx="685800" cy="384048"/>
           </a:xfrm>
           <a:prstGeom prst="rect">
@@ -10629,7 +10629,7 @@
                 <a:ea typeface="Trebuchet MS" pitchFamily="34" charset="-122"/>
                 <a:cs typeface="Trebuchet MS" pitchFamily="34" charset="-120"/>
               </a:rPr>
-              <a:t>e</a:t>
+              <a:t>p</a:t>
             </a:r>
             <a:endParaRPr lang="en-US" sz="900" dirty="0"/>
           </a:p>
@@ -10643,7 +10643,7 @@
         </p:nvSpPr>
         <p:spPr>
           <a:xfrm>
-            <a:off x="4850892" y="4169664"/>
+            <a:off x="7031736" y="4169664"/>
             <a:ext cx="685800" cy="384048"/>
           </a:xfrm>
           <a:prstGeom prst="rect">
@@ -10670,7 +10670,7 @@
         </p:nvSpPr>
         <p:spPr>
           <a:xfrm>
-            <a:off x="4850892" y="4169664"/>
+            <a:off x="7031736" y="4169664"/>
             <a:ext cx="685800" cy="384048"/>
           </a:xfrm>
           <a:prstGeom prst="rect">
@@ -10695,7 +10695,7 @@
                 <a:ea typeface="Trebuchet MS" pitchFamily="34" charset="-122"/>
                 <a:cs typeface="Trebuchet MS" pitchFamily="34" charset="-120"/>
               </a:rPr>
-              <a:t>d</a:t>
+              <a:t>are</a:t>
             </a:r>
             <a:endParaRPr lang="en-US" sz="900" dirty="0"/>
           </a:p>
@@ -10703,145 +10703,13 @@
       </p:sp>
       <p:sp>
         <p:nvSpPr>
-          <p:cNvPr id="41" name="Shape 39"/>
-          <p:cNvSpPr/>
-          <p:nvPr/>
-        </p:nvSpPr>
-        <p:spPr>
-          <a:xfrm>
-            <a:off x="5759577" y="4169664"/>
-            <a:ext cx="685800" cy="384048"/>
-          </a:xfrm>
-          <a:prstGeom prst="rect">
-            <a:avLst>
-              <a:gd name="adj" fmla="val 9524"/>
-            </a:avLst>
-          </a:prstGeom>
-          <a:solidFill>
-            <a:srgbClr val="FFFFFF"/>
-          </a:solidFill>
-          <a:ln w="12700">
-            <a:solidFill>
-              <a:srgbClr val="DB2777"/>
-            </a:solidFill>
-            <a:prstDash val="solid"/>
-          </a:ln>
-        </p:spPr>
-      </p:sp>
-      <p:sp>
-        <p:nvSpPr>
-          <p:cNvPr id="42" name="Text 40"/>
-          <p:cNvSpPr/>
-          <p:nvPr/>
-        </p:nvSpPr>
-        <p:spPr>
-          <a:xfrm>
-            <a:off x="5759577" y="4169664"/>
-            <a:ext cx="685800" cy="384048"/>
-          </a:xfrm>
-          <a:prstGeom prst="rect">
-            <a:avLst/>
-          </a:prstGeom>
-          <a:noFill/>
-          <a:ln/>
-        </p:spPr>
-        <p:txBody>
-          <a:bodyPr wrap="square" lIns="0" tIns="0" rIns="0" bIns="0" rtlCol="0" anchor="ctr"/>
-          <a:lstStyle/>
-          <a:p>
-            <a:pPr algn="ctr" indent="0" marL="0">
-              <a:buNone/>
-            </a:pPr>
-            <a:r>
-              <a:rPr lang="en-US" sz="900" b="1" dirty="0">
-                <a:solidFill>
-                  <a:srgbClr val="9D174D"/>
-                </a:solidFill>
-                <a:latin typeface="Trebuchet MS" pitchFamily="34" charset="0"/>
-                <a:ea typeface="Trebuchet MS" pitchFamily="34" charset="-122"/>
-                <a:cs typeface="Trebuchet MS" pitchFamily="34" charset="-120"/>
-              </a:rPr>
-              <a:t>i</a:t>
-            </a:r>
-            <a:endParaRPr lang="en-US" sz="900" dirty="0"/>
-          </a:p>
-        </p:txBody>
-      </p:sp>
-      <p:sp>
-        <p:nvSpPr>
-          <p:cNvPr id="43" name="Shape 41"/>
-          <p:cNvSpPr/>
-          <p:nvPr/>
-        </p:nvSpPr>
-        <p:spPr>
-          <a:xfrm>
-            <a:off x="6668262" y="4169664"/>
-            <a:ext cx="685800" cy="384048"/>
-          </a:xfrm>
-          <a:prstGeom prst="rect">
-            <a:avLst>
-              <a:gd name="adj" fmla="val 9524"/>
-            </a:avLst>
-          </a:prstGeom>
-          <a:solidFill>
-            <a:srgbClr val="FFFFFF"/>
-          </a:solidFill>
-          <a:ln w="12700">
-            <a:solidFill>
-              <a:srgbClr val="DB2777"/>
-            </a:solidFill>
-            <a:prstDash val="solid"/>
-          </a:ln>
-        </p:spPr>
-      </p:sp>
-      <p:sp>
-        <p:nvSpPr>
-          <p:cNvPr id="44" name="Text 42"/>
-          <p:cNvSpPr/>
-          <p:nvPr/>
-        </p:nvSpPr>
-        <p:spPr>
-          <a:xfrm>
-            <a:off x="6668262" y="4169664"/>
-            <a:ext cx="685800" cy="384048"/>
-          </a:xfrm>
-          <a:prstGeom prst="rect">
-            <a:avLst/>
-          </a:prstGeom>
-          <a:noFill/>
-          <a:ln/>
-        </p:spPr>
-        <p:txBody>
-          <a:bodyPr wrap="square" lIns="0" tIns="0" rIns="0" bIns="0" rtlCol="0" anchor="ctr"/>
-          <a:lstStyle/>
-          <a:p>
-            <a:pPr algn="ctr" indent="0" marL="0">
-              <a:buNone/>
-            </a:pPr>
-            <a:r>
-              <a:rPr lang="en-US" sz="900" b="1" dirty="0">
-                <a:solidFill>
-                  <a:srgbClr val="9D174D"/>
-                </a:solidFill>
-                <a:latin typeface="Trebuchet MS" pitchFamily="34" charset="0"/>
-                <a:ea typeface="Trebuchet MS" pitchFamily="34" charset="-122"/>
-                <a:cs typeface="Trebuchet MS" pitchFamily="34" charset="-120"/>
-              </a:rPr>
-              <a:t>c</a:t>
-            </a:r>
-            <a:endParaRPr lang="en-US" sz="900" dirty="0"/>
-          </a:p>
-        </p:txBody>
-      </p:sp>
-      <p:sp>
-        <p:nvSpPr>
-          <p:cNvPr id="45" name="Text 43"/>
-          <p:cNvSpPr/>
-          <p:nvPr/>
-        </p:nvSpPr>
-        <p:spPr>
-          <a:xfrm>
-            <a:off x="6668262" y="4572000"/>
+          <p:cNvPr id="41" name="Text 39"/>
+          <p:cNvSpPr/>
+          <p:nvPr/>
+        </p:nvSpPr>
+        <p:spPr>
+          <a:xfrm>
+            <a:off x="7031736" y="4572000"/>
             <a:ext cx="685800" cy="219456"/>
           </a:xfrm>
           <a:prstGeom prst="rect">
@@ -10866,75 +10734,9 @@
                 <a:ea typeface="Calibri" pitchFamily="34" charset="-122"/>
                 <a:cs typeface="Calibri" pitchFamily="34" charset="-120"/>
               </a:rPr>
-              <a:t>/k/</a:t>
+              <a:t>/air/</a:t>
             </a:r>
             <a:endParaRPr lang="en-US" sz="750" dirty="0"/>
-          </a:p>
-        </p:txBody>
-      </p:sp>
-      <p:sp>
-        <p:nvSpPr>
-          <p:cNvPr id="46" name="Shape 44"/>
-          <p:cNvSpPr/>
-          <p:nvPr/>
-        </p:nvSpPr>
-        <p:spPr>
-          <a:xfrm>
-            <a:off x="7576947" y="4169664"/>
-            <a:ext cx="685800" cy="384048"/>
-          </a:xfrm>
-          <a:prstGeom prst="rect">
-            <a:avLst>
-              <a:gd name="adj" fmla="val 9524"/>
-            </a:avLst>
-          </a:prstGeom>
-          <a:solidFill>
-            <a:srgbClr val="FFFFFF"/>
-          </a:solidFill>
-          <a:ln w="12700">
-            <a:solidFill>
-              <a:srgbClr val="DB2777"/>
-            </a:solidFill>
-            <a:prstDash val="solid"/>
-          </a:ln>
-        </p:spPr>
-      </p:sp>
-      <p:sp>
-        <p:nvSpPr>
-          <p:cNvPr id="47" name="Text 45"/>
-          <p:cNvSpPr/>
-          <p:nvPr/>
-        </p:nvSpPr>
-        <p:spPr>
-          <a:xfrm>
-            <a:off x="7576947" y="4169664"/>
-            <a:ext cx="685800" cy="384048"/>
-          </a:xfrm>
-          <a:prstGeom prst="rect">
-            <a:avLst/>
-          </a:prstGeom>
-          <a:noFill/>
-          <a:ln/>
-        </p:spPr>
-        <p:txBody>
-          <a:bodyPr wrap="square" lIns="0" tIns="0" rIns="0" bIns="0" rtlCol="0" anchor="ctr"/>
-          <a:lstStyle/>
-          <a:p>
-            <a:pPr algn="ctr" indent="0" marL="0">
-              <a:buNone/>
-            </a:pPr>
-            <a:r>
-              <a:rPr lang="en-US" sz="900" b="1" dirty="0">
-                <a:solidFill>
-                  <a:srgbClr val="9D174D"/>
-                </a:solidFill>
-                <a:latin typeface="Trebuchet MS" pitchFamily="34" charset="0"/>
-                <a:ea typeface="Trebuchet MS" pitchFamily="34" charset="-122"/>
-                <a:cs typeface="Trebuchet MS" pitchFamily="34" charset="-120"/>
-              </a:rPr>
-              <a:t>t</a:t>
-            </a:r>
-            <a:endParaRPr lang="en-US" sz="900" dirty="0"/>
           </a:p>
         </p:txBody>
       </p:sp>
@@ -11224,7 +11026,7 @@
                 <a:ea typeface="Calibri" pitchFamily="34" charset="-122"/>
                 <a:cs typeface="Calibri" pitchFamily="34" charset="-120"/>
               </a:rPr>
-              <a:t>Word Labs  •  wordlabs.app  •  Prefix: 'pre-' = before, in front of</a:t>
+              <a:t>Word Labs  •  wordlabs.app  •  Prefix: 'pre-' = before, in advance</a:t>
             </a:r>
             <a:endParaRPr lang="en-US" sz="800" dirty="0"/>
           </a:p>
@@ -11363,7 +11165,7 @@
                 <a:ea typeface="Trebuchet MS" pitchFamily="34" charset="-122"/>
                 <a:cs typeface="Trebuchet MS" pitchFamily="34" charset="-120"/>
               </a:rPr>
-              <a:t>preheat</a:t>
+              <a:t>preview</a:t>
             </a:r>
             <a:endParaRPr lang="en-US" sz="2800" dirty="0"/>
           </a:p>
@@ -12051,7 +11853,7 @@
                 <a:ea typeface="Calibri" pitchFamily="34" charset="-122"/>
                 <a:cs typeface="Calibri" pitchFamily="34" charset="-120"/>
               </a:rPr>
-              <a:t>Word Labs  •  wordlabs.app  •  Prefix: 'pre-' = before, in front of</a:t>
+              <a:t>Word Labs  •  wordlabs.app  •  Prefix: 'pre-' = before, in advance</a:t>
             </a:r>
             <a:endParaRPr lang="en-US" sz="800" dirty="0"/>
           </a:p>
@@ -12190,7 +11992,7 @@
                 <a:ea typeface="Trebuchet MS" pitchFamily="34" charset="-122"/>
                 <a:cs typeface="Trebuchet MS" pitchFamily="34" charset="-120"/>
               </a:rPr>
-              <a:t>preheat</a:t>
+              <a:t>preview</a:t>
             </a:r>
             <a:endParaRPr lang="en-US" sz="2800" dirty="0"/>
           </a:p>
@@ -12441,7 +12243,7 @@
                 <a:ea typeface="Trebuchet MS" pitchFamily="34" charset="-122"/>
                 <a:cs typeface="Trebuchet MS" pitchFamily="34" charset="-120"/>
               </a:rPr>
-              <a:t>heat</a:t>
+              <a:t>view</a:t>
             </a:r>
             <a:endParaRPr lang="en-US" sz="1300" dirty="0"/>
           </a:p>
@@ -12480,7 +12282,7 @@
                 <a:ea typeface="Calibri" pitchFamily="34" charset="-122"/>
                 <a:cs typeface="Calibri" pitchFamily="34" charset="-120"/>
               </a:rPr>
-              <a:t>to make hot</a:t>
+              <a:t>to look at</a:t>
             </a:r>
             <a:endParaRPr lang="en-US" sz="850" dirty="0"/>
           </a:p>
@@ -13036,7 +12838,7 @@
                 <a:ea typeface="Calibri" pitchFamily="34" charset="-122"/>
                 <a:cs typeface="Calibri" pitchFamily="34" charset="-120"/>
               </a:rPr>
-              <a:t>Word Labs  •  wordlabs.app  •  Prefix: 'pre-' = before, in front of</a:t>
+              <a:t>Word Labs  •  wordlabs.app  •  Prefix: 'pre-' = before, in advance</a:t>
             </a:r>
             <a:endParaRPr lang="en-US" sz="800" dirty="0"/>
           </a:p>
@@ -13175,7 +12977,7 @@
                 <a:ea typeface="Trebuchet MS" pitchFamily="34" charset="-122"/>
                 <a:cs typeface="Trebuchet MS" pitchFamily="34" charset="-120"/>
               </a:rPr>
-              <a:t>preheat</a:t>
+              <a:t>preview</a:t>
             </a:r>
             <a:endParaRPr lang="en-US" sz="2800" dirty="0"/>
           </a:p>
@@ -13426,7 +13228,7 @@
                 <a:ea typeface="Trebuchet MS" pitchFamily="34" charset="-122"/>
                 <a:cs typeface="Trebuchet MS" pitchFamily="34" charset="-120"/>
               </a:rPr>
-              <a:t>heat</a:t>
+              <a:t>view</a:t>
             </a:r>
             <a:endParaRPr lang="en-US" sz="1300" dirty="0"/>
           </a:p>
@@ -13465,7 +13267,7 @@
                 <a:ea typeface="Calibri" pitchFamily="34" charset="-122"/>
                 <a:cs typeface="Calibri" pitchFamily="34" charset="-120"/>
               </a:rPr>
-              <a:t>to make hot</a:t>
+              <a:t>to look at</a:t>
             </a:r>
             <a:endParaRPr lang="en-US" sz="850" dirty="0"/>
           </a:p>
@@ -13729,7 +13531,7 @@
                 <a:ea typeface="Trebuchet MS" pitchFamily="34" charset="-122"/>
                 <a:cs typeface="Trebuchet MS" pitchFamily="34" charset="-120"/>
               </a:rPr>
-              <a:t>heat</a:t>
+              <a:t>view</a:t>
             </a:r>
             <a:endParaRPr lang="en-US" sz="1400" dirty="0"/>
           </a:p>
@@ -14062,7 +13864,7 @@
                 <a:ea typeface="Calibri" pitchFamily="34" charset="-122"/>
                 <a:cs typeface="Calibri" pitchFamily="34" charset="-120"/>
               </a:rPr>
-              <a:t>Prefix 'pre-' — before, in front of</a:t>
+              <a:t>Prefix 'pre-' — before, in advance</a:t>
             </a:r>
             <a:endParaRPr lang="en-US" sz="1600" dirty="0"/>
           </a:p>
@@ -14418,7 +14220,7 @@
                 <a:ea typeface="Calibri" pitchFamily="34" charset="-122"/>
                 <a:cs typeface="Calibri" pitchFamily="34" charset="-120"/>
               </a:rPr>
-              <a:t>Word Labs  •  wordlabs.app  •  Prefix: 'pre-' = before, in front of</a:t>
+              <a:t>Word Labs  •  wordlabs.app  •  Prefix: 'pre-' = before, in advance</a:t>
             </a:r>
             <a:endParaRPr lang="en-US" sz="800" dirty="0"/>
           </a:p>
@@ -14557,7 +14359,7 @@
                 <a:ea typeface="Trebuchet MS" pitchFamily="34" charset="-122"/>
                 <a:cs typeface="Trebuchet MS" pitchFamily="34" charset="-120"/>
               </a:rPr>
-              <a:t>preheat</a:t>
+              <a:t>preview</a:t>
             </a:r>
             <a:endParaRPr lang="en-US" sz="2800" dirty="0"/>
           </a:p>
@@ -14808,7 +14610,7 @@
                 <a:ea typeface="Trebuchet MS" pitchFamily="34" charset="-122"/>
                 <a:cs typeface="Trebuchet MS" pitchFamily="34" charset="-120"/>
               </a:rPr>
-              <a:t>heat</a:t>
+              <a:t>view</a:t>
             </a:r>
             <a:endParaRPr lang="en-US" sz="1300" dirty="0"/>
           </a:p>
@@ -14847,7 +14649,7 @@
                 <a:ea typeface="Calibri" pitchFamily="34" charset="-122"/>
                 <a:cs typeface="Calibri" pitchFamily="34" charset="-120"/>
               </a:rPr>
-              <a:t>to make hot</a:t>
+              <a:t>to look at</a:t>
             </a:r>
             <a:endParaRPr lang="en-US" sz="850" dirty="0"/>
           </a:p>
@@ -15111,7 +14913,7 @@
                 <a:ea typeface="Trebuchet MS" pitchFamily="34" charset="-122"/>
                 <a:cs typeface="Trebuchet MS" pitchFamily="34" charset="-120"/>
               </a:rPr>
-              <a:t>heat</a:t>
+              <a:t>view</a:t>
             </a:r>
             <a:endParaRPr lang="en-US" sz="1400" dirty="0"/>
           </a:p>
@@ -15192,11 +14994,11 @@
         <p:spPr>
           <a:xfrm>
             <a:off x="1874520" y="4096512"/>
-            <a:ext cx="6903720" cy="658368"/>
+            <a:ext cx="6903720" cy="804672"/>
           </a:xfrm>
           <a:prstGeom prst="rect">
             <a:avLst>
-              <a:gd name="adj" fmla="val 8333"/>
+              <a:gd name="adj" fmla="val 6818"/>
             </a:avLst>
           </a:prstGeom>
           <a:solidFill>
@@ -15218,12 +15020,12 @@
         </p:nvSpPr>
         <p:spPr>
           <a:xfrm>
-            <a:off x="2254649" y="4169664"/>
-            <a:ext cx="685800" cy="475488"/>
+            <a:off x="2670048" y="4169664"/>
+            <a:ext cx="685800" cy="384048"/>
           </a:xfrm>
           <a:prstGeom prst="rect">
             <a:avLst>
-              <a:gd name="adj" fmla="val 7692"/>
+              <a:gd name="adj" fmla="val 9524"/>
             </a:avLst>
           </a:prstGeom>
           <a:solidFill>
@@ -15245,8 +15047,8 @@
         </p:nvSpPr>
         <p:spPr>
           <a:xfrm>
-            <a:off x="2254649" y="4169664"/>
-            <a:ext cx="685800" cy="475488"/>
+            <a:off x="2670048" y="4169664"/>
+            <a:ext cx="685800" cy="384048"/>
           </a:xfrm>
           <a:prstGeom prst="rect">
             <a:avLst/>
@@ -15270,7 +15072,7 @@
                 <a:ea typeface="Trebuchet MS" pitchFamily="34" charset="-122"/>
                 <a:cs typeface="Trebuchet MS" pitchFamily="34" charset="-120"/>
               </a:rPr>
-              <a:t>p</a:t>
+              <a:t>pr</a:t>
             </a:r>
             <a:endParaRPr lang="en-US" sz="900" dirty="0"/>
           </a:p>
@@ -15284,12 +15086,12 @@
         </p:nvSpPr>
         <p:spPr>
           <a:xfrm>
-            <a:off x="3293146" y="4169664"/>
-            <a:ext cx="685800" cy="475488"/>
+            <a:off x="4123944" y="4169664"/>
+            <a:ext cx="685800" cy="384048"/>
           </a:xfrm>
           <a:prstGeom prst="rect">
             <a:avLst>
-              <a:gd name="adj" fmla="val 7692"/>
+              <a:gd name="adj" fmla="val 9524"/>
             </a:avLst>
           </a:prstGeom>
           <a:solidFill>
@@ -15311,8 +15113,8 @@
         </p:nvSpPr>
         <p:spPr>
           <a:xfrm>
-            <a:off x="3293146" y="4169664"/>
-            <a:ext cx="685800" cy="475488"/>
+            <a:off x="4123944" y="4169664"/>
+            <a:ext cx="685800" cy="384048"/>
           </a:xfrm>
           <a:prstGeom prst="rect">
             <a:avLst/>
@@ -15336,7 +15138,7 @@
                 <a:ea typeface="Trebuchet MS" pitchFamily="34" charset="-122"/>
                 <a:cs typeface="Trebuchet MS" pitchFamily="34" charset="-120"/>
               </a:rPr>
-              <a:t>r</a:t>
+              <a:t>e</a:t>
             </a:r>
             <a:endParaRPr lang="en-US" sz="900" dirty="0"/>
           </a:p>
@@ -15350,12 +15152,12 @@
         </p:nvSpPr>
         <p:spPr>
           <a:xfrm>
-            <a:off x="4331643" y="4169664"/>
-            <a:ext cx="685800" cy="475488"/>
+            <a:off x="5577840" y="4169664"/>
+            <a:ext cx="685800" cy="384048"/>
           </a:xfrm>
           <a:prstGeom prst="rect">
             <a:avLst>
-              <a:gd name="adj" fmla="val 7692"/>
+              <a:gd name="adj" fmla="val 9524"/>
             </a:avLst>
           </a:prstGeom>
           <a:solidFill>
@@ -15377,8 +15179,8 @@
         </p:nvSpPr>
         <p:spPr>
           <a:xfrm>
-            <a:off x="4331643" y="4169664"/>
-            <a:ext cx="685800" cy="475488"/>
+            <a:off x="5577840" y="4169664"/>
+            <a:ext cx="685800" cy="384048"/>
           </a:xfrm>
           <a:prstGeom prst="rect">
             <a:avLst/>
@@ -15402,7 +15204,7 @@
                 <a:ea typeface="Trebuchet MS" pitchFamily="34" charset="-122"/>
                 <a:cs typeface="Trebuchet MS" pitchFamily="34" charset="-120"/>
               </a:rPr>
-              <a:t>e</a:t>
+              <a:t>v</a:t>
             </a:r>
             <a:endParaRPr lang="en-US" sz="900" dirty="0"/>
           </a:p>
@@ -15416,12 +15218,12 @@
         </p:nvSpPr>
         <p:spPr>
           <a:xfrm>
-            <a:off x="5370141" y="4169664"/>
-            <a:ext cx="685800" cy="475488"/>
+            <a:off x="7031736" y="4169664"/>
+            <a:ext cx="685800" cy="384048"/>
           </a:xfrm>
           <a:prstGeom prst="rect">
             <a:avLst>
-              <a:gd name="adj" fmla="val 7692"/>
+              <a:gd name="adj" fmla="val 9524"/>
             </a:avLst>
           </a:prstGeom>
           <a:solidFill>
@@ -15443,8 +15245,8 @@
         </p:nvSpPr>
         <p:spPr>
           <a:xfrm>
-            <a:off x="5370141" y="4169664"/>
-            <a:ext cx="685800" cy="475488"/>
+            <a:off x="7031736" y="4169664"/>
+            <a:ext cx="685800" cy="384048"/>
           </a:xfrm>
           <a:prstGeom prst="rect">
             <a:avLst/>
@@ -15468,7 +15270,7 @@
                 <a:ea typeface="Trebuchet MS" pitchFamily="34" charset="-122"/>
                 <a:cs typeface="Trebuchet MS" pitchFamily="34" charset="-120"/>
               </a:rPr>
-              <a:t>h</a:t>
+              <a:t>iew</a:t>
             </a:r>
             <a:endParaRPr lang="en-US" sz="900" dirty="0"/>
           </a:p>
@@ -15476,133 +15278,40 @@
       </p:sp>
       <p:sp>
         <p:nvSpPr>
-          <p:cNvPr id="41" name="Shape 39"/>
-          <p:cNvSpPr/>
-          <p:nvPr/>
-        </p:nvSpPr>
-        <p:spPr>
-          <a:xfrm>
-            <a:off x="6408638" y="4169664"/>
-            <a:ext cx="685800" cy="475488"/>
-          </a:xfrm>
-          <a:prstGeom prst="rect">
-            <a:avLst>
-              <a:gd name="adj" fmla="val 7692"/>
-            </a:avLst>
-          </a:prstGeom>
-          <a:solidFill>
-            <a:srgbClr val="FFFFFF"/>
-          </a:solidFill>
-          <a:ln w="12700">
-            <a:solidFill>
-              <a:srgbClr val="DB2777"/>
-            </a:solidFill>
-            <a:prstDash val="solid"/>
-          </a:ln>
-        </p:spPr>
-      </p:sp>
-      <p:sp>
-        <p:nvSpPr>
-          <p:cNvPr id="42" name="Text 40"/>
-          <p:cNvSpPr/>
-          <p:nvPr/>
-        </p:nvSpPr>
-        <p:spPr>
-          <a:xfrm>
-            <a:off x="6408638" y="4169664"/>
-            <a:ext cx="685800" cy="475488"/>
-          </a:xfrm>
-          <a:prstGeom prst="rect">
-            <a:avLst/>
-          </a:prstGeom>
-          <a:noFill/>
-          <a:ln/>
-        </p:spPr>
-        <p:txBody>
-          <a:bodyPr wrap="square" lIns="0" tIns="0" rIns="0" bIns="0" rtlCol="0" anchor="ctr"/>
-          <a:lstStyle/>
-          <a:p>
-            <a:pPr algn="ctr" indent="0" marL="0">
-              <a:buNone/>
-            </a:pPr>
-            <a:r>
-              <a:rPr lang="en-US" sz="900" b="1" dirty="0">
-                <a:solidFill>
-                  <a:srgbClr val="9D174D"/>
-                </a:solidFill>
-                <a:latin typeface="Trebuchet MS" pitchFamily="34" charset="0"/>
-                <a:ea typeface="Trebuchet MS" pitchFamily="34" charset="-122"/>
-                <a:cs typeface="Trebuchet MS" pitchFamily="34" charset="-120"/>
-              </a:rPr>
-              <a:t>ea</a:t>
-            </a:r>
-            <a:endParaRPr lang="en-US" sz="900" dirty="0"/>
-          </a:p>
-        </p:txBody>
-      </p:sp>
-      <p:sp>
-        <p:nvSpPr>
-          <p:cNvPr id="43" name="Shape 41"/>
-          <p:cNvSpPr/>
-          <p:nvPr/>
-        </p:nvSpPr>
-        <p:spPr>
-          <a:xfrm>
-            <a:off x="7447135" y="4169664"/>
-            <a:ext cx="685800" cy="475488"/>
-          </a:xfrm>
-          <a:prstGeom prst="rect">
-            <a:avLst>
-              <a:gd name="adj" fmla="val 7692"/>
-            </a:avLst>
-          </a:prstGeom>
-          <a:solidFill>
-            <a:srgbClr val="FFFFFF"/>
-          </a:solidFill>
-          <a:ln w="12700">
-            <a:solidFill>
-              <a:srgbClr val="DB2777"/>
-            </a:solidFill>
-            <a:prstDash val="solid"/>
-          </a:ln>
-        </p:spPr>
-      </p:sp>
-      <p:sp>
-        <p:nvSpPr>
-          <p:cNvPr id="44" name="Text 42"/>
-          <p:cNvSpPr/>
-          <p:nvPr/>
-        </p:nvSpPr>
-        <p:spPr>
-          <a:xfrm>
-            <a:off x="7447135" y="4169664"/>
-            <a:ext cx="685800" cy="475488"/>
-          </a:xfrm>
-          <a:prstGeom prst="rect">
-            <a:avLst/>
-          </a:prstGeom>
-          <a:noFill/>
-          <a:ln/>
-        </p:spPr>
-        <p:txBody>
-          <a:bodyPr wrap="square" lIns="0" tIns="0" rIns="0" bIns="0" rtlCol="0" anchor="ctr"/>
-          <a:lstStyle/>
-          <a:p>
-            <a:pPr algn="ctr" indent="0" marL="0">
-              <a:buNone/>
-            </a:pPr>
-            <a:r>
-              <a:rPr lang="en-US" sz="900" b="1" dirty="0">
-                <a:solidFill>
-                  <a:srgbClr val="9D174D"/>
-                </a:solidFill>
-                <a:latin typeface="Trebuchet MS" pitchFamily="34" charset="0"/>
-                <a:ea typeface="Trebuchet MS" pitchFamily="34" charset="-122"/>
-                <a:cs typeface="Trebuchet MS" pitchFamily="34" charset="-120"/>
-              </a:rPr>
-              <a:t>t</a:t>
-            </a:r>
-            <a:endParaRPr lang="en-US" sz="900" dirty="0"/>
+          <p:cNvPr id="41" name="Text 39"/>
+          <p:cNvSpPr/>
+          <p:nvPr/>
+        </p:nvSpPr>
+        <p:spPr>
+          <a:xfrm>
+            <a:off x="7031736" y="4572000"/>
+            <a:ext cx="685800" cy="219456"/>
+          </a:xfrm>
+          <a:prstGeom prst="rect">
+            <a:avLst/>
+          </a:prstGeom>
+          <a:noFill/>
+          <a:ln/>
+        </p:spPr>
+        <p:txBody>
+          <a:bodyPr wrap="square" lIns="0" tIns="0" rIns="0" bIns="0" rtlCol="0" anchor="t"/>
+          <a:lstStyle/>
+          <a:p>
+            <a:pPr algn="ctr" indent="0" marL="0">
+              <a:buNone/>
+            </a:pPr>
+            <a:r>
+              <a:rPr lang="en-US" sz="750" i="1" dirty="0">
+                <a:solidFill>
+                  <a:srgbClr val="94A3B8"/>
+                </a:solidFill>
+                <a:latin typeface="Calibri" pitchFamily="34" charset="0"/>
+                <a:ea typeface="Calibri" pitchFamily="34" charset="-122"/>
+                <a:cs typeface="Calibri" pitchFamily="34" charset="-120"/>
+              </a:rPr>
+              <a:t>/yoo/</a:t>
+            </a:r>
+            <a:endParaRPr lang="en-US" sz="750" dirty="0"/>
           </a:p>
         </p:txBody>
       </p:sp>
@@ -16174,7 +15883,7 @@
                 <a:ea typeface="Calibri" pitchFamily="34" charset="-122"/>
                 <a:cs typeface="Calibri" pitchFamily="34" charset="-120"/>
               </a:rPr>
-              <a:t>Word Labs  •  wordlabs.app  •  Prefix: 'pre-' = before, in front of</a:t>
+              <a:t>Word Labs  •  wordlabs.app  •  Prefix: 'pre-' = before, in advance</a:t>
             </a:r>
             <a:endParaRPr lang="en-US" sz="800" dirty="0"/>
           </a:p>
@@ -16814,7 +16523,7 @@
                 <a:ea typeface="Calibri" pitchFamily="34" charset="-122"/>
                 <a:cs typeface="Calibri" pitchFamily="34" charset="-120"/>
               </a:rPr>
-              <a:t>Word Labs  •  wordlabs.app  •  Prefix: 'pre-' = before, in front of</a:t>
+              <a:t>Word Labs  •  wordlabs.app  •  Prefix: 'pre-' = before, in advance</a:t>
             </a:r>
             <a:endParaRPr lang="en-US" sz="800" dirty="0"/>
           </a:p>
@@ -16926,7 +16635,7 @@
                 <a:ea typeface="Calibri" pitchFamily="34" charset="-122"/>
                 <a:cs typeface="Calibri" pitchFamily="34" charset="-120"/>
               </a:rPr>
-              <a:t>Before the excursion, we had to </a:t>
+              <a:t>The teacher said to </a:t>
             </a:r>
             <a:pPr algn="l" indent="0" marL="0">
               <a:buNone/>
@@ -16943,7 +16652,7 @@
                 <a:ea typeface="Calibri" pitchFamily="34" charset="-122"/>
                 <a:cs typeface="Calibri" pitchFamily="34" charset="-120"/>
               </a:rPr>
-              <a:t>prepare</a:t>
+              <a:t>predict</a:t>
             </a:r>
             <a:pPr algn="l" indent="0" marL="0">
               <a:buNone/>
@@ -16957,7 +16666,7 @@
                 <a:ea typeface="Calibri" pitchFamily="34" charset="-122"/>
                 <a:cs typeface="Calibri" pitchFamily="34" charset="-120"/>
               </a:rPr>
-              <a:t> our bags, </a:t>
+              <a:t> the ending, </a:t>
             </a:r>
             <a:pPr algn="l" indent="0" marL="0">
               <a:buNone/>
@@ -16974,7 +16683,7 @@
                 <a:ea typeface="Calibri" pitchFamily="34" charset="-122"/>
                 <a:cs typeface="Calibri" pitchFamily="34" charset="-120"/>
               </a:rPr>
-              <a:t>preview</a:t>
+              <a:t>prevent</a:t>
             </a:r>
             <a:pPr algn="l" indent="0" marL="0">
               <a:buNone/>
@@ -16988,7 +16697,7 @@
                 <a:ea typeface="Calibri" pitchFamily="34" charset="-122"/>
                 <a:cs typeface="Calibri" pitchFamily="34" charset="-120"/>
               </a:rPr>
-              <a:t> the map, and </a:t>
+              <a:t> any spoilers, and </a:t>
             </a:r>
             <a:pPr algn="l" indent="0" marL="0">
               <a:buNone/>
@@ -17005,7 +16714,7 @@
                 <a:ea typeface="Calibri" pitchFamily="34" charset="-122"/>
                 <a:cs typeface="Calibri" pitchFamily="34" charset="-120"/>
               </a:rPr>
-              <a:t>predict</a:t>
+              <a:t>preheat</a:t>
             </a:r>
             <a:pPr algn="l" indent="0" marL="0">
               <a:buNone/>
@@ -17019,7 +16728,7 @@
                 <a:ea typeface="Calibri" pitchFamily="34" charset="-122"/>
                 <a:cs typeface="Calibri" pitchFamily="34" charset="-120"/>
               </a:rPr>
-              <a:t> the weather.</a:t>
+              <a:t> your thinking before reading the next chapter.</a:t>
             </a:r>
             <a:endParaRPr lang="en-US" sz="1800" dirty="0"/>
           </a:p>
@@ -17174,7 +16883,7 @@
                 <a:ea typeface="Trebuchet MS" pitchFamily="34" charset="-122"/>
                 <a:cs typeface="Trebuchet MS" pitchFamily="34" charset="-120"/>
               </a:rPr>
-              <a:t>prepare</a:t>
+              <a:t>predict</a:t>
             </a:r>
             <a:endParaRPr lang="en-US" sz="1400" dirty="0"/>
           </a:p>
@@ -17302,7 +17011,7 @@
                 <a:ea typeface="Trebuchet MS" pitchFamily="34" charset="-122"/>
                 <a:cs typeface="Trebuchet MS" pitchFamily="34" charset="-120"/>
               </a:rPr>
-              <a:t>preview</a:t>
+              <a:t>prevent</a:t>
             </a:r>
             <a:endParaRPr lang="en-US" sz="1400" dirty="0"/>
           </a:p>
@@ -17430,7 +17139,7 @@
                 <a:ea typeface="Trebuchet MS" pitchFamily="34" charset="-122"/>
                 <a:cs typeface="Trebuchet MS" pitchFamily="34" charset="-120"/>
               </a:rPr>
-              <a:t>predict</a:t>
+              <a:t>preheat</a:t>
             </a:r>
             <a:endParaRPr lang="en-US" sz="1400" dirty="0"/>
           </a:p>
@@ -17761,7 +17470,7 @@
                 <a:ea typeface="Calibri" pitchFamily="34" charset="-122"/>
                 <a:cs typeface="Calibri" pitchFamily="34" charset="-120"/>
               </a:rPr>
-              <a:t>Word Labs  •  wordlabs.app  •  Prefix: 'pre-' = before, in front of</a:t>
+              <a:t>Word Labs  •  wordlabs.app  •  Prefix: 'pre-' = before, in advance</a:t>
             </a:r>
             <a:endParaRPr lang="en-US" sz="800" dirty="0"/>
           </a:p>
@@ -17900,7 +17609,7 @@
                 <a:ea typeface="Trebuchet MS" pitchFamily="34" charset="-122"/>
                 <a:cs typeface="Trebuchet MS" pitchFamily="34" charset="-120"/>
               </a:rPr>
-              <a:t>prepare</a:t>
+              <a:t>predict</a:t>
             </a:r>
             <a:endParaRPr lang="en-US" sz="2800" dirty="0"/>
           </a:p>
@@ -18588,7 +18297,7 @@
                 <a:ea typeface="Calibri" pitchFamily="34" charset="-122"/>
                 <a:cs typeface="Calibri" pitchFamily="34" charset="-120"/>
               </a:rPr>
-              <a:t>Word Labs  •  wordlabs.app  •  Prefix: 'pre-' = before, in front of</a:t>
+              <a:t>Word Labs  •  wordlabs.app  •  Prefix: 'pre-' = before, in advance</a:t>
             </a:r>
             <a:endParaRPr lang="en-US" sz="800" dirty="0"/>
           </a:p>
@@ -18727,7 +18436,7 @@
                 <a:ea typeface="Trebuchet MS" pitchFamily="34" charset="-122"/>
                 <a:cs typeface="Trebuchet MS" pitchFamily="34" charset="-120"/>
               </a:rPr>
-              <a:t>prepare</a:t>
+              <a:t>predict</a:t>
             </a:r>
             <a:endParaRPr lang="en-US" sz="2800" dirty="0"/>
           </a:p>
@@ -18978,7 +18687,7 @@
                 <a:ea typeface="Trebuchet MS" pitchFamily="34" charset="-122"/>
                 <a:cs typeface="Trebuchet MS" pitchFamily="34" charset="-120"/>
               </a:rPr>
-              <a:t>pare</a:t>
+              <a:t>dict</a:t>
             </a:r>
             <a:endParaRPr lang="en-US" sz="1300" dirty="0"/>
           </a:p>
@@ -19017,7 +18726,7 @@
                 <a:ea typeface="Calibri" pitchFamily="34" charset="-122"/>
                 <a:cs typeface="Calibri" pitchFamily="34" charset="-120"/>
               </a:rPr>
-              <a:t>make ready</a:t>
+              <a:t>to say or tell</a:t>
             </a:r>
             <a:endParaRPr lang="en-US" sz="850" dirty="0"/>
           </a:p>
@@ -19573,7 +19282,7 @@
                 <a:ea typeface="Calibri" pitchFamily="34" charset="-122"/>
                 <a:cs typeface="Calibri" pitchFamily="34" charset="-120"/>
               </a:rPr>
-              <a:t>Word Labs  •  wordlabs.app  •  Prefix: 'pre-' = before, in front of</a:t>
+              <a:t>Word Labs  •  wordlabs.app  •  Prefix: 'pre-' = before, in advance</a:t>
             </a:r>
             <a:endParaRPr lang="en-US" sz="800" dirty="0"/>
           </a:p>
@@ -19712,7 +19421,7 @@
                 <a:ea typeface="Trebuchet MS" pitchFamily="34" charset="-122"/>
                 <a:cs typeface="Trebuchet MS" pitchFamily="34" charset="-120"/>
               </a:rPr>
-              <a:t>prepare</a:t>
+              <a:t>predict</a:t>
             </a:r>
             <a:endParaRPr lang="en-US" sz="2800" dirty="0"/>
           </a:p>
@@ -19963,7 +19672,7 @@
                 <a:ea typeface="Trebuchet MS" pitchFamily="34" charset="-122"/>
                 <a:cs typeface="Trebuchet MS" pitchFamily="34" charset="-120"/>
               </a:rPr>
-              <a:t>pare</a:t>
+              <a:t>dict</a:t>
             </a:r>
             <a:endParaRPr lang="en-US" sz="1300" dirty="0"/>
           </a:p>
@@ -20002,7 +19711,7 @@
                 <a:ea typeface="Calibri" pitchFamily="34" charset="-122"/>
                 <a:cs typeface="Calibri" pitchFamily="34" charset="-120"/>
               </a:rPr>
-              <a:t>make ready</a:t>
+              <a:t>to say or tell</a:t>
             </a:r>
             <a:endParaRPr lang="en-US" sz="850" dirty="0"/>
           </a:p>
@@ -20266,7 +19975,7 @@
                 <a:ea typeface="Trebuchet MS" pitchFamily="34" charset="-122"/>
                 <a:cs typeface="Trebuchet MS" pitchFamily="34" charset="-120"/>
               </a:rPr>
-              <a:t>pare</a:t>
+              <a:t>dict</a:t>
             </a:r>
             <a:endParaRPr lang="en-US" sz="1400" dirty="0"/>
           </a:p>
@@ -20690,7 +20399,7 @@
                 <a:ea typeface="Calibri" pitchFamily="34" charset="-122"/>
                 <a:cs typeface="Calibri" pitchFamily="34" charset="-120"/>
               </a:rPr>
-              <a:t>Word Labs  •  wordlabs.app  •  Prefix: 'pre-' = before, in front of</a:t>
+              <a:t>Word Labs  •  wordlabs.app  •  Prefix: 'pre-' = before, in advance</a:t>
             </a:r>
             <a:endParaRPr lang="en-US" sz="800" dirty="0"/>
           </a:p>
@@ -20829,7 +20538,7 @@
                 <a:ea typeface="Trebuchet MS" pitchFamily="34" charset="-122"/>
                 <a:cs typeface="Trebuchet MS" pitchFamily="34" charset="-120"/>
               </a:rPr>
-              <a:t>prepare</a:t>
+              <a:t>predict</a:t>
             </a:r>
             <a:endParaRPr lang="en-US" sz="2800" dirty="0"/>
           </a:p>
@@ -21080,7 +20789,7 @@
                 <a:ea typeface="Trebuchet MS" pitchFamily="34" charset="-122"/>
                 <a:cs typeface="Trebuchet MS" pitchFamily="34" charset="-120"/>
               </a:rPr>
-              <a:t>pare</a:t>
+              <a:t>dict</a:t>
             </a:r>
             <a:endParaRPr lang="en-US" sz="1300" dirty="0"/>
           </a:p>
@@ -21119,7 +20828,7 @@
                 <a:ea typeface="Calibri" pitchFamily="34" charset="-122"/>
                 <a:cs typeface="Calibri" pitchFamily="34" charset="-120"/>
               </a:rPr>
-              <a:t>make ready</a:t>
+              <a:t>to say or tell</a:t>
             </a:r>
             <a:endParaRPr lang="en-US" sz="850" dirty="0"/>
           </a:p>
@@ -21383,7 +21092,7 @@
                 <a:ea typeface="Trebuchet MS" pitchFamily="34" charset="-122"/>
                 <a:cs typeface="Trebuchet MS" pitchFamily="34" charset="-120"/>
               </a:rPr>
-              <a:t>pare</a:t>
+              <a:t>dict</a:t>
             </a:r>
             <a:endParaRPr lang="en-US" sz="1400" dirty="0"/>
           </a:p>
@@ -21542,7 +21251,7 @@
                 <a:ea typeface="Trebuchet MS" pitchFamily="34" charset="-122"/>
                 <a:cs typeface="Trebuchet MS" pitchFamily="34" charset="-120"/>
               </a:rPr>
-              <a:t>p</a:t>
+              <a:t>pr</a:t>
             </a:r>
             <a:endParaRPr lang="en-US" sz="900" dirty="0"/>
           </a:p>
@@ -21608,7 +21317,7 @@
                 <a:ea typeface="Trebuchet MS" pitchFamily="34" charset="-122"/>
                 <a:cs typeface="Trebuchet MS" pitchFamily="34" charset="-120"/>
               </a:rPr>
-              <a:t>r</a:t>
+              <a:t>e</a:t>
             </a:r>
             <a:endParaRPr lang="en-US" sz="900" dirty="0"/>
           </a:p>
@@ -21674,7 +21383,7 @@
                 <a:ea typeface="Trebuchet MS" pitchFamily="34" charset="-122"/>
                 <a:cs typeface="Trebuchet MS" pitchFamily="34" charset="-120"/>
               </a:rPr>
-              <a:t>e</a:t>
+              <a:t>d</a:t>
             </a:r>
             <a:endParaRPr lang="en-US" sz="900" dirty="0"/>
           </a:p>
@@ -21740,7 +21449,7 @@
                 <a:ea typeface="Trebuchet MS" pitchFamily="34" charset="-122"/>
                 <a:cs typeface="Trebuchet MS" pitchFamily="34" charset="-120"/>
               </a:rPr>
-              <a:t>p</a:t>
+              <a:t>i</a:t>
             </a:r>
             <a:endParaRPr lang="en-US" sz="900" dirty="0"/>
           </a:p>
@@ -21806,7 +21515,7 @@
                 <a:ea typeface="Trebuchet MS" pitchFamily="34" charset="-122"/>
                 <a:cs typeface="Trebuchet MS" pitchFamily="34" charset="-120"/>
               </a:rPr>
-              <a:t>ar</a:t>
+              <a:t>c</a:t>
             </a:r>
             <a:endParaRPr lang="en-US" sz="900" dirty="0"/>
           </a:p>
@@ -21872,7 +21581,7 @@
                 <a:ea typeface="Trebuchet MS" pitchFamily="34" charset="-122"/>
                 <a:cs typeface="Trebuchet MS" pitchFamily="34" charset="-120"/>
               </a:rPr>
-              <a:t>e</a:t>
+              <a:t>t</a:t>
             </a:r>
             <a:endParaRPr lang="en-US" sz="900" dirty="0"/>
           </a:p>
@@ -22164,7 +21873,7 @@
                 <a:ea typeface="Calibri" pitchFamily="34" charset="-122"/>
                 <a:cs typeface="Calibri" pitchFamily="34" charset="-120"/>
               </a:rPr>
-              <a:t>Word Labs  •  wordlabs.app  •  Prefix: 'pre-' = before, in front of</a:t>
+              <a:t>Word Labs  •  wordlabs.app  •  Prefix: 'pre-' = before, in advance</a:t>
             </a:r>
             <a:endParaRPr lang="en-US" sz="800" dirty="0"/>
           </a:p>
@@ -22303,7 +22012,7 @@
                 <a:ea typeface="Trebuchet MS" pitchFamily="34" charset="-122"/>
                 <a:cs typeface="Trebuchet MS" pitchFamily="34" charset="-120"/>
               </a:rPr>
-              <a:t>preview</a:t>
+              <a:t>prevent</a:t>
             </a:r>
             <a:endParaRPr lang="en-US" sz="2800" dirty="0"/>
           </a:p>
@@ -22991,7 +22700,7 @@
                 <a:ea typeface="Calibri" pitchFamily="34" charset="-122"/>
                 <a:cs typeface="Calibri" pitchFamily="34" charset="-120"/>
               </a:rPr>
-              <a:t>Word Labs  •  wordlabs.app  •  Prefix: 'pre-' = before, in front of</a:t>
+              <a:t>Word Labs  •  wordlabs.app  •  Prefix: 'pre-' = before, in advance</a:t>
             </a:r>
             <a:endParaRPr lang="en-US" sz="800" dirty="0"/>
           </a:p>
@@ -23130,7 +22839,7 @@
                 <a:ea typeface="Trebuchet MS" pitchFamily="34" charset="-122"/>
                 <a:cs typeface="Trebuchet MS" pitchFamily="34" charset="-120"/>
               </a:rPr>
-              <a:t>preview</a:t>
+              <a:t>prevent</a:t>
             </a:r>
             <a:endParaRPr lang="en-US" sz="2800" dirty="0"/>
           </a:p>
@@ -23381,7 +23090,7 @@
                 <a:ea typeface="Trebuchet MS" pitchFamily="34" charset="-122"/>
                 <a:cs typeface="Trebuchet MS" pitchFamily="34" charset="-120"/>
               </a:rPr>
-              <a:t>view</a:t>
+              <a:t>vent</a:t>
             </a:r>
             <a:endParaRPr lang="en-US" sz="1300" dirty="0"/>
           </a:p>
@@ -23420,7 +23129,7 @@
                 <a:ea typeface="Calibri" pitchFamily="34" charset="-122"/>
                 <a:cs typeface="Calibri" pitchFamily="34" charset="-120"/>
               </a:rPr>
-              <a:t>to see or look at</a:t>
+              <a:t>to come</a:t>
             </a:r>
             <a:endParaRPr lang="en-US" sz="850" dirty="0"/>
           </a:p>
@@ -23976,7 +23685,7 @@
                 <a:ea typeface="Calibri" pitchFamily="34" charset="-122"/>
                 <a:cs typeface="Calibri" pitchFamily="34" charset="-120"/>
               </a:rPr>
-              <a:t>Word Labs  •  wordlabs.app  •  Prefix: 'pre-' = before, in front of</a:t>
+              <a:t>Word Labs  •  wordlabs.app  •  Prefix: 'pre-' = before, in advance</a:t>
             </a:r>
             <a:endParaRPr lang="en-US" sz="800" dirty="0"/>
           </a:p>
@@ -24049,7 +23758,7 @@
                 <a:ea typeface="Trebuchet MS" pitchFamily="34" charset="-122"/>
                 <a:cs typeface="Trebuchet MS" pitchFamily="34" charset="-120"/>
               </a:rPr>
-              <a:t>We are learning that the prefix 'pre-' means 'before, in front of'.</a:t>
+              <a:t>We are learning that the prefix 'pre-' means 'before, in advance'.</a:t>
             </a:r>
             <a:endParaRPr lang="en-US" sz="2000" dirty="0"/>
           </a:p>
@@ -24695,7 +24404,7 @@
                 <a:ea typeface="Calibri" pitchFamily="34" charset="-122"/>
                 <a:cs typeface="Calibri" pitchFamily="34" charset="-120"/>
               </a:rPr>
-              <a:t>Word Labs  •  wordlabs.app  •  Prefix: 'pre-' = before, in front of</a:t>
+              <a:t>Word Labs  •  wordlabs.app  •  Prefix: 'pre-' = before, in advance</a:t>
             </a:r>
             <a:endParaRPr lang="en-US" sz="800" dirty="0"/>
           </a:p>
@@ -24834,7 +24543,7 @@
                 <a:ea typeface="Trebuchet MS" pitchFamily="34" charset="-122"/>
                 <a:cs typeface="Trebuchet MS" pitchFamily="34" charset="-120"/>
               </a:rPr>
-              <a:t>preview</a:t>
+              <a:t>prevent</a:t>
             </a:r>
             <a:endParaRPr lang="en-US" sz="2800" dirty="0"/>
           </a:p>
@@ -25085,7 +24794,7 @@
                 <a:ea typeface="Trebuchet MS" pitchFamily="34" charset="-122"/>
                 <a:cs typeface="Trebuchet MS" pitchFamily="34" charset="-120"/>
               </a:rPr>
-              <a:t>view</a:t>
+              <a:t>vent</a:t>
             </a:r>
             <a:endParaRPr lang="en-US" sz="1300" dirty="0"/>
           </a:p>
@@ -25124,7 +24833,7 @@
                 <a:ea typeface="Calibri" pitchFamily="34" charset="-122"/>
                 <a:cs typeface="Calibri" pitchFamily="34" charset="-120"/>
               </a:rPr>
-              <a:t>to see or look at</a:t>
+              <a:t>to come</a:t>
             </a:r>
             <a:endParaRPr lang="en-US" sz="850" dirty="0"/>
           </a:p>
@@ -25388,7 +25097,7 @@
                 <a:ea typeface="Trebuchet MS" pitchFamily="34" charset="-122"/>
                 <a:cs typeface="Trebuchet MS" pitchFamily="34" charset="-120"/>
               </a:rPr>
-              <a:t>view</a:t>
+              <a:t>vent</a:t>
             </a:r>
             <a:endParaRPr lang="en-US" sz="1400" dirty="0"/>
           </a:p>
@@ -25812,7 +25521,7 @@
                 <a:ea typeface="Calibri" pitchFamily="34" charset="-122"/>
                 <a:cs typeface="Calibri" pitchFamily="34" charset="-120"/>
               </a:rPr>
-              <a:t>Word Labs  •  wordlabs.app  •  Prefix: 'pre-' = before, in front of</a:t>
+              <a:t>Word Labs  •  wordlabs.app  •  Prefix: 'pre-' = before, in advance</a:t>
             </a:r>
             <a:endParaRPr lang="en-US" sz="800" dirty="0"/>
           </a:p>
@@ -25951,7 +25660,7 @@
                 <a:ea typeface="Trebuchet MS" pitchFamily="34" charset="-122"/>
                 <a:cs typeface="Trebuchet MS" pitchFamily="34" charset="-120"/>
               </a:rPr>
-              <a:t>preview</a:t>
+              <a:t>prevent</a:t>
             </a:r>
             <a:endParaRPr lang="en-US" sz="2800" dirty="0"/>
           </a:p>
@@ -26202,7 +25911,7 @@
                 <a:ea typeface="Trebuchet MS" pitchFamily="34" charset="-122"/>
                 <a:cs typeface="Trebuchet MS" pitchFamily="34" charset="-120"/>
               </a:rPr>
-              <a:t>view</a:t>
+              <a:t>vent</a:t>
             </a:r>
             <a:endParaRPr lang="en-US" sz="1300" dirty="0"/>
           </a:p>
@@ -26241,7 +25950,7 @@
                 <a:ea typeface="Calibri" pitchFamily="34" charset="-122"/>
                 <a:cs typeface="Calibri" pitchFamily="34" charset="-120"/>
               </a:rPr>
-              <a:t>to see or look at</a:t>
+              <a:t>to come</a:t>
             </a:r>
             <a:endParaRPr lang="en-US" sz="850" dirty="0"/>
           </a:p>
@@ -26505,7 +26214,7 @@
                 <a:ea typeface="Trebuchet MS" pitchFamily="34" charset="-122"/>
                 <a:cs typeface="Trebuchet MS" pitchFamily="34" charset="-120"/>
               </a:rPr>
-              <a:t>view</a:t>
+              <a:t>vent</a:t>
             </a:r>
             <a:endParaRPr lang="en-US" sz="1400" dirty="0"/>
           </a:p>
@@ -26664,7 +26373,7 @@
                 <a:ea typeface="Trebuchet MS" pitchFamily="34" charset="-122"/>
                 <a:cs typeface="Trebuchet MS" pitchFamily="34" charset="-120"/>
               </a:rPr>
-              <a:t>p</a:t>
+              <a:t>pr</a:t>
             </a:r>
             <a:endParaRPr lang="en-US" sz="900" dirty="0"/>
           </a:p>
@@ -26730,7 +26439,7 @@
                 <a:ea typeface="Trebuchet MS" pitchFamily="34" charset="-122"/>
                 <a:cs typeface="Trebuchet MS" pitchFamily="34" charset="-120"/>
               </a:rPr>
-              <a:t>r</a:t>
+              <a:t>e</a:t>
             </a:r>
             <a:endParaRPr lang="en-US" sz="900" dirty="0"/>
           </a:p>
@@ -26796,7 +26505,7 @@
                 <a:ea typeface="Trebuchet MS" pitchFamily="34" charset="-122"/>
                 <a:cs typeface="Trebuchet MS" pitchFamily="34" charset="-120"/>
               </a:rPr>
-              <a:t>e</a:t>
+              <a:t>v</a:t>
             </a:r>
             <a:endParaRPr lang="en-US" sz="900" dirty="0"/>
           </a:p>
@@ -26862,7 +26571,7 @@
                 <a:ea typeface="Trebuchet MS" pitchFamily="34" charset="-122"/>
                 <a:cs typeface="Trebuchet MS" pitchFamily="34" charset="-120"/>
               </a:rPr>
-              <a:t>v</a:t>
+              <a:t>e</a:t>
             </a:r>
             <a:endParaRPr lang="en-US" sz="900" dirty="0"/>
           </a:p>
@@ -26928,7 +26637,7 @@
                 <a:ea typeface="Trebuchet MS" pitchFamily="34" charset="-122"/>
                 <a:cs typeface="Trebuchet MS" pitchFamily="34" charset="-120"/>
               </a:rPr>
-              <a:t>ie</a:t>
+              <a:t>n</a:t>
             </a:r>
             <a:endParaRPr lang="en-US" sz="900" dirty="0"/>
           </a:p>
@@ -26994,7 +26703,7 @@
                 <a:ea typeface="Trebuchet MS" pitchFamily="34" charset="-122"/>
                 <a:cs typeface="Trebuchet MS" pitchFamily="34" charset="-120"/>
               </a:rPr>
-              <a:t>w</a:t>
+              <a:t>t</a:t>
             </a:r>
             <a:endParaRPr lang="en-US" sz="900" dirty="0"/>
           </a:p>
@@ -27286,7 +26995,7 @@
                 <a:ea typeface="Calibri" pitchFamily="34" charset="-122"/>
                 <a:cs typeface="Calibri" pitchFamily="34" charset="-120"/>
               </a:rPr>
-              <a:t>Word Labs  •  wordlabs.app  •  Prefix: 'pre-' = before, in front of</a:t>
+              <a:t>Word Labs  •  wordlabs.app  •  Prefix: 'pre-' = before, in advance</a:t>
             </a:r>
             <a:endParaRPr lang="en-US" sz="800" dirty="0"/>
           </a:p>
@@ -27425,7 +27134,7 @@
                 <a:ea typeface="Trebuchet MS" pitchFamily="34" charset="-122"/>
                 <a:cs typeface="Trebuchet MS" pitchFamily="34" charset="-120"/>
               </a:rPr>
-              <a:t>predict</a:t>
+              <a:t>preheat</a:t>
             </a:r>
             <a:endParaRPr lang="en-US" sz="2800" dirty="0"/>
           </a:p>
@@ -28113,7 +27822,7 @@
                 <a:ea typeface="Calibri" pitchFamily="34" charset="-122"/>
                 <a:cs typeface="Calibri" pitchFamily="34" charset="-120"/>
               </a:rPr>
-              <a:t>Word Labs  •  wordlabs.app  •  Prefix: 'pre-' = before, in front of</a:t>
+              <a:t>Word Labs  •  wordlabs.app  •  Prefix: 'pre-' = before, in advance</a:t>
             </a:r>
             <a:endParaRPr lang="en-US" sz="800" dirty="0"/>
           </a:p>
@@ -28252,7 +27961,7 @@
                 <a:ea typeface="Trebuchet MS" pitchFamily="34" charset="-122"/>
                 <a:cs typeface="Trebuchet MS" pitchFamily="34" charset="-120"/>
               </a:rPr>
-              <a:t>predict</a:t>
+              <a:t>preheat</a:t>
             </a:r>
             <a:endParaRPr lang="en-US" sz="2800" dirty="0"/>
           </a:p>
@@ -28503,7 +28212,7 @@
                 <a:ea typeface="Trebuchet MS" pitchFamily="34" charset="-122"/>
                 <a:cs typeface="Trebuchet MS" pitchFamily="34" charset="-120"/>
               </a:rPr>
-              <a:t>dict</a:t>
+              <a:t>heat</a:t>
             </a:r>
             <a:endParaRPr lang="en-US" sz="1300" dirty="0"/>
           </a:p>
@@ -28542,7 +28251,7 @@
                 <a:ea typeface="Calibri" pitchFamily="34" charset="-122"/>
                 <a:cs typeface="Calibri" pitchFamily="34" charset="-120"/>
               </a:rPr>
-              <a:t>say, tell</a:t>
+              <a:t>to make warm</a:t>
             </a:r>
             <a:endParaRPr lang="en-US" sz="850" dirty="0"/>
           </a:p>
@@ -29098,7 +28807,7 @@
                 <a:ea typeface="Calibri" pitchFamily="34" charset="-122"/>
                 <a:cs typeface="Calibri" pitchFamily="34" charset="-120"/>
               </a:rPr>
-              <a:t>Word Labs  •  wordlabs.app  •  Prefix: 'pre-' = before, in front of</a:t>
+              <a:t>Word Labs  •  wordlabs.app  •  Prefix: 'pre-' = before, in advance</a:t>
             </a:r>
             <a:endParaRPr lang="en-US" sz="800" dirty="0"/>
           </a:p>
@@ -29237,7 +28946,7 @@
                 <a:ea typeface="Trebuchet MS" pitchFamily="34" charset="-122"/>
                 <a:cs typeface="Trebuchet MS" pitchFamily="34" charset="-120"/>
               </a:rPr>
-              <a:t>predict</a:t>
+              <a:t>preheat</a:t>
             </a:r>
             <a:endParaRPr lang="en-US" sz="2800" dirty="0"/>
           </a:p>
@@ -29488,7 +29197,7 @@
                 <a:ea typeface="Trebuchet MS" pitchFamily="34" charset="-122"/>
                 <a:cs typeface="Trebuchet MS" pitchFamily="34" charset="-120"/>
               </a:rPr>
-              <a:t>dict</a:t>
+              <a:t>heat</a:t>
             </a:r>
             <a:endParaRPr lang="en-US" sz="1300" dirty="0"/>
           </a:p>
@@ -29527,7 +29236,7 @@
                 <a:ea typeface="Calibri" pitchFamily="34" charset="-122"/>
                 <a:cs typeface="Calibri" pitchFamily="34" charset="-120"/>
               </a:rPr>
-              <a:t>say, tell</a:t>
+              <a:t>to make warm</a:t>
             </a:r>
             <a:endParaRPr lang="en-US" sz="850" dirty="0"/>
           </a:p>
@@ -29791,7 +29500,7 @@
                 <a:ea typeface="Trebuchet MS" pitchFamily="34" charset="-122"/>
                 <a:cs typeface="Trebuchet MS" pitchFamily="34" charset="-120"/>
               </a:rPr>
-              <a:t>dict</a:t>
+              <a:t>heat</a:t>
             </a:r>
             <a:endParaRPr lang="en-US" sz="1400" dirty="0"/>
           </a:p>
@@ -30215,7 +29924,7 @@
                 <a:ea typeface="Calibri" pitchFamily="34" charset="-122"/>
                 <a:cs typeface="Calibri" pitchFamily="34" charset="-120"/>
               </a:rPr>
-              <a:t>Word Labs  •  wordlabs.app  •  Prefix: 'pre-' = before, in front of</a:t>
+              <a:t>Word Labs  •  wordlabs.app  •  Prefix: 'pre-' = before, in advance</a:t>
             </a:r>
             <a:endParaRPr lang="en-US" sz="800" dirty="0"/>
           </a:p>
@@ -30354,7 +30063,7 @@
                 <a:ea typeface="Trebuchet MS" pitchFamily="34" charset="-122"/>
                 <a:cs typeface="Trebuchet MS" pitchFamily="34" charset="-120"/>
               </a:rPr>
-              <a:t>predict</a:t>
+              <a:t>preheat</a:t>
             </a:r>
             <a:endParaRPr lang="en-US" sz="2800" dirty="0"/>
           </a:p>
@@ -30605,7 +30314,7 @@
                 <a:ea typeface="Trebuchet MS" pitchFamily="34" charset="-122"/>
                 <a:cs typeface="Trebuchet MS" pitchFamily="34" charset="-120"/>
               </a:rPr>
-              <a:t>dict</a:t>
+              <a:t>heat</a:t>
             </a:r>
             <a:endParaRPr lang="en-US" sz="1300" dirty="0"/>
           </a:p>
@@ -30644,7 +30353,7 @@
                 <a:ea typeface="Calibri" pitchFamily="34" charset="-122"/>
                 <a:cs typeface="Calibri" pitchFamily="34" charset="-120"/>
               </a:rPr>
-              <a:t>say, tell</a:t>
+              <a:t>to make warm</a:t>
             </a:r>
             <a:endParaRPr lang="en-US" sz="850" dirty="0"/>
           </a:p>
@@ -30908,7 +30617,7 @@
                 <a:ea typeface="Trebuchet MS" pitchFamily="34" charset="-122"/>
                 <a:cs typeface="Trebuchet MS" pitchFamily="34" charset="-120"/>
               </a:rPr>
-              <a:t>dict</a:t>
+              <a:t>heat</a:t>
             </a:r>
             <a:endParaRPr lang="en-US" sz="1400" dirty="0"/>
           </a:p>
@@ -31015,7 +30724,7 @@
         </p:nvSpPr>
         <p:spPr>
           <a:xfrm>
-            <a:off x="2124837" y="4169664"/>
+            <a:off x="2427732" y="4169664"/>
             <a:ext cx="685800" cy="384048"/>
           </a:xfrm>
           <a:prstGeom prst="rect">
@@ -31042,7 +30751,7 @@
         </p:nvSpPr>
         <p:spPr>
           <a:xfrm>
-            <a:off x="2124837" y="4169664"/>
+            <a:off x="2427732" y="4169664"/>
             <a:ext cx="685800" cy="384048"/>
           </a:xfrm>
           <a:prstGeom prst="rect">
@@ -31067,7 +30776,7 @@
                 <a:ea typeface="Trebuchet MS" pitchFamily="34" charset="-122"/>
                 <a:cs typeface="Trebuchet MS" pitchFamily="34" charset="-120"/>
               </a:rPr>
-              <a:t>p</a:t>
+              <a:t>pr</a:t>
             </a:r>
             <a:endParaRPr lang="en-US" sz="900" dirty="0"/>
           </a:p>
@@ -31081,7 +30790,7 @@
         </p:nvSpPr>
         <p:spPr>
           <a:xfrm>
-            <a:off x="3033522" y="4169664"/>
+            <a:off x="3639312" y="4169664"/>
             <a:ext cx="685800" cy="384048"/>
           </a:xfrm>
           <a:prstGeom prst="rect">
@@ -31108,7 +30817,7 @@
         </p:nvSpPr>
         <p:spPr>
           <a:xfrm>
-            <a:off x="3033522" y="4169664"/>
+            <a:off x="3639312" y="4169664"/>
             <a:ext cx="685800" cy="384048"/>
           </a:xfrm>
           <a:prstGeom prst="rect">
@@ -31133,7 +30842,7 @@
                 <a:ea typeface="Trebuchet MS" pitchFamily="34" charset="-122"/>
                 <a:cs typeface="Trebuchet MS" pitchFamily="34" charset="-120"/>
               </a:rPr>
-              <a:t>r</a:t>
+              <a:t>e</a:t>
             </a:r>
             <a:endParaRPr lang="en-US" sz="900" dirty="0"/>
           </a:p>
@@ -31147,7 +30856,7 @@
         </p:nvSpPr>
         <p:spPr>
           <a:xfrm>
-            <a:off x="3942207" y="4169664"/>
+            <a:off x="4850892" y="4169664"/>
             <a:ext cx="685800" cy="384048"/>
           </a:xfrm>
           <a:prstGeom prst="rect">
@@ -31174,7 +30883,7 @@
         </p:nvSpPr>
         <p:spPr>
           <a:xfrm>
-            <a:off x="3942207" y="4169664"/>
+            <a:off x="4850892" y="4169664"/>
             <a:ext cx="685800" cy="384048"/>
           </a:xfrm>
           <a:prstGeom prst="rect">
@@ -31199,7 +30908,7 @@
                 <a:ea typeface="Trebuchet MS" pitchFamily="34" charset="-122"/>
                 <a:cs typeface="Trebuchet MS" pitchFamily="34" charset="-120"/>
               </a:rPr>
-              <a:t>e</a:t>
+              <a:t>h</a:t>
             </a:r>
             <a:endParaRPr lang="en-US" sz="900" dirty="0"/>
           </a:p>
@@ -31213,7 +30922,7 @@
         </p:nvSpPr>
         <p:spPr>
           <a:xfrm>
-            <a:off x="4850892" y="4169664"/>
+            <a:off x="6062472" y="4169664"/>
             <a:ext cx="685800" cy="384048"/>
           </a:xfrm>
           <a:prstGeom prst="rect">
@@ -31240,7 +30949,7 @@
         </p:nvSpPr>
         <p:spPr>
           <a:xfrm>
-            <a:off x="4850892" y="4169664"/>
+            <a:off x="6062472" y="4169664"/>
             <a:ext cx="685800" cy="384048"/>
           </a:xfrm>
           <a:prstGeom prst="rect">
@@ -31265,7 +30974,7 @@
                 <a:ea typeface="Trebuchet MS" pitchFamily="34" charset="-122"/>
                 <a:cs typeface="Trebuchet MS" pitchFamily="34" charset="-120"/>
               </a:rPr>
-              <a:t>d</a:t>
+              <a:t>ea</a:t>
             </a:r>
             <a:endParaRPr lang="en-US" sz="900" dirty="0"/>
           </a:p>
@@ -31273,13 +30982,52 @@
       </p:sp>
       <p:sp>
         <p:nvSpPr>
-          <p:cNvPr id="41" name="Shape 39"/>
-          <p:cNvSpPr/>
-          <p:nvPr/>
-        </p:nvSpPr>
-        <p:spPr>
-          <a:xfrm>
-            <a:off x="5759577" y="4169664"/>
+          <p:cNvPr id="41" name="Text 39"/>
+          <p:cNvSpPr/>
+          <p:nvPr/>
+        </p:nvSpPr>
+        <p:spPr>
+          <a:xfrm>
+            <a:off x="6062472" y="4572000"/>
+            <a:ext cx="685800" cy="219456"/>
+          </a:xfrm>
+          <a:prstGeom prst="rect">
+            <a:avLst/>
+          </a:prstGeom>
+          <a:noFill/>
+          <a:ln/>
+        </p:spPr>
+        <p:txBody>
+          <a:bodyPr wrap="square" lIns="0" tIns="0" rIns="0" bIns="0" rtlCol="0" anchor="t"/>
+          <a:lstStyle/>
+          <a:p>
+            <a:pPr algn="ctr" indent="0" marL="0">
+              <a:buNone/>
+            </a:pPr>
+            <a:r>
+              <a:rPr lang="en-US" sz="750" i="1" dirty="0">
+                <a:solidFill>
+                  <a:srgbClr val="94A3B8"/>
+                </a:solidFill>
+                <a:latin typeface="Calibri" pitchFamily="34" charset="0"/>
+                <a:ea typeface="Calibri" pitchFamily="34" charset="-122"/>
+                <a:cs typeface="Calibri" pitchFamily="34" charset="-120"/>
+              </a:rPr>
+              <a:t>/ee/</a:t>
+            </a:r>
+            <a:endParaRPr lang="en-US" sz="750" dirty="0"/>
+          </a:p>
+        </p:txBody>
+      </p:sp>
+      <p:sp>
+        <p:nvSpPr>
+          <p:cNvPr id="42" name="Shape 40"/>
+          <p:cNvSpPr/>
+          <p:nvPr/>
+        </p:nvSpPr>
+        <p:spPr>
+          <a:xfrm>
+            <a:off x="7274052" y="4169664"/>
             <a:ext cx="685800" cy="384048"/>
           </a:xfrm>
           <a:prstGeom prst="rect">
@@ -31300,184 +31048,13 @@
       </p:sp>
       <p:sp>
         <p:nvSpPr>
-          <p:cNvPr id="42" name="Text 40"/>
-          <p:cNvSpPr/>
-          <p:nvPr/>
-        </p:nvSpPr>
-        <p:spPr>
-          <a:xfrm>
-            <a:off x="5759577" y="4169664"/>
-            <a:ext cx="685800" cy="384048"/>
-          </a:xfrm>
-          <a:prstGeom prst="rect">
-            <a:avLst/>
-          </a:prstGeom>
-          <a:noFill/>
-          <a:ln/>
-        </p:spPr>
-        <p:txBody>
-          <a:bodyPr wrap="square" lIns="0" tIns="0" rIns="0" bIns="0" rtlCol="0" anchor="ctr"/>
-          <a:lstStyle/>
-          <a:p>
-            <a:pPr algn="ctr" indent="0" marL="0">
-              <a:buNone/>
-            </a:pPr>
-            <a:r>
-              <a:rPr lang="en-US" sz="900" b="1" dirty="0">
-                <a:solidFill>
-                  <a:srgbClr val="9D174D"/>
-                </a:solidFill>
-                <a:latin typeface="Trebuchet MS" pitchFamily="34" charset="0"/>
-                <a:ea typeface="Trebuchet MS" pitchFamily="34" charset="-122"/>
-                <a:cs typeface="Trebuchet MS" pitchFamily="34" charset="-120"/>
-              </a:rPr>
-              <a:t>i</a:t>
-            </a:r>
-            <a:endParaRPr lang="en-US" sz="900" dirty="0"/>
-          </a:p>
-        </p:txBody>
-      </p:sp>
-      <p:sp>
-        <p:nvSpPr>
-          <p:cNvPr id="43" name="Shape 41"/>
-          <p:cNvSpPr/>
-          <p:nvPr/>
-        </p:nvSpPr>
-        <p:spPr>
-          <a:xfrm>
-            <a:off x="6668262" y="4169664"/>
-            <a:ext cx="685800" cy="384048"/>
-          </a:xfrm>
-          <a:prstGeom prst="rect">
-            <a:avLst>
-              <a:gd name="adj" fmla="val 9524"/>
-            </a:avLst>
-          </a:prstGeom>
-          <a:solidFill>
-            <a:srgbClr val="FFFFFF"/>
-          </a:solidFill>
-          <a:ln w="12700">
-            <a:solidFill>
-              <a:srgbClr val="DB2777"/>
-            </a:solidFill>
-            <a:prstDash val="solid"/>
-          </a:ln>
-        </p:spPr>
-      </p:sp>
-      <p:sp>
-        <p:nvSpPr>
-          <p:cNvPr id="44" name="Text 42"/>
-          <p:cNvSpPr/>
-          <p:nvPr/>
-        </p:nvSpPr>
-        <p:spPr>
-          <a:xfrm>
-            <a:off x="6668262" y="4169664"/>
-            <a:ext cx="685800" cy="384048"/>
-          </a:xfrm>
-          <a:prstGeom prst="rect">
-            <a:avLst/>
-          </a:prstGeom>
-          <a:noFill/>
-          <a:ln/>
-        </p:spPr>
-        <p:txBody>
-          <a:bodyPr wrap="square" lIns="0" tIns="0" rIns="0" bIns="0" rtlCol="0" anchor="ctr"/>
-          <a:lstStyle/>
-          <a:p>
-            <a:pPr algn="ctr" indent="0" marL="0">
-              <a:buNone/>
-            </a:pPr>
-            <a:r>
-              <a:rPr lang="en-US" sz="900" b="1" dirty="0">
-                <a:solidFill>
-                  <a:srgbClr val="9D174D"/>
-                </a:solidFill>
-                <a:latin typeface="Trebuchet MS" pitchFamily="34" charset="0"/>
-                <a:ea typeface="Trebuchet MS" pitchFamily="34" charset="-122"/>
-                <a:cs typeface="Trebuchet MS" pitchFamily="34" charset="-120"/>
-              </a:rPr>
-              <a:t>c</a:t>
-            </a:r>
-            <a:endParaRPr lang="en-US" sz="900" dirty="0"/>
-          </a:p>
-        </p:txBody>
-      </p:sp>
-      <p:sp>
-        <p:nvSpPr>
-          <p:cNvPr id="45" name="Text 43"/>
-          <p:cNvSpPr/>
-          <p:nvPr/>
-        </p:nvSpPr>
-        <p:spPr>
-          <a:xfrm>
-            <a:off x="6668262" y="4572000"/>
-            <a:ext cx="685800" cy="219456"/>
-          </a:xfrm>
-          <a:prstGeom prst="rect">
-            <a:avLst/>
-          </a:prstGeom>
-          <a:noFill/>
-          <a:ln/>
-        </p:spPr>
-        <p:txBody>
-          <a:bodyPr wrap="square" lIns="0" tIns="0" rIns="0" bIns="0" rtlCol="0" anchor="t"/>
-          <a:lstStyle/>
-          <a:p>
-            <a:pPr algn="ctr" indent="0" marL="0">
-              <a:buNone/>
-            </a:pPr>
-            <a:r>
-              <a:rPr lang="en-US" sz="750" i="1" dirty="0">
-                <a:solidFill>
-                  <a:srgbClr val="94A3B8"/>
-                </a:solidFill>
-                <a:latin typeface="Calibri" pitchFamily="34" charset="0"/>
-                <a:ea typeface="Calibri" pitchFamily="34" charset="-122"/>
-                <a:cs typeface="Calibri" pitchFamily="34" charset="-120"/>
-              </a:rPr>
-              <a:t>/k/</a:t>
-            </a:r>
-            <a:endParaRPr lang="en-US" sz="750" dirty="0"/>
-          </a:p>
-        </p:txBody>
-      </p:sp>
-      <p:sp>
-        <p:nvSpPr>
-          <p:cNvPr id="46" name="Shape 44"/>
-          <p:cNvSpPr/>
-          <p:nvPr/>
-        </p:nvSpPr>
-        <p:spPr>
-          <a:xfrm>
-            <a:off x="7576947" y="4169664"/>
-            <a:ext cx="685800" cy="384048"/>
-          </a:xfrm>
-          <a:prstGeom prst="rect">
-            <a:avLst>
-              <a:gd name="adj" fmla="val 9524"/>
-            </a:avLst>
-          </a:prstGeom>
-          <a:solidFill>
-            <a:srgbClr val="FFFFFF"/>
-          </a:solidFill>
-          <a:ln w="12700">
-            <a:solidFill>
-              <a:srgbClr val="DB2777"/>
-            </a:solidFill>
-            <a:prstDash val="solid"/>
-          </a:ln>
-        </p:spPr>
-      </p:sp>
-      <p:sp>
-        <p:nvSpPr>
-          <p:cNvPr id="47" name="Text 45"/>
-          <p:cNvSpPr/>
-          <p:nvPr/>
-        </p:nvSpPr>
-        <p:spPr>
-          <a:xfrm>
-            <a:off x="7576947" y="4169664"/>
+          <p:cNvPr id="43" name="Text 41"/>
+          <p:cNvSpPr/>
+          <p:nvPr/>
+        </p:nvSpPr>
+        <p:spPr>
+          <a:xfrm>
+            <a:off x="7274052" y="4169664"/>
             <a:ext cx="685800" cy="384048"/>
           </a:xfrm>
           <a:prstGeom prst="rect">
@@ -31794,7 +31371,7 @@
                 <a:ea typeface="Calibri" pitchFamily="34" charset="-122"/>
                 <a:cs typeface="Calibri" pitchFamily="34" charset="-120"/>
               </a:rPr>
-              <a:t>Word Labs  •  wordlabs.app  •  Prefix: 'pre-' = before, in front of</a:t>
+              <a:t>Word Labs  •  wordlabs.app  •  Prefix: 'pre-' = before, in advance</a:t>
             </a:r>
             <a:endParaRPr lang="en-US" sz="800" dirty="0"/>
           </a:p>
@@ -32963,7 +32540,7 @@
                 <a:ea typeface="Calibri" pitchFamily="34" charset="-122"/>
                 <a:cs typeface="Calibri" pitchFamily="34" charset="-120"/>
               </a:rPr>
-              <a:t>Word Labs  •  wordlabs.app  •  Prefix: 'pre-' = before, in front of</a:t>
+              <a:t>Word Labs  •  wordlabs.app  •  Prefix: 'pre-' = before, in advance</a:t>
             </a:r>
             <a:endParaRPr lang="en-US" sz="800" dirty="0"/>
           </a:p>
@@ -34004,7 +33581,7 @@
                 <a:ea typeface="Trebuchet MS" pitchFamily="34" charset="-122"/>
                 <a:cs typeface="Trebuchet MS" pitchFamily="34" charset="-120"/>
               </a:rPr>
-              <a:t>-ment</a:t>
+              <a:t>-tion</a:t>
             </a:r>
             <a:endParaRPr lang="en-US" sz="1300" dirty="0"/>
           </a:p>
@@ -34175,7 +33752,7 @@
                 <a:ea typeface="Trebuchet MS" pitchFamily="34" charset="-122"/>
                 <a:cs typeface="Trebuchet MS" pitchFamily="34" charset="-120"/>
               </a:rPr>
-              <a:t>preheat</a:t>
+              <a:t>predict</a:t>
             </a:r>
             <a:endParaRPr lang="en-US" sz="1200" dirty="0"/>
           </a:p>
@@ -34241,7 +33818,7 @@
                 <a:ea typeface="Trebuchet MS" pitchFamily="34" charset="-122"/>
                 <a:cs typeface="Trebuchet MS" pitchFamily="34" charset="-120"/>
               </a:rPr>
-              <a:t>prepaid</a:t>
+              <a:t>prepare</a:t>
             </a:r>
             <a:endParaRPr lang="en-US" sz="1200" dirty="0"/>
           </a:p>
@@ -34373,7 +33950,7 @@
                 <a:ea typeface="Trebuchet MS" pitchFamily="34" charset="-122"/>
                 <a:cs typeface="Trebuchet MS" pitchFamily="34" charset="-120"/>
               </a:rPr>
-              <a:t>predict</a:t>
+              <a:t>preheat</a:t>
             </a:r>
             <a:endParaRPr lang="en-US" sz="1200" dirty="0"/>
           </a:p>
@@ -34439,7 +34016,7 @@
                 <a:ea typeface="Trebuchet MS" pitchFamily="34" charset="-122"/>
                 <a:cs typeface="Trebuchet MS" pitchFamily="34" charset="-120"/>
               </a:rPr>
-              <a:t>prepare</a:t>
+              <a:t>prepaid</a:t>
             </a:r>
             <a:endParaRPr lang="en-US" sz="1200" dirty="0"/>
           </a:p>
@@ -34571,7 +34148,7 @@
                 <a:ea typeface="Trebuchet MS" pitchFamily="34" charset="-122"/>
                 <a:cs typeface="Trebuchet MS" pitchFamily="34" charset="-120"/>
               </a:rPr>
-              <a:t>prehistoric</a:t>
+              <a:t>precious</a:t>
             </a:r>
             <a:endParaRPr lang="en-US" sz="1200" dirty="0"/>
           </a:p>
@@ -34863,7 +34440,7 @@
                 <a:ea typeface="Calibri" pitchFamily="34" charset="-122"/>
                 <a:cs typeface="Calibri" pitchFamily="34" charset="-120"/>
               </a:rPr>
-              <a:t>Word Labs  •  wordlabs.app  •  Prefix: 'pre-' = before, in front of</a:t>
+              <a:t>Word Labs  •  wordlabs.app  •  Prefix: 'pre-' = before, in advance</a:t>
             </a:r>
             <a:endParaRPr lang="en-US" sz="800" dirty="0"/>
           </a:p>
@@ -35027,7 +34604,7 @@
                 <a:ea typeface="Calibri" pitchFamily="34" charset="-122"/>
                 <a:cs typeface="Calibri" pitchFamily="34" charset="-120"/>
               </a:rPr>
-              <a:t>A meaningful word part added to the beginning of a root to change its meaning. The prefix 'pre-' means 'before, in front of'.</a:t>
+              <a:t>A meaningful word part added to the beginning of a root to change its meaning. The prefix 'pre-' means 'before, in advance'.</a:t>
             </a:r>
             <a:endParaRPr lang="en-US" sz="1350" dirty="0"/>
           </a:p>
@@ -35647,7 +35224,7 @@
                 <a:ea typeface="Calibri" pitchFamily="34" charset="-122"/>
                 <a:cs typeface="Calibri" pitchFamily="34" charset="-120"/>
               </a:rPr>
-              <a:t>Word Labs  •  wordlabs.app  •  Prefix: 'pre-' = before, in front of</a:t>
+              <a:t>Word Labs  •  wordlabs.app  •  Prefix: 'pre-' = before, in advance</a:t>
             </a:r>
             <a:endParaRPr lang="en-US" sz="800" dirty="0"/>
           </a:p>
@@ -35759,7 +35336,7 @@
                 <a:ea typeface="Calibri" pitchFamily="34" charset="-122"/>
                 <a:cs typeface="Calibri" pitchFamily="34" charset="-120"/>
               </a:rPr>
-              <a:t>1.  The prefix 'pre-' means before or in front of.</a:t>
+              <a:t>1.  The prefix 'pre-' means before or in advance.</a:t>
             </a:r>
             <a:endParaRPr lang="en-US" sz="1300" dirty="0"/>
           </a:p>
@@ -35898,7 +35475,7 @@
                 <a:ea typeface="Calibri" pitchFamily="34" charset="-122"/>
                 <a:cs typeface="Calibri" pitchFamily="34" charset="-120"/>
               </a:rPr>
-              <a:t>2.  The prefix 'pre-' means to do something again.</a:t>
+              <a:t>2.  Adding 'pre-' to 'heat' makes the word 'preheat', meaning to heat something beforehand.</a:t>
             </a:r>
             <a:endParaRPr lang="en-US" sz="1300" dirty="0"/>
           </a:p>
@@ -35921,11 +35498,11 @@
             </a:avLst>
           </a:prstGeom>
           <a:solidFill>
-            <a:srgbClr val="FEE2E2"/>
-          </a:solidFill>
-          <a:ln w="12700">
-            <a:solidFill>
-              <a:srgbClr val="DC2626"/>
+            <a:srgbClr val="DCFCE7"/>
+          </a:solidFill>
+          <a:ln w="12700">
+            <a:solidFill>
+              <a:srgbClr val="16A34A"/>
             </a:solidFill>
             <a:prstDash val="solid"/>
           </a:ln>
@@ -35958,13 +35535,13 @@
             <a:r>
               <a:rPr lang="en-US" sz="1100" b="1" dirty="0">
                 <a:solidFill>
-                  <a:srgbClr val="DC2626"/>
+                  <a:srgbClr val="16A34A"/>
                 </a:solidFill>
                 <a:latin typeface="Trebuchet MS" pitchFamily="34" charset="0"/>
                 <a:ea typeface="Trebuchet MS" pitchFamily="34" charset="-122"/>
                 <a:cs typeface="Trebuchet MS" pitchFamily="34" charset="-120"/>
               </a:rPr>
-              <a:t>FALSE</a:t>
+              <a:t>TRUE</a:t>
             </a:r>
             <a:endParaRPr lang="en-US" sz="1100" dirty="0"/>
           </a:p>
@@ -36037,7 +35614,7 @@
                 <a:ea typeface="Calibri" pitchFamily="34" charset="-122"/>
                 <a:cs typeface="Calibri" pitchFamily="34" charset="-120"/>
               </a:rPr>
-              <a:t>3.  The word 'preheat' uses the prefix 'pre-' because you heat the oven before using it.</a:t>
+              <a:t>3.  The prefix 'pre-' comes from the Latin word 'prae'.</a:t>
             </a:r>
             <a:endParaRPr lang="en-US" sz="1300" dirty="0"/>
           </a:p>
@@ -36176,7 +35753,7 @@
                 <a:ea typeface="Calibri" pitchFamily="34" charset="-122"/>
                 <a:cs typeface="Calibri" pitchFamily="34" charset="-120"/>
               </a:rPr>
-              <a:t>4.  The prefix 'pre-' comes from Latin.</a:t>
+              <a:t>4.  The word 'present' always means a gift you give someone.</a:t>
             </a:r>
             <a:endParaRPr lang="en-US" sz="1300" dirty="0"/>
           </a:p>
@@ -36199,11 +35776,11 @@
             </a:avLst>
           </a:prstGeom>
           <a:solidFill>
-            <a:srgbClr val="DCFCE7"/>
-          </a:solidFill>
-          <a:ln w="12700">
-            <a:solidFill>
-              <a:srgbClr val="16A34A"/>
+            <a:srgbClr val="FEE2E2"/>
+          </a:solidFill>
+          <a:ln w="12700">
+            <a:solidFill>
+              <a:srgbClr val="DC2626"/>
             </a:solidFill>
             <a:prstDash val="solid"/>
           </a:ln>
@@ -36236,13 +35813,13 @@
             <a:r>
               <a:rPr lang="en-US" sz="1100" b="1" dirty="0">
                 <a:solidFill>
-                  <a:srgbClr val="16A34A"/>
+                  <a:srgbClr val="DC2626"/>
                 </a:solidFill>
                 <a:latin typeface="Trebuchet MS" pitchFamily="34" charset="0"/>
                 <a:ea typeface="Trebuchet MS" pitchFamily="34" charset="-122"/>
                 <a:cs typeface="Trebuchet MS" pitchFamily="34" charset="-120"/>
               </a:rPr>
-              <a:t>TRUE</a:t>
+              <a:t>FALSE</a:t>
             </a:r>
             <a:endParaRPr lang="en-US" sz="1100" dirty="0"/>
           </a:p>
@@ -36315,7 +35892,7 @@
                 <a:ea typeface="Calibri" pitchFamily="34" charset="-122"/>
                 <a:cs typeface="Calibri" pitchFamily="34" charset="-120"/>
               </a:rPr>
-              <a:t>5.  The prefix 'pre-' changes the base word so it means the opposite.</a:t>
+              <a:t>5.  The prefix 'pre-' means after or following.</a:t>
             </a:r>
             <a:endParaRPr lang="en-US" sz="1300" dirty="0"/>
           </a:p>
@@ -36673,7 +36250,7 @@
                 <a:ea typeface="Calibri" pitchFamily="34" charset="-122"/>
                 <a:cs typeface="Calibri" pitchFamily="34" charset="-120"/>
               </a:rPr>
-              <a:t>Word Labs  •  wordlabs.app  •  Prefix: 'pre-' = before, in front of</a:t>
+              <a:t>Word Labs  •  wordlabs.app  •  Prefix: 'pre-' = before, in advance</a:t>
             </a:r>
             <a:endParaRPr lang="en-US" sz="800" dirty="0"/>
           </a:p>
@@ -36810,7 +36387,7 @@
                 <a:ea typeface="Trebuchet MS" pitchFamily="34" charset="-122"/>
                 <a:cs typeface="Trebuchet MS" pitchFamily="34" charset="-120"/>
               </a:rPr>
-              <a:t>before, in front of</a:t>
+              <a:t>before, in advance</a:t>
             </a:r>
             <a:endParaRPr lang="en-US" sz="2000" dirty="0"/>
           </a:p>
@@ -37020,7 +36597,7 @@
                 <a:ea typeface="Trebuchet MS" pitchFamily="34" charset="-122"/>
                 <a:cs typeface="Trebuchet MS" pitchFamily="34" charset="-120"/>
               </a:rPr>
-              <a:t>preheat</a:t>
+              <a:t>predict</a:t>
             </a:r>
             <a:endParaRPr lang="en-US" sz="1300" dirty="0"/>
           </a:p>
@@ -37086,7 +36663,7 @@
                 <a:ea typeface="Trebuchet MS" pitchFamily="34" charset="-122"/>
                 <a:cs typeface="Trebuchet MS" pitchFamily="34" charset="-120"/>
               </a:rPr>
-              <a:t>prepaid</a:t>
+              <a:t>prepare</a:t>
             </a:r>
             <a:endParaRPr lang="en-US" sz="1300" dirty="0"/>
           </a:p>
@@ -37218,7 +36795,7 @@
                 <a:ea typeface="Trebuchet MS" pitchFamily="34" charset="-122"/>
                 <a:cs typeface="Trebuchet MS" pitchFamily="34" charset="-120"/>
               </a:rPr>
-              <a:t>predict</a:t>
+              <a:t>preheat</a:t>
             </a:r>
             <a:endParaRPr lang="en-US" sz="1300" dirty="0"/>
           </a:p>
@@ -37284,7 +36861,7 @@
                 <a:ea typeface="Trebuchet MS" pitchFamily="34" charset="-122"/>
                 <a:cs typeface="Trebuchet MS" pitchFamily="34" charset="-120"/>
               </a:rPr>
-              <a:t>prepare</a:t>
+              <a:t>prepaid</a:t>
             </a:r>
             <a:endParaRPr lang="en-US" sz="1300" dirty="0"/>
           </a:p>
@@ -37642,7 +37219,7 @@
                 <a:ea typeface="Calibri" pitchFamily="34" charset="-122"/>
                 <a:cs typeface="Calibri" pitchFamily="34" charset="-120"/>
               </a:rPr>
-              <a:t>Word Labs  •  wordlabs.app  •  Prefix: 'pre-' = before, in front of</a:t>
+              <a:t>Word Labs  •  wordlabs.app  •  Prefix: 'pre-' = before, in advance</a:t>
             </a:r>
             <a:endParaRPr lang="en-US" sz="800" dirty="0"/>
           </a:p>
@@ -38683,7 +38260,7 @@
                 <a:ea typeface="Trebuchet MS" pitchFamily="34" charset="-122"/>
                 <a:cs typeface="Trebuchet MS" pitchFamily="34" charset="-120"/>
               </a:rPr>
-              <a:t>-ment</a:t>
+              <a:t>-tion</a:t>
             </a:r>
             <a:endParaRPr lang="en-US" sz="1300" dirty="0"/>
           </a:p>
@@ -39416,7 +38993,7 @@
                 <a:ea typeface="Calibri" pitchFamily="34" charset="-122"/>
                 <a:cs typeface="Calibri" pitchFamily="34" charset="-120"/>
               </a:rPr>
-              <a:t>Word Labs  •  wordlabs.app  •  Prefix: 'pre-' = before, in front of</a:t>
+              <a:t>Word Labs  •  wordlabs.app  •  Prefix: 'pre-' = before, in advance</a:t>
             </a:r>
             <a:endParaRPr lang="en-US" sz="800" dirty="0"/>
           </a:p>
@@ -39594,7 +39171,7 @@
                 <a:ea typeface="Calibri" pitchFamily="34" charset="-122"/>
                 <a:cs typeface="Calibri" pitchFamily="34" charset="-120"/>
               </a:rPr>
-              <a:t>When something has already been paid for before you use it, like a prepaid phone card.</a:t>
+              <a:t>To get ready for something before it happens.</a:t>
             </a:r>
             <a:endParaRPr lang="en-US" sz="1200" dirty="0"/>
           </a:p>
@@ -39667,7 +39244,7 @@
                 <a:ea typeface="Trebuchet MS" pitchFamily="34" charset="-122"/>
                 <a:cs typeface="Trebuchet MS" pitchFamily="34" charset="-120"/>
               </a:rPr>
-              <a:t>preheat</a:t>
+              <a:t>predict</a:t>
             </a:r>
             <a:endParaRPr lang="en-US" sz="1200" dirty="0"/>
           </a:p>
@@ -39733,7 +39310,7 @@
                 <a:ea typeface="Calibri" pitchFamily="34" charset="-122"/>
                 <a:cs typeface="Calibri" pitchFamily="34" charset="-120"/>
               </a:rPr>
-              <a:t>To say what you think will happen before it actually happens.</a:t>
+              <a:t>To heat an oven to the right temperature before putting food in.</a:t>
             </a:r>
             <a:endParaRPr lang="en-US" sz="1200" dirty="0"/>
           </a:p>
@@ -39806,7 +39383,7 @@
                 <a:ea typeface="Trebuchet MS" pitchFamily="34" charset="-122"/>
                 <a:cs typeface="Trebuchet MS" pitchFamily="34" charset="-120"/>
               </a:rPr>
-              <a:t>prepaid</a:t>
+              <a:t>prepare</a:t>
             </a:r>
             <a:endParaRPr lang="en-US" sz="1200" dirty="0"/>
           </a:p>
@@ -39872,7 +39449,7 @@
                 <a:ea typeface="Calibri" pitchFamily="34" charset="-122"/>
                 <a:cs typeface="Calibri" pitchFamily="34" charset="-120"/>
               </a:rPr>
-              <a:t>To look at something before it is shown to everyone, like watching a movie trailer before the film comes out.</a:t>
+              <a:t>To look at or watch something before it is officially released or shown.</a:t>
             </a:r>
             <a:endParaRPr lang="en-US" sz="1200" dirty="0"/>
           </a:p>
@@ -40011,7 +39588,7 @@
                 <a:ea typeface="Calibri" pitchFamily="34" charset="-122"/>
                 <a:cs typeface="Calibri" pitchFamily="34" charset="-120"/>
               </a:rPr>
-              <a:t>To get everything ready before doing something, like preparing your bag before school.</a:t>
+              <a:t>Something that has already been paid for before it is used.</a:t>
             </a:r>
             <a:endParaRPr lang="en-US" sz="1200" dirty="0"/>
           </a:p>
@@ -40084,7 +39661,7 @@
                 <a:ea typeface="Trebuchet MS" pitchFamily="34" charset="-122"/>
                 <a:cs typeface="Trebuchet MS" pitchFamily="34" charset="-120"/>
               </a:rPr>
-              <a:t>predict</a:t>
+              <a:t>preheat</a:t>
             </a:r>
             <a:endParaRPr lang="en-US" sz="1200" dirty="0"/>
           </a:p>
@@ -40223,7 +39800,7 @@
                 <a:ea typeface="Trebuchet MS" pitchFamily="34" charset="-122"/>
                 <a:cs typeface="Trebuchet MS" pitchFamily="34" charset="-120"/>
               </a:rPr>
-              <a:t>prepare</a:t>
+              <a:t>prepaid</a:t>
             </a:r>
             <a:endParaRPr lang="en-US" sz="1200" dirty="0"/>
           </a:p>
@@ -40289,7 +39866,7 @@
                 <a:ea typeface="Calibri" pitchFamily="34" charset="-122"/>
                 <a:cs typeface="Calibri" pitchFamily="34" charset="-120"/>
               </a:rPr>
-              <a:t>A school for very young children before they start primary school.</a:t>
+              <a:t>A school or program for young children before they start primary school.</a:t>
             </a:r>
             <a:endParaRPr lang="en-US" sz="1200" dirty="0"/>
           </a:p>
@@ -40428,7 +40005,7 @@
                 <a:ea typeface="Calibri" pitchFamily="34" charset="-122"/>
                 <a:cs typeface="Calibri" pitchFamily="34" charset="-120"/>
               </a:rPr>
-              <a:t>To heat an oven before you put food inside it, so it is already at the right temperature.</a:t>
+              <a:t>To say what you think will happen in the future before it occurs.</a:t>
             </a:r>
             <a:endParaRPr lang="en-US" sz="1200" dirty="0"/>
           </a:p>
@@ -40720,7 +40297,7 @@
                 <a:ea typeface="Calibri" pitchFamily="34" charset="-122"/>
                 <a:cs typeface="Calibri" pitchFamily="34" charset="-120"/>
               </a:rPr>
-              <a:t>Word Labs  •  wordlabs.app  •  Prefix: 'pre-' = before, in front of</a:t>
+              <a:t>Word Labs  •  wordlabs.app  •  Prefix: 'pre-' = before, in advance</a:t>
             </a:r>
             <a:endParaRPr lang="en-US" sz="800" dirty="0"/>
           </a:p>
@@ -40923,7 +40500,7 @@
                 <a:ea typeface="Calibri" pitchFamily="34" charset="-122"/>
                 <a:cs typeface="Calibri" pitchFamily="34" charset="-120"/>
               </a:rPr>
-              <a:t>We need to preheat the oven before we bake the birthday cake.</a:t>
+              <a:t>Mum asked me to preheat the oven before she started making the pizza.</a:t>
             </a:r>
             <a:endParaRPr lang="en-US" sz="1500" dirty="0"/>
           </a:p>
@@ -41087,7 +40664,7 @@
                 <a:ea typeface="Calibri" pitchFamily="34" charset="-122"/>
                 <a:cs typeface="Calibri" pitchFamily="34" charset="-120"/>
               </a:rPr>
-              <a:t>The teacher asked us to predict what would happen next in the story.</a:t>
+              <a:t>The weather reporter tried to predict whether it would rain on the weekend.</a:t>
             </a:r>
             <a:endParaRPr lang="en-US" sz="1500" dirty="0"/>
           </a:p>
@@ -41251,7 +40828,7 @@
                 <a:ea typeface="Calibri" pitchFamily="34" charset="-122"/>
                 <a:cs typeface="Calibri" pitchFamily="34" charset="-120"/>
               </a:rPr>
-              <a:t>The children were excited to preview the new library books before choosing one to borrow.</a:t>
+              <a:t>We got to watch a preview of the new movie at the cinema last Friday.</a:t>
             </a:r>
             <a:endParaRPr lang="en-US" sz="1500" dirty="0"/>
           </a:p>

--- a/output/wordlabs-pre-prefix-3day.pptx
+++ b/output/wordlabs-pre-prefix-3day.pptx
@@ -4240,7 +4240,7 @@
                 <a:ea typeface="Calibri" pitchFamily="34" charset="-122"/>
                 <a:cs typeface="Calibri" pitchFamily="34" charset="-120"/>
               </a:rPr>
-              <a:t>"before, in advance"</a:t>
+              <a:t>"before"</a:t>
             </a:r>
             <a:endParaRPr lang="en-US" sz="2200" dirty="0"/>
           </a:p>
@@ -4279,7 +4279,7 @@
                 <a:ea typeface="Calibri" pitchFamily="34" charset="-122"/>
                 <a:cs typeface="Calibri" pitchFamily="34" charset="-120"/>
               </a:rPr>
-              <a:t>Origin: Latin: prae</a:t>
+              <a:t>Origin: Prefix</a:t>
             </a:r>
             <a:endParaRPr lang="en-US" sz="1300" dirty="0"/>
           </a:p>
@@ -5288,7 +5288,7 @@
                 <a:ea typeface="Calibri" pitchFamily="34" charset="-122"/>
                 <a:cs typeface="Calibri" pitchFamily="34" charset="-120"/>
               </a:rPr>
-              <a:t>Word Labs  •  wordlabs.app  •  Prefix: 'pre-' = before, in advance</a:t>
+              <a:t>Word Labs  •  wordlabs.app  •  Prefix: 'pre-' = before</a:t>
             </a:r>
             <a:endParaRPr lang="en-US" sz="800" dirty="0"/>
           </a:p>
@@ -5622,7 +5622,7 @@
                 <a:ea typeface="Trebuchet MS" pitchFamily="34" charset="-122"/>
                 <a:cs typeface="Trebuchet MS" pitchFamily="34" charset="-120"/>
               </a:rPr>
-              <a:t>1</a:t>
+              <a:t>0</a:t>
             </a:r>
             <a:pPr algn="ctr" indent="0" marL="0">
               <a:buNone/>
@@ -5928,7 +5928,7 @@
                 <a:ea typeface="Calibri" pitchFamily="34" charset="-122"/>
                 <a:cs typeface="Calibri" pitchFamily="34" charset="-120"/>
               </a:rPr>
-              <a:t>Word Labs  •  wordlabs.app  •  Prefix: 'pre-' = before, in advance</a:t>
+              <a:t>Word Labs  •  wordlabs.app  •  Prefix: 'pre-' = before</a:t>
             </a:r>
             <a:endParaRPr lang="en-US" sz="800" dirty="0"/>
           </a:p>
@@ -6040,7 +6040,7 @@
                 <a:ea typeface="Calibri" pitchFamily="34" charset="-122"/>
                 <a:cs typeface="Calibri" pitchFamily="34" charset="-120"/>
               </a:rPr>
-              <a:t>We need to </a:t>
+              <a:t>The judge's ruling set a </a:t>
             </a:r>
             <a:pPr algn="l" indent="0" marL="0">
               <a:buNone/>
@@ -6057,7 +6057,7 @@
                 <a:ea typeface="Calibri" pitchFamily="34" charset="-122"/>
                 <a:cs typeface="Calibri" pitchFamily="34" charset="-120"/>
               </a:rPr>
-              <a:t>prepare</a:t>
+              <a:t>precedent</a:t>
             </a:r>
             <a:pPr algn="l" indent="0" marL="0">
               <a:buNone/>
@@ -6071,7 +6071,7 @@
                 <a:ea typeface="Calibri" pitchFamily="34" charset="-122"/>
                 <a:cs typeface="Calibri" pitchFamily="34" charset="-120"/>
               </a:rPr>
-              <a:t> our costumes before the school </a:t>
+              <a:t> for future cases. Please read the </a:t>
             </a:r>
             <a:pPr algn="l" indent="0" marL="0">
               <a:buNone/>
@@ -6088,7 +6088,7 @@
                 <a:ea typeface="Calibri" pitchFamily="34" charset="-122"/>
                 <a:cs typeface="Calibri" pitchFamily="34" charset="-120"/>
               </a:rPr>
-              <a:t>preview</a:t>
+              <a:t>preceding</a:t>
             </a:r>
             <a:pPr algn="l" indent="0" marL="0">
               <a:buNone/>
@@ -6102,7 +6102,7 @@
                 <a:ea typeface="Calibri" pitchFamily="34" charset="-122"/>
                 <a:cs typeface="Calibri" pitchFamily="34" charset="-120"/>
               </a:rPr>
-              <a:t> next week.</a:t>
+              <a:t> paragraph before answering the question.</a:t>
             </a:r>
             <a:endParaRPr lang="en-US" sz="1800" dirty="0"/>
           </a:p>
@@ -6257,7 +6257,7 @@
                 <a:ea typeface="Trebuchet MS" pitchFamily="34" charset="-122"/>
                 <a:cs typeface="Trebuchet MS" pitchFamily="34" charset="-120"/>
               </a:rPr>
-              <a:t>prepare</a:t>
+              <a:t>precedent</a:t>
             </a:r>
             <a:endParaRPr lang="en-US" sz="1400" dirty="0"/>
           </a:p>
@@ -6385,7 +6385,7 @@
                 <a:ea typeface="Trebuchet MS" pitchFamily="34" charset="-122"/>
                 <a:cs typeface="Trebuchet MS" pitchFamily="34" charset="-120"/>
               </a:rPr>
-              <a:t>preview</a:t>
+              <a:t>preceding</a:t>
             </a:r>
             <a:endParaRPr lang="en-US" sz="1400" dirty="0"/>
           </a:p>
@@ -6716,7 +6716,7 @@
                 <a:ea typeface="Calibri" pitchFamily="34" charset="-122"/>
                 <a:cs typeface="Calibri" pitchFamily="34" charset="-120"/>
               </a:rPr>
-              <a:t>Word Labs  •  wordlabs.app  •  Prefix: 'pre-' = before, in advance</a:t>
+              <a:t>Word Labs  •  wordlabs.app  •  Prefix: 'pre-' = before</a:t>
             </a:r>
             <a:endParaRPr lang="en-US" sz="800" dirty="0"/>
           </a:p>
@@ -6855,7 +6855,7 @@
                 <a:ea typeface="Trebuchet MS" pitchFamily="34" charset="-122"/>
                 <a:cs typeface="Trebuchet MS" pitchFamily="34" charset="-120"/>
               </a:rPr>
-              <a:t>prepare</a:t>
+              <a:t>precedent</a:t>
             </a:r>
             <a:endParaRPr lang="en-US" sz="2800" dirty="0"/>
           </a:p>
@@ -7543,7 +7543,7 @@
                 <a:ea typeface="Calibri" pitchFamily="34" charset="-122"/>
                 <a:cs typeface="Calibri" pitchFamily="34" charset="-120"/>
               </a:rPr>
-              <a:t>Word Labs  •  wordlabs.app  •  Prefix: 'pre-' = before, in advance</a:t>
+              <a:t>Word Labs  •  wordlabs.app  •  Prefix: 'pre-' = before</a:t>
             </a:r>
             <a:endParaRPr lang="en-US" sz="800" dirty="0"/>
           </a:p>
@@ -7682,7 +7682,7 @@
                 <a:ea typeface="Trebuchet MS" pitchFamily="34" charset="-122"/>
                 <a:cs typeface="Trebuchet MS" pitchFamily="34" charset="-120"/>
               </a:rPr>
-              <a:t>prepare</a:t>
+              <a:t>precedent</a:t>
             </a:r>
             <a:endParaRPr lang="en-US" sz="2800" dirty="0"/>
           </a:p>
@@ -7762,7 +7762,7 @@
         </p:nvSpPr>
         <p:spPr>
           <a:xfrm>
-            <a:off x="2938272" y="2258568"/>
+            <a:off x="2221992" y="2258568"/>
             <a:ext cx="1828800" cy="292608"/>
           </a:xfrm>
           <a:prstGeom prst="rect">
@@ -7796,7 +7796,7 @@
         </p:nvSpPr>
         <p:spPr>
           <a:xfrm>
-            <a:off x="2938272" y="2258568"/>
+            <a:off x="2221992" y="2258568"/>
             <a:ext cx="1828800" cy="292608"/>
           </a:xfrm>
           <a:prstGeom prst="rect">
@@ -7835,7 +7835,7 @@
         </p:nvSpPr>
         <p:spPr>
           <a:xfrm>
-            <a:off x="2938272" y="2569464"/>
+            <a:off x="2221992" y="2569464"/>
             <a:ext cx="1828800" cy="201168"/>
           </a:xfrm>
           <a:prstGeom prst="rect">
@@ -7874,7 +7874,7 @@
         </p:nvSpPr>
         <p:spPr>
           <a:xfrm>
-            <a:off x="5803392" y="2258568"/>
+            <a:off x="4370832" y="2258568"/>
             <a:ext cx="1828800" cy="292608"/>
           </a:xfrm>
           <a:prstGeom prst="rect">
@@ -7908,7 +7908,7 @@
         </p:nvSpPr>
         <p:spPr>
           <a:xfrm>
-            <a:off x="5803392" y="2258568"/>
+            <a:off x="4370832" y="2258568"/>
             <a:ext cx="1828800" cy="292608"/>
           </a:xfrm>
           <a:prstGeom prst="rect">
@@ -7933,7 +7933,7 @@
                 <a:ea typeface="Trebuchet MS" pitchFamily="34" charset="-122"/>
                 <a:cs typeface="Trebuchet MS" pitchFamily="34" charset="-120"/>
               </a:rPr>
-              <a:t>pare</a:t>
+              <a:t>cede</a:t>
             </a:r>
             <a:endParaRPr lang="en-US" sz="1300" dirty="0"/>
           </a:p>
@@ -7947,7 +7947,7 @@
         </p:nvSpPr>
         <p:spPr>
           <a:xfrm>
-            <a:off x="5803392" y="2569464"/>
+            <a:off x="4370832" y="2569464"/>
             <a:ext cx="1828800" cy="201168"/>
           </a:xfrm>
           <a:prstGeom prst="rect">
@@ -7972,7 +7972,7 @@
                 <a:ea typeface="Calibri" pitchFamily="34" charset="-122"/>
                 <a:cs typeface="Calibri" pitchFamily="34" charset="-120"/>
               </a:rPr>
-              <a:t>to make ready</a:t>
+              <a:t>go; yield</a:t>
             </a:r>
             <a:endParaRPr lang="en-US" sz="850" dirty="0"/>
           </a:p>
@@ -7981,6 +7981,118 @@
       <p:sp>
         <p:nvSpPr>
           <p:cNvPr id="22" name="Shape 20"/>
+          <p:cNvSpPr/>
+          <p:nvPr/>
+        </p:nvSpPr>
+        <p:spPr>
+          <a:xfrm>
+            <a:off x="6519672" y="2258568"/>
+            <a:ext cx="1828800" cy="292608"/>
+          </a:xfrm>
+          <a:prstGeom prst="rect">
+            <a:avLst>
+              <a:gd name="adj" fmla="val 25000"/>
+            </a:avLst>
+          </a:prstGeom>
+          <a:solidFill>
+            <a:srgbClr val="FCE7F3"/>
+          </a:solidFill>
+          <a:ln w="19050">
+            <a:solidFill>
+              <a:srgbClr val="DB2777"/>
+            </a:solidFill>
+            <a:prstDash val="solid"/>
+          </a:ln>
+          <a:effectLst>
+            <a:outerShdw sx="100000" sy="100000" kx="0" ky="0" algn="bl" rotWithShape="0" blurRad="101600" dist="38100" dir="8100000">
+              <a:srgbClr val="000000">
+                <a:alpha val="12000"/>
+              </a:srgbClr>
+            </a:outerShdw>
+          </a:effectLst>
+        </p:spPr>
+      </p:sp>
+      <p:sp>
+        <p:nvSpPr>
+          <p:cNvPr id="23" name="Text 21"/>
+          <p:cNvSpPr/>
+          <p:nvPr/>
+        </p:nvSpPr>
+        <p:spPr>
+          <a:xfrm>
+            <a:off x="6519672" y="2258568"/>
+            <a:ext cx="1828800" cy="292608"/>
+          </a:xfrm>
+          <a:prstGeom prst="rect">
+            <a:avLst/>
+          </a:prstGeom>
+          <a:noFill/>
+          <a:ln/>
+        </p:spPr>
+        <p:txBody>
+          <a:bodyPr wrap="square" lIns="0" tIns="0" rIns="0" bIns="0" rtlCol="0" anchor="ctr"/>
+          <a:lstStyle/>
+          <a:p>
+            <a:pPr algn="ctr" indent="0" marL="0">
+              <a:buNone/>
+            </a:pPr>
+            <a:r>
+              <a:rPr lang="en-US" sz="1300" b="1" dirty="0">
+                <a:solidFill>
+                  <a:srgbClr val="9D174D"/>
+                </a:solidFill>
+                <a:latin typeface="Trebuchet MS" pitchFamily="34" charset="0"/>
+                <a:ea typeface="Trebuchet MS" pitchFamily="34" charset="-122"/>
+                <a:cs typeface="Trebuchet MS" pitchFamily="34" charset="-120"/>
+              </a:rPr>
+              <a:t>ent</a:t>
+            </a:r>
+            <a:endParaRPr lang="en-US" sz="1300" dirty="0"/>
+          </a:p>
+        </p:txBody>
+      </p:sp>
+      <p:sp>
+        <p:nvSpPr>
+          <p:cNvPr id="24" name="Text 22"/>
+          <p:cNvSpPr/>
+          <p:nvPr/>
+        </p:nvSpPr>
+        <p:spPr>
+          <a:xfrm>
+            <a:off x="6519672" y="2569464"/>
+            <a:ext cx="1828800" cy="201168"/>
+          </a:xfrm>
+          <a:prstGeom prst="rect">
+            <a:avLst/>
+          </a:prstGeom>
+          <a:noFill/>
+          <a:ln/>
+        </p:spPr>
+        <p:txBody>
+          <a:bodyPr wrap="square" lIns="0" tIns="0" rIns="0" bIns="0" rtlCol="0" anchor="t"/>
+          <a:lstStyle/>
+          <a:p>
+            <a:pPr algn="ctr" indent="0" marL="0">
+              <a:buNone/>
+            </a:pPr>
+            <a:r>
+              <a:rPr lang="en-US" sz="850" dirty="0">
+                <a:solidFill>
+                  <a:srgbClr val="475569"/>
+                </a:solidFill>
+                <a:latin typeface="Calibri" pitchFamily="34" charset="0"/>
+                <a:ea typeface="Calibri" pitchFamily="34" charset="-122"/>
+                <a:cs typeface="Calibri" pitchFamily="34" charset="-120"/>
+              </a:rPr>
+              <a:t>person or thing that</a:t>
+            </a:r>
+            <a:endParaRPr lang="en-US" sz="850" dirty="0"/>
+          </a:p>
+        </p:txBody>
+      </p:sp>
+      <p:sp>
+        <p:nvSpPr>
+          <p:cNvPr id="25" name="Shape 23"/>
           <p:cNvSpPr/>
           <p:nvPr/>
         </p:nvSpPr>
@@ -8007,7 +8119,7 @@
       </p:sp>
       <p:sp>
         <p:nvSpPr>
-          <p:cNvPr id="23" name="Text 21"/>
+          <p:cNvPr id="26" name="Text 24"/>
           <p:cNvSpPr/>
           <p:nvPr/>
         </p:nvSpPr>
@@ -8046,7 +8158,7 @@
       </p:sp>
       <p:sp>
         <p:nvSpPr>
-          <p:cNvPr id="24" name="Shape 22"/>
+          <p:cNvPr id="27" name="Shape 25"/>
           <p:cNvSpPr/>
           <p:nvPr/>
         </p:nvSpPr>
@@ -8073,7 +8185,7 @@
       </p:sp>
       <p:sp>
         <p:nvSpPr>
-          <p:cNvPr id="25" name="Text 23"/>
+          <p:cNvPr id="28" name="Text 26"/>
           <p:cNvSpPr/>
           <p:nvPr/>
         </p:nvSpPr>
@@ -8112,7 +8224,7 @@
       </p:sp>
       <p:sp>
         <p:nvSpPr>
-          <p:cNvPr id="26" name="Shape 24"/>
+          <p:cNvPr id="29" name="Shape 27"/>
           <p:cNvSpPr/>
           <p:nvPr/>
         </p:nvSpPr>
@@ -8139,7 +8251,7 @@
       </p:sp>
       <p:sp>
         <p:nvSpPr>
-          <p:cNvPr id="27" name="Text 25"/>
+          <p:cNvPr id="30" name="Text 28"/>
           <p:cNvSpPr/>
           <p:nvPr/>
         </p:nvSpPr>
@@ -8178,7 +8290,7 @@
       </p:sp>
       <p:sp>
         <p:nvSpPr>
-          <p:cNvPr id="28" name="Shape 26"/>
+          <p:cNvPr id="31" name="Shape 29"/>
           <p:cNvSpPr/>
           <p:nvPr/>
         </p:nvSpPr>
@@ -8205,7 +8317,7 @@
       </p:sp>
       <p:sp>
         <p:nvSpPr>
-          <p:cNvPr id="29" name="Text 27"/>
+          <p:cNvPr id="32" name="Text 30"/>
           <p:cNvSpPr/>
           <p:nvPr/>
         </p:nvSpPr>
@@ -8528,7 +8640,7 @@
                 <a:ea typeface="Calibri" pitchFamily="34" charset="-122"/>
                 <a:cs typeface="Calibri" pitchFamily="34" charset="-120"/>
               </a:rPr>
-              <a:t>Word Labs  •  wordlabs.app  •  Prefix: 'pre-' = before, in advance</a:t>
+              <a:t>Word Labs  •  wordlabs.app  •  Prefix: 'pre-' = before</a:t>
             </a:r>
             <a:endParaRPr lang="en-US" sz="800" dirty="0"/>
           </a:p>
@@ -8667,7 +8779,7 @@
                 <a:ea typeface="Trebuchet MS" pitchFamily="34" charset="-122"/>
                 <a:cs typeface="Trebuchet MS" pitchFamily="34" charset="-120"/>
               </a:rPr>
-              <a:t>prepare</a:t>
+              <a:t>precedent</a:t>
             </a:r>
             <a:endParaRPr lang="en-US" sz="2800" dirty="0"/>
           </a:p>
@@ -8747,7 +8859,7 @@
         </p:nvSpPr>
         <p:spPr>
           <a:xfrm>
-            <a:off x="2938272" y="2258568"/>
+            <a:off x="2221992" y="2258568"/>
             <a:ext cx="1828800" cy="292608"/>
           </a:xfrm>
           <a:prstGeom prst="rect">
@@ -8781,7 +8893,7 @@
         </p:nvSpPr>
         <p:spPr>
           <a:xfrm>
-            <a:off x="2938272" y="2258568"/>
+            <a:off x="2221992" y="2258568"/>
             <a:ext cx="1828800" cy="292608"/>
           </a:xfrm>
           <a:prstGeom prst="rect">
@@ -8820,7 +8932,7 @@
         </p:nvSpPr>
         <p:spPr>
           <a:xfrm>
-            <a:off x="2938272" y="2569464"/>
+            <a:off x="2221992" y="2569464"/>
             <a:ext cx="1828800" cy="201168"/>
           </a:xfrm>
           <a:prstGeom prst="rect">
@@ -8859,7 +8971,7 @@
         </p:nvSpPr>
         <p:spPr>
           <a:xfrm>
-            <a:off x="5803392" y="2258568"/>
+            <a:off x="4370832" y="2258568"/>
             <a:ext cx="1828800" cy="292608"/>
           </a:xfrm>
           <a:prstGeom prst="rect">
@@ -8893,7 +9005,7 @@
         </p:nvSpPr>
         <p:spPr>
           <a:xfrm>
-            <a:off x="5803392" y="2258568"/>
+            <a:off x="4370832" y="2258568"/>
             <a:ext cx="1828800" cy="292608"/>
           </a:xfrm>
           <a:prstGeom prst="rect">
@@ -8918,7 +9030,7 @@
                 <a:ea typeface="Trebuchet MS" pitchFamily="34" charset="-122"/>
                 <a:cs typeface="Trebuchet MS" pitchFamily="34" charset="-120"/>
               </a:rPr>
-              <a:t>pare</a:t>
+              <a:t>cede</a:t>
             </a:r>
             <a:endParaRPr lang="en-US" sz="1300" dirty="0"/>
           </a:p>
@@ -8932,7 +9044,7 @@
         </p:nvSpPr>
         <p:spPr>
           <a:xfrm>
-            <a:off x="5803392" y="2569464"/>
+            <a:off x="4370832" y="2569464"/>
             <a:ext cx="1828800" cy="201168"/>
           </a:xfrm>
           <a:prstGeom prst="rect">
@@ -8957,7 +9069,7 @@
                 <a:ea typeface="Calibri" pitchFamily="34" charset="-122"/>
                 <a:cs typeface="Calibri" pitchFamily="34" charset="-120"/>
               </a:rPr>
-              <a:t>to make ready</a:t>
+              <a:t>go; yield</a:t>
             </a:r>
             <a:endParaRPr lang="en-US" sz="850" dirty="0"/>
           </a:p>
@@ -8966,6 +9078,118 @@
       <p:sp>
         <p:nvSpPr>
           <p:cNvPr id="22" name="Shape 20"/>
+          <p:cNvSpPr/>
+          <p:nvPr/>
+        </p:nvSpPr>
+        <p:spPr>
+          <a:xfrm>
+            <a:off x="6519672" y="2258568"/>
+            <a:ext cx="1828800" cy="292608"/>
+          </a:xfrm>
+          <a:prstGeom prst="rect">
+            <a:avLst>
+              <a:gd name="adj" fmla="val 25000"/>
+            </a:avLst>
+          </a:prstGeom>
+          <a:solidFill>
+            <a:srgbClr val="FCE7F3"/>
+          </a:solidFill>
+          <a:ln w="19050">
+            <a:solidFill>
+              <a:srgbClr val="DB2777"/>
+            </a:solidFill>
+            <a:prstDash val="solid"/>
+          </a:ln>
+          <a:effectLst>
+            <a:outerShdw sx="100000" sy="100000" kx="0" ky="0" algn="bl" rotWithShape="0" blurRad="101600" dist="38100" dir="8100000">
+              <a:srgbClr val="000000">
+                <a:alpha val="12000"/>
+              </a:srgbClr>
+            </a:outerShdw>
+          </a:effectLst>
+        </p:spPr>
+      </p:sp>
+      <p:sp>
+        <p:nvSpPr>
+          <p:cNvPr id="23" name="Text 21"/>
+          <p:cNvSpPr/>
+          <p:nvPr/>
+        </p:nvSpPr>
+        <p:spPr>
+          <a:xfrm>
+            <a:off x="6519672" y="2258568"/>
+            <a:ext cx="1828800" cy="292608"/>
+          </a:xfrm>
+          <a:prstGeom prst="rect">
+            <a:avLst/>
+          </a:prstGeom>
+          <a:noFill/>
+          <a:ln/>
+        </p:spPr>
+        <p:txBody>
+          <a:bodyPr wrap="square" lIns="0" tIns="0" rIns="0" bIns="0" rtlCol="0" anchor="ctr"/>
+          <a:lstStyle/>
+          <a:p>
+            <a:pPr algn="ctr" indent="0" marL="0">
+              <a:buNone/>
+            </a:pPr>
+            <a:r>
+              <a:rPr lang="en-US" sz="1300" b="1" dirty="0">
+                <a:solidFill>
+                  <a:srgbClr val="9D174D"/>
+                </a:solidFill>
+                <a:latin typeface="Trebuchet MS" pitchFamily="34" charset="0"/>
+                <a:ea typeface="Trebuchet MS" pitchFamily="34" charset="-122"/>
+                <a:cs typeface="Trebuchet MS" pitchFamily="34" charset="-120"/>
+              </a:rPr>
+              <a:t>ent</a:t>
+            </a:r>
+            <a:endParaRPr lang="en-US" sz="1300" dirty="0"/>
+          </a:p>
+        </p:txBody>
+      </p:sp>
+      <p:sp>
+        <p:nvSpPr>
+          <p:cNvPr id="24" name="Text 22"/>
+          <p:cNvSpPr/>
+          <p:nvPr/>
+        </p:nvSpPr>
+        <p:spPr>
+          <a:xfrm>
+            <a:off x="6519672" y="2569464"/>
+            <a:ext cx="1828800" cy="201168"/>
+          </a:xfrm>
+          <a:prstGeom prst="rect">
+            <a:avLst/>
+          </a:prstGeom>
+          <a:noFill/>
+          <a:ln/>
+        </p:spPr>
+        <p:txBody>
+          <a:bodyPr wrap="square" lIns="0" tIns="0" rIns="0" bIns="0" rtlCol="0" anchor="t"/>
+          <a:lstStyle/>
+          <a:p>
+            <a:pPr algn="ctr" indent="0" marL="0">
+              <a:buNone/>
+            </a:pPr>
+            <a:r>
+              <a:rPr lang="en-US" sz="850" dirty="0">
+                <a:solidFill>
+                  <a:srgbClr val="475569"/>
+                </a:solidFill>
+                <a:latin typeface="Calibri" pitchFamily="34" charset="0"/>
+                <a:ea typeface="Calibri" pitchFamily="34" charset="-122"/>
+                <a:cs typeface="Calibri" pitchFamily="34" charset="-120"/>
+              </a:rPr>
+              <a:t>person or thing that</a:t>
+            </a:r>
+            <a:endParaRPr lang="en-US" sz="850" dirty="0"/>
+          </a:p>
+        </p:txBody>
+      </p:sp>
+      <p:sp>
+        <p:nvSpPr>
+          <p:cNvPr id="25" name="Shape 23"/>
           <p:cNvSpPr/>
           <p:nvPr/>
         </p:nvSpPr>
@@ -8992,7 +9216,7 @@
       </p:sp>
       <p:sp>
         <p:nvSpPr>
-          <p:cNvPr id="23" name="Text 21"/>
+          <p:cNvPr id="26" name="Text 24"/>
           <p:cNvSpPr/>
           <p:nvPr/>
         </p:nvSpPr>
@@ -9031,7 +9255,7 @@
       </p:sp>
       <p:sp>
         <p:nvSpPr>
-          <p:cNvPr id="24" name="Shape 22"/>
+          <p:cNvPr id="27" name="Shape 25"/>
           <p:cNvSpPr/>
           <p:nvPr/>
         </p:nvSpPr>
@@ -9058,13 +9282,13 @@
       </p:sp>
       <p:sp>
         <p:nvSpPr>
-          <p:cNvPr id="25" name="Shape 23"/>
-          <p:cNvSpPr/>
-          <p:nvPr/>
-        </p:nvSpPr>
-        <p:spPr>
-          <a:xfrm>
-            <a:off x="2999232" y="3364992"/>
+          <p:cNvPr id="28" name="Shape 26"/>
+          <p:cNvSpPr/>
+          <p:nvPr/>
+        </p:nvSpPr>
+        <p:spPr>
+          <a:xfrm>
+            <a:off x="2313432" y="3364992"/>
             <a:ext cx="1645920" cy="475488"/>
           </a:xfrm>
           <a:prstGeom prst="rect">
@@ -9085,13 +9309,13 @@
       </p:sp>
       <p:sp>
         <p:nvSpPr>
-          <p:cNvPr id="26" name="Text 24"/>
-          <p:cNvSpPr/>
-          <p:nvPr/>
-        </p:nvSpPr>
-        <p:spPr>
-          <a:xfrm>
-            <a:off x="2999232" y="3364992"/>
+          <p:cNvPr id="29" name="Text 27"/>
+          <p:cNvSpPr/>
+          <p:nvPr/>
+        </p:nvSpPr>
+        <p:spPr>
+          <a:xfrm>
+            <a:off x="2313432" y="3364992"/>
             <a:ext cx="1645920" cy="475488"/>
           </a:xfrm>
           <a:prstGeom prst="rect">
@@ -9116,7 +9340,7 @@
                 <a:ea typeface="Trebuchet MS" pitchFamily="34" charset="-122"/>
                 <a:cs typeface="Trebuchet MS" pitchFamily="34" charset="-120"/>
               </a:rPr>
-              <a:t>pre</a:t>
+              <a:t>prec</a:t>
             </a:r>
             <a:endParaRPr lang="en-US" sz="1400" dirty="0"/>
           </a:p>
@@ -9124,14 +9348,14 @@
       </p:sp>
       <p:sp>
         <p:nvSpPr>
-          <p:cNvPr id="27" name="Text 25"/>
-          <p:cNvSpPr/>
-          <p:nvPr/>
-        </p:nvSpPr>
-        <p:spPr>
-          <a:xfrm>
-            <a:off x="4645152" y="3364992"/>
-            <a:ext cx="1097280" cy="475488"/>
+          <p:cNvPr id="30" name="Text 28"/>
+          <p:cNvSpPr/>
+          <p:nvPr/>
+        </p:nvSpPr>
+        <p:spPr>
+          <a:xfrm>
+            <a:off x="3959352" y="3364992"/>
+            <a:ext cx="411480" cy="475488"/>
           </a:xfrm>
           <a:prstGeom prst="rect">
             <a:avLst/>
@@ -9163,13 +9387,13 @@
       </p:sp>
       <p:sp>
         <p:nvSpPr>
-          <p:cNvPr id="28" name="Shape 26"/>
-          <p:cNvSpPr/>
-          <p:nvPr/>
-        </p:nvSpPr>
-        <p:spPr>
-          <a:xfrm>
-            <a:off x="5742432" y="3364992"/>
+          <p:cNvPr id="31" name="Shape 29"/>
+          <p:cNvSpPr/>
+          <p:nvPr/>
+        </p:nvSpPr>
+        <p:spPr>
+          <a:xfrm>
+            <a:off x="4370832" y="3364992"/>
             <a:ext cx="1645920" cy="475488"/>
           </a:xfrm>
           <a:prstGeom prst="rect">
@@ -9190,13 +9414,13 @@
       </p:sp>
       <p:sp>
         <p:nvSpPr>
-          <p:cNvPr id="29" name="Text 27"/>
-          <p:cNvSpPr/>
-          <p:nvPr/>
-        </p:nvSpPr>
-        <p:spPr>
-          <a:xfrm>
-            <a:off x="5742432" y="3364992"/>
+          <p:cNvPr id="32" name="Text 30"/>
+          <p:cNvSpPr/>
+          <p:nvPr/>
+        </p:nvSpPr>
+        <p:spPr>
+          <a:xfrm>
+            <a:off x="4370832" y="3364992"/>
             <a:ext cx="1645920" cy="475488"/>
           </a:xfrm>
           <a:prstGeom prst="rect">
@@ -9221,7 +9445,7 @@
                 <a:ea typeface="Trebuchet MS" pitchFamily="34" charset="-122"/>
                 <a:cs typeface="Trebuchet MS" pitchFamily="34" charset="-120"/>
               </a:rPr>
-              <a:t>pare</a:t>
+              <a:t>e</a:t>
             </a:r>
             <a:endParaRPr lang="en-US" sz="1400" dirty="0"/>
           </a:p>
@@ -9229,7 +9453,112 @@
       </p:sp>
       <p:sp>
         <p:nvSpPr>
-          <p:cNvPr id="30" name="Shape 28"/>
+          <p:cNvPr id="33" name="Text 31"/>
+          <p:cNvSpPr/>
+          <p:nvPr/>
+        </p:nvSpPr>
+        <p:spPr>
+          <a:xfrm>
+            <a:off x="6016752" y="3364992"/>
+            <a:ext cx="411480" cy="475488"/>
+          </a:xfrm>
+          <a:prstGeom prst="rect">
+            <a:avLst/>
+          </a:prstGeom>
+          <a:noFill/>
+          <a:ln/>
+        </p:spPr>
+        <p:txBody>
+          <a:bodyPr wrap="square" lIns="0" tIns="0" rIns="0" bIns="0" rtlCol="0" anchor="ctr"/>
+          <a:lstStyle/>
+          <a:p>
+            <a:pPr algn="ctr" indent="0" marL="0">
+              <a:buNone/>
+            </a:pPr>
+            <a:r>
+              <a:rPr lang="en-US" sz="1600" b="1" dirty="0">
+                <a:solidFill>
+                  <a:srgbClr val="0D9488"/>
+                </a:solidFill>
+                <a:latin typeface="Trebuchet MS" pitchFamily="34" charset="0"/>
+                <a:ea typeface="Trebuchet MS" pitchFamily="34" charset="-122"/>
+                <a:cs typeface="Trebuchet MS" pitchFamily="34" charset="-120"/>
+              </a:rPr>
+              <a:t>·</a:t>
+            </a:r>
+            <a:endParaRPr lang="en-US" sz="1600" dirty="0"/>
+          </a:p>
+        </p:txBody>
+      </p:sp>
+      <p:sp>
+        <p:nvSpPr>
+          <p:cNvPr id="34" name="Shape 32"/>
+          <p:cNvSpPr/>
+          <p:nvPr/>
+        </p:nvSpPr>
+        <p:spPr>
+          <a:xfrm>
+            <a:off x="6428232" y="3364992"/>
+            <a:ext cx="1645920" cy="475488"/>
+          </a:xfrm>
+          <a:prstGeom prst="rect">
+            <a:avLst>
+              <a:gd name="adj" fmla="val 9615"/>
+            </a:avLst>
+          </a:prstGeom>
+          <a:solidFill>
+            <a:srgbClr val="FFFFFF"/>
+          </a:solidFill>
+          <a:ln w="12700">
+            <a:solidFill>
+              <a:srgbClr val="0D9488"/>
+            </a:solidFill>
+            <a:prstDash val="solid"/>
+          </a:ln>
+        </p:spPr>
+      </p:sp>
+      <p:sp>
+        <p:nvSpPr>
+          <p:cNvPr id="35" name="Text 33"/>
+          <p:cNvSpPr/>
+          <p:nvPr/>
+        </p:nvSpPr>
+        <p:spPr>
+          <a:xfrm>
+            <a:off x="6428232" y="3364992"/>
+            <a:ext cx="1645920" cy="475488"/>
+          </a:xfrm>
+          <a:prstGeom prst="rect">
+            <a:avLst/>
+          </a:prstGeom>
+          <a:noFill/>
+          <a:ln/>
+        </p:spPr>
+        <p:txBody>
+          <a:bodyPr wrap="square" lIns="0" tIns="0" rIns="0" bIns="0" rtlCol="0" anchor="ctr"/>
+          <a:lstStyle/>
+          <a:p>
+            <a:pPr algn="ctr" indent="0" marL="0">
+              <a:buNone/>
+            </a:pPr>
+            <a:r>
+              <a:rPr lang="en-US" sz="1400" b="1" dirty="0">
+                <a:solidFill>
+                  <a:srgbClr val="0D9488"/>
+                </a:solidFill>
+                <a:latin typeface="Trebuchet MS" pitchFamily="34" charset="0"/>
+                <a:ea typeface="Trebuchet MS" pitchFamily="34" charset="-122"/>
+                <a:cs typeface="Trebuchet MS" pitchFamily="34" charset="-120"/>
+              </a:rPr>
+              <a:t>dent</a:t>
+            </a:r>
+            <a:endParaRPr lang="en-US" sz="1400" dirty="0"/>
+          </a:p>
+        </p:txBody>
+      </p:sp>
+      <p:sp>
+        <p:nvSpPr>
+          <p:cNvPr id="36" name="Shape 34"/>
           <p:cNvSpPr/>
           <p:nvPr/>
         </p:nvSpPr>
@@ -9256,7 +9585,7 @@
       </p:sp>
       <p:sp>
         <p:nvSpPr>
-          <p:cNvPr id="31" name="Text 29"/>
+          <p:cNvPr id="37" name="Text 35"/>
           <p:cNvSpPr/>
           <p:nvPr/>
         </p:nvSpPr>
@@ -9295,7 +9624,7 @@
       </p:sp>
       <p:sp>
         <p:nvSpPr>
-          <p:cNvPr id="32" name="Shape 30"/>
+          <p:cNvPr id="38" name="Shape 36"/>
           <p:cNvSpPr/>
           <p:nvPr/>
         </p:nvSpPr>
@@ -9322,7 +9651,7 @@
       </p:sp>
       <p:sp>
         <p:nvSpPr>
-          <p:cNvPr id="33" name="Text 31"/>
+          <p:cNvPr id="39" name="Text 37"/>
           <p:cNvSpPr/>
           <p:nvPr/>
         </p:nvSpPr>
@@ -9645,7 +9974,7 @@
                 <a:ea typeface="Calibri" pitchFamily="34" charset="-122"/>
                 <a:cs typeface="Calibri" pitchFamily="34" charset="-120"/>
               </a:rPr>
-              <a:t>Word Labs  •  wordlabs.app  •  Prefix: 'pre-' = before, in advance</a:t>
+              <a:t>Word Labs  •  wordlabs.app  •  Prefix: 'pre-' = before</a:t>
             </a:r>
             <a:endParaRPr lang="en-US" sz="800" dirty="0"/>
           </a:p>
@@ -9784,7 +10113,7 @@
                 <a:ea typeface="Trebuchet MS" pitchFamily="34" charset="-122"/>
                 <a:cs typeface="Trebuchet MS" pitchFamily="34" charset="-120"/>
               </a:rPr>
-              <a:t>prepare</a:t>
+              <a:t>precedent</a:t>
             </a:r>
             <a:endParaRPr lang="en-US" sz="2800" dirty="0"/>
           </a:p>
@@ -9864,7 +10193,7 @@
         </p:nvSpPr>
         <p:spPr>
           <a:xfrm>
-            <a:off x="2938272" y="2258568"/>
+            <a:off x="2221992" y="2258568"/>
             <a:ext cx="1828800" cy="292608"/>
           </a:xfrm>
           <a:prstGeom prst="rect">
@@ -9898,7 +10227,7 @@
         </p:nvSpPr>
         <p:spPr>
           <a:xfrm>
-            <a:off x="2938272" y="2258568"/>
+            <a:off x="2221992" y="2258568"/>
             <a:ext cx="1828800" cy="292608"/>
           </a:xfrm>
           <a:prstGeom prst="rect">
@@ -9937,7 +10266,7 @@
         </p:nvSpPr>
         <p:spPr>
           <a:xfrm>
-            <a:off x="2938272" y="2569464"/>
+            <a:off x="2221992" y="2569464"/>
             <a:ext cx="1828800" cy="201168"/>
           </a:xfrm>
           <a:prstGeom prst="rect">
@@ -9976,7 +10305,7 @@
         </p:nvSpPr>
         <p:spPr>
           <a:xfrm>
-            <a:off x="5803392" y="2258568"/>
+            <a:off x="4370832" y="2258568"/>
             <a:ext cx="1828800" cy="292608"/>
           </a:xfrm>
           <a:prstGeom prst="rect">
@@ -10010,7 +10339,7 @@
         </p:nvSpPr>
         <p:spPr>
           <a:xfrm>
-            <a:off x="5803392" y="2258568"/>
+            <a:off x="4370832" y="2258568"/>
             <a:ext cx="1828800" cy="292608"/>
           </a:xfrm>
           <a:prstGeom prst="rect">
@@ -10035,7 +10364,7 @@
                 <a:ea typeface="Trebuchet MS" pitchFamily="34" charset="-122"/>
                 <a:cs typeface="Trebuchet MS" pitchFamily="34" charset="-120"/>
               </a:rPr>
-              <a:t>pare</a:t>
+              <a:t>cede</a:t>
             </a:r>
             <a:endParaRPr lang="en-US" sz="1300" dirty="0"/>
           </a:p>
@@ -10049,7 +10378,7 @@
         </p:nvSpPr>
         <p:spPr>
           <a:xfrm>
-            <a:off x="5803392" y="2569464"/>
+            <a:off x="4370832" y="2569464"/>
             <a:ext cx="1828800" cy="201168"/>
           </a:xfrm>
           <a:prstGeom prst="rect">
@@ -10074,7 +10403,7 @@
                 <a:ea typeface="Calibri" pitchFamily="34" charset="-122"/>
                 <a:cs typeface="Calibri" pitchFamily="34" charset="-120"/>
               </a:rPr>
-              <a:t>to make ready</a:t>
+              <a:t>go; yield</a:t>
             </a:r>
             <a:endParaRPr lang="en-US" sz="850" dirty="0"/>
           </a:p>
@@ -10083,6 +10412,118 @@
       <p:sp>
         <p:nvSpPr>
           <p:cNvPr id="22" name="Shape 20"/>
+          <p:cNvSpPr/>
+          <p:nvPr/>
+        </p:nvSpPr>
+        <p:spPr>
+          <a:xfrm>
+            <a:off x="6519672" y="2258568"/>
+            <a:ext cx="1828800" cy="292608"/>
+          </a:xfrm>
+          <a:prstGeom prst="rect">
+            <a:avLst>
+              <a:gd name="adj" fmla="val 25000"/>
+            </a:avLst>
+          </a:prstGeom>
+          <a:solidFill>
+            <a:srgbClr val="FCE7F3"/>
+          </a:solidFill>
+          <a:ln w="19050">
+            <a:solidFill>
+              <a:srgbClr val="DB2777"/>
+            </a:solidFill>
+            <a:prstDash val="solid"/>
+          </a:ln>
+          <a:effectLst>
+            <a:outerShdw sx="100000" sy="100000" kx="0" ky="0" algn="bl" rotWithShape="0" blurRad="101600" dist="38100" dir="8100000">
+              <a:srgbClr val="000000">
+                <a:alpha val="12000"/>
+              </a:srgbClr>
+            </a:outerShdw>
+          </a:effectLst>
+        </p:spPr>
+      </p:sp>
+      <p:sp>
+        <p:nvSpPr>
+          <p:cNvPr id="23" name="Text 21"/>
+          <p:cNvSpPr/>
+          <p:nvPr/>
+        </p:nvSpPr>
+        <p:spPr>
+          <a:xfrm>
+            <a:off x="6519672" y="2258568"/>
+            <a:ext cx="1828800" cy="292608"/>
+          </a:xfrm>
+          <a:prstGeom prst="rect">
+            <a:avLst/>
+          </a:prstGeom>
+          <a:noFill/>
+          <a:ln/>
+        </p:spPr>
+        <p:txBody>
+          <a:bodyPr wrap="square" lIns="0" tIns="0" rIns="0" bIns="0" rtlCol="0" anchor="ctr"/>
+          <a:lstStyle/>
+          <a:p>
+            <a:pPr algn="ctr" indent="0" marL="0">
+              <a:buNone/>
+            </a:pPr>
+            <a:r>
+              <a:rPr lang="en-US" sz="1300" b="1" dirty="0">
+                <a:solidFill>
+                  <a:srgbClr val="9D174D"/>
+                </a:solidFill>
+                <a:latin typeface="Trebuchet MS" pitchFamily="34" charset="0"/>
+                <a:ea typeface="Trebuchet MS" pitchFamily="34" charset="-122"/>
+                <a:cs typeface="Trebuchet MS" pitchFamily="34" charset="-120"/>
+              </a:rPr>
+              <a:t>ent</a:t>
+            </a:r>
+            <a:endParaRPr lang="en-US" sz="1300" dirty="0"/>
+          </a:p>
+        </p:txBody>
+      </p:sp>
+      <p:sp>
+        <p:nvSpPr>
+          <p:cNvPr id="24" name="Text 22"/>
+          <p:cNvSpPr/>
+          <p:nvPr/>
+        </p:nvSpPr>
+        <p:spPr>
+          <a:xfrm>
+            <a:off x="6519672" y="2569464"/>
+            <a:ext cx="1828800" cy="201168"/>
+          </a:xfrm>
+          <a:prstGeom prst="rect">
+            <a:avLst/>
+          </a:prstGeom>
+          <a:noFill/>
+          <a:ln/>
+        </p:spPr>
+        <p:txBody>
+          <a:bodyPr wrap="square" lIns="0" tIns="0" rIns="0" bIns="0" rtlCol="0" anchor="t"/>
+          <a:lstStyle/>
+          <a:p>
+            <a:pPr algn="ctr" indent="0" marL="0">
+              <a:buNone/>
+            </a:pPr>
+            <a:r>
+              <a:rPr lang="en-US" sz="850" dirty="0">
+                <a:solidFill>
+                  <a:srgbClr val="475569"/>
+                </a:solidFill>
+                <a:latin typeface="Calibri" pitchFamily="34" charset="0"/>
+                <a:ea typeface="Calibri" pitchFamily="34" charset="-122"/>
+                <a:cs typeface="Calibri" pitchFamily="34" charset="-120"/>
+              </a:rPr>
+              <a:t>person or thing that</a:t>
+            </a:r>
+            <a:endParaRPr lang="en-US" sz="850" dirty="0"/>
+          </a:p>
+        </p:txBody>
+      </p:sp>
+      <p:sp>
+        <p:nvSpPr>
+          <p:cNvPr id="25" name="Shape 23"/>
           <p:cNvSpPr/>
           <p:nvPr/>
         </p:nvSpPr>
@@ -10109,7 +10550,7 @@
       </p:sp>
       <p:sp>
         <p:nvSpPr>
-          <p:cNvPr id="23" name="Text 21"/>
+          <p:cNvPr id="26" name="Text 24"/>
           <p:cNvSpPr/>
           <p:nvPr/>
         </p:nvSpPr>
@@ -10148,7 +10589,7 @@
       </p:sp>
       <p:sp>
         <p:nvSpPr>
-          <p:cNvPr id="24" name="Shape 22"/>
+          <p:cNvPr id="27" name="Shape 25"/>
           <p:cNvSpPr/>
           <p:nvPr/>
         </p:nvSpPr>
@@ -10175,13 +10616,13 @@
       </p:sp>
       <p:sp>
         <p:nvSpPr>
-          <p:cNvPr id="25" name="Shape 23"/>
-          <p:cNvSpPr/>
-          <p:nvPr/>
-        </p:nvSpPr>
-        <p:spPr>
-          <a:xfrm>
-            <a:off x="2999232" y="3364992"/>
+          <p:cNvPr id="28" name="Shape 26"/>
+          <p:cNvSpPr/>
+          <p:nvPr/>
+        </p:nvSpPr>
+        <p:spPr>
+          <a:xfrm>
+            <a:off x="2313432" y="3364992"/>
             <a:ext cx="1645920" cy="475488"/>
           </a:xfrm>
           <a:prstGeom prst="rect">
@@ -10202,13 +10643,13 @@
       </p:sp>
       <p:sp>
         <p:nvSpPr>
-          <p:cNvPr id="26" name="Text 24"/>
-          <p:cNvSpPr/>
-          <p:nvPr/>
-        </p:nvSpPr>
-        <p:spPr>
-          <a:xfrm>
-            <a:off x="2999232" y="3364992"/>
+          <p:cNvPr id="29" name="Text 27"/>
+          <p:cNvSpPr/>
+          <p:nvPr/>
+        </p:nvSpPr>
+        <p:spPr>
+          <a:xfrm>
+            <a:off x="2313432" y="3364992"/>
             <a:ext cx="1645920" cy="475488"/>
           </a:xfrm>
           <a:prstGeom prst="rect">
@@ -10233,7 +10674,7 @@
                 <a:ea typeface="Trebuchet MS" pitchFamily="34" charset="-122"/>
                 <a:cs typeface="Trebuchet MS" pitchFamily="34" charset="-120"/>
               </a:rPr>
-              <a:t>pre</a:t>
+              <a:t>prec</a:t>
             </a:r>
             <a:endParaRPr lang="en-US" sz="1400" dirty="0"/>
           </a:p>
@@ -10241,14 +10682,14 @@
       </p:sp>
       <p:sp>
         <p:nvSpPr>
-          <p:cNvPr id="27" name="Text 25"/>
-          <p:cNvSpPr/>
-          <p:nvPr/>
-        </p:nvSpPr>
-        <p:spPr>
-          <a:xfrm>
-            <a:off x="4645152" y="3364992"/>
-            <a:ext cx="1097280" cy="475488"/>
+          <p:cNvPr id="30" name="Text 28"/>
+          <p:cNvSpPr/>
+          <p:nvPr/>
+        </p:nvSpPr>
+        <p:spPr>
+          <a:xfrm>
+            <a:off x="3959352" y="3364992"/>
+            <a:ext cx="411480" cy="475488"/>
           </a:xfrm>
           <a:prstGeom prst="rect">
             <a:avLst/>
@@ -10280,13 +10721,13 @@
       </p:sp>
       <p:sp>
         <p:nvSpPr>
-          <p:cNvPr id="28" name="Shape 26"/>
-          <p:cNvSpPr/>
-          <p:nvPr/>
-        </p:nvSpPr>
-        <p:spPr>
-          <a:xfrm>
-            <a:off x="5742432" y="3364992"/>
+          <p:cNvPr id="31" name="Shape 29"/>
+          <p:cNvSpPr/>
+          <p:nvPr/>
+        </p:nvSpPr>
+        <p:spPr>
+          <a:xfrm>
+            <a:off x="4370832" y="3364992"/>
             <a:ext cx="1645920" cy="475488"/>
           </a:xfrm>
           <a:prstGeom prst="rect">
@@ -10307,13 +10748,13 @@
       </p:sp>
       <p:sp>
         <p:nvSpPr>
-          <p:cNvPr id="29" name="Text 27"/>
-          <p:cNvSpPr/>
-          <p:nvPr/>
-        </p:nvSpPr>
-        <p:spPr>
-          <a:xfrm>
-            <a:off x="5742432" y="3364992"/>
+          <p:cNvPr id="32" name="Text 30"/>
+          <p:cNvSpPr/>
+          <p:nvPr/>
+        </p:nvSpPr>
+        <p:spPr>
+          <a:xfrm>
+            <a:off x="4370832" y="3364992"/>
             <a:ext cx="1645920" cy="475488"/>
           </a:xfrm>
           <a:prstGeom prst="rect">
@@ -10338,7 +10779,7 @@
                 <a:ea typeface="Trebuchet MS" pitchFamily="34" charset="-122"/>
                 <a:cs typeface="Trebuchet MS" pitchFamily="34" charset="-120"/>
               </a:rPr>
-              <a:t>pare</a:t>
+              <a:t>e</a:t>
             </a:r>
             <a:endParaRPr lang="en-US" sz="1400" dirty="0"/>
           </a:p>
@@ -10346,7 +10787,112 @@
       </p:sp>
       <p:sp>
         <p:nvSpPr>
-          <p:cNvPr id="30" name="Shape 28"/>
+          <p:cNvPr id="33" name="Text 31"/>
+          <p:cNvSpPr/>
+          <p:nvPr/>
+        </p:nvSpPr>
+        <p:spPr>
+          <a:xfrm>
+            <a:off x="6016752" y="3364992"/>
+            <a:ext cx="411480" cy="475488"/>
+          </a:xfrm>
+          <a:prstGeom prst="rect">
+            <a:avLst/>
+          </a:prstGeom>
+          <a:noFill/>
+          <a:ln/>
+        </p:spPr>
+        <p:txBody>
+          <a:bodyPr wrap="square" lIns="0" tIns="0" rIns="0" bIns="0" rtlCol="0" anchor="ctr"/>
+          <a:lstStyle/>
+          <a:p>
+            <a:pPr algn="ctr" indent="0" marL="0">
+              <a:buNone/>
+            </a:pPr>
+            <a:r>
+              <a:rPr lang="en-US" sz="1600" b="1" dirty="0">
+                <a:solidFill>
+                  <a:srgbClr val="0D9488"/>
+                </a:solidFill>
+                <a:latin typeface="Trebuchet MS" pitchFamily="34" charset="0"/>
+                <a:ea typeface="Trebuchet MS" pitchFamily="34" charset="-122"/>
+                <a:cs typeface="Trebuchet MS" pitchFamily="34" charset="-120"/>
+              </a:rPr>
+              <a:t>·</a:t>
+            </a:r>
+            <a:endParaRPr lang="en-US" sz="1600" dirty="0"/>
+          </a:p>
+        </p:txBody>
+      </p:sp>
+      <p:sp>
+        <p:nvSpPr>
+          <p:cNvPr id="34" name="Shape 32"/>
+          <p:cNvSpPr/>
+          <p:nvPr/>
+        </p:nvSpPr>
+        <p:spPr>
+          <a:xfrm>
+            <a:off x="6428232" y="3364992"/>
+            <a:ext cx="1645920" cy="475488"/>
+          </a:xfrm>
+          <a:prstGeom prst="rect">
+            <a:avLst>
+              <a:gd name="adj" fmla="val 9615"/>
+            </a:avLst>
+          </a:prstGeom>
+          <a:solidFill>
+            <a:srgbClr val="FFFFFF"/>
+          </a:solidFill>
+          <a:ln w="12700">
+            <a:solidFill>
+              <a:srgbClr val="0D9488"/>
+            </a:solidFill>
+            <a:prstDash val="solid"/>
+          </a:ln>
+        </p:spPr>
+      </p:sp>
+      <p:sp>
+        <p:nvSpPr>
+          <p:cNvPr id="35" name="Text 33"/>
+          <p:cNvSpPr/>
+          <p:nvPr/>
+        </p:nvSpPr>
+        <p:spPr>
+          <a:xfrm>
+            <a:off x="6428232" y="3364992"/>
+            <a:ext cx="1645920" cy="475488"/>
+          </a:xfrm>
+          <a:prstGeom prst="rect">
+            <a:avLst/>
+          </a:prstGeom>
+          <a:noFill/>
+          <a:ln/>
+        </p:spPr>
+        <p:txBody>
+          <a:bodyPr wrap="square" lIns="0" tIns="0" rIns="0" bIns="0" rtlCol="0" anchor="ctr"/>
+          <a:lstStyle/>
+          <a:p>
+            <a:pPr algn="ctr" indent="0" marL="0">
+              <a:buNone/>
+            </a:pPr>
+            <a:r>
+              <a:rPr lang="en-US" sz="1400" b="1" dirty="0">
+                <a:solidFill>
+                  <a:srgbClr val="0D9488"/>
+                </a:solidFill>
+                <a:latin typeface="Trebuchet MS" pitchFamily="34" charset="0"/>
+                <a:ea typeface="Trebuchet MS" pitchFamily="34" charset="-122"/>
+                <a:cs typeface="Trebuchet MS" pitchFamily="34" charset="-120"/>
+              </a:rPr>
+              <a:t>dent</a:t>
+            </a:r>
+            <a:endParaRPr lang="en-US" sz="1400" dirty="0"/>
+          </a:p>
+        </p:txBody>
+      </p:sp>
+      <p:sp>
+        <p:nvSpPr>
+          <p:cNvPr id="36" name="Shape 34"/>
           <p:cNvSpPr/>
           <p:nvPr/>
         </p:nvSpPr>
@@ -10373,7 +10919,7 @@
       </p:sp>
       <p:sp>
         <p:nvSpPr>
-          <p:cNvPr id="31" name="Text 29"/>
+          <p:cNvPr id="37" name="Text 35"/>
           <p:cNvSpPr/>
           <p:nvPr/>
         </p:nvSpPr>
@@ -10412,18 +10958,18 @@
       </p:sp>
       <p:sp>
         <p:nvSpPr>
-          <p:cNvPr id="32" name="Shape 30"/>
+          <p:cNvPr id="38" name="Shape 36"/>
           <p:cNvSpPr/>
           <p:nvPr/>
         </p:nvSpPr>
         <p:spPr>
           <a:xfrm>
             <a:off x="1874520" y="4096512"/>
-            <a:ext cx="6903720" cy="804672"/>
+            <a:ext cx="6903720" cy="658368"/>
           </a:xfrm>
           <a:prstGeom prst="rect">
             <a:avLst>
-              <a:gd name="adj" fmla="val 6818"/>
+              <a:gd name="adj" fmla="val 8333"/>
             </a:avLst>
           </a:prstGeom>
           <a:solidFill>
@@ -10439,18 +10985,18 @@
       </p:sp>
       <p:sp>
         <p:nvSpPr>
-          <p:cNvPr id="33" name="Shape 31"/>
-          <p:cNvSpPr/>
-          <p:nvPr/>
-        </p:nvSpPr>
-        <p:spPr>
-          <a:xfrm>
-            <a:off x="2670048" y="4169664"/>
-            <a:ext cx="685800" cy="384048"/>
+          <p:cNvPr id="39" name="Shape 37"/>
+          <p:cNvSpPr/>
+          <p:nvPr/>
+        </p:nvSpPr>
+        <p:spPr>
+          <a:xfrm>
+            <a:off x="1951330" y="4169664"/>
+            <a:ext cx="676656" cy="475488"/>
           </a:xfrm>
           <a:prstGeom prst="rect">
             <a:avLst>
-              <a:gd name="adj" fmla="val 9524"/>
+              <a:gd name="adj" fmla="val 7692"/>
             </a:avLst>
           </a:prstGeom>
           <a:solidFill>
@@ -10466,14 +11012,14 @@
       </p:sp>
       <p:sp>
         <p:nvSpPr>
-          <p:cNvPr id="34" name="Text 32"/>
-          <p:cNvSpPr/>
-          <p:nvPr/>
-        </p:nvSpPr>
-        <p:spPr>
-          <a:xfrm>
-            <a:off x="2670048" y="4169664"/>
-            <a:ext cx="685800" cy="384048"/>
+          <p:cNvPr id="40" name="Text 38"/>
+          <p:cNvSpPr/>
+          <p:nvPr/>
+        </p:nvSpPr>
+        <p:spPr>
+          <a:xfrm>
+            <a:off x="1951330" y="4169664"/>
+            <a:ext cx="676656" cy="475488"/>
           </a:xfrm>
           <a:prstGeom prst="rect">
             <a:avLst/>
@@ -10497,7 +11043,7 @@
                 <a:ea typeface="Trebuchet MS" pitchFamily="34" charset="-122"/>
                 <a:cs typeface="Trebuchet MS" pitchFamily="34" charset="-120"/>
               </a:rPr>
-              <a:t>pr</a:t>
+              <a:t>p</a:t>
             </a:r>
             <a:endParaRPr lang="en-US" sz="900" dirty="0"/>
           </a:p>
@@ -10505,18 +11051,18 @@
       </p:sp>
       <p:sp>
         <p:nvSpPr>
-          <p:cNvPr id="35" name="Shape 33"/>
-          <p:cNvSpPr/>
-          <p:nvPr/>
-        </p:nvSpPr>
-        <p:spPr>
-          <a:xfrm>
-            <a:off x="4123944" y="4169664"/>
-            <a:ext cx="685800" cy="384048"/>
+          <p:cNvPr id="41" name="Shape 39"/>
+          <p:cNvSpPr/>
+          <p:nvPr/>
+        </p:nvSpPr>
+        <p:spPr>
+          <a:xfrm>
+            <a:off x="2677363" y="4169664"/>
+            <a:ext cx="676656" cy="475488"/>
           </a:xfrm>
           <a:prstGeom prst="rect">
             <a:avLst>
-              <a:gd name="adj" fmla="val 9524"/>
+              <a:gd name="adj" fmla="val 7692"/>
             </a:avLst>
           </a:prstGeom>
           <a:solidFill>
@@ -10532,14 +11078,14 @@
       </p:sp>
       <p:sp>
         <p:nvSpPr>
-          <p:cNvPr id="36" name="Text 34"/>
-          <p:cNvSpPr/>
-          <p:nvPr/>
-        </p:nvSpPr>
-        <p:spPr>
-          <a:xfrm>
-            <a:off x="4123944" y="4169664"/>
-            <a:ext cx="685800" cy="384048"/>
+          <p:cNvPr id="42" name="Text 40"/>
+          <p:cNvSpPr/>
+          <p:nvPr/>
+        </p:nvSpPr>
+        <p:spPr>
+          <a:xfrm>
+            <a:off x="2677363" y="4169664"/>
+            <a:ext cx="676656" cy="475488"/>
           </a:xfrm>
           <a:prstGeom prst="rect">
             <a:avLst/>
@@ -10563,7 +11109,7 @@
                 <a:ea typeface="Trebuchet MS" pitchFamily="34" charset="-122"/>
                 <a:cs typeface="Trebuchet MS" pitchFamily="34" charset="-120"/>
               </a:rPr>
-              <a:t>e</a:t>
+              <a:t>r</a:t>
             </a:r>
             <a:endParaRPr lang="en-US" sz="900" dirty="0"/>
           </a:p>
@@ -10571,18 +11117,18 @@
       </p:sp>
       <p:sp>
         <p:nvSpPr>
-          <p:cNvPr id="37" name="Shape 35"/>
-          <p:cNvSpPr/>
-          <p:nvPr/>
-        </p:nvSpPr>
-        <p:spPr>
-          <a:xfrm>
-            <a:off x="5577840" y="4169664"/>
-            <a:ext cx="685800" cy="384048"/>
+          <p:cNvPr id="43" name="Shape 41"/>
+          <p:cNvSpPr/>
+          <p:nvPr/>
+        </p:nvSpPr>
+        <p:spPr>
+          <a:xfrm>
+            <a:off x="3403397" y="4169664"/>
+            <a:ext cx="676656" cy="475488"/>
           </a:xfrm>
           <a:prstGeom prst="rect">
             <a:avLst>
-              <a:gd name="adj" fmla="val 9524"/>
+              <a:gd name="adj" fmla="val 7692"/>
             </a:avLst>
           </a:prstGeom>
           <a:solidFill>
@@ -10598,14 +11144,14 @@
       </p:sp>
       <p:sp>
         <p:nvSpPr>
-          <p:cNvPr id="38" name="Text 36"/>
-          <p:cNvSpPr/>
-          <p:nvPr/>
-        </p:nvSpPr>
-        <p:spPr>
-          <a:xfrm>
-            <a:off x="5577840" y="4169664"/>
-            <a:ext cx="685800" cy="384048"/>
+          <p:cNvPr id="44" name="Text 42"/>
+          <p:cNvSpPr/>
+          <p:nvPr/>
+        </p:nvSpPr>
+        <p:spPr>
+          <a:xfrm>
+            <a:off x="3403397" y="4169664"/>
+            <a:ext cx="676656" cy="475488"/>
           </a:xfrm>
           <a:prstGeom prst="rect">
             <a:avLst/>
@@ -10629,7 +11175,7 @@
                 <a:ea typeface="Trebuchet MS" pitchFamily="34" charset="-122"/>
                 <a:cs typeface="Trebuchet MS" pitchFamily="34" charset="-120"/>
               </a:rPr>
-              <a:t>p</a:t>
+              <a:t>e</a:t>
             </a:r>
             <a:endParaRPr lang="en-US" sz="900" dirty="0"/>
           </a:p>
@@ -10637,18 +11183,18 @@
       </p:sp>
       <p:sp>
         <p:nvSpPr>
-          <p:cNvPr id="39" name="Shape 37"/>
-          <p:cNvSpPr/>
-          <p:nvPr/>
-        </p:nvSpPr>
-        <p:spPr>
-          <a:xfrm>
-            <a:off x="7031736" y="4169664"/>
-            <a:ext cx="685800" cy="384048"/>
+          <p:cNvPr id="45" name="Shape 43"/>
+          <p:cNvSpPr/>
+          <p:nvPr/>
+        </p:nvSpPr>
+        <p:spPr>
+          <a:xfrm>
+            <a:off x="4129430" y="4169664"/>
+            <a:ext cx="676656" cy="475488"/>
           </a:xfrm>
           <a:prstGeom prst="rect">
             <a:avLst>
-              <a:gd name="adj" fmla="val 9524"/>
+              <a:gd name="adj" fmla="val 7692"/>
             </a:avLst>
           </a:prstGeom>
           <a:solidFill>
@@ -10664,14 +11210,14 @@
       </p:sp>
       <p:sp>
         <p:nvSpPr>
-          <p:cNvPr id="40" name="Text 38"/>
-          <p:cNvSpPr/>
-          <p:nvPr/>
-        </p:nvSpPr>
-        <p:spPr>
-          <a:xfrm>
-            <a:off x="7031736" y="4169664"/>
-            <a:ext cx="685800" cy="384048"/>
+          <p:cNvPr id="46" name="Text 44"/>
+          <p:cNvSpPr/>
+          <p:nvPr/>
+        </p:nvSpPr>
+        <p:spPr>
+          <a:xfrm>
+            <a:off x="4129430" y="4169664"/>
+            <a:ext cx="676656" cy="475488"/>
           </a:xfrm>
           <a:prstGeom prst="rect">
             <a:avLst/>
@@ -10695,7 +11241,7 @@
                 <a:ea typeface="Trebuchet MS" pitchFamily="34" charset="-122"/>
                 <a:cs typeface="Trebuchet MS" pitchFamily="34" charset="-120"/>
               </a:rPr>
-              <a:t>are</a:t>
+              <a:t>c</a:t>
             </a:r>
             <a:endParaRPr lang="en-US" sz="900" dirty="0"/>
           </a:p>
@@ -10703,40 +11249,331 @@
       </p:sp>
       <p:sp>
         <p:nvSpPr>
-          <p:cNvPr id="41" name="Text 39"/>
-          <p:cNvSpPr/>
-          <p:nvPr/>
-        </p:nvSpPr>
-        <p:spPr>
-          <a:xfrm>
-            <a:off x="7031736" y="4572000"/>
-            <a:ext cx="685800" cy="219456"/>
-          </a:xfrm>
-          <a:prstGeom prst="rect">
-            <a:avLst/>
-          </a:prstGeom>
-          <a:noFill/>
-          <a:ln/>
-        </p:spPr>
-        <p:txBody>
-          <a:bodyPr wrap="square" lIns="0" tIns="0" rIns="0" bIns="0" rtlCol="0" anchor="t"/>
-          <a:lstStyle/>
-          <a:p>
-            <a:pPr algn="ctr" indent="0" marL="0">
-              <a:buNone/>
-            </a:pPr>
-            <a:r>
-              <a:rPr lang="en-US" sz="750" i="1" dirty="0">
-                <a:solidFill>
-                  <a:srgbClr val="94A3B8"/>
-                </a:solidFill>
-                <a:latin typeface="Calibri" pitchFamily="34" charset="0"/>
-                <a:ea typeface="Calibri" pitchFamily="34" charset="-122"/>
-                <a:cs typeface="Calibri" pitchFamily="34" charset="-120"/>
-              </a:rPr>
-              <a:t>/air/</a:t>
-            </a:r>
-            <a:endParaRPr lang="en-US" sz="750" dirty="0"/>
+          <p:cNvPr id="47" name="Shape 45"/>
+          <p:cNvSpPr/>
+          <p:nvPr/>
+        </p:nvSpPr>
+        <p:spPr>
+          <a:xfrm>
+            <a:off x="4855464" y="4169664"/>
+            <a:ext cx="676656" cy="475488"/>
+          </a:xfrm>
+          <a:prstGeom prst="rect">
+            <a:avLst>
+              <a:gd name="adj" fmla="val 7692"/>
+            </a:avLst>
+          </a:prstGeom>
+          <a:solidFill>
+            <a:srgbClr val="FFFFFF"/>
+          </a:solidFill>
+          <a:ln w="12700">
+            <a:solidFill>
+              <a:srgbClr val="DB2777"/>
+            </a:solidFill>
+            <a:prstDash val="solid"/>
+          </a:ln>
+        </p:spPr>
+      </p:sp>
+      <p:sp>
+        <p:nvSpPr>
+          <p:cNvPr id="48" name="Text 46"/>
+          <p:cNvSpPr/>
+          <p:nvPr/>
+        </p:nvSpPr>
+        <p:spPr>
+          <a:xfrm>
+            <a:off x="4855464" y="4169664"/>
+            <a:ext cx="676656" cy="475488"/>
+          </a:xfrm>
+          <a:prstGeom prst="rect">
+            <a:avLst/>
+          </a:prstGeom>
+          <a:noFill/>
+          <a:ln/>
+        </p:spPr>
+        <p:txBody>
+          <a:bodyPr wrap="square" lIns="0" tIns="0" rIns="0" bIns="0" rtlCol="0" anchor="ctr"/>
+          <a:lstStyle/>
+          <a:p>
+            <a:pPr algn="ctr" indent="0" marL="0">
+              <a:buNone/>
+            </a:pPr>
+            <a:r>
+              <a:rPr lang="en-US" sz="900" b="1" dirty="0">
+                <a:solidFill>
+                  <a:srgbClr val="9D174D"/>
+                </a:solidFill>
+                <a:latin typeface="Trebuchet MS" pitchFamily="34" charset="0"/>
+                <a:ea typeface="Trebuchet MS" pitchFamily="34" charset="-122"/>
+                <a:cs typeface="Trebuchet MS" pitchFamily="34" charset="-120"/>
+              </a:rPr>
+              <a:t>e</a:t>
+            </a:r>
+            <a:endParaRPr lang="en-US" sz="900" dirty="0"/>
+          </a:p>
+        </p:txBody>
+      </p:sp>
+      <p:sp>
+        <p:nvSpPr>
+          <p:cNvPr id="49" name="Shape 47"/>
+          <p:cNvSpPr/>
+          <p:nvPr/>
+        </p:nvSpPr>
+        <p:spPr>
+          <a:xfrm>
+            <a:off x="5581498" y="4169664"/>
+            <a:ext cx="676656" cy="475488"/>
+          </a:xfrm>
+          <a:prstGeom prst="rect">
+            <a:avLst>
+              <a:gd name="adj" fmla="val 7692"/>
+            </a:avLst>
+          </a:prstGeom>
+          <a:solidFill>
+            <a:srgbClr val="FFFFFF"/>
+          </a:solidFill>
+          <a:ln w="12700">
+            <a:solidFill>
+              <a:srgbClr val="DB2777"/>
+            </a:solidFill>
+            <a:prstDash val="solid"/>
+          </a:ln>
+        </p:spPr>
+      </p:sp>
+      <p:sp>
+        <p:nvSpPr>
+          <p:cNvPr id="50" name="Text 48"/>
+          <p:cNvSpPr/>
+          <p:nvPr/>
+        </p:nvSpPr>
+        <p:spPr>
+          <a:xfrm>
+            <a:off x="5581498" y="4169664"/>
+            <a:ext cx="676656" cy="475488"/>
+          </a:xfrm>
+          <a:prstGeom prst="rect">
+            <a:avLst/>
+          </a:prstGeom>
+          <a:noFill/>
+          <a:ln/>
+        </p:spPr>
+        <p:txBody>
+          <a:bodyPr wrap="square" lIns="0" tIns="0" rIns="0" bIns="0" rtlCol="0" anchor="ctr"/>
+          <a:lstStyle/>
+          <a:p>
+            <a:pPr algn="ctr" indent="0" marL="0">
+              <a:buNone/>
+            </a:pPr>
+            <a:r>
+              <a:rPr lang="en-US" sz="900" b="1" dirty="0">
+                <a:solidFill>
+                  <a:srgbClr val="9D174D"/>
+                </a:solidFill>
+                <a:latin typeface="Trebuchet MS" pitchFamily="34" charset="0"/>
+                <a:ea typeface="Trebuchet MS" pitchFamily="34" charset="-122"/>
+                <a:cs typeface="Trebuchet MS" pitchFamily="34" charset="-120"/>
+              </a:rPr>
+              <a:t>d</a:t>
+            </a:r>
+            <a:endParaRPr lang="en-US" sz="900" dirty="0"/>
+          </a:p>
+        </p:txBody>
+      </p:sp>
+      <p:sp>
+        <p:nvSpPr>
+          <p:cNvPr id="51" name="Shape 49"/>
+          <p:cNvSpPr/>
+          <p:nvPr/>
+        </p:nvSpPr>
+        <p:spPr>
+          <a:xfrm>
+            <a:off x="6307531" y="4169664"/>
+            <a:ext cx="676656" cy="475488"/>
+          </a:xfrm>
+          <a:prstGeom prst="rect">
+            <a:avLst>
+              <a:gd name="adj" fmla="val 7692"/>
+            </a:avLst>
+          </a:prstGeom>
+          <a:solidFill>
+            <a:srgbClr val="FFFFFF"/>
+          </a:solidFill>
+          <a:ln w="12700">
+            <a:solidFill>
+              <a:srgbClr val="DB2777"/>
+            </a:solidFill>
+            <a:prstDash val="solid"/>
+          </a:ln>
+        </p:spPr>
+      </p:sp>
+      <p:sp>
+        <p:nvSpPr>
+          <p:cNvPr id="52" name="Text 50"/>
+          <p:cNvSpPr/>
+          <p:nvPr/>
+        </p:nvSpPr>
+        <p:spPr>
+          <a:xfrm>
+            <a:off x="6307531" y="4169664"/>
+            <a:ext cx="676656" cy="475488"/>
+          </a:xfrm>
+          <a:prstGeom prst="rect">
+            <a:avLst/>
+          </a:prstGeom>
+          <a:noFill/>
+          <a:ln/>
+        </p:spPr>
+        <p:txBody>
+          <a:bodyPr wrap="square" lIns="0" tIns="0" rIns="0" bIns="0" rtlCol="0" anchor="ctr"/>
+          <a:lstStyle/>
+          <a:p>
+            <a:pPr algn="ctr" indent="0" marL="0">
+              <a:buNone/>
+            </a:pPr>
+            <a:r>
+              <a:rPr lang="en-US" sz="900" b="1" dirty="0">
+                <a:solidFill>
+                  <a:srgbClr val="9D174D"/>
+                </a:solidFill>
+                <a:latin typeface="Trebuchet MS" pitchFamily="34" charset="0"/>
+                <a:ea typeface="Trebuchet MS" pitchFamily="34" charset="-122"/>
+                <a:cs typeface="Trebuchet MS" pitchFamily="34" charset="-120"/>
+              </a:rPr>
+              <a:t>e</a:t>
+            </a:r>
+            <a:endParaRPr lang="en-US" sz="900" dirty="0"/>
+          </a:p>
+        </p:txBody>
+      </p:sp>
+      <p:sp>
+        <p:nvSpPr>
+          <p:cNvPr id="53" name="Shape 51"/>
+          <p:cNvSpPr/>
+          <p:nvPr/>
+        </p:nvSpPr>
+        <p:spPr>
+          <a:xfrm>
+            <a:off x="7033565" y="4169664"/>
+            <a:ext cx="676656" cy="475488"/>
+          </a:xfrm>
+          <a:prstGeom prst="rect">
+            <a:avLst>
+              <a:gd name="adj" fmla="val 7692"/>
+            </a:avLst>
+          </a:prstGeom>
+          <a:solidFill>
+            <a:srgbClr val="FFFFFF"/>
+          </a:solidFill>
+          <a:ln w="12700">
+            <a:solidFill>
+              <a:srgbClr val="DB2777"/>
+            </a:solidFill>
+            <a:prstDash val="solid"/>
+          </a:ln>
+        </p:spPr>
+      </p:sp>
+      <p:sp>
+        <p:nvSpPr>
+          <p:cNvPr id="54" name="Text 52"/>
+          <p:cNvSpPr/>
+          <p:nvPr/>
+        </p:nvSpPr>
+        <p:spPr>
+          <a:xfrm>
+            <a:off x="7033565" y="4169664"/>
+            <a:ext cx="676656" cy="475488"/>
+          </a:xfrm>
+          <a:prstGeom prst="rect">
+            <a:avLst/>
+          </a:prstGeom>
+          <a:noFill/>
+          <a:ln/>
+        </p:spPr>
+        <p:txBody>
+          <a:bodyPr wrap="square" lIns="0" tIns="0" rIns="0" bIns="0" rtlCol="0" anchor="ctr"/>
+          <a:lstStyle/>
+          <a:p>
+            <a:pPr algn="ctr" indent="0" marL="0">
+              <a:buNone/>
+            </a:pPr>
+            <a:r>
+              <a:rPr lang="en-US" sz="900" b="1" dirty="0">
+                <a:solidFill>
+                  <a:srgbClr val="9D174D"/>
+                </a:solidFill>
+                <a:latin typeface="Trebuchet MS" pitchFamily="34" charset="0"/>
+                <a:ea typeface="Trebuchet MS" pitchFamily="34" charset="-122"/>
+                <a:cs typeface="Trebuchet MS" pitchFamily="34" charset="-120"/>
+              </a:rPr>
+              <a:t>n</a:t>
+            </a:r>
+            <a:endParaRPr lang="en-US" sz="900" dirty="0"/>
+          </a:p>
+        </p:txBody>
+      </p:sp>
+      <p:sp>
+        <p:nvSpPr>
+          <p:cNvPr id="55" name="Shape 53"/>
+          <p:cNvSpPr/>
+          <p:nvPr/>
+        </p:nvSpPr>
+        <p:spPr>
+          <a:xfrm>
+            <a:off x="7759598" y="4169664"/>
+            <a:ext cx="676656" cy="475488"/>
+          </a:xfrm>
+          <a:prstGeom prst="rect">
+            <a:avLst>
+              <a:gd name="adj" fmla="val 7692"/>
+            </a:avLst>
+          </a:prstGeom>
+          <a:solidFill>
+            <a:srgbClr val="FFFFFF"/>
+          </a:solidFill>
+          <a:ln w="12700">
+            <a:solidFill>
+              <a:srgbClr val="DB2777"/>
+            </a:solidFill>
+            <a:prstDash val="solid"/>
+          </a:ln>
+        </p:spPr>
+      </p:sp>
+      <p:sp>
+        <p:nvSpPr>
+          <p:cNvPr id="56" name="Text 54"/>
+          <p:cNvSpPr/>
+          <p:nvPr/>
+        </p:nvSpPr>
+        <p:spPr>
+          <a:xfrm>
+            <a:off x="7759598" y="4169664"/>
+            <a:ext cx="676656" cy="475488"/>
+          </a:xfrm>
+          <a:prstGeom prst="rect">
+            <a:avLst/>
+          </a:prstGeom>
+          <a:noFill/>
+          <a:ln/>
+        </p:spPr>
+        <p:txBody>
+          <a:bodyPr wrap="square" lIns="0" tIns="0" rIns="0" bIns="0" rtlCol="0" anchor="ctr"/>
+          <a:lstStyle/>
+          <a:p>
+            <a:pPr algn="ctr" indent="0" marL="0">
+              <a:buNone/>
+            </a:pPr>
+            <a:r>
+              <a:rPr lang="en-US" sz="900" b="1" dirty="0">
+                <a:solidFill>
+                  <a:srgbClr val="9D174D"/>
+                </a:solidFill>
+                <a:latin typeface="Trebuchet MS" pitchFamily="34" charset="0"/>
+                <a:ea typeface="Trebuchet MS" pitchFamily="34" charset="-122"/>
+                <a:cs typeface="Trebuchet MS" pitchFamily="34" charset="-120"/>
+              </a:rPr>
+              <a:t>t</a:t>
+            </a:r>
+            <a:endParaRPr lang="en-US" sz="900" dirty="0"/>
           </a:p>
         </p:txBody>
       </p:sp>
@@ -11026,7 +11863,7 @@
                 <a:ea typeface="Calibri" pitchFamily="34" charset="-122"/>
                 <a:cs typeface="Calibri" pitchFamily="34" charset="-120"/>
               </a:rPr>
-              <a:t>Word Labs  •  wordlabs.app  •  Prefix: 'pre-' = before, in advance</a:t>
+              <a:t>Word Labs  •  wordlabs.app  •  Prefix: 'pre-' = before</a:t>
             </a:r>
             <a:endParaRPr lang="en-US" sz="800" dirty="0"/>
           </a:p>
@@ -11165,7 +12002,7 @@
                 <a:ea typeface="Trebuchet MS" pitchFamily="34" charset="-122"/>
                 <a:cs typeface="Trebuchet MS" pitchFamily="34" charset="-120"/>
               </a:rPr>
-              <a:t>preview</a:t>
+              <a:t>preceding</a:t>
             </a:r>
             <a:endParaRPr lang="en-US" sz="2800" dirty="0"/>
           </a:p>
@@ -11853,7 +12690,7 @@
                 <a:ea typeface="Calibri" pitchFamily="34" charset="-122"/>
                 <a:cs typeface="Calibri" pitchFamily="34" charset="-120"/>
               </a:rPr>
-              <a:t>Word Labs  •  wordlabs.app  •  Prefix: 'pre-' = before, in advance</a:t>
+              <a:t>Word Labs  •  wordlabs.app  •  Prefix: 'pre-' = before</a:t>
             </a:r>
             <a:endParaRPr lang="en-US" sz="800" dirty="0"/>
           </a:p>
@@ -11992,7 +12829,7 @@
                 <a:ea typeface="Trebuchet MS" pitchFamily="34" charset="-122"/>
                 <a:cs typeface="Trebuchet MS" pitchFamily="34" charset="-120"/>
               </a:rPr>
-              <a:t>preview</a:t>
+              <a:t>preceding</a:t>
             </a:r>
             <a:endParaRPr lang="en-US" sz="2800" dirty="0"/>
           </a:p>
@@ -12072,7 +12909,7 @@
         </p:nvSpPr>
         <p:spPr>
           <a:xfrm>
-            <a:off x="2938272" y="2258568"/>
+            <a:off x="2221992" y="2258568"/>
             <a:ext cx="1828800" cy="292608"/>
           </a:xfrm>
           <a:prstGeom prst="rect">
@@ -12106,7 +12943,7 @@
         </p:nvSpPr>
         <p:spPr>
           <a:xfrm>
-            <a:off x="2938272" y="2258568"/>
+            <a:off x="2221992" y="2258568"/>
             <a:ext cx="1828800" cy="292608"/>
           </a:xfrm>
           <a:prstGeom prst="rect">
@@ -12145,7 +12982,7 @@
         </p:nvSpPr>
         <p:spPr>
           <a:xfrm>
-            <a:off x="2938272" y="2569464"/>
+            <a:off x="2221992" y="2569464"/>
             <a:ext cx="1828800" cy="201168"/>
           </a:xfrm>
           <a:prstGeom prst="rect">
@@ -12184,7 +13021,7 @@
         </p:nvSpPr>
         <p:spPr>
           <a:xfrm>
-            <a:off x="5803392" y="2258568"/>
+            <a:off x="4370832" y="2258568"/>
             <a:ext cx="1828800" cy="292608"/>
           </a:xfrm>
           <a:prstGeom prst="rect">
@@ -12218,7 +13055,7 @@
         </p:nvSpPr>
         <p:spPr>
           <a:xfrm>
-            <a:off x="5803392" y="2258568"/>
+            <a:off x="4370832" y="2258568"/>
             <a:ext cx="1828800" cy="292608"/>
           </a:xfrm>
           <a:prstGeom prst="rect">
@@ -12243,7 +13080,7 @@
                 <a:ea typeface="Trebuchet MS" pitchFamily="34" charset="-122"/>
                 <a:cs typeface="Trebuchet MS" pitchFamily="34" charset="-120"/>
               </a:rPr>
-              <a:t>view</a:t>
+              <a:t>cede</a:t>
             </a:r>
             <a:endParaRPr lang="en-US" sz="1300" dirty="0"/>
           </a:p>
@@ -12257,7 +13094,7 @@
         </p:nvSpPr>
         <p:spPr>
           <a:xfrm>
-            <a:off x="5803392" y="2569464"/>
+            <a:off x="4370832" y="2569464"/>
             <a:ext cx="1828800" cy="201168"/>
           </a:xfrm>
           <a:prstGeom prst="rect">
@@ -12282,7 +13119,7 @@
                 <a:ea typeface="Calibri" pitchFamily="34" charset="-122"/>
                 <a:cs typeface="Calibri" pitchFamily="34" charset="-120"/>
               </a:rPr>
-              <a:t>to look at</a:t>
+              <a:t>go; yield</a:t>
             </a:r>
             <a:endParaRPr lang="en-US" sz="850" dirty="0"/>
           </a:p>
@@ -12291,6 +13128,118 @@
       <p:sp>
         <p:nvSpPr>
           <p:cNvPr id="22" name="Shape 20"/>
+          <p:cNvSpPr/>
+          <p:nvPr/>
+        </p:nvSpPr>
+        <p:spPr>
+          <a:xfrm>
+            <a:off x="6519672" y="2258568"/>
+            <a:ext cx="1828800" cy="292608"/>
+          </a:xfrm>
+          <a:prstGeom prst="rect">
+            <a:avLst>
+              <a:gd name="adj" fmla="val 25000"/>
+            </a:avLst>
+          </a:prstGeom>
+          <a:solidFill>
+            <a:srgbClr val="FCE7F3"/>
+          </a:solidFill>
+          <a:ln w="19050">
+            <a:solidFill>
+              <a:srgbClr val="DB2777"/>
+            </a:solidFill>
+            <a:prstDash val="solid"/>
+          </a:ln>
+          <a:effectLst>
+            <a:outerShdw sx="100000" sy="100000" kx="0" ky="0" algn="bl" rotWithShape="0" blurRad="101600" dist="38100" dir="8100000">
+              <a:srgbClr val="000000">
+                <a:alpha val="12000"/>
+              </a:srgbClr>
+            </a:outerShdw>
+          </a:effectLst>
+        </p:spPr>
+      </p:sp>
+      <p:sp>
+        <p:nvSpPr>
+          <p:cNvPr id="23" name="Text 21"/>
+          <p:cNvSpPr/>
+          <p:nvPr/>
+        </p:nvSpPr>
+        <p:spPr>
+          <a:xfrm>
+            <a:off x="6519672" y="2258568"/>
+            <a:ext cx="1828800" cy="292608"/>
+          </a:xfrm>
+          <a:prstGeom prst="rect">
+            <a:avLst/>
+          </a:prstGeom>
+          <a:noFill/>
+          <a:ln/>
+        </p:spPr>
+        <p:txBody>
+          <a:bodyPr wrap="square" lIns="0" tIns="0" rIns="0" bIns="0" rtlCol="0" anchor="ctr"/>
+          <a:lstStyle/>
+          <a:p>
+            <a:pPr algn="ctr" indent="0" marL="0">
+              <a:buNone/>
+            </a:pPr>
+            <a:r>
+              <a:rPr lang="en-US" sz="1300" b="1" dirty="0">
+                <a:solidFill>
+                  <a:srgbClr val="9D174D"/>
+                </a:solidFill>
+                <a:latin typeface="Trebuchet MS" pitchFamily="34" charset="0"/>
+                <a:ea typeface="Trebuchet MS" pitchFamily="34" charset="-122"/>
+                <a:cs typeface="Trebuchet MS" pitchFamily="34" charset="-120"/>
+              </a:rPr>
+              <a:t>ing</a:t>
+            </a:r>
+            <a:endParaRPr lang="en-US" sz="1300" dirty="0"/>
+          </a:p>
+        </p:txBody>
+      </p:sp>
+      <p:sp>
+        <p:nvSpPr>
+          <p:cNvPr id="24" name="Text 22"/>
+          <p:cNvSpPr/>
+          <p:nvPr/>
+        </p:nvSpPr>
+        <p:spPr>
+          <a:xfrm>
+            <a:off x="6519672" y="2569464"/>
+            <a:ext cx="1828800" cy="201168"/>
+          </a:xfrm>
+          <a:prstGeom prst="rect">
+            <a:avLst/>
+          </a:prstGeom>
+          <a:noFill/>
+          <a:ln/>
+        </p:spPr>
+        <p:txBody>
+          <a:bodyPr wrap="square" lIns="0" tIns="0" rIns="0" bIns="0" rtlCol="0" anchor="t"/>
+          <a:lstStyle/>
+          <a:p>
+            <a:pPr algn="ctr" indent="0" marL="0">
+              <a:buNone/>
+            </a:pPr>
+            <a:r>
+              <a:rPr lang="en-US" sz="850" dirty="0">
+                <a:solidFill>
+                  <a:srgbClr val="475569"/>
+                </a:solidFill>
+                <a:latin typeface="Calibri" pitchFamily="34" charset="0"/>
+                <a:ea typeface="Calibri" pitchFamily="34" charset="-122"/>
+                <a:cs typeface="Calibri" pitchFamily="34" charset="-120"/>
+              </a:rPr>
+              <a:t>happening now</a:t>
+            </a:r>
+            <a:endParaRPr lang="en-US" sz="850" dirty="0"/>
+          </a:p>
+        </p:txBody>
+      </p:sp>
+      <p:sp>
+        <p:nvSpPr>
+          <p:cNvPr id="25" name="Shape 23"/>
           <p:cNvSpPr/>
           <p:nvPr/>
         </p:nvSpPr>
@@ -12317,7 +13266,7 @@
       </p:sp>
       <p:sp>
         <p:nvSpPr>
-          <p:cNvPr id="23" name="Text 21"/>
+          <p:cNvPr id="26" name="Text 24"/>
           <p:cNvSpPr/>
           <p:nvPr/>
         </p:nvSpPr>
@@ -12356,7 +13305,7 @@
       </p:sp>
       <p:sp>
         <p:nvSpPr>
-          <p:cNvPr id="24" name="Shape 22"/>
+          <p:cNvPr id="27" name="Shape 25"/>
           <p:cNvSpPr/>
           <p:nvPr/>
         </p:nvSpPr>
@@ -12383,7 +13332,7 @@
       </p:sp>
       <p:sp>
         <p:nvSpPr>
-          <p:cNvPr id="25" name="Text 23"/>
+          <p:cNvPr id="28" name="Text 26"/>
           <p:cNvSpPr/>
           <p:nvPr/>
         </p:nvSpPr>
@@ -12422,7 +13371,7 @@
       </p:sp>
       <p:sp>
         <p:nvSpPr>
-          <p:cNvPr id="26" name="Shape 24"/>
+          <p:cNvPr id="29" name="Shape 27"/>
           <p:cNvSpPr/>
           <p:nvPr/>
         </p:nvSpPr>
@@ -12449,7 +13398,7 @@
       </p:sp>
       <p:sp>
         <p:nvSpPr>
-          <p:cNvPr id="27" name="Text 25"/>
+          <p:cNvPr id="30" name="Text 28"/>
           <p:cNvSpPr/>
           <p:nvPr/>
         </p:nvSpPr>
@@ -12488,7 +13437,7 @@
       </p:sp>
       <p:sp>
         <p:nvSpPr>
-          <p:cNvPr id="28" name="Shape 26"/>
+          <p:cNvPr id="31" name="Shape 29"/>
           <p:cNvSpPr/>
           <p:nvPr/>
         </p:nvSpPr>
@@ -12515,7 +13464,7 @@
       </p:sp>
       <p:sp>
         <p:nvSpPr>
-          <p:cNvPr id="29" name="Text 27"/>
+          <p:cNvPr id="32" name="Text 30"/>
           <p:cNvSpPr/>
           <p:nvPr/>
         </p:nvSpPr>
@@ -12838,7 +13787,7 @@
                 <a:ea typeface="Calibri" pitchFamily="34" charset="-122"/>
                 <a:cs typeface="Calibri" pitchFamily="34" charset="-120"/>
               </a:rPr>
-              <a:t>Word Labs  •  wordlabs.app  •  Prefix: 'pre-' = before, in advance</a:t>
+              <a:t>Word Labs  •  wordlabs.app  •  Prefix: 'pre-' = before</a:t>
             </a:r>
             <a:endParaRPr lang="en-US" sz="800" dirty="0"/>
           </a:p>
@@ -12977,7 +13926,7 @@
                 <a:ea typeface="Trebuchet MS" pitchFamily="34" charset="-122"/>
                 <a:cs typeface="Trebuchet MS" pitchFamily="34" charset="-120"/>
               </a:rPr>
-              <a:t>preview</a:t>
+              <a:t>preceding</a:t>
             </a:r>
             <a:endParaRPr lang="en-US" sz="2800" dirty="0"/>
           </a:p>
@@ -13057,7 +14006,7 @@
         </p:nvSpPr>
         <p:spPr>
           <a:xfrm>
-            <a:off x="2938272" y="2258568"/>
+            <a:off x="2221992" y="2258568"/>
             <a:ext cx="1828800" cy="292608"/>
           </a:xfrm>
           <a:prstGeom prst="rect">
@@ -13091,7 +14040,7 @@
         </p:nvSpPr>
         <p:spPr>
           <a:xfrm>
-            <a:off x="2938272" y="2258568"/>
+            <a:off x="2221992" y="2258568"/>
             <a:ext cx="1828800" cy="292608"/>
           </a:xfrm>
           <a:prstGeom prst="rect">
@@ -13130,7 +14079,7 @@
         </p:nvSpPr>
         <p:spPr>
           <a:xfrm>
-            <a:off x="2938272" y="2569464"/>
+            <a:off x="2221992" y="2569464"/>
             <a:ext cx="1828800" cy="201168"/>
           </a:xfrm>
           <a:prstGeom prst="rect">
@@ -13169,7 +14118,7 @@
         </p:nvSpPr>
         <p:spPr>
           <a:xfrm>
-            <a:off x="5803392" y="2258568"/>
+            <a:off x="4370832" y="2258568"/>
             <a:ext cx="1828800" cy="292608"/>
           </a:xfrm>
           <a:prstGeom prst="rect">
@@ -13203,7 +14152,7 @@
         </p:nvSpPr>
         <p:spPr>
           <a:xfrm>
-            <a:off x="5803392" y="2258568"/>
+            <a:off x="4370832" y="2258568"/>
             <a:ext cx="1828800" cy="292608"/>
           </a:xfrm>
           <a:prstGeom prst="rect">
@@ -13228,7 +14177,7 @@
                 <a:ea typeface="Trebuchet MS" pitchFamily="34" charset="-122"/>
                 <a:cs typeface="Trebuchet MS" pitchFamily="34" charset="-120"/>
               </a:rPr>
-              <a:t>view</a:t>
+              <a:t>cede</a:t>
             </a:r>
             <a:endParaRPr lang="en-US" sz="1300" dirty="0"/>
           </a:p>
@@ -13242,7 +14191,7 @@
         </p:nvSpPr>
         <p:spPr>
           <a:xfrm>
-            <a:off x="5803392" y="2569464"/>
+            <a:off x="4370832" y="2569464"/>
             <a:ext cx="1828800" cy="201168"/>
           </a:xfrm>
           <a:prstGeom prst="rect">
@@ -13267,7 +14216,7 @@
                 <a:ea typeface="Calibri" pitchFamily="34" charset="-122"/>
                 <a:cs typeface="Calibri" pitchFamily="34" charset="-120"/>
               </a:rPr>
-              <a:t>to look at</a:t>
+              <a:t>go; yield</a:t>
             </a:r>
             <a:endParaRPr lang="en-US" sz="850" dirty="0"/>
           </a:p>
@@ -13276,6 +14225,118 @@
       <p:sp>
         <p:nvSpPr>
           <p:cNvPr id="22" name="Shape 20"/>
+          <p:cNvSpPr/>
+          <p:nvPr/>
+        </p:nvSpPr>
+        <p:spPr>
+          <a:xfrm>
+            <a:off x="6519672" y="2258568"/>
+            <a:ext cx="1828800" cy="292608"/>
+          </a:xfrm>
+          <a:prstGeom prst="rect">
+            <a:avLst>
+              <a:gd name="adj" fmla="val 25000"/>
+            </a:avLst>
+          </a:prstGeom>
+          <a:solidFill>
+            <a:srgbClr val="FCE7F3"/>
+          </a:solidFill>
+          <a:ln w="19050">
+            <a:solidFill>
+              <a:srgbClr val="DB2777"/>
+            </a:solidFill>
+            <a:prstDash val="solid"/>
+          </a:ln>
+          <a:effectLst>
+            <a:outerShdw sx="100000" sy="100000" kx="0" ky="0" algn="bl" rotWithShape="0" blurRad="101600" dist="38100" dir="8100000">
+              <a:srgbClr val="000000">
+                <a:alpha val="12000"/>
+              </a:srgbClr>
+            </a:outerShdw>
+          </a:effectLst>
+        </p:spPr>
+      </p:sp>
+      <p:sp>
+        <p:nvSpPr>
+          <p:cNvPr id="23" name="Text 21"/>
+          <p:cNvSpPr/>
+          <p:nvPr/>
+        </p:nvSpPr>
+        <p:spPr>
+          <a:xfrm>
+            <a:off x="6519672" y="2258568"/>
+            <a:ext cx="1828800" cy="292608"/>
+          </a:xfrm>
+          <a:prstGeom prst="rect">
+            <a:avLst/>
+          </a:prstGeom>
+          <a:noFill/>
+          <a:ln/>
+        </p:spPr>
+        <p:txBody>
+          <a:bodyPr wrap="square" lIns="0" tIns="0" rIns="0" bIns="0" rtlCol="0" anchor="ctr"/>
+          <a:lstStyle/>
+          <a:p>
+            <a:pPr algn="ctr" indent="0" marL="0">
+              <a:buNone/>
+            </a:pPr>
+            <a:r>
+              <a:rPr lang="en-US" sz="1300" b="1" dirty="0">
+                <a:solidFill>
+                  <a:srgbClr val="9D174D"/>
+                </a:solidFill>
+                <a:latin typeface="Trebuchet MS" pitchFamily="34" charset="0"/>
+                <a:ea typeface="Trebuchet MS" pitchFamily="34" charset="-122"/>
+                <a:cs typeface="Trebuchet MS" pitchFamily="34" charset="-120"/>
+              </a:rPr>
+              <a:t>ing</a:t>
+            </a:r>
+            <a:endParaRPr lang="en-US" sz="1300" dirty="0"/>
+          </a:p>
+        </p:txBody>
+      </p:sp>
+      <p:sp>
+        <p:nvSpPr>
+          <p:cNvPr id="24" name="Text 22"/>
+          <p:cNvSpPr/>
+          <p:nvPr/>
+        </p:nvSpPr>
+        <p:spPr>
+          <a:xfrm>
+            <a:off x="6519672" y="2569464"/>
+            <a:ext cx="1828800" cy="201168"/>
+          </a:xfrm>
+          <a:prstGeom prst="rect">
+            <a:avLst/>
+          </a:prstGeom>
+          <a:noFill/>
+          <a:ln/>
+        </p:spPr>
+        <p:txBody>
+          <a:bodyPr wrap="square" lIns="0" tIns="0" rIns="0" bIns="0" rtlCol="0" anchor="t"/>
+          <a:lstStyle/>
+          <a:p>
+            <a:pPr algn="ctr" indent="0" marL="0">
+              <a:buNone/>
+            </a:pPr>
+            <a:r>
+              <a:rPr lang="en-US" sz="850" dirty="0">
+                <a:solidFill>
+                  <a:srgbClr val="475569"/>
+                </a:solidFill>
+                <a:latin typeface="Calibri" pitchFamily="34" charset="0"/>
+                <a:ea typeface="Calibri" pitchFamily="34" charset="-122"/>
+                <a:cs typeface="Calibri" pitchFamily="34" charset="-120"/>
+              </a:rPr>
+              <a:t>happening now</a:t>
+            </a:r>
+            <a:endParaRPr lang="en-US" sz="850" dirty="0"/>
+          </a:p>
+        </p:txBody>
+      </p:sp>
+      <p:sp>
+        <p:nvSpPr>
+          <p:cNvPr id="25" name="Shape 23"/>
           <p:cNvSpPr/>
           <p:nvPr/>
         </p:nvSpPr>
@@ -13302,7 +14363,7 @@
       </p:sp>
       <p:sp>
         <p:nvSpPr>
-          <p:cNvPr id="23" name="Text 21"/>
+          <p:cNvPr id="26" name="Text 24"/>
           <p:cNvSpPr/>
           <p:nvPr/>
         </p:nvSpPr>
@@ -13341,7 +14402,7 @@
       </p:sp>
       <p:sp>
         <p:nvSpPr>
-          <p:cNvPr id="24" name="Shape 22"/>
+          <p:cNvPr id="27" name="Shape 25"/>
           <p:cNvSpPr/>
           <p:nvPr/>
         </p:nvSpPr>
@@ -13368,13 +14429,13 @@
       </p:sp>
       <p:sp>
         <p:nvSpPr>
-          <p:cNvPr id="25" name="Shape 23"/>
-          <p:cNvSpPr/>
-          <p:nvPr/>
-        </p:nvSpPr>
-        <p:spPr>
-          <a:xfrm>
-            <a:off x="2999232" y="3364992"/>
+          <p:cNvPr id="28" name="Shape 26"/>
+          <p:cNvSpPr/>
+          <p:nvPr/>
+        </p:nvSpPr>
+        <p:spPr>
+          <a:xfrm>
+            <a:off x="2313432" y="3364992"/>
             <a:ext cx="1645920" cy="475488"/>
           </a:xfrm>
           <a:prstGeom prst="rect">
@@ -13395,13 +14456,13 @@
       </p:sp>
       <p:sp>
         <p:nvSpPr>
-          <p:cNvPr id="26" name="Text 24"/>
-          <p:cNvSpPr/>
-          <p:nvPr/>
-        </p:nvSpPr>
-        <p:spPr>
-          <a:xfrm>
-            <a:off x="2999232" y="3364992"/>
+          <p:cNvPr id="29" name="Text 27"/>
+          <p:cNvSpPr/>
+          <p:nvPr/>
+        </p:nvSpPr>
+        <p:spPr>
+          <a:xfrm>
+            <a:off x="2313432" y="3364992"/>
             <a:ext cx="1645920" cy="475488"/>
           </a:xfrm>
           <a:prstGeom prst="rect">
@@ -13434,14 +14495,14 @@
       </p:sp>
       <p:sp>
         <p:nvSpPr>
-          <p:cNvPr id="27" name="Text 25"/>
-          <p:cNvSpPr/>
-          <p:nvPr/>
-        </p:nvSpPr>
-        <p:spPr>
-          <a:xfrm>
-            <a:off x="4645152" y="3364992"/>
-            <a:ext cx="1097280" cy="475488"/>
+          <p:cNvPr id="30" name="Text 28"/>
+          <p:cNvSpPr/>
+          <p:nvPr/>
+        </p:nvSpPr>
+        <p:spPr>
+          <a:xfrm>
+            <a:off x="3959352" y="3364992"/>
+            <a:ext cx="411480" cy="475488"/>
           </a:xfrm>
           <a:prstGeom prst="rect">
             <a:avLst/>
@@ -13473,13 +14534,13 @@
       </p:sp>
       <p:sp>
         <p:nvSpPr>
-          <p:cNvPr id="28" name="Shape 26"/>
-          <p:cNvSpPr/>
-          <p:nvPr/>
-        </p:nvSpPr>
-        <p:spPr>
-          <a:xfrm>
-            <a:off x="5742432" y="3364992"/>
+          <p:cNvPr id="31" name="Shape 29"/>
+          <p:cNvSpPr/>
+          <p:nvPr/>
+        </p:nvSpPr>
+        <p:spPr>
+          <a:xfrm>
+            <a:off x="4370832" y="3364992"/>
             <a:ext cx="1645920" cy="475488"/>
           </a:xfrm>
           <a:prstGeom prst="rect">
@@ -13500,13 +14561,13 @@
       </p:sp>
       <p:sp>
         <p:nvSpPr>
-          <p:cNvPr id="29" name="Text 27"/>
-          <p:cNvSpPr/>
-          <p:nvPr/>
-        </p:nvSpPr>
-        <p:spPr>
-          <a:xfrm>
-            <a:off x="5742432" y="3364992"/>
+          <p:cNvPr id="32" name="Text 30"/>
+          <p:cNvSpPr/>
+          <p:nvPr/>
+        </p:nvSpPr>
+        <p:spPr>
+          <a:xfrm>
+            <a:off x="4370832" y="3364992"/>
             <a:ext cx="1645920" cy="475488"/>
           </a:xfrm>
           <a:prstGeom prst="rect">
@@ -13531,7 +14592,7 @@
                 <a:ea typeface="Trebuchet MS" pitchFamily="34" charset="-122"/>
                 <a:cs typeface="Trebuchet MS" pitchFamily="34" charset="-120"/>
               </a:rPr>
-              <a:t>view</a:t>
+              <a:t>ced</a:t>
             </a:r>
             <a:endParaRPr lang="en-US" sz="1400" dirty="0"/>
           </a:p>
@@ -13539,7 +14600,112 @@
       </p:sp>
       <p:sp>
         <p:nvSpPr>
-          <p:cNvPr id="30" name="Shape 28"/>
+          <p:cNvPr id="33" name="Text 31"/>
+          <p:cNvSpPr/>
+          <p:nvPr/>
+        </p:nvSpPr>
+        <p:spPr>
+          <a:xfrm>
+            <a:off x="6016752" y="3364992"/>
+            <a:ext cx="411480" cy="475488"/>
+          </a:xfrm>
+          <a:prstGeom prst="rect">
+            <a:avLst/>
+          </a:prstGeom>
+          <a:noFill/>
+          <a:ln/>
+        </p:spPr>
+        <p:txBody>
+          <a:bodyPr wrap="square" lIns="0" tIns="0" rIns="0" bIns="0" rtlCol="0" anchor="ctr"/>
+          <a:lstStyle/>
+          <a:p>
+            <a:pPr algn="ctr" indent="0" marL="0">
+              <a:buNone/>
+            </a:pPr>
+            <a:r>
+              <a:rPr lang="en-US" sz="1600" b="1" dirty="0">
+                <a:solidFill>
+                  <a:srgbClr val="0D9488"/>
+                </a:solidFill>
+                <a:latin typeface="Trebuchet MS" pitchFamily="34" charset="0"/>
+                <a:ea typeface="Trebuchet MS" pitchFamily="34" charset="-122"/>
+                <a:cs typeface="Trebuchet MS" pitchFamily="34" charset="-120"/>
+              </a:rPr>
+              <a:t>·</a:t>
+            </a:r>
+            <a:endParaRPr lang="en-US" sz="1600" dirty="0"/>
+          </a:p>
+        </p:txBody>
+      </p:sp>
+      <p:sp>
+        <p:nvSpPr>
+          <p:cNvPr id="34" name="Shape 32"/>
+          <p:cNvSpPr/>
+          <p:nvPr/>
+        </p:nvSpPr>
+        <p:spPr>
+          <a:xfrm>
+            <a:off x="6428232" y="3364992"/>
+            <a:ext cx="1645920" cy="475488"/>
+          </a:xfrm>
+          <a:prstGeom prst="rect">
+            <a:avLst>
+              <a:gd name="adj" fmla="val 9615"/>
+            </a:avLst>
+          </a:prstGeom>
+          <a:solidFill>
+            <a:srgbClr val="FFFFFF"/>
+          </a:solidFill>
+          <a:ln w="12700">
+            <a:solidFill>
+              <a:srgbClr val="0D9488"/>
+            </a:solidFill>
+            <a:prstDash val="solid"/>
+          </a:ln>
+        </p:spPr>
+      </p:sp>
+      <p:sp>
+        <p:nvSpPr>
+          <p:cNvPr id="35" name="Text 33"/>
+          <p:cNvSpPr/>
+          <p:nvPr/>
+        </p:nvSpPr>
+        <p:spPr>
+          <a:xfrm>
+            <a:off x="6428232" y="3364992"/>
+            <a:ext cx="1645920" cy="475488"/>
+          </a:xfrm>
+          <a:prstGeom prst="rect">
+            <a:avLst/>
+          </a:prstGeom>
+          <a:noFill/>
+          <a:ln/>
+        </p:spPr>
+        <p:txBody>
+          <a:bodyPr wrap="square" lIns="0" tIns="0" rIns="0" bIns="0" rtlCol="0" anchor="ctr"/>
+          <a:lstStyle/>
+          <a:p>
+            <a:pPr algn="ctr" indent="0" marL="0">
+              <a:buNone/>
+            </a:pPr>
+            <a:r>
+              <a:rPr lang="en-US" sz="1400" b="1" dirty="0">
+                <a:solidFill>
+                  <a:srgbClr val="0D9488"/>
+                </a:solidFill>
+                <a:latin typeface="Trebuchet MS" pitchFamily="34" charset="0"/>
+                <a:ea typeface="Trebuchet MS" pitchFamily="34" charset="-122"/>
+                <a:cs typeface="Trebuchet MS" pitchFamily="34" charset="-120"/>
+              </a:rPr>
+              <a:t>ing</a:t>
+            </a:r>
+            <a:endParaRPr lang="en-US" sz="1400" dirty="0"/>
+          </a:p>
+        </p:txBody>
+      </p:sp>
+      <p:sp>
+        <p:nvSpPr>
+          <p:cNvPr id="36" name="Shape 34"/>
           <p:cNvSpPr/>
           <p:nvPr/>
         </p:nvSpPr>
@@ -13566,7 +14732,7 @@
       </p:sp>
       <p:sp>
         <p:nvSpPr>
-          <p:cNvPr id="31" name="Text 29"/>
+          <p:cNvPr id="37" name="Text 35"/>
           <p:cNvSpPr/>
           <p:nvPr/>
         </p:nvSpPr>
@@ -13605,7 +14771,7 @@
       </p:sp>
       <p:sp>
         <p:nvSpPr>
-          <p:cNvPr id="32" name="Shape 30"/>
+          <p:cNvPr id="38" name="Shape 36"/>
           <p:cNvSpPr/>
           <p:nvPr/>
         </p:nvSpPr>
@@ -13632,7 +14798,7 @@
       </p:sp>
       <p:sp>
         <p:nvSpPr>
-          <p:cNvPr id="33" name="Text 31"/>
+          <p:cNvPr id="39" name="Text 37"/>
           <p:cNvSpPr/>
           <p:nvPr/>
         </p:nvSpPr>
@@ -13864,7 +15030,7 @@
                 <a:ea typeface="Calibri" pitchFamily="34" charset="-122"/>
                 <a:cs typeface="Calibri" pitchFamily="34" charset="-120"/>
               </a:rPr>
-              <a:t>Prefix 'pre-' — before, in advance</a:t>
+              <a:t>Prefix 'pre-' — before</a:t>
             </a:r>
             <a:endParaRPr lang="en-US" sz="1600" dirty="0"/>
           </a:p>
@@ -14220,7 +15386,7 @@
                 <a:ea typeface="Calibri" pitchFamily="34" charset="-122"/>
                 <a:cs typeface="Calibri" pitchFamily="34" charset="-120"/>
               </a:rPr>
-              <a:t>Word Labs  •  wordlabs.app  •  Prefix: 'pre-' = before, in advance</a:t>
+              <a:t>Word Labs  •  wordlabs.app  •  Prefix: 'pre-' = before</a:t>
             </a:r>
             <a:endParaRPr lang="en-US" sz="800" dirty="0"/>
           </a:p>
@@ -14359,7 +15525,7 @@
                 <a:ea typeface="Trebuchet MS" pitchFamily="34" charset="-122"/>
                 <a:cs typeface="Trebuchet MS" pitchFamily="34" charset="-120"/>
               </a:rPr>
-              <a:t>preview</a:t>
+              <a:t>preceding</a:t>
             </a:r>
             <a:endParaRPr lang="en-US" sz="2800" dirty="0"/>
           </a:p>
@@ -14439,7 +15605,7 @@
         </p:nvSpPr>
         <p:spPr>
           <a:xfrm>
-            <a:off x="2938272" y="2258568"/>
+            <a:off x="2221992" y="2258568"/>
             <a:ext cx="1828800" cy="292608"/>
           </a:xfrm>
           <a:prstGeom prst="rect">
@@ -14473,7 +15639,7 @@
         </p:nvSpPr>
         <p:spPr>
           <a:xfrm>
-            <a:off x="2938272" y="2258568"/>
+            <a:off x="2221992" y="2258568"/>
             <a:ext cx="1828800" cy="292608"/>
           </a:xfrm>
           <a:prstGeom prst="rect">
@@ -14512,7 +15678,7 @@
         </p:nvSpPr>
         <p:spPr>
           <a:xfrm>
-            <a:off x="2938272" y="2569464"/>
+            <a:off x="2221992" y="2569464"/>
             <a:ext cx="1828800" cy="201168"/>
           </a:xfrm>
           <a:prstGeom prst="rect">
@@ -14551,7 +15717,7 @@
         </p:nvSpPr>
         <p:spPr>
           <a:xfrm>
-            <a:off x="5803392" y="2258568"/>
+            <a:off x="4370832" y="2258568"/>
             <a:ext cx="1828800" cy="292608"/>
           </a:xfrm>
           <a:prstGeom prst="rect">
@@ -14585,7 +15751,7 @@
         </p:nvSpPr>
         <p:spPr>
           <a:xfrm>
-            <a:off x="5803392" y="2258568"/>
+            <a:off x="4370832" y="2258568"/>
             <a:ext cx="1828800" cy="292608"/>
           </a:xfrm>
           <a:prstGeom prst="rect">
@@ -14610,7 +15776,7 @@
                 <a:ea typeface="Trebuchet MS" pitchFamily="34" charset="-122"/>
                 <a:cs typeface="Trebuchet MS" pitchFamily="34" charset="-120"/>
               </a:rPr>
-              <a:t>view</a:t>
+              <a:t>cede</a:t>
             </a:r>
             <a:endParaRPr lang="en-US" sz="1300" dirty="0"/>
           </a:p>
@@ -14624,7 +15790,7 @@
         </p:nvSpPr>
         <p:spPr>
           <a:xfrm>
-            <a:off x="5803392" y="2569464"/>
+            <a:off x="4370832" y="2569464"/>
             <a:ext cx="1828800" cy="201168"/>
           </a:xfrm>
           <a:prstGeom prst="rect">
@@ -14649,7 +15815,7 @@
                 <a:ea typeface="Calibri" pitchFamily="34" charset="-122"/>
                 <a:cs typeface="Calibri" pitchFamily="34" charset="-120"/>
               </a:rPr>
-              <a:t>to look at</a:t>
+              <a:t>go; yield</a:t>
             </a:r>
             <a:endParaRPr lang="en-US" sz="850" dirty="0"/>
           </a:p>
@@ -14658,6 +15824,118 @@
       <p:sp>
         <p:nvSpPr>
           <p:cNvPr id="22" name="Shape 20"/>
+          <p:cNvSpPr/>
+          <p:nvPr/>
+        </p:nvSpPr>
+        <p:spPr>
+          <a:xfrm>
+            <a:off x="6519672" y="2258568"/>
+            <a:ext cx="1828800" cy="292608"/>
+          </a:xfrm>
+          <a:prstGeom prst="rect">
+            <a:avLst>
+              <a:gd name="adj" fmla="val 25000"/>
+            </a:avLst>
+          </a:prstGeom>
+          <a:solidFill>
+            <a:srgbClr val="FCE7F3"/>
+          </a:solidFill>
+          <a:ln w="19050">
+            <a:solidFill>
+              <a:srgbClr val="DB2777"/>
+            </a:solidFill>
+            <a:prstDash val="solid"/>
+          </a:ln>
+          <a:effectLst>
+            <a:outerShdw sx="100000" sy="100000" kx="0" ky="0" algn="bl" rotWithShape="0" blurRad="101600" dist="38100" dir="8100000">
+              <a:srgbClr val="000000">
+                <a:alpha val="12000"/>
+              </a:srgbClr>
+            </a:outerShdw>
+          </a:effectLst>
+        </p:spPr>
+      </p:sp>
+      <p:sp>
+        <p:nvSpPr>
+          <p:cNvPr id="23" name="Text 21"/>
+          <p:cNvSpPr/>
+          <p:nvPr/>
+        </p:nvSpPr>
+        <p:spPr>
+          <a:xfrm>
+            <a:off x="6519672" y="2258568"/>
+            <a:ext cx="1828800" cy="292608"/>
+          </a:xfrm>
+          <a:prstGeom prst="rect">
+            <a:avLst/>
+          </a:prstGeom>
+          <a:noFill/>
+          <a:ln/>
+        </p:spPr>
+        <p:txBody>
+          <a:bodyPr wrap="square" lIns="0" tIns="0" rIns="0" bIns="0" rtlCol="0" anchor="ctr"/>
+          <a:lstStyle/>
+          <a:p>
+            <a:pPr algn="ctr" indent="0" marL="0">
+              <a:buNone/>
+            </a:pPr>
+            <a:r>
+              <a:rPr lang="en-US" sz="1300" b="1" dirty="0">
+                <a:solidFill>
+                  <a:srgbClr val="9D174D"/>
+                </a:solidFill>
+                <a:latin typeface="Trebuchet MS" pitchFamily="34" charset="0"/>
+                <a:ea typeface="Trebuchet MS" pitchFamily="34" charset="-122"/>
+                <a:cs typeface="Trebuchet MS" pitchFamily="34" charset="-120"/>
+              </a:rPr>
+              <a:t>ing</a:t>
+            </a:r>
+            <a:endParaRPr lang="en-US" sz="1300" dirty="0"/>
+          </a:p>
+        </p:txBody>
+      </p:sp>
+      <p:sp>
+        <p:nvSpPr>
+          <p:cNvPr id="24" name="Text 22"/>
+          <p:cNvSpPr/>
+          <p:nvPr/>
+        </p:nvSpPr>
+        <p:spPr>
+          <a:xfrm>
+            <a:off x="6519672" y="2569464"/>
+            <a:ext cx="1828800" cy="201168"/>
+          </a:xfrm>
+          <a:prstGeom prst="rect">
+            <a:avLst/>
+          </a:prstGeom>
+          <a:noFill/>
+          <a:ln/>
+        </p:spPr>
+        <p:txBody>
+          <a:bodyPr wrap="square" lIns="0" tIns="0" rIns="0" bIns="0" rtlCol="0" anchor="t"/>
+          <a:lstStyle/>
+          <a:p>
+            <a:pPr algn="ctr" indent="0" marL="0">
+              <a:buNone/>
+            </a:pPr>
+            <a:r>
+              <a:rPr lang="en-US" sz="850" dirty="0">
+                <a:solidFill>
+                  <a:srgbClr val="475569"/>
+                </a:solidFill>
+                <a:latin typeface="Calibri" pitchFamily="34" charset="0"/>
+                <a:ea typeface="Calibri" pitchFamily="34" charset="-122"/>
+                <a:cs typeface="Calibri" pitchFamily="34" charset="-120"/>
+              </a:rPr>
+              <a:t>happening now</a:t>
+            </a:r>
+            <a:endParaRPr lang="en-US" sz="850" dirty="0"/>
+          </a:p>
+        </p:txBody>
+      </p:sp>
+      <p:sp>
+        <p:nvSpPr>
+          <p:cNvPr id="25" name="Shape 23"/>
           <p:cNvSpPr/>
           <p:nvPr/>
         </p:nvSpPr>
@@ -14684,7 +15962,7 @@
       </p:sp>
       <p:sp>
         <p:nvSpPr>
-          <p:cNvPr id="23" name="Text 21"/>
+          <p:cNvPr id="26" name="Text 24"/>
           <p:cNvSpPr/>
           <p:nvPr/>
         </p:nvSpPr>
@@ -14723,7 +16001,7 @@
       </p:sp>
       <p:sp>
         <p:nvSpPr>
-          <p:cNvPr id="24" name="Shape 22"/>
+          <p:cNvPr id="27" name="Shape 25"/>
           <p:cNvSpPr/>
           <p:nvPr/>
         </p:nvSpPr>
@@ -14750,13 +16028,13 @@
       </p:sp>
       <p:sp>
         <p:nvSpPr>
-          <p:cNvPr id="25" name="Shape 23"/>
-          <p:cNvSpPr/>
-          <p:nvPr/>
-        </p:nvSpPr>
-        <p:spPr>
-          <a:xfrm>
-            <a:off x="2999232" y="3364992"/>
+          <p:cNvPr id="28" name="Shape 26"/>
+          <p:cNvSpPr/>
+          <p:nvPr/>
+        </p:nvSpPr>
+        <p:spPr>
+          <a:xfrm>
+            <a:off x="2313432" y="3364992"/>
             <a:ext cx="1645920" cy="475488"/>
           </a:xfrm>
           <a:prstGeom prst="rect">
@@ -14777,13 +16055,13 @@
       </p:sp>
       <p:sp>
         <p:nvSpPr>
-          <p:cNvPr id="26" name="Text 24"/>
-          <p:cNvSpPr/>
-          <p:nvPr/>
-        </p:nvSpPr>
-        <p:spPr>
-          <a:xfrm>
-            <a:off x="2999232" y="3364992"/>
+          <p:cNvPr id="29" name="Text 27"/>
+          <p:cNvSpPr/>
+          <p:nvPr/>
+        </p:nvSpPr>
+        <p:spPr>
+          <a:xfrm>
+            <a:off x="2313432" y="3364992"/>
             <a:ext cx="1645920" cy="475488"/>
           </a:xfrm>
           <a:prstGeom prst="rect">
@@ -14816,14 +16094,14 @@
       </p:sp>
       <p:sp>
         <p:nvSpPr>
-          <p:cNvPr id="27" name="Text 25"/>
-          <p:cNvSpPr/>
-          <p:nvPr/>
-        </p:nvSpPr>
-        <p:spPr>
-          <a:xfrm>
-            <a:off x="4645152" y="3364992"/>
-            <a:ext cx="1097280" cy="475488"/>
+          <p:cNvPr id="30" name="Text 28"/>
+          <p:cNvSpPr/>
+          <p:nvPr/>
+        </p:nvSpPr>
+        <p:spPr>
+          <a:xfrm>
+            <a:off x="3959352" y="3364992"/>
+            <a:ext cx="411480" cy="475488"/>
           </a:xfrm>
           <a:prstGeom prst="rect">
             <a:avLst/>
@@ -14855,13 +16133,13 @@
       </p:sp>
       <p:sp>
         <p:nvSpPr>
-          <p:cNvPr id="28" name="Shape 26"/>
-          <p:cNvSpPr/>
-          <p:nvPr/>
-        </p:nvSpPr>
-        <p:spPr>
-          <a:xfrm>
-            <a:off x="5742432" y="3364992"/>
+          <p:cNvPr id="31" name="Shape 29"/>
+          <p:cNvSpPr/>
+          <p:nvPr/>
+        </p:nvSpPr>
+        <p:spPr>
+          <a:xfrm>
+            <a:off x="4370832" y="3364992"/>
             <a:ext cx="1645920" cy="475488"/>
           </a:xfrm>
           <a:prstGeom prst="rect">
@@ -14882,13 +16160,13 @@
       </p:sp>
       <p:sp>
         <p:nvSpPr>
-          <p:cNvPr id="29" name="Text 27"/>
-          <p:cNvSpPr/>
-          <p:nvPr/>
-        </p:nvSpPr>
-        <p:spPr>
-          <a:xfrm>
-            <a:off x="5742432" y="3364992"/>
+          <p:cNvPr id="32" name="Text 30"/>
+          <p:cNvSpPr/>
+          <p:nvPr/>
+        </p:nvSpPr>
+        <p:spPr>
+          <a:xfrm>
+            <a:off x="4370832" y="3364992"/>
             <a:ext cx="1645920" cy="475488"/>
           </a:xfrm>
           <a:prstGeom prst="rect">
@@ -14913,7 +16191,7 @@
                 <a:ea typeface="Trebuchet MS" pitchFamily="34" charset="-122"/>
                 <a:cs typeface="Trebuchet MS" pitchFamily="34" charset="-120"/>
               </a:rPr>
-              <a:t>view</a:t>
+              <a:t>ced</a:t>
             </a:r>
             <a:endParaRPr lang="en-US" sz="1400" dirty="0"/>
           </a:p>
@@ -14921,7 +16199,112 @@
       </p:sp>
       <p:sp>
         <p:nvSpPr>
-          <p:cNvPr id="30" name="Shape 28"/>
+          <p:cNvPr id="33" name="Text 31"/>
+          <p:cNvSpPr/>
+          <p:nvPr/>
+        </p:nvSpPr>
+        <p:spPr>
+          <a:xfrm>
+            <a:off x="6016752" y="3364992"/>
+            <a:ext cx="411480" cy="475488"/>
+          </a:xfrm>
+          <a:prstGeom prst="rect">
+            <a:avLst/>
+          </a:prstGeom>
+          <a:noFill/>
+          <a:ln/>
+        </p:spPr>
+        <p:txBody>
+          <a:bodyPr wrap="square" lIns="0" tIns="0" rIns="0" bIns="0" rtlCol="0" anchor="ctr"/>
+          <a:lstStyle/>
+          <a:p>
+            <a:pPr algn="ctr" indent="0" marL="0">
+              <a:buNone/>
+            </a:pPr>
+            <a:r>
+              <a:rPr lang="en-US" sz="1600" b="1" dirty="0">
+                <a:solidFill>
+                  <a:srgbClr val="0D9488"/>
+                </a:solidFill>
+                <a:latin typeface="Trebuchet MS" pitchFamily="34" charset="0"/>
+                <a:ea typeface="Trebuchet MS" pitchFamily="34" charset="-122"/>
+                <a:cs typeface="Trebuchet MS" pitchFamily="34" charset="-120"/>
+              </a:rPr>
+              <a:t>·</a:t>
+            </a:r>
+            <a:endParaRPr lang="en-US" sz="1600" dirty="0"/>
+          </a:p>
+        </p:txBody>
+      </p:sp>
+      <p:sp>
+        <p:nvSpPr>
+          <p:cNvPr id="34" name="Shape 32"/>
+          <p:cNvSpPr/>
+          <p:nvPr/>
+        </p:nvSpPr>
+        <p:spPr>
+          <a:xfrm>
+            <a:off x="6428232" y="3364992"/>
+            <a:ext cx="1645920" cy="475488"/>
+          </a:xfrm>
+          <a:prstGeom prst="rect">
+            <a:avLst>
+              <a:gd name="adj" fmla="val 9615"/>
+            </a:avLst>
+          </a:prstGeom>
+          <a:solidFill>
+            <a:srgbClr val="FFFFFF"/>
+          </a:solidFill>
+          <a:ln w="12700">
+            <a:solidFill>
+              <a:srgbClr val="0D9488"/>
+            </a:solidFill>
+            <a:prstDash val="solid"/>
+          </a:ln>
+        </p:spPr>
+      </p:sp>
+      <p:sp>
+        <p:nvSpPr>
+          <p:cNvPr id="35" name="Text 33"/>
+          <p:cNvSpPr/>
+          <p:nvPr/>
+        </p:nvSpPr>
+        <p:spPr>
+          <a:xfrm>
+            <a:off x="6428232" y="3364992"/>
+            <a:ext cx="1645920" cy="475488"/>
+          </a:xfrm>
+          <a:prstGeom prst="rect">
+            <a:avLst/>
+          </a:prstGeom>
+          <a:noFill/>
+          <a:ln/>
+        </p:spPr>
+        <p:txBody>
+          <a:bodyPr wrap="square" lIns="0" tIns="0" rIns="0" bIns="0" rtlCol="0" anchor="ctr"/>
+          <a:lstStyle/>
+          <a:p>
+            <a:pPr algn="ctr" indent="0" marL="0">
+              <a:buNone/>
+            </a:pPr>
+            <a:r>
+              <a:rPr lang="en-US" sz="1400" b="1" dirty="0">
+                <a:solidFill>
+                  <a:srgbClr val="0D9488"/>
+                </a:solidFill>
+                <a:latin typeface="Trebuchet MS" pitchFamily="34" charset="0"/>
+                <a:ea typeface="Trebuchet MS" pitchFamily="34" charset="-122"/>
+                <a:cs typeface="Trebuchet MS" pitchFamily="34" charset="-120"/>
+              </a:rPr>
+              <a:t>ing</a:t>
+            </a:r>
+            <a:endParaRPr lang="en-US" sz="1400" dirty="0"/>
+          </a:p>
+        </p:txBody>
+      </p:sp>
+      <p:sp>
+        <p:nvSpPr>
+          <p:cNvPr id="36" name="Shape 34"/>
           <p:cNvSpPr/>
           <p:nvPr/>
         </p:nvSpPr>
@@ -14948,7 +16331,7 @@
       </p:sp>
       <p:sp>
         <p:nvSpPr>
-          <p:cNvPr id="31" name="Text 29"/>
+          <p:cNvPr id="37" name="Text 35"/>
           <p:cNvSpPr/>
           <p:nvPr/>
         </p:nvSpPr>
@@ -14987,18 +16370,18 @@
       </p:sp>
       <p:sp>
         <p:nvSpPr>
-          <p:cNvPr id="32" name="Shape 30"/>
+          <p:cNvPr id="38" name="Shape 36"/>
           <p:cNvSpPr/>
           <p:nvPr/>
         </p:nvSpPr>
         <p:spPr>
           <a:xfrm>
             <a:off x="1874520" y="4096512"/>
-            <a:ext cx="6903720" cy="804672"/>
+            <a:ext cx="6903720" cy="658368"/>
           </a:xfrm>
           <a:prstGeom prst="rect">
             <a:avLst>
-              <a:gd name="adj" fmla="val 6818"/>
+              <a:gd name="adj" fmla="val 8333"/>
             </a:avLst>
           </a:prstGeom>
           <a:solidFill>
@@ -15014,18 +16397,18 @@
       </p:sp>
       <p:sp>
         <p:nvSpPr>
-          <p:cNvPr id="33" name="Shape 31"/>
-          <p:cNvSpPr/>
-          <p:nvPr/>
-        </p:nvSpPr>
-        <p:spPr>
-          <a:xfrm>
-            <a:off x="2670048" y="4169664"/>
-            <a:ext cx="685800" cy="384048"/>
+          <p:cNvPr id="39" name="Shape 37"/>
+          <p:cNvSpPr/>
+          <p:nvPr/>
+        </p:nvSpPr>
+        <p:spPr>
+          <a:xfrm>
+            <a:off x="2023872" y="4169664"/>
+            <a:ext cx="685800" cy="475488"/>
           </a:xfrm>
           <a:prstGeom prst="rect">
             <a:avLst>
-              <a:gd name="adj" fmla="val 9524"/>
+              <a:gd name="adj" fmla="val 7692"/>
             </a:avLst>
           </a:prstGeom>
           <a:solidFill>
@@ -15041,14 +16424,14 @@
       </p:sp>
       <p:sp>
         <p:nvSpPr>
-          <p:cNvPr id="34" name="Text 32"/>
-          <p:cNvSpPr/>
-          <p:nvPr/>
-        </p:nvSpPr>
-        <p:spPr>
-          <a:xfrm>
-            <a:off x="2670048" y="4169664"/>
-            <a:ext cx="685800" cy="384048"/>
+          <p:cNvPr id="40" name="Text 38"/>
+          <p:cNvSpPr/>
+          <p:nvPr/>
+        </p:nvSpPr>
+        <p:spPr>
+          <a:xfrm>
+            <a:off x="2023872" y="4169664"/>
+            <a:ext cx="685800" cy="475488"/>
           </a:xfrm>
           <a:prstGeom prst="rect">
             <a:avLst/>
@@ -15072,7 +16455,7 @@
                 <a:ea typeface="Trebuchet MS" pitchFamily="34" charset="-122"/>
                 <a:cs typeface="Trebuchet MS" pitchFamily="34" charset="-120"/>
               </a:rPr>
-              <a:t>pr</a:t>
+              <a:t>p</a:t>
             </a:r>
             <a:endParaRPr lang="en-US" sz="900" dirty="0"/>
           </a:p>
@@ -15080,18 +16463,18 @@
       </p:sp>
       <p:sp>
         <p:nvSpPr>
-          <p:cNvPr id="35" name="Shape 33"/>
-          <p:cNvSpPr/>
-          <p:nvPr/>
-        </p:nvSpPr>
-        <p:spPr>
-          <a:xfrm>
-            <a:off x="4123944" y="4169664"/>
-            <a:ext cx="685800" cy="384048"/>
+          <p:cNvPr id="41" name="Shape 39"/>
+          <p:cNvSpPr/>
+          <p:nvPr/>
+        </p:nvSpPr>
+        <p:spPr>
+          <a:xfrm>
+            <a:off x="2831592" y="4169664"/>
+            <a:ext cx="685800" cy="475488"/>
           </a:xfrm>
           <a:prstGeom prst="rect">
             <a:avLst>
-              <a:gd name="adj" fmla="val 9524"/>
+              <a:gd name="adj" fmla="val 7692"/>
             </a:avLst>
           </a:prstGeom>
           <a:solidFill>
@@ -15107,14 +16490,14 @@
       </p:sp>
       <p:sp>
         <p:nvSpPr>
-          <p:cNvPr id="36" name="Text 34"/>
-          <p:cNvSpPr/>
-          <p:nvPr/>
-        </p:nvSpPr>
-        <p:spPr>
-          <a:xfrm>
-            <a:off x="4123944" y="4169664"/>
-            <a:ext cx="685800" cy="384048"/>
+          <p:cNvPr id="42" name="Text 40"/>
+          <p:cNvSpPr/>
+          <p:nvPr/>
+        </p:nvSpPr>
+        <p:spPr>
+          <a:xfrm>
+            <a:off x="2831592" y="4169664"/>
+            <a:ext cx="685800" cy="475488"/>
           </a:xfrm>
           <a:prstGeom prst="rect">
             <a:avLst/>
@@ -15138,7 +16521,7 @@
                 <a:ea typeface="Trebuchet MS" pitchFamily="34" charset="-122"/>
                 <a:cs typeface="Trebuchet MS" pitchFamily="34" charset="-120"/>
               </a:rPr>
-              <a:t>e</a:t>
+              <a:t>r</a:t>
             </a:r>
             <a:endParaRPr lang="en-US" sz="900" dirty="0"/>
           </a:p>
@@ -15146,18 +16529,18 @@
       </p:sp>
       <p:sp>
         <p:nvSpPr>
-          <p:cNvPr id="37" name="Shape 35"/>
-          <p:cNvSpPr/>
-          <p:nvPr/>
-        </p:nvSpPr>
-        <p:spPr>
-          <a:xfrm>
-            <a:off x="5577840" y="4169664"/>
-            <a:ext cx="685800" cy="384048"/>
+          <p:cNvPr id="43" name="Shape 41"/>
+          <p:cNvSpPr/>
+          <p:nvPr/>
+        </p:nvSpPr>
+        <p:spPr>
+          <a:xfrm>
+            <a:off x="3639312" y="4169664"/>
+            <a:ext cx="685800" cy="475488"/>
           </a:xfrm>
           <a:prstGeom prst="rect">
             <a:avLst>
-              <a:gd name="adj" fmla="val 9524"/>
+              <a:gd name="adj" fmla="val 7692"/>
             </a:avLst>
           </a:prstGeom>
           <a:solidFill>
@@ -15173,14 +16556,14 @@
       </p:sp>
       <p:sp>
         <p:nvSpPr>
-          <p:cNvPr id="38" name="Text 36"/>
-          <p:cNvSpPr/>
-          <p:nvPr/>
-        </p:nvSpPr>
-        <p:spPr>
-          <a:xfrm>
-            <a:off x="5577840" y="4169664"/>
-            <a:ext cx="685800" cy="384048"/>
+          <p:cNvPr id="44" name="Text 42"/>
+          <p:cNvSpPr/>
+          <p:nvPr/>
+        </p:nvSpPr>
+        <p:spPr>
+          <a:xfrm>
+            <a:off x="3639312" y="4169664"/>
+            <a:ext cx="685800" cy="475488"/>
           </a:xfrm>
           <a:prstGeom prst="rect">
             <a:avLst/>
@@ -15204,7 +16587,7 @@
                 <a:ea typeface="Trebuchet MS" pitchFamily="34" charset="-122"/>
                 <a:cs typeface="Trebuchet MS" pitchFamily="34" charset="-120"/>
               </a:rPr>
-              <a:t>v</a:t>
+              <a:t>e</a:t>
             </a:r>
             <a:endParaRPr lang="en-US" sz="900" dirty="0"/>
           </a:p>
@@ -15212,18 +16595,18 @@
       </p:sp>
       <p:sp>
         <p:nvSpPr>
-          <p:cNvPr id="39" name="Shape 37"/>
-          <p:cNvSpPr/>
-          <p:nvPr/>
-        </p:nvSpPr>
-        <p:spPr>
-          <a:xfrm>
-            <a:off x="7031736" y="4169664"/>
-            <a:ext cx="685800" cy="384048"/>
+          <p:cNvPr id="45" name="Shape 43"/>
+          <p:cNvSpPr/>
+          <p:nvPr/>
+        </p:nvSpPr>
+        <p:spPr>
+          <a:xfrm>
+            <a:off x="4447032" y="4169664"/>
+            <a:ext cx="685800" cy="475488"/>
           </a:xfrm>
           <a:prstGeom prst="rect">
             <a:avLst>
-              <a:gd name="adj" fmla="val 9524"/>
+              <a:gd name="adj" fmla="val 7692"/>
             </a:avLst>
           </a:prstGeom>
           <a:solidFill>
@@ -15239,14 +16622,14 @@
       </p:sp>
       <p:sp>
         <p:nvSpPr>
-          <p:cNvPr id="40" name="Text 38"/>
-          <p:cNvSpPr/>
-          <p:nvPr/>
-        </p:nvSpPr>
-        <p:spPr>
-          <a:xfrm>
-            <a:off x="7031736" y="4169664"/>
-            <a:ext cx="685800" cy="384048"/>
+          <p:cNvPr id="46" name="Text 44"/>
+          <p:cNvSpPr/>
+          <p:nvPr/>
+        </p:nvSpPr>
+        <p:spPr>
+          <a:xfrm>
+            <a:off x="4447032" y="4169664"/>
+            <a:ext cx="685800" cy="475488"/>
           </a:xfrm>
           <a:prstGeom prst="rect">
             <a:avLst/>
@@ -15270,7 +16653,7 @@
                 <a:ea typeface="Trebuchet MS" pitchFamily="34" charset="-122"/>
                 <a:cs typeface="Trebuchet MS" pitchFamily="34" charset="-120"/>
               </a:rPr>
-              <a:t>iew</a:t>
+              <a:t>c</a:t>
             </a:r>
             <a:endParaRPr lang="en-US" sz="900" dirty="0"/>
           </a:p>
@@ -15278,40 +16661,265 @@
       </p:sp>
       <p:sp>
         <p:nvSpPr>
-          <p:cNvPr id="41" name="Text 39"/>
-          <p:cNvSpPr/>
-          <p:nvPr/>
-        </p:nvSpPr>
-        <p:spPr>
-          <a:xfrm>
-            <a:off x="7031736" y="4572000"/>
-            <a:ext cx="685800" cy="219456"/>
-          </a:xfrm>
-          <a:prstGeom prst="rect">
-            <a:avLst/>
-          </a:prstGeom>
-          <a:noFill/>
-          <a:ln/>
-        </p:spPr>
-        <p:txBody>
-          <a:bodyPr wrap="square" lIns="0" tIns="0" rIns="0" bIns="0" rtlCol="0" anchor="t"/>
-          <a:lstStyle/>
-          <a:p>
-            <a:pPr algn="ctr" indent="0" marL="0">
-              <a:buNone/>
-            </a:pPr>
-            <a:r>
-              <a:rPr lang="en-US" sz="750" i="1" dirty="0">
-                <a:solidFill>
-                  <a:srgbClr val="94A3B8"/>
-                </a:solidFill>
-                <a:latin typeface="Calibri" pitchFamily="34" charset="0"/>
-                <a:ea typeface="Calibri" pitchFamily="34" charset="-122"/>
-                <a:cs typeface="Calibri" pitchFamily="34" charset="-120"/>
-              </a:rPr>
-              <a:t>/yoo/</a:t>
-            </a:r>
-            <a:endParaRPr lang="en-US" sz="750" dirty="0"/>
+          <p:cNvPr id="47" name="Shape 45"/>
+          <p:cNvSpPr/>
+          <p:nvPr/>
+        </p:nvSpPr>
+        <p:spPr>
+          <a:xfrm>
+            <a:off x="5254752" y="4169664"/>
+            <a:ext cx="685800" cy="475488"/>
+          </a:xfrm>
+          <a:prstGeom prst="rect">
+            <a:avLst>
+              <a:gd name="adj" fmla="val 7692"/>
+            </a:avLst>
+          </a:prstGeom>
+          <a:solidFill>
+            <a:srgbClr val="FFFFFF"/>
+          </a:solidFill>
+          <a:ln w="12700">
+            <a:solidFill>
+              <a:srgbClr val="DB2777"/>
+            </a:solidFill>
+            <a:prstDash val="solid"/>
+          </a:ln>
+        </p:spPr>
+      </p:sp>
+      <p:sp>
+        <p:nvSpPr>
+          <p:cNvPr id="48" name="Text 46"/>
+          <p:cNvSpPr/>
+          <p:nvPr/>
+        </p:nvSpPr>
+        <p:spPr>
+          <a:xfrm>
+            <a:off x="5254752" y="4169664"/>
+            <a:ext cx="685800" cy="475488"/>
+          </a:xfrm>
+          <a:prstGeom prst="rect">
+            <a:avLst/>
+          </a:prstGeom>
+          <a:noFill/>
+          <a:ln/>
+        </p:spPr>
+        <p:txBody>
+          <a:bodyPr wrap="square" lIns="0" tIns="0" rIns="0" bIns="0" rtlCol="0" anchor="ctr"/>
+          <a:lstStyle/>
+          <a:p>
+            <a:pPr algn="ctr" indent="0" marL="0">
+              <a:buNone/>
+            </a:pPr>
+            <a:r>
+              <a:rPr lang="en-US" sz="900" b="1" dirty="0">
+                <a:solidFill>
+                  <a:srgbClr val="9D174D"/>
+                </a:solidFill>
+                <a:latin typeface="Trebuchet MS" pitchFamily="34" charset="0"/>
+                <a:ea typeface="Trebuchet MS" pitchFamily="34" charset="-122"/>
+                <a:cs typeface="Trebuchet MS" pitchFamily="34" charset="-120"/>
+              </a:rPr>
+              <a:t>e</a:t>
+            </a:r>
+            <a:endParaRPr lang="en-US" sz="900" dirty="0"/>
+          </a:p>
+        </p:txBody>
+      </p:sp>
+      <p:sp>
+        <p:nvSpPr>
+          <p:cNvPr id="49" name="Shape 47"/>
+          <p:cNvSpPr/>
+          <p:nvPr/>
+        </p:nvSpPr>
+        <p:spPr>
+          <a:xfrm>
+            <a:off x="6062472" y="4169664"/>
+            <a:ext cx="685800" cy="475488"/>
+          </a:xfrm>
+          <a:prstGeom prst="rect">
+            <a:avLst>
+              <a:gd name="adj" fmla="val 7692"/>
+            </a:avLst>
+          </a:prstGeom>
+          <a:solidFill>
+            <a:srgbClr val="FFFFFF"/>
+          </a:solidFill>
+          <a:ln w="12700">
+            <a:solidFill>
+              <a:srgbClr val="DB2777"/>
+            </a:solidFill>
+            <a:prstDash val="solid"/>
+          </a:ln>
+        </p:spPr>
+      </p:sp>
+      <p:sp>
+        <p:nvSpPr>
+          <p:cNvPr id="50" name="Text 48"/>
+          <p:cNvSpPr/>
+          <p:nvPr/>
+        </p:nvSpPr>
+        <p:spPr>
+          <a:xfrm>
+            <a:off x="6062472" y="4169664"/>
+            <a:ext cx="685800" cy="475488"/>
+          </a:xfrm>
+          <a:prstGeom prst="rect">
+            <a:avLst/>
+          </a:prstGeom>
+          <a:noFill/>
+          <a:ln/>
+        </p:spPr>
+        <p:txBody>
+          <a:bodyPr wrap="square" lIns="0" tIns="0" rIns="0" bIns="0" rtlCol="0" anchor="ctr"/>
+          <a:lstStyle/>
+          <a:p>
+            <a:pPr algn="ctr" indent="0" marL="0">
+              <a:buNone/>
+            </a:pPr>
+            <a:r>
+              <a:rPr lang="en-US" sz="900" b="1" dirty="0">
+                <a:solidFill>
+                  <a:srgbClr val="9D174D"/>
+                </a:solidFill>
+                <a:latin typeface="Trebuchet MS" pitchFamily="34" charset="0"/>
+                <a:ea typeface="Trebuchet MS" pitchFamily="34" charset="-122"/>
+                <a:cs typeface="Trebuchet MS" pitchFamily="34" charset="-120"/>
+              </a:rPr>
+              <a:t>d</a:t>
+            </a:r>
+            <a:endParaRPr lang="en-US" sz="900" dirty="0"/>
+          </a:p>
+        </p:txBody>
+      </p:sp>
+      <p:sp>
+        <p:nvSpPr>
+          <p:cNvPr id="51" name="Shape 49"/>
+          <p:cNvSpPr/>
+          <p:nvPr/>
+        </p:nvSpPr>
+        <p:spPr>
+          <a:xfrm>
+            <a:off x="6870192" y="4169664"/>
+            <a:ext cx="685800" cy="475488"/>
+          </a:xfrm>
+          <a:prstGeom prst="rect">
+            <a:avLst>
+              <a:gd name="adj" fmla="val 7692"/>
+            </a:avLst>
+          </a:prstGeom>
+          <a:solidFill>
+            <a:srgbClr val="FFFFFF"/>
+          </a:solidFill>
+          <a:ln w="12700">
+            <a:solidFill>
+              <a:srgbClr val="DB2777"/>
+            </a:solidFill>
+            <a:prstDash val="solid"/>
+          </a:ln>
+        </p:spPr>
+      </p:sp>
+      <p:sp>
+        <p:nvSpPr>
+          <p:cNvPr id="52" name="Text 50"/>
+          <p:cNvSpPr/>
+          <p:nvPr/>
+        </p:nvSpPr>
+        <p:spPr>
+          <a:xfrm>
+            <a:off x="6870192" y="4169664"/>
+            <a:ext cx="685800" cy="475488"/>
+          </a:xfrm>
+          <a:prstGeom prst="rect">
+            <a:avLst/>
+          </a:prstGeom>
+          <a:noFill/>
+          <a:ln/>
+        </p:spPr>
+        <p:txBody>
+          <a:bodyPr wrap="square" lIns="0" tIns="0" rIns="0" bIns="0" rtlCol="0" anchor="ctr"/>
+          <a:lstStyle/>
+          <a:p>
+            <a:pPr algn="ctr" indent="0" marL="0">
+              <a:buNone/>
+            </a:pPr>
+            <a:r>
+              <a:rPr lang="en-US" sz="900" b="1" dirty="0">
+                <a:solidFill>
+                  <a:srgbClr val="9D174D"/>
+                </a:solidFill>
+                <a:latin typeface="Trebuchet MS" pitchFamily="34" charset="0"/>
+                <a:ea typeface="Trebuchet MS" pitchFamily="34" charset="-122"/>
+                <a:cs typeface="Trebuchet MS" pitchFamily="34" charset="-120"/>
+              </a:rPr>
+              <a:t>i</a:t>
+            </a:r>
+            <a:endParaRPr lang="en-US" sz="900" dirty="0"/>
+          </a:p>
+        </p:txBody>
+      </p:sp>
+      <p:sp>
+        <p:nvSpPr>
+          <p:cNvPr id="53" name="Shape 51"/>
+          <p:cNvSpPr/>
+          <p:nvPr/>
+        </p:nvSpPr>
+        <p:spPr>
+          <a:xfrm>
+            <a:off x="7677912" y="4169664"/>
+            <a:ext cx="685800" cy="475488"/>
+          </a:xfrm>
+          <a:prstGeom prst="rect">
+            <a:avLst>
+              <a:gd name="adj" fmla="val 7692"/>
+            </a:avLst>
+          </a:prstGeom>
+          <a:solidFill>
+            <a:srgbClr val="FFFFFF"/>
+          </a:solidFill>
+          <a:ln w="12700">
+            <a:solidFill>
+              <a:srgbClr val="DB2777"/>
+            </a:solidFill>
+            <a:prstDash val="solid"/>
+          </a:ln>
+        </p:spPr>
+      </p:sp>
+      <p:sp>
+        <p:nvSpPr>
+          <p:cNvPr id="54" name="Text 52"/>
+          <p:cNvSpPr/>
+          <p:nvPr/>
+        </p:nvSpPr>
+        <p:spPr>
+          <a:xfrm>
+            <a:off x="7677912" y="4169664"/>
+            <a:ext cx="685800" cy="475488"/>
+          </a:xfrm>
+          <a:prstGeom prst="rect">
+            <a:avLst/>
+          </a:prstGeom>
+          <a:noFill/>
+          <a:ln/>
+        </p:spPr>
+        <p:txBody>
+          <a:bodyPr wrap="square" lIns="0" tIns="0" rIns="0" bIns="0" rtlCol="0" anchor="ctr"/>
+          <a:lstStyle/>
+          <a:p>
+            <a:pPr algn="ctr" indent="0" marL="0">
+              <a:buNone/>
+            </a:pPr>
+            <a:r>
+              <a:rPr lang="en-US" sz="900" b="1" dirty="0">
+                <a:solidFill>
+                  <a:srgbClr val="9D174D"/>
+                </a:solidFill>
+                <a:latin typeface="Trebuchet MS" pitchFamily="34" charset="0"/>
+                <a:ea typeface="Trebuchet MS" pitchFamily="34" charset="-122"/>
+                <a:cs typeface="Trebuchet MS" pitchFamily="34" charset="-120"/>
+              </a:rPr>
+              <a:t>ng</a:t>
+            </a:r>
+            <a:endParaRPr lang="en-US" sz="900" dirty="0"/>
           </a:p>
         </p:txBody>
       </p:sp>
@@ -15883,7 +17491,7 @@
                 <a:ea typeface="Calibri" pitchFamily="34" charset="-122"/>
                 <a:cs typeface="Calibri" pitchFamily="34" charset="-120"/>
               </a:rPr>
-              <a:t>Word Labs  •  wordlabs.app  •  Prefix: 'pre-' = before, in advance</a:t>
+              <a:t>Word Labs  •  wordlabs.app  •  Prefix: 'pre-' = before</a:t>
             </a:r>
             <a:endParaRPr lang="en-US" sz="800" dirty="0"/>
           </a:p>
@@ -16217,7 +17825,7 @@
                 <a:ea typeface="Trebuchet MS" pitchFamily="34" charset="-122"/>
                 <a:cs typeface="Trebuchet MS" pitchFamily="34" charset="-120"/>
               </a:rPr>
-              <a:t>2</a:t>
+              <a:t>0</a:t>
             </a:r>
             <a:pPr algn="ctr" indent="0" marL="0">
               <a:buNone/>
@@ -16231,7 +17839,7 @@
                 <a:ea typeface="Trebuchet MS" pitchFamily="34" charset="-122"/>
                 <a:cs typeface="Trebuchet MS" pitchFamily="34" charset="-120"/>
               </a:rPr>
-              <a:t>  punctuation marks</a:t>
+              <a:t>  punctuation mark</a:t>
             </a:r>
             <a:endParaRPr lang="en-US" sz="2800" dirty="0"/>
           </a:p>
@@ -16523,7 +18131,7 @@
                 <a:ea typeface="Calibri" pitchFamily="34" charset="-122"/>
                 <a:cs typeface="Calibri" pitchFamily="34" charset="-120"/>
               </a:rPr>
-              <a:t>Word Labs  •  wordlabs.app  •  Prefix: 'pre-' = before, in advance</a:t>
+              <a:t>Word Labs  •  wordlabs.app  •  Prefix: 'pre-' = before</a:t>
             </a:r>
             <a:endParaRPr lang="en-US" sz="800" dirty="0"/>
           </a:p>
@@ -16635,7 +18243,7 @@
                 <a:ea typeface="Calibri" pitchFamily="34" charset="-122"/>
                 <a:cs typeface="Calibri" pitchFamily="34" charset="-120"/>
               </a:rPr>
-              <a:t>The teacher said to </a:t>
+              <a:t>Dark clouds are often a </a:t>
             </a:r>
             <a:pPr algn="l" indent="0" marL="0">
               <a:buNone/>
@@ -16652,7 +18260,7 @@
                 <a:ea typeface="Calibri" pitchFamily="34" charset="-122"/>
                 <a:cs typeface="Calibri" pitchFamily="34" charset="-120"/>
               </a:rPr>
-              <a:t>predict</a:t>
+              <a:t>precursor</a:t>
             </a:r>
             <a:pPr algn="l" indent="0" marL="0">
               <a:buNone/>
@@ -16666,7 +18274,7 @@
                 <a:ea typeface="Calibri" pitchFamily="34" charset="-122"/>
                 <a:cs typeface="Calibri" pitchFamily="34" charset="-120"/>
               </a:rPr>
-              <a:t> the ending, </a:t>
+              <a:t> to heavy rain. The doctor will </a:t>
             </a:r>
             <a:pPr algn="l" indent="0" marL="0">
               <a:buNone/>
@@ -16683,7 +18291,7 @@
                 <a:ea typeface="Calibri" pitchFamily="34" charset="-122"/>
                 <a:cs typeface="Calibri" pitchFamily="34" charset="-120"/>
               </a:rPr>
-              <a:t>prevent</a:t>
+              <a:t>prescribe</a:t>
             </a:r>
             <a:pPr algn="l" indent="0" marL="0">
               <a:buNone/>
@@ -16697,7 +18305,7 @@
                 <a:ea typeface="Calibri" pitchFamily="34" charset="-122"/>
                 <a:cs typeface="Calibri" pitchFamily="34" charset="-120"/>
               </a:rPr>
-              <a:t> any spoilers, and </a:t>
+              <a:t> antibiotics if the infection doesn't clear up. Safety always takes </a:t>
             </a:r>
             <a:pPr algn="l" indent="0" marL="0">
               <a:buNone/>
@@ -16714,7 +18322,7 @@
                 <a:ea typeface="Calibri" pitchFamily="34" charset="-122"/>
                 <a:cs typeface="Calibri" pitchFamily="34" charset="-120"/>
               </a:rPr>
-              <a:t>preheat</a:t>
+              <a:t>precedence</a:t>
             </a:r>
             <a:pPr algn="l" indent="0" marL="0">
               <a:buNone/>
@@ -16728,7 +18336,7 @@
                 <a:ea typeface="Calibri" pitchFamily="34" charset="-122"/>
                 <a:cs typeface="Calibri" pitchFamily="34" charset="-120"/>
               </a:rPr>
-              <a:t> your thinking before reading the next chapter.</a:t>
+              <a:t> over speed in the workshop.</a:t>
             </a:r>
             <a:endParaRPr lang="en-US" sz="1800" dirty="0"/>
           </a:p>
@@ -16883,7 +18491,7 @@
                 <a:ea typeface="Trebuchet MS" pitchFamily="34" charset="-122"/>
                 <a:cs typeface="Trebuchet MS" pitchFamily="34" charset="-120"/>
               </a:rPr>
-              <a:t>predict</a:t>
+              <a:t>precursor</a:t>
             </a:r>
             <a:endParaRPr lang="en-US" sz="1400" dirty="0"/>
           </a:p>
@@ -17011,7 +18619,7 @@
                 <a:ea typeface="Trebuchet MS" pitchFamily="34" charset="-122"/>
                 <a:cs typeface="Trebuchet MS" pitchFamily="34" charset="-120"/>
               </a:rPr>
-              <a:t>prevent</a:t>
+              <a:t>prescribe</a:t>
             </a:r>
             <a:endParaRPr lang="en-US" sz="1400" dirty="0"/>
           </a:p>
@@ -17139,7 +18747,7 @@
                 <a:ea typeface="Trebuchet MS" pitchFamily="34" charset="-122"/>
                 <a:cs typeface="Trebuchet MS" pitchFamily="34" charset="-120"/>
               </a:rPr>
-              <a:t>preheat</a:t>
+              <a:t>precedence</a:t>
             </a:r>
             <a:endParaRPr lang="en-US" sz="1400" dirty="0"/>
           </a:p>
@@ -17470,7 +19078,7 @@
                 <a:ea typeface="Calibri" pitchFamily="34" charset="-122"/>
                 <a:cs typeface="Calibri" pitchFamily="34" charset="-120"/>
               </a:rPr>
-              <a:t>Word Labs  •  wordlabs.app  •  Prefix: 'pre-' = before, in advance</a:t>
+              <a:t>Word Labs  •  wordlabs.app  •  Prefix: 'pre-' = before</a:t>
             </a:r>
             <a:endParaRPr lang="en-US" sz="800" dirty="0"/>
           </a:p>
@@ -17609,7 +19217,7 @@
                 <a:ea typeface="Trebuchet MS" pitchFamily="34" charset="-122"/>
                 <a:cs typeface="Trebuchet MS" pitchFamily="34" charset="-120"/>
               </a:rPr>
-              <a:t>predict</a:t>
+              <a:t>precursor</a:t>
             </a:r>
             <a:endParaRPr lang="en-US" sz="2800" dirty="0"/>
           </a:p>
@@ -18297,7 +19905,7 @@
                 <a:ea typeface="Calibri" pitchFamily="34" charset="-122"/>
                 <a:cs typeface="Calibri" pitchFamily="34" charset="-120"/>
               </a:rPr>
-              <a:t>Word Labs  •  wordlabs.app  •  Prefix: 'pre-' = before, in advance</a:t>
+              <a:t>Word Labs  •  wordlabs.app  •  Prefix: 'pre-' = before</a:t>
             </a:r>
             <a:endParaRPr lang="en-US" sz="800" dirty="0"/>
           </a:p>
@@ -18436,7 +20044,7 @@
                 <a:ea typeface="Trebuchet MS" pitchFamily="34" charset="-122"/>
                 <a:cs typeface="Trebuchet MS" pitchFamily="34" charset="-120"/>
               </a:rPr>
-              <a:t>predict</a:t>
+              <a:t>precursor</a:t>
             </a:r>
             <a:endParaRPr lang="en-US" sz="2800" dirty="0"/>
           </a:p>
@@ -18516,7 +20124,7 @@
         </p:nvSpPr>
         <p:spPr>
           <a:xfrm>
-            <a:off x="2938272" y="2258568"/>
+            <a:off x="2221992" y="2258568"/>
             <a:ext cx="1828800" cy="292608"/>
           </a:xfrm>
           <a:prstGeom prst="rect">
@@ -18550,7 +20158,7 @@
         </p:nvSpPr>
         <p:spPr>
           <a:xfrm>
-            <a:off x="2938272" y="2258568"/>
+            <a:off x="2221992" y="2258568"/>
             <a:ext cx="1828800" cy="292608"/>
           </a:xfrm>
           <a:prstGeom prst="rect">
@@ -18589,7 +20197,7 @@
         </p:nvSpPr>
         <p:spPr>
           <a:xfrm>
-            <a:off x="2938272" y="2569464"/>
+            <a:off x="2221992" y="2569464"/>
             <a:ext cx="1828800" cy="201168"/>
           </a:xfrm>
           <a:prstGeom prst="rect">
@@ -18628,7 +20236,7 @@
         </p:nvSpPr>
         <p:spPr>
           <a:xfrm>
-            <a:off x="5803392" y="2258568"/>
+            <a:off x="4370832" y="2258568"/>
             <a:ext cx="1828800" cy="292608"/>
           </a:xfrm>
           <a:prstGeom prst="rect">
@@ -18662,7 +20270,7 @@
         </p:nvSpPr>
         <p:spPr>
           <a:xfrm>
-            <a:off x="5803392" y="2258568"/>
+            <a:off x="4370832" y="2258568"/>
             <a:ext cx="1828800" cy="292608"/>
           </a:xfrm>
           <a:prstGeom prst="rect">
@@ -18687,7 +20295,7 @@
                 <a:ea typeface="Trebuchet MS" pitchFamily="34" charset="-122"/>
                 <a:cs typeface="Trebuchet MS" pitchFamily="34" charset="-120"/>
               </a:rPr>
-              <a:t>dict</a:t>
+              <a:t>curs</a:t>
             </a:r>
             <a:endParaRPr lang="en-US" sz="1300" dirty="0"/>
           </a:p>
@@ -18701,7 +20309,7 @@
         </p:nvSpPr>
         <p:spPr>
           <a:xfrm>
-            <a:off x="5803392" y="2569464"/>
+            <a:off x="4370832" y="2569464"/>
             <a:ext cx="1828800" cy="201168"/>
           </a:xfrm>
           <a:prstGeom prst="rect">
@@ -18726,7 +20334,7 @@
                 <a:ea typeface="Calibri" pitchFamily="34" charset="-122"/>
                 <a:cs typeface="Calibri" pitchFamily="34" charset="-120"/>
               </a:rPr>
-              <a:t>to say or tell</a:t>
+              <a:t>run; go</a:t>
             </a:r>
             <a:endParaRPr lang="en-US" sz="850" dirty="0"/>
           </a:p>
@@ -18735,6 +20343,118 @@
       <p:sp>
         <p:nvSpPr>
           <p:cNvPr id="22" name="Shape 20"/>
+          <p:cNvSpPr/>
+          <p:nvPr/>
+        </p:nvSpPr>
+        <p:spPr>
+          <a:xfrm>
+            <a:off x="6519672" y="2258568"/>
+            <a:ext cx="1828800" cy="292608"/>
+          </a:xfrm>
+          <a:prstGeom prst="rect">
+            <a:avLst>
+              <a:gd name="adj" fmla="val 25000"/>
+            </a:avLst>
+          </a:prstGeom>
+          <a:solidFill>
+            <a:srgbClr val="FCE7F3"/>
+          </a:solidFill>
+          <a:ln w="19050">
+            <a:solidFill>
+              <a:srgbClr val="DB2777"/>
+            </a:solidFill>
+            <a:prstDash val="solid"/>
+          </a:ln>
+          <a:effectLst>
+            <a:outerShdw sx="100000" sy="100000" kx="0" ky="0" algn="bl" rotWithShape="0" blurRad="101600" dist="38100" dir="8100000">
+              <a:srgbClr val="000000">
+                <a:alpha val="12000"/>
+              </a:srgbClr>
+            </a:outerShdw>
+          </a:effectLst>
+        </p:spPr>
+      </p:sp>
+      <p:sp>
+        <p:nvSpPr>
+          <p:cNvPr id="23" name="Text 21"/>
+          <p:cNvSpPr/>
+          <p:nvPr/>
+        </p:nvSpPr>
+        <p:spPr>
+          <a:xfrm>
+            <a:off x="6519672" y="2258568"/>
+            <a:ext cx="1828800" cy="292608"/>
+          </a:xfrm>
+          <a:prstGeom prst="rect">
+            <a:avLst/>
+          </a:prstGeom>
+          <a:noFill/>
+          <a:ln/>
+        </p:spPr>
+        <p:txBody>
+          <a:bodyPr wrap="square" lIns="0" tIns="0" rIns="0" bIns="0" rtlCol="0" anchor="ctr"/>
+          <a:lstStyle/>
+          <a:p>
+            <a:pPr algn="ctr" indent="0" marL="0">
+              <a:buNone/>
+            </a:pPr>
+            <a:r>
+              <a:rPr lang="en-US" sz="1300" b="1" dirty="0">
+                <a:solidFill>
+                  <a:srgbClr val="9D174D"/>
+                </a:solidFill>
+                <a:latin typeface="Trebuchet MS" pitchFamily="34" charset="0"/>
+                <a:ea typeface="Trebuchet MS" pitchFamily="34" charset="-122"/>
+                <a:cs typeface="Trebuchet MS" pitchFamily="34" charset="-120"/>
+              </a:rPr>
+              <a:t>or</a:t>
+            </a:r>
+            <a:endParaRPr lang="en-US" sz="1300" dirty="0"/>
+          </a:p>
+        </p:txBody>
+      </p:sp>
+      <p:sp>
+        <p:nvSpPr>
+          <p:cNvPr id="24" name="Text 22"/>
+          <p:cNvSpPr/>
+          <p:nvPr/>
+        </p:nvSpPr>
+        <p:spPr>
+          <a:xfrm>
+            <a:off x="6519672" y="2569464"/>
+            <a:ext cx="1828800" cy="201168"/>
+          </a:xfrm>
+          <a:prstGeom prst="rect">
+            <a:avLst/>
+          </a:prstGeom>
+          <a:noFill/>
+          <a:ln/>
+        </p:spPr>
+        <p:txBody>
+          <a:bodyPr wrap="square" lIns="0" tIns="0" rIns="0" bIns="0" rtlCol="0" anchor="t"/>
+          <a:lstStyle/>
+          <a:p>
+            <a:pPr algn="ctr" indent="0" marL="0">
+              <a:buNone/>
+            </a:pPr>
+            <a:r>
+              <a:rPr lang="en-US" sz="850" dirty="0">
+                <a:solidFill>
+                  <a:srgbClr val="475569"/>
+                </a:solidFill>
+                <a:latin typeface="Calibri" pitchFamily="34" charset="0"/>
+                <a:ea typeface="Calibri" pitchFamily="34" charset="-122"/>
+                <a:cs typeface="Calibri" pitchFamily="34" charset="-120"/>
+              </a:rPr>
+              <a:t>person who</a:t>
+            </a:r>
+            <a:endParaRPr lang="en-US" sz="850" dirty="0"/>
+          </a:p>
+        </p:txBody>
+      </p:sp>
+      <p:sp>
+        <p:nvSpPr>
+          <p:cNvPr id="25" name="Shape 23"/>
           <p:cNvSpPr/>
           <p:nvPr/>
         </p:nvSpPr>
@@ -18761,7 +20481,7 @@
       </p:sp>
       <p:sp>
         <p:nvSpPr>
-          <p:cNvPr id="23" name="Text 21"/>
+          <p:cNvPr id="26" name="Text 24"/>
           <p:cNvSpPr/>
           <p:nvPr/>
         </p:nvSpPr>
@@ -18800,7 +20520,7 @@
       </p:sp>
       <p:sp>
         <p:nvSpPr>
-          <p:cNvPr id="24" name="Shape 22"/>
+          <p:cNvPr id="27" name="Shape 25"/>
           <p:cNvSpPr/>
           <p:nvPr/>
         </p:nvSpPr>
@@ -18827,7 +20547,7 @@
       </p:sp>
       <p:sp>
         <p:nvSpPr>
-          <p:cNvPr id="25" name="Text 23"/>
+          <p:cNvPr id="28" name="Text 26"/>
           <p:cNvSpPr/>
           <p:nvPr/>
         </p:nvSpPr>
@@ -18866,7 +20586,7 @@
       </p:sp>
       <p:sp>
         <p:nvSpPr>
-          <p:cNvPr id="26" name="Shape 24"/>
+          <p:cNvPr id="29" name="Shape 27"/>
           <p:cNvSpPr/>
           <p:nvPr/>
         </p:nvSpPr>
@@ -18893,7 +20613,7 @@
       </p:sp>
       <p:sp>
         <p:nvSpPr>
-          <p:cNvPr id="27" name="Text 25"/>
+          <p:cNvPr id="30" name="Text 28"/>
           <p:cNvSpPr/>
           <p:nvPr/>
         </p:nvSpPr>
@@ -18932,7 +20652,7 @@
       </p:sp>
       <p:sp>
         <p:nvSpPr>
-          <p:cNvPr id="28" name="Shape 26"/>
+          <p:cNvPr id="31" name="Shape 29"/>
           <p:cNvSpPr/>
           <p:nvPr/>
         </p:nvSpPr>
@@ -18959,7 +20679,7 @@
       </p:sp>
       <p:sp>
         <p:nvSpPr>
-          <p:cNvPr id="29" name="Text 27"/>
+          <p:cNvPr id="32" name="Text 30"/>
           <p:cNvSpPr/>
           <p:nvPr/>
         </p:nvSpPr>
@@ -19282,7 +21002,7 @@
                 <a:ea typeface="Calibri" pitchFamily="34" charset="-122"/>
                 <a:cs typeface="Calibri" pitchFamily="34" charset="-120"/>
               </a:rPr>
-              <a:t>Word Labs  •  wordlabs.app  •  Prefix: 'pre-' = before, in advance</a:t>
+              <a:t>Word Labs  •  wordlabs.app  •  Prefix: 'pre-' = before</a:t>
             </a:r>
             <a:endParaRPr lang="en-US" sz="800" dirty="0"/>
           </a:p>
@@ -19421,7 +21141,7 @@
                 <a:ea typeface="Trebuchet MS" pitchFamily="34" charset="-122"/>
                 <a:cs typeface="Trebuchet MS" pitchFamily="34" charset="-120"/>
               </a:rPr>
-              <a:t>predict</a:t>
+              <a:t>precursor</a:t>
             </a:r>
             <a:endParaRPr lang="en-US" sz="2800" dirty="0"/>
           </a:p>
@@ -19501,7 +21221,7 @@
         </p:nvSpPr>
         <p:spPr>
           <a:xfrm>
-            <a:off x="2938272" y="2258568"/>
+            <a:off x="2221992" y="2258568"/>
             <a:ext cx="1828800" cy="292608"/>
           </a:xfrm>
           <a:prstGeom prst="rect">
@@ -19535,7 +21255,7 @@
         </p:nvSpPr>
         <p:spPr>
           <a:xfrm>
-            <a:off x="2938272" y="2258568"/>
+            <a:off x="2221992" y="2258568"/>
             <a:ext cx="1828800" cy="292608"/>
           </a:xfrm>
           <a:prstGeom prst="rect">
@@ -19574,7 +21294,7 @@
         </p:nvSpPr>
         <p:spPr>
           <a:xfrm>
-            <a:off x="2938272" y="2569464"/>
+            <a:off x="2221992" y="2569464"/>
             <a:ext cx="1828800" cy="201168"/>
           </a:xfrm>
           <a:prstGeom prst="rect">
@@ -19613,7 +21333,7 @@
         </p:nvSpPr>
         <p:spPr>
           <a:xfrm>
-            <a:off x="5803392" y="2258568"/>
+            <a:off x="4370832" y="2258568"/>
             <a:ext cx="1828800" cy="292608"/>
           </a:xfrm>
           <a:prstGeom prst="rect">
@@ -19647,7 +21367,7 @@
         </p:nvSpPr>
         <p:spPr>
           <a:xfrm>
-            <a:off x="5803392" y="2258568"/>
+            <a:off x="4370832" y="2258568"/>
             <a:ext cx="1828800" cy="292608"/>
           </a:xfrm>
           <a:prstGeom prst="rect">
@@ -19672,7 +21392,7 @@
                 <a:ea typeface="Trebuchet MS" pitchFamily="34" charset="-122"/>
                 <a:cs typeface="Trebuchet MS" pitchFamily="34" charset="-120"/>
               </a:rPr>
-              <a:t>dict</a:t>
+              <a:t>curs</a:t>
             </a:r>
             <a:endParaRPr lang="en-US" sz="1300" dirty="0"/>
           </a:p>
@@ -19686,7 +21406,7 @@
         </p:nvSpPr>
         <p:spPr>
           <a:xfrm>
-            <a:off x="5803392" y="2569464"/>
+            <a:off x="4370832" y="2569464"/>
             <a:ext cx="1828800" cy="201168"/>
           </a:xfrm>
           <a:prstGeom prst="rect">
@@ -19711,7 +21431,7 @@
                 <a:ea typeface="Calibri" pitchFamily="34" charset="-122"/>
                 <a:cs typeface="Calibri" pitchFamily="34" charset="-120"/>
               </a:rPr>
-              <a:t>to say or tell</a:t>
+              <a:t>run; go</a:t>
             </a:r>
             <a:endParaRPr lang="en-US" sz="850" dirty="0"/>
           </a:p>
@@ -19720,6 +21440,118 @@
       <p:sp>
         <p:nvSpPr>
           <p:cNvPr id="22" name="Shape 20"/>
+          <p:cNvSpPr/>
+          <p:nvPr/>
+        </p:nvSpPr>
+        <p:spPr>
+          <a:xfrm>
+            <a:off x="6519672" y="2258568"/>
+            <a:ext cx="1828800" cy="292608"/>
+          </a:xfrm>
+          <a:prstGeom prst="rect">
+            <a:avLst>
+              <a:gd name="adj" fmla="val 25000"/>
+            </a:avLst>
+          </a:prstGeom>
+          <a:solidFill>
+            <a:srgbClr val="FCE7F3"/>
+          </a:solidFill>
+          <a:ln w="19050">
+            <a:solidFill>
+              <a:srgbClr val="DB2777"/>
+            </a:solidFill>
+            <a:prstDash val="solid"/>
+          </a:ln>
+          <a:effectLst>
+            <a:outerShdw sx="100000" sy="100000" kx="0" ky="0" algn="bl" rotWithShape="0" blurRad="101600" dist="38100" dir="8100000">
+              <a:srgbClr val="000000">
+                <a:alpha val="12000"/>
+              </a:srgbClr>
+            </a:outerShdw>
+          </a:effectLst>
+        </p:spPr>
+      </p:sp>
+      <p:sp>
+        <p:nvSpPr>
+          <p:cNvPr id="23" name="Text 21"/>
+          <p:cNvSpPr/>
+          <p:nvPr/>
+        </p:nvSpPr>
+        <p:spPr>
+          <a:xfrm>
+            <a:off x="6519672" y="2258568"/>
+            <a:ext cx="1828800" cy="292608"/>
+          </a:xfrm>
+          <a:prstGeom prst="rect">
+            <a:avLst/>
+          </a:prstGeom>
+          <a:noFill/>
+          <a:ln/>
+        </p:spPr>
+        <p:txBody>
+          <a:bodyPr wrap="square" lIns="0" tIns="0" rIns="0" bIns="0" rtlCol="0" anchor="ctr"/>
+          <a:lstStyle/>
+          <a:p>
+            <a:pPr algn="ctr" indent="0" marL="0">
+              <a:buNone/>
+            </a:pPr>
+            <a:r>
+              <a:rPr lang="en-US" sz="1300" b="1" dirty="0">
+                <a:solidFill>
+                  <a:srgbClr val="9D174D"/>
+                </a:solidFill>
+                <a:latin typeface="Trebuchet MS" pitchFamily="34" charset="0"/>
+                <a:ea typeface="Trebuchet MS" pitchFamily="34" charset="-122"/>
+                <a:cs typeface="Trebuchet MS" pitchFamily="34" charset="-120"/>
+              </a:rPr>
+              <a:t>or</a:t>
+            </a:r>
+            <a:endParaRPr lang="en-US" sz="1300" dirty="0"/>
+          </a:p>
+        </p:txBody>
+      </p:sp>
+      <p:sp>
+        <p:nvSpPr>
+          <p:cNvPr id="24" name="Text 22"/>
+          <p:cNvSpPr/>
+          <p:nvPr/>
+        </p:nvSpPr>
+        <p:spPr>
+          <a:xfrm>
+            <a:off x="6519672" y="2569464"/>
+            <a:ext cx="1828800" cy="201168"/>
+          </a:xfrm>
+          <a:prstGeom prst="rect">
+            <a:avLst/>
+          </a:prstGeom>
+          <a:noFill/>
+          <a:ln/>
+        </p:spPr>
+        <p:txBody>
+          <a:bodyPr wrap="square" lIns="0" tIns="0" rIns="0" bIns="0" rtlCol="0" anchor="t"/>
+          <a:lstStyle/>
+          <a:p>
+            <a:pPr algn="ctr" indent="0" marL="0">
+              <a:buNone/>
+            </a:pPr>
+            <a:r>
+              <a:rPr lang="en-US" sz="850" dirty="0">
+                <a:solidFill>
+                  <a:srgbClr val="475569"/>
+                </a:solidFill>
+                <a:latin typeface="Calibri" pitchFamily="34" charset="0"/>
+                <a:ea typeface="Calibri" pitchFamily="34" charset="-122"/>
+                <a:cs typeface="Calibri" pitchFamily="34" charset="-120"/>
+              </a:rPr>
+              <a:t>person who</a:t>
+            </a:r>
+            <a:endParaRPr lang="en-US" sz="850" dirty="0"/>
+          </a:p>
+        </p:txBody>
+      </p:sp>
+      <p:sp>
+        <p:nvSpPr>
+          <p:cNvPr id="25" name="Shape 23"/>
           <p:cNvSpPr/>
           <p:nvPr/>
         </p:nvSpPr>
@@ -19746,7 +21578,7 @@
       </p:sp>
       <p:sp>
         <p:nvSpPr>
-          <p:cNvPr id="23" name="Text 21"/>
+          <p:cNvPr id="26" name="Text 24"/>
           <p:cNvSpPr/>
           <p:nvPr/>
         </p:nvSpPr>
@@ -19785,7 +21617,7 @@
       </p:sp>
       <p:sp>
         <p:nvSpPr>
-          <p:cNvPr id="24" name="Shape 22"/>
+          <p:cNvPr id="27" name="Shape 25"/>
           <p:cNvSpPr/>
           <p:nvPr/>
         </p:nvSpPr>
@@ -19812,13 +21644,13 @@
       </p:sp>
       <p:sp>
         <p:nvSpPr>
-          <p:cNvPr id="25" name="Shape 23"/>
-          <p:cNvSpPr/>
-          <p:nvPr/>
-        </p:nvSpPr>
-        <p:spPr>
-          <a:xfrm>
-            <a:off x="2999232" y="3364992"/>
+          <p:cNvPr id="28" name="Shape 26"/>
+          <p:cNvSpPr/>
+          <p:nvPr/>
+        </p:nvSpPr>
+        <p:spPr>
+          <a:xfrm>
+            <a:off x="2313432" y="3364992"/>
             <a:ext cx="1645920" cy="475488"/>
           </a:xfrm>
           <a:prstGeom prst="rect">
@@ -19839,13 +21671,13 @@
       </p:sp>
       <p:sp>
         <p:nvSpPr>
-          <p:cNvPr id="26" name="Text 24"/>
-          <p:cNvSpPr/>
-          <p:nvPr/>
-        </p:nvSpPr>
-        <p:spPr>
-          <a:xfrm>
-            <a:off x="2999232" y="3364992"/>
+          <p:cNvPr id="29" name="Text 27"/>
+          <p:cNvSpPr/>
+          <p:nvPr/>
+        </p:nvSpPr>
+        <p:spPr>
+          <a:xfrm>
+            <a:off x="2313432" y="3364992"/>
             <a:ext cx="1645920" cy="475488"/>
           </a:xfrm>
           <a:prstGeom prst="rect">
@@ -19878,14 +21710,14 @@
       </p:sp>
       <p:sp>
         <p:nvSpPr>
-          <p:cNvPr id="27" name="Text 25"/>
-          <p:cNvSpPr/>
-          <p:nvPr/>
-        </p:nvSpPr>
-        <p:spPr>
-          <a:xfrm>
-            <a:off x="4645152" y="3364992"/>
-            <a:ext cx="1097280" cy="475488"/>
+          <p:cNvPr id="30" name="Text 28"/>
+          <p:cNvSpPr/>
+          <p:nvPr/>
+        </p:nvSpPr>
+        <p:spPr>
+          <a:xfrm>
+            <a:off x="3959352" y="3364992"/>
+            <a:ext cx="411480" cy="475488"/>
           </a:xfrm>
           <a:prstGeom prst="rect">
             <a:avLst/>
@@ -19917,13 +21749,13 @@
       </p:sp>
       <p:sp>
         <p:nvSpPr>
-          <p:cNvPr id="28" name="Shape 26"/>
-          <p:cNvSpPr/>
-          <p:nvPr/>
-        </p:nvSpPr>
-        <p:spPr>
-          <a:xfrm>
-            <a:off x="5742432" y="3364992"/>
+          <p:cNvPr id="31" name="Shape 29"/>
+          <p:cNvSpPr/>
+          <p:nvPr/>
+        </p:nvSpPr>
+        <p:spPr>
+          <a:xfrm>
+            <a:off x="4370832" y="3364992"/>
             <a:ext cx="1645920" cy="475488"/>
           </a:xfrm>
           <a:prstGeom prst="rect">
@@ -19944,13 +21776,13 @@
       </p:sp>
       <p:sp>
         <p:nvSpPr>
-          <p:cNvPr id="29" name="Text 27"/>
-          <p:cNvSpPr/>
-          <p:nvPr/>
-        </p:nvSpPr>
-        <p:spPr>
-          <a:xfrm>
-            <a:off x="5742432" y="3364992"/>
+          <p:cNvPr id="32" name="Text 30"/>
+          <p:cNvSpPr/>
+          <p:nvPr/>
+        </p:nvSpPr>
+        <p:spPr>
+          <a:xfrm>
+            <a:off x="4370832" y="3364992"/>
             <a:ext cx="1645920" cy="475488"/>
           </a:xfrm>
           <a:prstGeom prst="rect">
@@ -19975,7 +21807,7 @@
                 <a:ea typeface="Trebuchet MS" pitchFamily="34" charset="-122"/>
                 <a:cs typeface="Trebuchet MS" pitchFamily="34" charset="-120"/>
               </a:rPr>
-              <a:t>dict</a:t>
+              <a:t>cur</a:t>
             </a:r>
             <a:endParaRPr lang="en-US" sz="1400" dirty="0"/>
           </a:p>
@@ -19983,7 +21815,112 @@
       </p:sp>
       <p:sp>
         <p:nvSpPr>
-          <p:cNvPr id="30" name="Shape 28"/>
+          <p:cNvPr id="33" name="Text 31"/>
+          <p:cNvSpPr/>
+          <p:nvPr/>
+        </p:nvSpPr>
+        <p:spPr>
+          <a:xfrm>
+            <a:off x="6016752" y="3364992"/>
+            <a:ext cx="411480" cy="475488"/>
+          </a:xfrm>
+          <a:prstGeom prst="rect">
+            <a:avLst/>
+          </a:prstGeom>
+          <a:noFill/>
+          <a:ln/>
+        </p:spPr>
+        <p:txBody>
+          <a:bodyPr wrap="square" lIns="0" tIns="0" rIns="0" bIns="0" rtlCol="0" anchor="ctr"/>
+          <a:lstStyle/>
+          <a:p>
+            <a:pPr algn="ctr" indent="0" marL="0">
+              <a:buNone/>
+            </a:pPr>
+            <a:r>
+              <a:rPr lang="en-US" sz="1600" b="1" dirty="0">
+                <a:solidFill>
+                  <a:srgbClr val="0D9488"/>
+                </a:solidFill>
+                <a:latin typeface="Trebuchet MS" pitchFamily="34" charset="0"/>
+                <a:ea typeface="Trebuchet MS" pitchFamily="34" charset="-122"/>
+                <a:cs typeface="Trebuchet MS" pitchFamily="34" charset="-120"/>
+              </a:rPr>
+              <a:t>·</a:t>
+            </a:r>
+            <a:endParaRPr lang="en-US" sz="1600" dirty="0"/>
+          </a:p>
+        </p:txBody>
+      </p:sp>
+      <p:sp>
+        <p:nvSpPr>
+          <p:cNvPr id="34" name="Shape 32"/>
+          <p:cNvSpPr/>
+          <p:nvPr/>
+        </p:nvSpPr>
+        <p:spPr>
+          <a:xfrm>
+            <a:off x="6428232" y="3364992"/>
+            <a:ext cx="1645920" cy="475488"/>
+          </a:xfrm>
+          <a:prstGeom prst="rect">
+            <a:avLst>
+              <a:gd name="adj" fmla="val 9615"/>
+            </a:avLst>
+          </a:prstGeom>
+          <a:solidFill>
+            <a:srgbClr val="FFFFFF"/>
+          </a:solidFill>
+          <a:ln w="12700">
+            <a:solidFill>
+              <a:srgbClr val="0D9488"/>
+            </a:solidFill>
+            <a:prstDash val="solid"/>
+          </a:ln>
+        </p:spPr>
+      </p:sp>
+      <p:sp>
+        <p:nvSpPr>
+          <p:cNvPr id="35" name="Text 33"/>
+          <p:cNvSpPr/>
+          <p:nvPr/>
+        </p:nvSpPr>
+        <p:spPr>
+          <a:xfrm>
+            <a:off x="6428232" y="3364992"/>
+            <a:ext cx="1645920" cy="475488"/>
+          </a:xfrm>
+          <a:prstGeom prst="rect">
+            <a:avLst/>
+          </a:prstGeom>
+          <a:noFill/>
+          <a:ln/>
+        </p:spPr>
+        <p:txBody>
+          <a:bodyPr wrap="square" lIns="0" tIns="0" rIns="0" bIns="0" rtlCol="0" anchor="ctr"/>
+          <a:lstStyle/>
+          <a:p>
+            <a:pPr algn="ctr" indent="0" marL="0">
+              <a:buNone/>
+            </a:pPr>
+            <a:r>
+              <a:rPr lang="en-US" sz="1400" b="1" dirty="0">
+                <a:solidFill>
+                  <a:srgbClr val="0D9488"/>
+                </a:solidFill>
+                <a:latin typeface="Trebuchet MS" pitchFamily="34" charset="0"/>
+                <a:ea typeface="Trebuchet MS" pitchFamily="34" charset="-122"/>
+                <a:cs typeface="Trebuchet MS" pitchFamily="34" charset="-120"/>
+              </a:rPr>
+              <a:t>sor</a:t>
+            </a:r>
+            <a:endParaRPr lang="en-US" sz="1400" dirty="0"/>
+          </a:p>
+        </p:txBody>
+      </p:sp>
+      <p:sp>
+        <p:nvSpPr>
+          <p:cNvPr id="36" name="Shape 34"/>
           <p:cNvSpPr/>
           <p:nvPr/>
         </p:nvSpPr>
@@ -20010,7 +21947,7 @@
       </p:sp>
       <p:sp>
         <p:nvSpPr>
-          <p:cNvPr id="31" name="Text 29"/>
+          <p:cNvPr id="37" name="Text 35"/>
           <p:cNvSpPr/>
           <p:nvPr/>
         </p:nvSpPr>
@@ -20049,7 +21986,7 @@
       </p:sp>
       <p:sp>
         <p:nvSpPr>
-          <p:cNvPr id="32" name="Shape 30"/>
+          <p:cNvPr id="38" name="Shape 36"/>
           <p:cNvSpPr/>
           <p:nvPr/>
         </p:nvSpPr>
@@ -20076,7 +22013,7 @@
       </p:sp>
       <p:sp>
         <p:nvSpPr>
-          <p:cNvPr id="33" name="Text 31"/>
+          <p:cNvPr id="39" name="Text 37"/>
           <p:cNvSpPr/>
           <p:nvPr/>
         </p:nvSpPr>
@@ -20399,7 +22336,7 @@
                 <a:ea typeface="Calibri" pitchFamily="34" charset="-122"/>
                 <a:cs typeface="Calibri" pitchFamily="34" charset="-120"/>
               </a:rPr>
-              <a:t>Word Labs  •  wordlabs.app  •  Prefix: 'pre-' = before, in advance</a:t>
+              <a:t>Word Labs  •  wordlabs.app  •  Prefix: 'pre-' = before</a:t>
             </a:r>
             <a:endParaRPr lang="en-US" sz="800" dirty="0"/>
           </a:p>
@@ -20538,7 +22475,7 @@
                 <a:ea typeface="Trebuchet MS" pitchFamily="34" charset="-122"/>
                 <a:cs typeface="Trebuchet MS" pitchFamily="34" charset="-120"/>
               </a:rPr>
-              <a:t>predict</a:t>
+              <a:t>precursor</a:t>
             </a:r>
             <a:endParaRPr lang="en-US" sz="2800" dirty="0"/>
           </a:p>
@@ -20618,7 +22555,7 @@
         </p:nvSpPr>
         <p:spPr>
           <a:xfrm>
-            <a:off x="2938272" y="2258568"/>
+            <a:off x="2221992" y="2258568"/>
             <a:ext cx="1828800" cy="292608"/>
           </a:xfrm>
           <a:prstGeom prst="rect">
@@ -20652,7 +22589,7 @@
         </p:nvSpPr>
         <p:spPr>
           <a:xfrm>
-            <a:off x="2938272" y="2258568"/>
+            <a:off x="2221992" y="2258568"/>
             <a:ext cx="1828800" cy="292608"/>
           </a:xfrm>
           <a:prstGeom prst="rect">
@@ -20691,7 +22628,7 @@
         </p:nvSpPr>
         <p:spPr>
           <a:xfrm>
-            <a:off x="2938272" y="2569464"/>
+            <a:off x="2221992" y="2569464"/>
             <a:ext cx="1828800" cy="201168"/>
           </a:xfrm>
           <a:prstGeom prst="rect">
@@ -20730,7 +22667,7 @@
         </p:nvSpPr>
         <p:spPr>
           <a:xfrm>
-            <a:off x="5803392" y="2258568"/>
+            <a:off x="4370832" y="2258568"/>
             <a:ext cx="1828800" cy="292608"/>
           </a:xfrm>
           <a:prstGeom prst="rect">
@@ -20764,7 +22701,7 @@
         </p:nvSpPr>
         <p:spPr>
           <a:xfrm>
-            <a:off x="5803392" y="2258568"/>
+            <a:off x="4370832" y="2258568"/>
             <a:ext cx="1828800" cy="292608"/>
           </a:xfrm>
           <a:prstGeom prst="rect">
@@ -20789,7 +22726,7 @@
                 <a:ea typeface="Trebuchet MS" pitchFamily="34" charset="-122"/>
                 <a:cs typeface="Trebuchet MS" pitchFamily="34" charset="-120"/>
               </a:rPr>
-              <a:t>dict</a:t>
+              <a:t>curs</a:t>
             </a:r>
             <a:endParaRPr lang="en-US" sz="1300" dirty="0"/>
           </a:p>
@@ -20803,7 +22740,7 @@
         </p:nvSpPr>
         <p:spPr>
           <a:xfrm>
-            <a:off x="5803392" y="2569464"/>
+            <a:off x="4370832" y="2569464"/>
             <a:ext cx="1828800" cy="201168"/>
           </a:xfrm>
           <a:prstGeom prst="rect">
@@ -20828,7 +22765,7 @@
                 <a:ea typeface="Calibri" pitchFamily="34" charset="-122"/>
                 <a:cs typeface="Calibri" pitchFamily="34" charset="-120"/>
               </a:rPr>
-              <a:t>to say or tell</a:t>
+              <a:t>run; go</a:t>
             </a:r>
             <a:endParaRPr lang="en-US" sz="850" dirty="0"/>
           </a:p>
@@ -20837,6 +22774,118 @@
       <p:sp>
         <p:nvSpPr>
           <p:cNvPr id="22" name="Shape 20"/>
+          <p:cNvSpPr/>
+          <p:nvPr/>
+        </p:nvSpPr>
+        <p:spPr>
+          <a:xfrm>
+            <a:off x="6519672" y="2258568"/>
+            <a:ext cx="1828800" cy="292608"/>
+          </a:xfrm>
+          <a:prstGeom prst="rect">
+            <a:avLst>
+              <a:gd name="adj" fmla="val 25000"/>
+            </a:avLst>
+          </a:prstGeom>
+          <a:solidFill>
+            <a:srgbClr val="FCE7F3"/>
+          </a:solidFill>
+          <a:ln w="19050">
+            <a:solidFill>
+              <a:srgbClr val="DB2777"/>
+            </a:solidFill>
+            <a:prstDash val="solid"/>
+          </a:ln>
+          <a:effectLst>
+            <a:outerShdw sx="100000" sy="100000" kx="0" ky="0" algn="bl" rotWithShape="0" blurRad="101600" dist="38100" dir="8100000">
+              <a:srgbClr val="000000">
+                <a:alpha val="12000"/>
+              </a:srgbClr>
+            </a:outerShdw>
+          </a:effectLst>
+        </p:spPr>
+      </p:sp>
+      <p:sp>
+        <p:nvSpPr>
+          <p:cNvPr id="23" name="Text 21"/>
+          <p:cNvSpPr/>
+          <p:nvPr/>
+        </p:nvSpPr>
+        <p:spPr>
+          <a:xfrm>
+            <a:off x="6519672" y="2258568"/>
+            <a:ext cx="1828800" cy="292608"/>
+          </a:xfrm>
+          <a:prstGeom prst="rect">
+            <a:avLst/>
+          </a:prstGeom>
+          <a:noFill/>
+          <a:ln/>
+        </p:spPr>
+        <p:txBody>
+          <a:bodyPr wrap="square" lIns="0" tIns="0" rIns="0" bIns="0" rtlCol="0" anchor="ctr"/>
+          <a:lstStyle/>
+          <a:p>
+            <a:pPr algn="ctr" indent="0" marL="0">
+              <a:buNone/>
+            </a:pPr>
+            <a:r>
+              <a:rPr lang="en-US" sz="1300" b="1" dirty="0">
+                <a:solidFill>
+                  <a:srgbClr val="9D174D"/>
+                </a:solidFill>
+                <a:latin typeface="Trebuchet MS" pitchFamily="34" charset="0"/>
+                <a:ea typeface="Trebuchet MS" pitchFamily="34" charset="-122"/>
+                <a:cs typeface="Trebuchet MS" pitchFamily="34" charset="-120"/>
+              </a:rPr>
+              <a:t>or</a:t>
+            </a:r>
+            <a:endParaRPr lang="en-US" sz="1300" dirty="0"/>
+          </a:p>
+        </p:txBody>
+      </p:sp>
+      <p:sp>
+        <p:nvSpPr>
+          <p:cNvPr id="24" name="Text 22"/>
+          <p:cNvSpPr/>
+          <p:nvPr/>
+        </p:nvSpPr>
+        <p:spPr>
+          <a:xfrm>
+            <a:off x="6519672" y="2569464"/>
+            <a:ext cx="1828800" cy="201168"/>
+          </a:xfrm>
+          <a:prstGeom prst="rect">
+            <a:avLst/>
+          </a:prstGeom>
+          <a:noFill/>
+          <a:ln/>
+        </p:spPr>
+        <p:txBody>
+          <a:bodyPr wrap="square" lIns="0" tIns="0" rIns="0" bIns="0" rtlCol="0" anchor="t"/>
+          <a:lstStyle/>
+          <a:p>
+            <a:pPr algn="ctr" indent="0" marL="0">
+              <a:buNone/>
+            </a:pPr>
+            <a:r>
+              <a:rPr lang="en-US" sz="850" dirty="0">
+                <a:solidFill>
+                  <a:srgbClr val="475569"/>
+                </a:solidFill>
+                <a:latin typeface="Calibri" pitchFamily="34" charset="0"/>
+                <a:ea typeface="Calibri" pitchFamily="34" charset="-122"/>
+                <a:cs typeface="Calibri" pitchFamily="34" charset="-120"/>
+              </a:rPr>
+              <a:t>person who</a:t>
+            </a:r>
+            <a:endParaRPr lang="en-US" sz="850" dirty="0"/>
+          </a:p>
+        </p:txBody>
+      </p:sp>
+      <p:sp>
+        <p:nvSpPr>
+          <p:cNvPr id="25" name="Shape 23"/>
           <p:cNvSpPr/>
           <p:nvPr/>
         </p:nvSpPr>
@@ -20863,7 +22912,7 @@
       </p:sp>
       <p:sp>
         <p:nvSpPr>
-          <p:cNvPr id="23" name="Text 21"/>
+          <p:cNvPr id="26" name="Text 24"/>
           <p:cNvSpPr/>
           <p:nvPr/>
         </p:nvSpPr>
@@ -20902,7 +22951,7 @@
       </p:sp>
       <p:sp>
         <p:nvSpPr>
-          <p:cNvPr id="24" name="Shape 22"/>
+          <p:cNvPr id="27" name="Shape 25"/>
           <p:cNvSpPr/>
           <p:nvPr/>
         </p:nvSpPr>
@@ -20929,13 +22978,13 @@
       </p:sp>
       <p:sp>
         <p:nvSpPr>
-          <p:cNvPr id="25" name="Shape 23"/>
-          <p:cNvSpPr/>
-          <p:nvPr/>
-        </p:nvSpPr>
-        <p:spPr>
-          <a:xfrm>
-            <a:off x="2999232" y="3364992"/>
+          <p:cNvPr id="28" name="Shape 26"/>
+          <p:cNvSpPr/>
+          <p:nvPr/>
+        </p:nvSpPr>
+        <p:spPr>
+          <a:xfrm>
+            <a:off x="2313432" y="3364992"/>
             <a:ext cx="1645920" cy="475488"/>
           </a:xfrm>
           <a:prstGeom prst="rect">
@@ -20956,13 +23005,13 @@
       </p:sp>
       <p:sp>
         <p:nvSpPr>
-          <p:cNvPr id="26" name="Text 24"/>
-          <p:cNvSpPr/>
-          <p:nvPr/>
-        </p:nvSpPr>
-        <p:spPr>
-          <a:xfrm>
-            <a:off x="2999232" y="3364992"/>
+          <p:cNvPr id="29" name="Text 27"/>
+          <p:cNvSpPr/>
+          <p:nvPr/>
+        </p:nvSpPr>
+        <p:spPr>
+          <a:xfrm>
+            <a:off x="2313432" y="3364992"/>
             <a:ext cx="1645920" cy="475488"/>
           </a:xfrm>
           <a:prstGeom prst="rect">
@@ -20995,14 +23044,14 @@
       </p:sp>
       <p:sp>
         <p:nvSpPr>
-          <p:cNvPr id="27" name="Text 25"/>
-          <p:cNvSpPr/>
-          <p:nvPr/>
-        </p:nvSpPr>
-        <p:spPr>
-          <a:xfrm>
-            <a:off x="4645152" y="3364992"/>
-            <a:ext cx="1097280" cy="475488"/>
+          <p:cNvPr id="30" name="Text 28"/>
+          <p:cNvSpPr/>
+          <p:nvPr/>
+        </p:nvSpPr>
+        <p:spPr>
+          <a:xfrm>
+            <a:off x="3959352" y="3364992"/>
+            <a:ext cx="411480" cy="475488"/>
           </a:xfrm>
           <a:prstGeom prst="rect">
             <a:avLst/>
@@ -21034,13 +23083,13 @@
       </p:sp>
       <p:sp>
         <p:nvSpPr>
-          <p:cNvPr id="28" name="Shape 26"/>
-          <p:cNvSpPr/>
-          <p:nvPr/>
-        </p:nvSpPr>
-        <p:spPr>
-          <a:xfrm>
-            <a:off x="5742432" y="3364992"/>
+          <p:cNvPr id="31" name="Shape 29"/>
+          <p:cNvSpPr/>
+          <p:nvPr/>
+        </p:nvSpPr>
+        <p:spPr>
+          <a:xfrm>
+            <a:off x="4370832" y="3364992"/>
             <a:ext cx="1645920" cy="475488"/>
           </a:xfrm>
           <a:prstGeom prst="rect">
@@ -21061,13 +23110,13 @@
       </p:sp>
       <p:sp>
         <p:nvSpPr>
-          <p:cNvPr id="29" name="Text 27"/>
-          <p:cNvSpPr/>
-          <p:nvPr/>
-        </p:nvSpPr>
-        <p:spPr>
-          <a:xfrm>
-            <a:off x="5742432" y="3364992"/>
+          <p:cNvPr id="32" name="Text 30"/>
+          <p:cNvSpPr/>
+          <p:nvPr/>
+        </p:nvSpPr>
+        <p:spPr>
+          <a:xfrm>
+            <a:off x="4370832" y="3364992"/>
             <a:ext cx="1645920" cy="475488"/>
           </a:xfrm>
           <a:prstGeom prst="rect">
@@ -21092,7 +23141,7 @@
                 <a:ea typeface="Trebuchet MS" pitchFamily="34" charset="-122"/>
                 <a:cs typeface="Trebuchet MS" pitchFamily="34" charset="-120"/>
               </a:rPr>
-              <a:t>dict</a:t>
+              <a:t>cur</a:t>
             </a:r>
             <a:endParaRPr lang="en-US" sz="1400" dirty="0"/>
           </a:p>
@@ -21100,7 +23149,112 @@
       </p:sp>
       <p:sp>
         <p:nvSpPr>
-          <p:cNvPr id="30" name="Shape 28"/>
+          <p:cNvPr id="33" name="Text 31"/>
+          <p:cNvSpPr/>
+          <p:nvPr/>
+        </p:nvSpPr>
+        <p:spPr>
+          <a:xfrm>
+            <a:off x="6016752" y="3364992"/>
+            <a:ext cx="411480" cy="475488"/>
+          </a:xfrm>
+          <a:prstGeom prst="rect">
+            <a:avLst/>
+          </a:prstGeom>
+          <a:noFill/>
+          <a:ln/>
+        </p:spPr>
+        <p:txBody>
+          <a:bodyPr wrap="square" lIns="0" tIns="0" rIns="0" bIns="0" rtlCol="0" anchor="ctr"/>
+          <a:lstStyle/>
+          <a:p>
+            <a:pPr algn="ctr" indent="0" marL="0">
+              <a:buNone/>
+            </a:pPr>
+            <a:r>
+              <a:rPr lang="en-US" sz="1600" b="1" dirty="0">
+                <a:solidFill>
+                  <a:srgbClr val="0D9488"/>
+                </a:solidFill>
+                <a:latin typeface="Trebuchet MS" pitchFamily="34" charset="0"/>
+                <a:ea typeface="Trebuchet MS" pitchFamily="34" charset="-122"/>
+                <a:cs typeface="Trebuchet MS" pitchFamily="34" charset="-120"/>
+              </a:rPr>
+              <a:t>·</a:t>
+            </a:r>
+            <a:endParaRPr lang="en-US" sz="1600" dirty="0"/>
+          </a:p>
+        </p:txBody>
+      </p:sp>
+      <p:sp>
+        <p:nvSpPr>
+          <p:cNvPr id="34" name="Shape 32"/>
+          <p:cNvSpPr/>
+          <p:nvPr/>
+        </p:nvSpPr>
+        <p:spPr>
+          <a:xfrm>
+            <a:off x="6428232" y="3364992"/>
+            <a:ext cx="1645920" cy="475488"/>
+          </a:xfrm>
+          <a:prstGeom prst="rect">
+            <a:avLst>
+              <a:gd name="adj" fmla="val 9615"/>
+            </a:avLst>
+          </a:prstGeom>
+          <a:solidFill>
+            <a:srgbClr val="FFFFFF"/>
+          </a:solidFill>
+          <a:ln w="12700">
+            <a:solidFill>
+              <a:srgbClr val="0D9488"/>
+            </a:solidFill>
+            <a:prstDash val="solid"/>
+          </a:ln>
+        </p:spPr>
+      </p:sp>
+      <p:sp>
+        <p:nvSpPr>
+          <p:cNvPr id="35" name="Text 33"/>
+          <p:cNvSpPr/>
+          <p:nvPr/>
+        </p:nvSpPr>
+        <p:spPr>
+          <a:xfrm>
+            <a:off x="6428232" y="3364992"/>
+            <a:ext cx="1645920" cy="475488"/>
+          </a:xfrm>
+          <a:prstGeom prst="rect">
+            <a:avLst/>
+          </a:prstGeom>
+          <a:noFill/>
+          <a:ln/>
+        </p:spPr>
+        <p:txBody>
+          <a:bodyPr wrap="square" lIns="0" tIns="0" rIns="0" bIns="0" rtlCol="0" anchor="ctr"/>
+          <a:lstStyle/>
+          <a:p>
+            <a:pPr algn="ctr" indent="0" marL="0">
+              <a:buNone/>
+            </a:pPr>
+            <a:r>
+              <a:rPr lang="en-US" sz="1400" b="1" dirty="0">
+                <a:solidFill>
+                  <a:srgbClr val="0D9488"/>
+                </a:solidFill>
+                <a:latin typeface="Trebuchet MS" pitchFamily="34" charset="0"/>
+                <a:ea typeface="Trebuchet MS" pitchFamily="34" charset="-122"/>
+                <a:cs typeface="Trebuchet MS" pitchFamily="34" charset="-120"/>
+              </a:rPr>
+              <a:t>sor</a:t>
+            </a:r>
+            <a:endParaRPr lang="en-US" sz="1400" dirty="0"/>
+          </a:p>
+        </p:txBody>
+      </p:sp>
+      <p:sp>
+        <p:nvSpPr>
+          <p:cNvPr id="36" name="Shape 34"/>
           <p:cNvSpPr/>
           <p:nvPr/>
         </p:nvSpPr>
@@ -21127,7 +23281,7 @@
       </p:sp>
       <p:sp>
         <p:nvSpPr>
-          <p:cNvPr id="31" name="Text 29"/>
+          <p:cNvPr id="37" name="Text 35"/>
           <p:cNvSpPr/>
           <p:nvPr/>
         </p:nvSpPr>
@@ -21166,7 +23320,7 @@
       </p:sp>
       <p:sp>
         <p:nvSpPr>
-          <p:cNvPr id="32" name="Shape 30"/>
+          <p:cNvPr id="38" name="Shape 36"/>
           <p:cNvSpPr/>
           <p:nvPr/>
         </p:nvSpPr>
@@ -21193,13 +23347,13 @@
       </p:sp>
       <p:sp>
         <p:nvSpPr>
-          <p:cNvPr id="33" name="Shape 31"/>
-          <p:cNvSpPr/>
-          <p:nvPr/>
-        </p:nvSpPr>
-        <p:spPr>
-          <a:xfrm>
-            <a:off x="2254649" y="4169664"/>
+          <p:cNvPr id="39" name="Shape 37"/>
+          <p:cNvSpPr/>
+          <p:nvPr/>
+        </p:nvSpPr>
+        <p:spPr>
+          <a:xfrm>
+            <a:off x="2124837" y="4169664"/>
             <a:ext cx="685800" cy="475488"/>
           </a:xfrm>
           <a:prstGeom prst="rect">
@@ -21220,13 +23374,13 @@
       </p:sp>
       <p:sp>
         <p:nvSpPr>
-          <p:cNvPr id="34" name="Text 32"/>
-          <p:cNvSpPr/>
-          <p:nvPr/>
-        </p:nvSpPr>
-        <p:spPr>
-          <a:xfrm>
-            <a:off x="2254649" y="4169664"/>
+          <p:cNvPr id="40" name="Text 38"/>
+          <p:cNvSpPr/>
+          <p:nvPr/>
+        </p:nvSpPr>
+        <p:spPr>
+          <a:xfrm>
+            <a:off x="2124837" y="4169664"/>
             <a:ext cx="685800" cy="475488"/>
           </a:xfrm>
           <a:prstGeom prst="rect">
@@ -21251,7 +23405,7 @@
                 <a:ea typeface="Trebuchet MS" pitchFamily="34" charset="-122"/>
                 <a:cs typeface="Trebuchet MS" pitchFamily="34" charset="-120"/>
               </a:rPr>
-              <a:t>pr</a:t>
+              <a:t>p</a:t>
             </a:r>
             <a:endParaRPr lang="en-US" sz="900" dirty="0"/>
           </a:p>
@@ -21259,13 +23413,13 @@
       </p:sp>
       <p:sp>
         <p:nvSpPr>
-          <p:cNvPr id="35" name="Shape 33"/>
-          <p:cNvSpPr/>
-          <p:nvPr/>
-        </p:nvSpPr>
-        <p:spPr>
-          <a:xfrm>
-            <a:off x="3293146" y="4169664"/>
+          <p:cNvPr id="41" name="Shape 39"/>
+          <p:cNvSpPr/>
+          <p:nvPr/>
+        </p:nvSpPr>
+        <p:spPr>
+          <a:xfrm>
+            <a:off x="3033522" y="4169664"/>
             <a:ext cx="685800" cy="475488"/>
           </a:xfrm>
           <a:prstGeom prst="rect">
@@ -21286,13 +23440,13 @@
       </p:sp>
       <p:sp>
         <p:nvSpPr>
-          <p:cNvPr id="36" name="Text 34"/>
-          <p:cNvSpPr/>
-          <p:nvPr/>
-        </p:nvSpPr>
-        <p:spPr>
-          <a:xfrm>
-            <a:off x="3293146" y="4169664"/>
+          <p:cNvPr id="42" name="Text 40"/>
+          <p:cNvSpPr/>
+          <p:nvPr/>
+        </p:nvSpPr>
+        <p:spPr>
+          <a:xfrm>
+            <a:off x="3033522" y="4169664"/>
             <a:ext cx="685800" cy="475488"/>
           </a:xfrm>
           <a:prstGeom prst="rect">
@@ -21317,7 +23471,7 @@
                 <a:ea typeface="Trebuchet MS" pitchFamily="34" charset="-122"/>
                 <a:cs typeface="Trebuchet MS" pitchFamily="34" charset="-120"/>
               </a:rPr>
-              <a:t>e</a:t>
+              <a:t>r</a:t>
             </a:r>
             <a:endParaRPr lang="en-US" sz="900" dirty="0"/>
           </a:p>
@@ -21325,13 +23479,13 @@
       </p:sp>
       <p:sp>
         <p:nvSpPr>
-          <p:cNvPr id="37" name="Shape 35"/>
-          <p:cNvSpPr/>
-          <p:nvPr/>
-        </p:nvSpPr>
-        <p:spPr>
-          <a:xfrm>
-            <a:off x="4331643" y="4169664"/>
+          <p:cNvPr id="43" name="Shape 41"/>
+          <p:cNvSpPr/>
+          <p:nvPr/>
+        </p:nvSpPr>
+        <p:spPr>
+          <a:xfrm>
+            <a:off x="3942207" y="4169664"/>
             <a:ext cx="685800" cy="475488"/>
           </a:xfrm>
           <a:prstGeom prst="rect">
@@ -21352,13 +23506,13 @@
       </p:sp>
       <p:sp>
         <p:nvSpPr>
-          <p:cNvPr id="38" name="Text 36"/>
-          <p:cNvSpPr/>
-          <p:nvPr/>
-        </p:nvSpPr>
-        <p:spPr>
-          <a:xfrm>
-            <a:off x="4331643" y="4169664"/>
+          <p:cNvPr id="44" name="Text 42"/>
+          <p:cNvSpPr/>
+          <p:nvPr/>
+        </p:nvSpPr>
+        <p:spPr>
+          <a:xfrm>
+            <a:off x="3942207" y="4169664"/>
             <a:ext cx="685800" cy="475488"/>
           </a:xfrm>
           <a:prstGeom prst="rect">
@@ -21383,7 +23537,7 @@
                 <a:ea typeface="Trebuchet MS" pitchFamily="34" charset="-122"/>
                 <a:cs typeface="Trebuchet MS" pitchFamily="34" charset="-120"/>
               </a:rPr>
-              <a:t>d</a:t>
+              <a:t>e</a:t>
             </a:r>
             <a:endParaRPr lang="en-US" sz="900" dirty="0"/>
           </a:p>
@@ -21391,13 +23545,13 @@
       </p:sp>
       <p:sp>
         <p:nvSpPr>
-          <p:cNvPr id="39" name="Shape 37"/>
-          <p:cNvSpPr/>
-          <p:nvPr/>
-        </p:nvSpPr>
-        <p:spPr>
-          <a:xfrm>
-            <a:off x="5370141" y="4169664"/>
+          <p:cNvPr id="45" name="Shape 43"/>
+          <p:cNvSpPr/>
+          <p:nvPr/>
+        </p:nvSpPr>
+        <p:spPr>
+          <a:xfrm>
+            <a:off x="4850892" y="4169664"/>
             <a:ext cx="685800" cy="475488"/>
           </a:xfrm>
           <a:prstGeom prst="rect">
@@ -21418,13 +23572,13 @@
       </p:sp>
       <p:sp>
         <p:nvSpPr>
-          <p:cNvPr id="40" name="Text 38"/>
-          <p:cNvSpPr/>
-          <p:nvPr/>
-        </p:nvSpPr>
-        <p:spPr>
-          <a:xfrm>
-            <a:off x="5370141" y="4169664"/>
+          <p:cNvPr id="46" name="Text 44"/>
+          <p:cNvSpPr/>
+          <p:nvPr/>
+        </p:nvSpPr>
+        <p:spPr>
+          <a:xfrm>
+            <a:off x="4850892" y="4169664"/>
             <a:ext cx="685800" cy="475488"/>
           </a:xfrm>
           <a:prstGeom prst="rect">
@@ -21449,7 +23603,7 @@
                 <a:ea typeface="Trebuchet MS" pitchFamily="34" charset="-122"/>
                 <a:cs typeface="Trebuchet MS" pitchFamily="34" charset="-120"/>
               </a:rPr>
-              <a:t>i</a:t>
+              <a:t>c</a:t>
             </a:r>
             <a:endParaRPr lang="en-US" sz="900" dirty="0"/>
           </a:p>
@@ -21457,13 +23611,13 @@
       </p:sp>
       <p:sp>
         <p:nvSpPr>
-          <p:cNvPr id="41" name="Shape 39"/>
-          <p:cNvSpPr/>
-          <p:nvPr/>
-        </p:nvSpPr>
-        <p:spPr>
-          <a:xfrm>
-            <a:off x="6408638" y="4169664"/>
+          <p:cNvPr id="47" name="Shape 45"/>
+          <p:cNvSpPr/>
+          <p:nvPr/>
+        </p:nvSpPr>
+        <p:spPr>
+          <a:xfrm>
+            <a:off x="5759577" y="4169664"/>
             <a:ext cx="685800" cy="475488"/>
           </a:xfrm>
           <a:prstGeom prst="rect">
@@ -21484,13 +23638,13 @@
       </p:sp>
       <p:sp>
         <p:nvSpPr>
-          <p:cNvPr id="42" name="Text 40"/>
-          <p:cNvSpPr/>
-          <p:nvPr/>
-        </p:nvSpPr>
-        <p:spPr>
-          <a:xfrm>
-            <a:off x="6408638" y="4169664"/>
+          <p:cNvPr id="48" name="Text 46"/>
+          <p:cNvSpPr/>
+          <p:nvPr/>
+        </p:nvSpPr>
+        <p:spPr>
+          <a:xfrm>
+            <a:off x="5759577" y="4169664"/>
             <a:ext cx="685800" cy="475488"/>
           </a:xfrm>
           <a:prstGeom prst="rect">
@@ -21515,7 +23669,7 @@
                 <a:ea typeface="Trebuchet MS" pitchFamily="34" charset="-122"/>
                 <a:cs typeface="Trebuchet MS" pitchFamily="34" charset="-120"/>
               </a:rPr>
-              <a:t>c</a:t>
+              <a:t>ur</a:t>
             </a:r>
             <a:endParaRPr lang="en-US" sz="900" dirty="0"/>
           </a:p>
@@ -21523,13 +23677,13 @@
       </p:sp>
       <p:sp>
         <p:nvSpPr>
-          <p:cNvPr id="43" name="Shape 41"/>
-          <p:cNvSpPr/>
-          <p:nvPr/>
-        </p:nvSpPr>
-        <p:spPr>
-          <a:xfrm>
-            <a:off x="7447135" y="4169664"/>
+          <p:cNvPr id="49" name="Shape 47"/>
+          <p:cNvSpPr/>
+          <p:nvPr/>
+        </p:nvSpPr>
+        <p:spPr>
+          <a:xfrm>
+            <a:off x="6668262" y="4169664"/>
             <a:ext cx="685800" cy="475488"/>
           </a:xfrm>
           <a:prstGeom prst="rect">
@@ -21550,13 +23704,13 @@
       </p:sp>
       <p:sp>
         <p:nvSpPr>
-          <p:cNvPr id="44" name="Text 42"/>
-          <p:cNvSpPr/>
-          <p:nvPr/>
-        </p:nvSpPr>
-        <p:spPr>
-          <a:xfrm>
-            <a:off x="7447135" y="4169664"/>
+          <p:cNvPr id="50" name="Text 48"/>
+          <p:cNvSpPr/>
+          <p:nvPr/>
+        </p:nvSpPr>
+        <p:spPr>
+          <a:xfrm>
+            <a:off x="6668262" y="4169664"/>
             <a:ext cx="685800" cy="475488"/>
           </a:xfrm>
           <a:prstGeom prst="rect">
@@ -21581,7 +23735,73 @@
                 <a:ea typeface="Trebuchet MS" pitchFamily="34" charset="-122"/>
                 <a:cs typeface="Trebuchet MS" pitchFamily="34" charset="-120"/>
               </a:rPr>
-              <a:t>t</a:t>
+              <a:t>s</a:t>
+            </a:r>
+            <a:endParaRPr lang="en-US" sz="900" dirty="0"/>
+          </a:p>
+        </p:txBody>
+      </p:sp>
+      <p:sp>
+        <p:nvSpPr>
+          <p:cNvPr id="51" name="Shape 49"/>
+          <p:cNvSpPr/>
+          <p:nvPr/>
+        </p:nvSpPr>
+        <p:spPr>
+          <a:xfrm>
+            <a:off x="7576947" y="4169664"/>
+            <a:ext cx="685800" cy="475488"/>
+          </a:xfrm>
+          <a:prstGeom prst="rect">
+            <a:avLst>
+              <a:gd name="adj" fmla="val 7692"/>
+            </a:avLst>
+          </a:prstGeom>
+          <a:solidFill>
+            <a:srgbClr val="FFFFFF"/>
+          </a:solidFill>
+          <a:ln w="12700">
+            <a:solidFill>
+              <a:srgbClr val="DB2777"/>
+            </a:solidFill>
+            <a:prstDash val="solid"/>
+          </a:ln>
+        </p:spPr>
+      </p:sp>
+      <p:sp>
+        <p:nvSpPr>
+          <p:cNvPr id="52" name="Text 50"/>
+          <p:cNvSpPr/>
+          <p:nvPr/>
+        </p:nvSpPr>
+        <p:spPr>
+          <a:xfrm>
+            <a:off x="7576947" y="4169664"/>
+            <a:ext cx="685800" cy="475488"/>
+          </a:xfrm>
+          <a:prstGeom prst="rect">
+            <a:avLst/>
+          </a:prstGeom>
+          <a:noFill/>
+          <a:ln/>
+        </p:spPr>
+        <p:txBody>
+          <a:bodyPr wrap="square" lIns="0" tIns="0" rIns="0" bIns="0" rtlCol="0" anchor="ctr"/>
+          <a:lstStyle/>
+          <a:p>
+            <a:pPr algn="ctr" indent="0" marL="0">
+              <a:buNone/>
+            </a:pPr>
+            <a:r>
+              <a:rPr lang="en-US" sz="900" b="1" dirty="0">
+                <a:solidFill>
+                  <a:srgbClr val="9D174D"/>
+                </a:solidFill>
+                <a:latin typeface="Trebuchet MS" pitchFamily="34" charset="0"/>
+                <a:ea typeface="Trebuchet MS" pitchFamily="34" charset="-122"/>
+                <a:cs typeface="Trebuchet MS" pitchFamily="34" charset="-120"/>
+              </a:rPr>
+              <a:t>or</a:t>
             </a:r>
             <a:endParaRPr lang="en-US" sz="900" dirty="0"/>
           </a:p>
@@ -21873,7 +24093,7 @@
                 <a:ea typeface="Calibri" pitchFamily="34" charset="-122"/>
                 <a:cs typeface="Calibri" pitchFamily="34" charset="-120"/>
               </a:rPr>
-              <a:t>Word Labs  •  wordlabs.app  •  Prefix: 'pre-' = before, in advance</a:t>
+              <a:t>Word Labs  •  wordlabs.app  •  Prefix: 'pre-' = before</a:t>
             </a:r>
             <a:endParaRPr lang="en-US" sz="800" dirty="0"/>
           </a:p>
@@ -22012,7 +24232,7 @@
                 <a:ea typeface="Trebuchet MS" pitchFamily="34" charset="-122"/>
                 <a:cs typeface="Trebuchet MS" pitchFamily="34" charset="-120"/>
               </a:rPr>
-              <a:t>prevent</a:t>
+              <a:t>prescribe</a:t>
             </a:r>
             <a:endParaRPr lang="en-US" sz="2800" dirty="0"/>
           </a:p>
@@ -22700,7 +24920,7 @@
                 <a:ea typeface="Calibri" pitchFamily="34" charset="-122"/>
                 <a:cs typeface="Calibri" pitchFamily="34" charset="-120"/>
               </a:rPr>
-              <a:t>Word Labs  •  wordlabs.app  •  Prefix: 'pre-' = before, in advance</a:t>
+              <a:t>Word Labs  •  wordlabs.app  •  Prefix: 'pre-' = before</a:t>
             </a:r>
             <a:endParaRPr lang="en-US" sz="800" dirty="0"/>
           </a:p>
@@ -22839,7 +25059,7 @@
                 <a:ea typeface="Trebuchet MS" pitchFamily="34" charset="-122"/>
                 <a:cs typeface="Trebuchet MS" pitchFamily="34" charset="-120"/>
               </a:rPr>
-              <a:t>prevent</a:t>
+              <a:t>prescribe</a:t>
             </a:r>
             <a:endParaRPr lang="en-US" sz="2800" dirty="0"/>
           </a:p>
@@ -23090,7 +25310,7 @@
                 <a:ea typeface="Trebuchet MS" pitchFamily="34" charset="-122"/>
                 <a:cs typeface="Trebuchet MS" pitchFamily="34" charset="-120"/>
               </a:rPr>
-              <a:t>vent</a:t>
+              <a:t>scribe</a:t>
             </a:r>
             <a:endParaRPr lang="en-US" sz="1300" dirty="0"/>
           </a:p>
@@ -23129,7 +25349,7 @@
                 <a:ea typeface="Calibri" pitchFamily="34" charset="-122"/>
                 <a:cs typeface="Calibri" pitchFamily="34" charset="-120"/>
               </a:rPr>
-              <a:t>to come</a:t>
+              <a:t>write</a:t>
             </a:r>
             <a:endParaRPr lang="en-US" sz="850" dirty="0"/>
           </a:p>
@@ -23685,7 +25905,7 @@
                 <a:ea typeface="Calibri" pitchFamily="34" charset="-122"/>
                 <a:cs typeface="Calibri" pitchFamily="34" charset="-120"/>
               </a:rPr>
-              <a:t>Word Labs  •  wordlabs.app  •  Prefix: 'pre-' = before, in advance</a:t>
+              <a:t>Word Labs  •  wordlabs.app  •  Prefix: 'pre-' = before</a:t>
             </a:r>
             <a:endParaRPr lang="en-US" sz="800" dirty="0"/>
           </a:p>
@@ -23758,7 +25978,7 @@
                 <a:ea typeface="Trebuchet MS" pitchFamily="34" charset="-122"/>
                 <a:cs typeface="Trebuchet MS" pitchFamily="34" charset="-120"/>
               </a:rPr>
-              <a:t>We are learning that the prefix 'pre-' means 'before, in advance'.</a:t>
+              <a:t>We are learning that the prefix 'pre-' means 'before'.</a:t>
             </a:r>
             <a:endParaRPr lang="en-US" sz="2000" dirty="0"/>
           </a:p>
@@ -24404,7 +26624,7 @@
                 <a:ea typeface="Calibri" pitchFamily="34" charset="-122"/>
                 <a:cs typeface="Calibri" pitchFamily="34" charset="-120"/>
               </a:rPr>
-              <a:t>Word Labs  •  wordlabs.app  •  Prefix: 'pre-' = before, in advance</a:t>
+              <a:t>Word Labs  •  wordlabs.app  •  Prefix: 'pre-' = before</a:t>
             </a:r>
             <a:endParaRPr lang="en-US" sz="800" dirty="0"/>
           </a:p>
@@ -24543,7 +26763,7 @@
                 <a:ea typeface="Trebuchet MS" pitchFamily="34" charset="-122"/>
                 <a:cs typeface="Trebuchet MS" pitchFamily="34" charset="-120"/>
               </a:rPr>
-              <a:t>prevent</a:t>
+              <a:t>prescribe</a:t>
             </a:r>
             <a:endParaRPr lang="en-US" sz="2800" dirty="0"/>
           </a:p>
@@ -24794,7 +27014,7 @@
                 <a:ea typeface="Trebuchet MS" pitchFamily="34" charset="-122"/>
                 <a:cs typeface="Trebuchet MS" pitchFamily="34" charset="-120"/>
               </a:rPr>
-              <a:t>vent</a:t>
+              <a:t>scribe</a:t>
             </a:r>
             <a:endParaRPr lang="en-US" sz="1300" dirty="0"/>
           </a:p>
@@ -24833,7 +27053,7 @@
                 <a:ea typeface="Calibri" pitchFamily="34" charset="-122"/>
                 <a:cs typeface="Calibri" pitchFamily="34" charset="-120"/>
               </a:rPr>
-              <a:t>to come</a:t>
+              <a:t>write</a:t>
             </a:r>
             <a:endParaRPr lang="en-US" sz="850" dirty="0"/>
           </a:p>
@@ -25097,7 +27317,7 @@
                 <a:ea typeface="Trebuchet MS" pitchFamily="34" charset="-122"/>
                 <a:cs typeface="Trebuchet MS" pitchFamily="34" charset="-120"/>
               </a:rPr>
-              <a:t>vent</a:t>
+              <a:t>scribe</a:t>
             </a:r>
             <a:endParaRPr lang="en-US" sz="1400" dirty="0"/>
           </a:p>
@@ -25521,7 +27741,7 @@
                 <a:ea typeface="Calibri" pitchFamily="34" charset="-122"/>
                 <a:cs typeface="Calibri" pitchFamily="34" charset="-120"/>
               </a:rPr>
-              <a:t>Word Labs  •  wordlabs.app  •  Prefix: 'pre-' = before, in advance</a:t>
+              <a:t>Word Labs  •  wordlabs.app  •  Prefix: 'pre-' = before</a:t>
             </a:r>
             <a:endParaRPr lang="en-US" sz="800" dirty="0"/>
           </a:p>
@@ -25660,7 +27880,7 @@
                 <a:ea typeface="Trebuchet MS" pitchFamily="34" charset="-122"/>
                 <a:cs typeface="Trebuchet MS" pitchFamily="34" charset="-120"/>
               </a:rPr>
-              <a:t>prevent</a:t>
+              <a:t>prescribe</a:t>
             </a:r>
             <a:endParaRPr lang="en-US" sz="2800" dirty="0"/>
           </a:p>
@@ -25911,7 +28131,7 @@
                 <a:ea typeface="Trebuchet MS" pitchFamily="34" charset="-122"/>
                 <a:cs typeface="Trebuchet MS" pitchFamily="34" charset="-120"/>
               </a:rPr>
-              <a:t>vent</a:t>
+              <a:t>scribe</a:t>
             </a:r>
             <a:endParaRPr lang="en-US" sz="1300" dirty="0"/>
           </a:p>
@@ -25950,7 +28170,7 @@
                 <a:ea typeface="Calibri" pitchFamily="34" charset="-122"/>
                 <a:cs typeface="Calibri" pitchFamily="34" charset="-120"/>
               </a:rPr>
-              <a:t>to come</a:t>
+              <a:t>write</a:t>
             </a:r>
             <a:endParaRPr lang="en-US" sz="850" dirty="0"/>
           </a:p>
@@ -26214,7 +28434,7 @@
                 <a:ea typeface="Trebuchet MS" pitchFamily="34" charset="-122"/>
                 <a:cs typeface="Trebuchet MS" pitchFamily="34" charset="-120"/>
               </a:rPr>
-              <a:t>vent</a:t>
+              <a:t>scribe</a:t>
             </a:r>
             <a:endParaRPr lang="en-US" sz="1400" dirty="0"/>
           </a:p>
@@ -26321,7 +28541,7 @@
         </p:nvSpPr>
         <p:spPr>
           <a:xfrm>
-            <a:off x="2254649" y="4169664"/>
+            <a:off x="2023872" y="4169664"/>
             <a:ext cx="685800" cy="475488"/>
           </a:xfrm>
           <a:prstGeom prst="rect">
@@ -26348,7 +28568,7 @@
         </p:nvSpPr>
         <p:spPr>
           <a:xfrm>
-            <a:off x="2254649" y="4169664"/>
+            <a:off x="2023872" y="4169664"/>
             <a:ext cx="685800" cy="475488"/>
           </a:xfrm>
           <a:prstGeom prst="rect">
@@ -26373,7 +28593,7 @@
                 <a:ea typeface="Trebuchet MS" pitchFamily="34" charset="-122"/>
                 <a:cs typeface="Trebuchet MS" pitchFamily="34" charset="-120"/>
               </a:rPr>
-              <a:t>pr</a:t>
+              <a:t>p</a:t>
             </a:r>
             <a:endParaRPr lang="en-US" sz="900" dirty="0"/>
           </a:p>
@@ -26387,7 +28607,7 @@
         </p:nvSpPr>
         <p:spPr>
           <a:xfrm>
-            <a:off x="3293146" y="4169664"/>
+            <a:off x="2831592" y="4169664"/>
             <a:ext cx="685800" cy="475488"/>
           </a:xfrm>
           <a:prstGeom prst="rect">
@@ -26414,7 +28634,7 @@
         </p:nvSpPr>
         <p:spPr>
           <a:xfrm>
-            <a:off x="3293146" y="4169664"/>
+            <a:off x="2831592" y="4169664"/>
             <a:ext cx="685800" cy="475488"/>
           </a:xfrm>
           <a:prstGeom prst="rect">
@@ -26439,7 +28659,7 @@
                 <a:ea typeface="Trebuchet MS" pitchFamily="34" charset="-122"/>
                 <a:cs typeface="Trebuchet MS" pitchFamily="34" charset="-120"/>
               </a:rPr>
-              <a:t>e</a:t>
+              <a:t>r</a:t>
             </a:r>
             <a:endParaRPr lang="en-US" sz="900" dirty="0"/>
           </a:p>
@@ -26453,7 +28673,7 @@
         </p:nvSpPr>
         <p:spPr>
           <a:xfrm>
-            <a:off x="4331643" y="4169664"/>
+            <a:off x="3639312" y="4169664"/>
             <a:ext cx="685800" cy="475488"/>
           </a:xfrm>
           <a:prstGeom prst="rect">
@@ -26480,7 +28700,7 @@
         </p:nvSpPr>
         <p:spPr>
           <a:xfrm>
-            <a:off x="4331643" y="4169664"/>
+            <a:off x="3639312" y="4169664"/>
             <a:ext cx="685800" cy="475488"/>
           </a:xfrm>
           <a:prstGeom prst="rect">
@@ -26505,7 +28725,7 @@
                 <a:ea typeface="Trebuchet MS" pitchFamily="34" charset="-122"/>
                 <a:cs typeface="Trebuchet MS" pitchFamily="34" charset="-120"/>
               </a:rPr>
-              <a:t>v</a:t>
+              <a:t>e</a:t>
             </a:r>
             <a:endParaRPr lang="en-US" sz="900" dirty="0"/>
           </a:p>
@@ -26519,7 +28739,7 @@
         </p:nvSpPr>
         <p:spPr>
           <a:xfrm>
-            <a:off x="5370141" y="4169664"/>
+            <a:off x="4447032" y="4169664"/>
             <a:ext cx="685800" cy="475488"/>
           </a:xfrm>
           <a:prstGeom prst="rect">
@@ -26546,7 +28766,7 @@
         </p:nvSpPr>
         <p:spPr>
           <a:xfrm>
-            <a:off x="5370141" y="4169664"/>
+            <a:off x="4447032" y="4169664"/>
             <a:ext cx="685800" cy="475488"/>
           </a:xfrm>
           <a:prstGeom prst="rect">
@@ -26571,7 +28791,7 @@
                 <a:ea typeface="Trebuchet MS" pitchFamily="34" charset="-122"/>
                 <a:cs typeface="Trebuchet MS" pitchFamily="34" charset="-120"/>
               </a:rPr>
-              <a:t>e</a:t>
+              <a:t>s</a:t>
             </a:r>
             <a:endParaRPr lang="en-US" sz="900" dirty="0"/>
           </a:p>
@@ -26585,7 +28805,7 @@
         </p:nvSpPr>
         <p:spPr>
           <a:xfrm>
-            <a:off x="6408638" y="4169664"/>
+            <a:off x="5254752" y="4169664"/>
             <a:ext cx="685800" cy="475488"/>
           </a:xfrm>
           <a:prstGeom prst="rect">
@@ -26612,7 +28832,7 @@
         </p:nvSpPr>
         <p:spPr>
           <a:xfrm>
-            <a:off x="6408638" y="4169664"/>
+            <a:off x="5254752" y="4169664"/>
             <a:ext cx="685800" cy="475488"/>
           </a:xfrm>
           <a:prstGeom prst="rect">
@@ -26637,7 +28857,7 @@
                 <a:ea typeface="Trebuchet MS" pitchFamily="34" charset="-122"/>
                 <a:cs typeface="Trebuchet MS" pitchFamily="34" charset="-120"/>
               </a:rPr>
-              <a:t>n</a:t>
+              <a:t>c</a:t>
             </a:r>
             <a:endParaRPr lang="en-US" sz="900" dirty="0"/>
           </a:p>
@@ -26651,7 +28871,7 @@
         </p:nvSpPr>
         <p:spPr>
           <a:xfrm>
-            <a:off x="7447135" y="4169664"/>
+            <a:off x="6062472" y="4169664"/>
             <a:ext cx="685800" cy="475488"/>
           </a:xfrm>
           <a:prstGeom prst="rect">
@@ -26678,7 +28898,7 @@
         </p:nvSpPr>
         <p:spPr>
           <a:xfrm>
-            <a:off x="7447135" y="4169664"/>
+            <a:off x="6062472" y="4169664"/>
             <a:ext cx="685800" cy="475488"/>
           </a:xfrm>
           <a:prstGeom prst="rect">
@@ -26703,7 +28923,139 @@
                 <a:ea typeface="Trebuchet MS" pitchFamily="34" charset="-122"/>
                 <a:cs typeface="Trebuchet MS" pitchFamily="34" charset="-120"/>
               </a:rPr>
-              <a:t>t</a:t>
+              <a:t>r</a:t>
+            </a:r>
+            <a:endParaRPr lang="en-US" sz="900" dirty="0"/>
+          </a:p>
+        </p:txBody>
+      </p:sp>
+      <p:sp>
+        <p:nvSpPr>
+          <p:cNvPr id="45" name="Shape 43"/>
+          <p:cNvSpPr/>
+          <p:nvPr/>
+        </p:nvSpPr>
+        <p:spPr>
+          <a:xfrm>
+            <a:off x="6870192" y="4169664"/>
+            <a:ext cx="685800" cy="475488"/>
+          </a:xfrm>
+          <a:prstGeom prst="rect">
+            <a:avLst>
+              <a:gd name="adj" fmla="val 7692"/>
+            </a:avLst>
+          </a:prstGeom>
+          <a:solidFill>
+            <a:srgbClr val="FFFFFF"/>
+          </a:solidFill>
+          <a:ln w="12700">
+            <a:solidFill>
+              <a:srgbClr val="DB2777"/>
+            </a:solidFill>
+            <a:prstDash val="solid"/>
+          </a:ln>
+        </p:spPr>
+      </p:sp>
+      <p:sp>
+        <p:nvSpPr>
+          <p:cNvPr id="46" name="Text 44"/>
+          <p:cNvSpPr/>
+          <p:nvPr/>
+        </p:nvSpPr>
+        <p:spPr>
+          <a:xfrm>
+            <a:off x="6870192" y="4169664"/>
+            <a:ext cx="685800" cy="475488"/>
+          </a:xfrm>
+          <a:prstGeom prst="rect">
+            <a:avLst/>
+          </a:prstGeom>
+          <a:noFill/>
+          <a:ln/>
+        </p:spPr>
+        <p:txBody>
+          <a:bodyPr wrap="square" lIns="0" tIns="0" rIns="0" bIns="0" rtlCol="0" anchor="ctr"/>
+          <a:lstStyle/>
+          <a:p>
+            <a:pPr algn="ctr" indent="0" marL="0">
+              <a:buNone/>
+            </a:pPr>
+            <a:r>
+              <a:rPr lang="en-US" sz="900" b="1" dirty="0">
+                <a:solidFill>
+                  <a:srgbClr val="9D174D"/>
+                </a:solidFill>
+                <a:latin typeface="Trebuchet MS" pitchFamily="34" charset="0"/>
+                <a:ea typeface="Trebuchet MS" pitchFamily="34" charset="-122"/>
+                <a:cs typeface="Trebuchet MS" pitchFamily="34" charset="-120"/>
+              </a:rPr>
+              <a:t>i_e</a:t>
+            </a:r>
+            <a:endParaRPr lang="en-US" sz="900" dirty="0"/>
+          </a:p>
+        </p:txBody>
+      </p:sp>
+      <p:sp>
+        <p:nvSpPr>
+          <p:cNvPr id="47" name="Shape 45"/>
+          <p:cNvSpPr/>
+          <p:nvPr/>
+        </p:nvSpPr>
+        <p:spPr>
+          <a:xfrm>
+            <a:off x="7677912" y="4169664"/>
+            <a:ext cx="685800" cy="475488"/>
+          </a:xfrm>
+          <a:prstGeom prst="rect">
+            <a:avLst>
+              <a:gd name="adj" fmla="val 7692"/>
+            </a:avLst>
+          </a:prstGeom>
+          <a:solidFill>
+            <a:srgbClr val="FFFFFF"/>
+          </a:solidFill>
+          <a:ln w="12700">
+            <a:solidFill>
+              <a:srgbClr val="DB2777"/>
+            </a:solidFill>
+            <a:prstDash val="solid"/>
+          </a:ln>
+        </p:spPr>
+      </p:sp>
+      <p:sp>
+        <p:nvSpPr>
+          <p:cNvPr id="48" name="Text 46"/>
+          <p:cNvSpPr/>
+          <p:nvPr/>
+        </p:nvSpPr>
+        <p:spPr>
+          <a:xfrm>
+            <a:off x="7677912" y="4169664"/>
+            <a:ext cx="685800" cy="475488"/>
+          </a:xfrm>
+          <a:prstGeom prst="rect">
+            <a:avLst/>
+          </a:prstGeom>
+          <a:noFill/>
+          <a:ln/>
+        </p:spPr>
+        <p:txBody>
+          <a:bodyPr wrap="square" lIns="0" tIns="0" rIns="0" bIns="0" rtlCol="0" anchor="ctr"/>
+          <a:lstStyle/>
+          <a:p>
+            <a:pPr algn="ctr" indent="0" marL="0">
+              <a:buNone/>
+            </a:pPr>
+            <a:r>
+              <a:rPr lang="en-US" sz="900" b="1" dirty="0">
+                <a:solidFill>
+                  <a:srgbClr val="9D174D"/>
+                </a:solidFill>
+                <a:latin typeface="Trebuchet MS" pitchFamily="34" charset="0"/>
+                <a:ea typeface="Trebuchet MS" pitchFamily="34" charset="-122"/>
+                <a:cs typeface="Trebuchet MS" pitchFamily="34" charset="-120"/>
+              </a:rPr>
+              <a:t>b</a:t>
             </a:r>
             <a:endParaRPr lang="en-US" sz="900" dirty="0"/>
           </a:p>
@@ -26995,7 +29347,7 @@
                 <a:ea typeface="Calibri" pitchFamily="34" charset="-122"/>
                 <a:cs typeface="Calibri" pitchFamily="34" charset="-120"/>
               </a:rPr>
-              <a:t>Word Labs  •  wordlabs.app  •  Prefix: 'pre-' = before, in advance</a:t>
+              <a:t>Word Labs  •  wordlabs.app  •  Prefix: 'pre-' = before</a:t>
             </a:r>
             <a:endParaRPr lang="en-US" sz="800" dirty="0"/>
           </a:p>
@@ -27134,7 +29486,7 @@
                 <a:ea typeface="Trebuchet MS" pitchFamily="34" charset="-122"/>
                 <a:cs typeface="Trebuchet MS" pitchFamily="34" charset="-120"/>
               </a:rPr>
-              <a:t>preheat</a:t>
+              <a:t>precedence</a:t>
             </a:r>
             <a:endParaRPr lang="en-US" sz="2800" dirty="0"/>
           </a:p>
@@ -27822,7 +30174,7 @@
                 <a:ea typeface="Calibri" pitchFamily="34" charset="-122"/>
                 <a:cs typeface="Calibri" pitchFamily="34" charset="-120"/>
               </a:rPr>
-              <a:t>Word Labs  •  wordlabs.app  •  Prefix: 'pre-' = before, in advance</a:t>
+              <a:t>Word Labs  •  wordlabs.app  •  Prefix: 'pre-' = before</a:t>
             </a:r>
             <a:endParaRPr lang="en-US" sz="800" dirty="0"/>
           </a:p>
@@ -27961,7 +30313,7 @@
                 <a:ea typeface="Trebuchet MS" pitchFamily="34" charset="-122"/>
                 <a:cs typeface="Trebuchet MS" pitchFamily="34" charset="-120"/>
               </a:rPr>
-              <a:t>preheat</a:t>
+              <a:t>precedence</a:t>
             </a:r>
             <a:endParaRPr lang="en-US" sz="2800" dirty="0"/>
           </a:p>
@@ -28041,7 +30393,7 @@
         </p:nvSpPr>
         <p:spPr>
           <a:xfrm>
-            <a:off x="2938272" y="2258568"/>
+            <a:off x="2221992" y="2258568"/>
             <a:ext cx="1828800" cy="292608"/>
           </a:xfrm>
           <a:prstGeom prst="rect">
@@ -28075,7 +30427,7 @@
         </p:nvSpPr>
         <p:spPr>
           <a:xfrm>
-            <a:off x="2938272" y="2258568"/>
+            <a:off x="2221992" y="2258568"/>
             <a:ext cx="1828800" cy="292608"/>
           </a:xfrm>
           <a:prstGeom prst="rect">
@@ -28114,7 +30466,7 @@
         </p:nvSpPr>
         <p:spPr>
           <a:xfrm>
-            <a:off x="2938272" y="2569464"/>
+            <a:off x="2221992" y="2569464"/>
             <a:ext cx="1828800" cy="201168"/>
           </a:xfrm>
           <a:prstGeom prst="rect">
@@ -28153,7 +30505,7 @@
         </p:nvSpPr>
         <p:spPr>
           <a:xfrm>
-            <a:off x="5803392" y="2258568"/>
+            <a:off x="4370832" y="2258568"/>
             <a:ext cx="1828800" cy="292608"/>
           </a:xfrm>
           <a:prstGeom prst="rect">
@@ -28187,7 +30539,7 @@
         </p:nvSpPr>
         <p:spPr>
           <a:xfrm>
-            <a:off x="5803392" y="2258568"/>
+            <a:off x="4370832" y="2258568"/>
             <a:ext cx="1828800" cy="292608"/>
           </a:xfrm>
           <a:prstGeom prst="rect">
@@ -28212,7 +30564,7 @@
                 <a:ea typeface="Trebuchet MS" pitchFamily="34" charset="-122"/>
                 <a:cs typeface="Trebuchet MS" pitchFamily="34" charset="-120"/>
               </a:rPr>
-              <a:t>heat</a:t>
+              <a:t>cede</a:t>
             </a:r>
             <a:endParaRPr lang="en-US" sz="1300" dirty="0"/>
           </a:p>
@@ -28226,7 +30578,7 @@
         </p:nvSpPr>
         <p:spPr>
           <a:xfrm>
-            <a:off x="5803392" y="2569464"/>
+            <a:off x="4370832" y="2569464"/>
             <a:ext cx="1828800" cy="201168"/>
           </a:xfrm>
           <a:prstGeom prst="rect">
@@ -28251,7 +30603,7 @@
                 <a:ea typeface="Calibri" pitchFamily="34" charset="-122"/>
                 <a:cs typeface="Calibri" pitchFamily="34" charset="-120"/>
               </a:rPr>
-              <a:t>to make warm</a:t>
+              <a:t>go; yield</a:t>
             </a:r>
             <a:endParaRPr lang="en-US" sz="850" dirty="0"/>
           </a:p>
@@ -28260,6 +30612,118 @@
       <p:sp>
         <p:nvSpPr>
           <p:cNvPr id="22" name="Shape 20"/>
+          <p:cNvSpPr/>
+          <p:nvPr/>
+        </p:nvSpPr>
+        <p:spPr>
+          <a:xfrm>
+            <a:off x="6519672" y="2258568"/>
+            <a:ext cx="1828800" cy="292608"/>
+          </a:xfrm>
+          <a:prstGeom prst="rect">
+            <a:avLst>
+              <a:gd name="adj" fmla="val 25000"/>
+            </a:avLst>
+          </a:prstGeom>
+          <a:solidFill>
+            <a:srgbClr val="FCE7F3"/>
+          </a:solidFill>
+          <a:ln w="19050">
+            <a:solidFill>
+              <a:srgbClr val="DB2777"/>
+            </a:solidFill>
+            <a:prstDash val="solid"/>
+          </a:ln>
+          <a:effectLst>
+            <a:outerShdw sx="100000" sy="100000" kx="0" ky="0" algn="bl" rotWithShape="0" blurRad="101600" dist="38100" dir="8100000">
+              <a:srgbClr val="000000">
+                <a:alpha val="12000"/>
+              </a:srgbClr>
+            </a:outerShdw>
+          </a:effectLst>
+        </p:spPr>
+      </p:sp>
+      <p:sp>
+        <p:nvSpPr>
+          <p:cNvPr id="23" name="Text 21"/>
+          <p:cNvSpPr/>
+          <p:nvPr/>
+        </p:nvSpPr>
+        <p:spPr>
+          <a:xfrm>
+            <a:off x="6519672" y="2258568"/>
+            <a:ext cx="1828800" cy="292608"/>
+          </a:xfrm>
+          <a:prstGeom prst="rect">
+            <a:avLst/>
+          </a:prstGeom>
+          <a:noFill/>
+          <a:ln/>
+        </p:spPr>
+        <p:txBody>
+          <a:bodyPr wrap="square" lIns="0" tIns="0" rIns="0" bIns="0" rtlCol="0" anchor="ctr"/>
+          <a:lstStyle/>
+          <a:p>
+            <a:pPr algn="ctr" indent="0" marL="0">
+              <a:buNone/>
+            </a:pPr>
+            <a:r>
+              <a:rPr lang="en-US" sz="1300" b="1" dirty="0">
+                <a:solidFill>
+                  <a:srgbClr val="9D174D"/>
+                </a:solidFill>
+                <a:latin typeface="Trebuchet MS" pitchFamily="34" charset="0"/>
+                <a:ea typeface="Trebuchet MS" pitchFamily="34" charset="-122"/>
+                <a:cs typeface="Trebuchet MS" pitchFamily="34" charset="-120"/>
+              </a:rPr>
+              <a:t>ence</a:t>
+            </a:r>
+            <a:endParaRPr lang="en-US" sz="1300" dirty="0"/>
+          </a:p>
+        </p:txBody>
+      </p:sp>
+      <p:sp>
+        <p:nvSpPr>
+          <p:cNvPr id="24" name="Text 22"/>
+          <p:cNvSpPr/>
+          <p:nvPr/>
+        </p:nvSpPr>
+        <p:spPr>
+          <a:xfrm>
+            <a:off x="6519672" y="2569464"/>
+            <a:ext cx="1828800" cy="201168"/>
+          </a:xfrm>
+          <a:prstGeom prst="rect">
+            <a:avLst/>
+          </a:prstGeom>
+          <a:noFill/>
+          <a:ln/>
+        </p:spPr>
+        <p:txBody>
+          <a:bodyPr wrap="square" lIns="0" tIns="0" rIns="0" bIns="0" rtlCol="0" anchor="t"/>
+          <a:lstStyle/>
+          <a:p>
+            <a:pPr algn="ctr" indent="0" marL="0">
+              <a:buNone/>
+            </a:pPr>
+            <a:r>
+              <a:rPr lang="en-US" sz="850" dirty="0">
+                <a:solidFill>
+                  <a:srgbClr val="475569"/>
+                </a:solidFill>
+                <a:latin typeface="Calibri" pitchFamily="34" charset="0"/>
+                <a:ea typeface="Calibri" pitchFamily="34" charset="-122"/>
+                <a:cs typeface="Calibri" pitchFamily="34" charset="-120"/>
+              </a:rPr>
+              <a:t>state of</a:t>
+            </a:r>
+            <a:endParaRPr lang="en-US" sz="850" dirty="0"/>
+          </a:p>
+        </p:txBody>
+      </p:sp>
+      <p:sp>
+        <p:nvSpPr>
+          <p:cNvPr id="25" name="Shape 23"/>
           <p:cNvSpPr/>
           <p:nvPr/>
         </p:nvSpPr>
@@ -28286,7 +30750,7 @@
       </p:sp>
       <p:sp>
         <p:nvSpPr>
-          <p:cNvPr id="23" name="Text 21"/>
+          <p:cNvPr id="26" name="Text 24"/>
           <p:cNvSpPr/>
           <p:nvPr/>
         </p:nvSpPr>
@@ -28325,7 +30789,7 @@
       </p:sp>
       <p:sp>
         <p:nvSpPr>
-          <p:cNvPr id="24" name="Shape 22"/>
+          <p:cNvPr id="27" name="Shape 25"/>
           <p:cNvSpPr/>
           <p:nvPr/>
         </p:nvSpPr>
@@ -28352,7 +30816,7 @@
       </p:sp>
       <p:sp>
         <p:nvSpPr>
-          <p:cNvPr id="25" name="Text 23"/>
+          <p:cNvPr id="28" name="Text 26"/>
           <p:cNvSpPr/>
           <p:nvPr/>
         </p:nvSpPr>
@@ -28391,7 +30855,7 @@
       </p:sp>
       <p:sp>
         <p:nvSpPr>
-          <p:cNvPr id="26" name="Shape 24"/>
+          <p:cNvPr id="29" name="Shape 27"/>
           <p:cNvSpPr/>
           <p:nvPr/>
         </p:nvSpPr>
@@ -28418,7 +30882,7 @@
       </p:sp>
       <p:sp>
         <p:nvSpPr>
-          <p:cNvPr id="27" name="Text 25"/>
+          <p:cNvPr id="30" name="Text 28"/>
           <p:cNvSpPr/>
           <p:nvPr/>
         </p:nvSpPr>
@@ -28457,7 +30921,7 @@
       </p:sp>
       <p:sp>
         <p:nvSpPr>
-          <p:cNvPr id="28" name="Shape 26"/>
+          <p:cNvPr id="31" name="Shape 29"/>
           <p:cNvSpPr/>
           <p:nvPr/>
         </p:nvSpPr>
@@ -28484,7 +30948,7 @@
       </p:sp>
       <p:sp>
         <p:nvSpPr>
-          <p:cNvPr id="29" name="Text 27"/>
+          <p:cNvPr id="32" name="Text 30"/>
           <p:cNvSpPr/>
           <p:nvPr/>
         </p:nvSpPr>
@@ -28807,7 +31271,7 @@
                 <a:ea typeface="Calibri" pitchFamily="34" charset="-122"/>
                 <a:cs typeface="Calibri" pitchFamily="34" charset="-120"/>
               </a:rPr>
-              <a:t>Word Labs  •  wordlabs.app  •  Prefix: 'pre-' = before, in advance</a:t>
+              <a:t>Word Labs  •  wordlabs.app  •  Prefix: 'pre-' = before</a:t>
             </a:r>
             <a:endParaRPr lang="en-US" sz="800" dirty="0"/>
           </a:p>
@@ -28946,7 +31410,7 @@
                 <a:ea typeface="Trebuchet MS" pitchFamily="34" charset="-122"/>
                 <a:cs typeface="Trebuchet MS" pitchFamily="34" charset="-120"/>
               </a:rPr>
-              <a:t>preheat</a:t>
+              <a:t>precedence</a:t>
             </a:r>
             <a:endParaRPr lang="en-US" sz="2800" dirty="0"/>
           </a:p>
@@ -29026,7 +31490,7 @@
         </p:nvSpPr>
         <p:spPr>
           <a:xfrm>
-            <a:off x="2938272" y="2258568"/>
+            <a:off x="2221992" y="2258568"/>
             <a:ext cx="1828800" cy="292608"/>
           </a:xfrm>
           <a:prstGeom prst="rect">
@@ -29060,7 +31524,7 @@
         </p:nvSpPr>
         <p:spPr>
           <a:xfrm>
-            <a:off x="2938272" y="2258568"/>
+            <a:off x="2221992" y="2258568"/>
             <a:ext cx="1828800" cy="292608"/>
           </a:xfrm>
           <a:prstGeom prst="rect">
@@ -29099,7 +31563,7 @@
         </p:nvSpPr>
         <p:spPr>
           <a:xfrm>
-            <a:off x="2938272" y="2569464"/>
+            <a:off x="2221992" y="2569464"/>
             <a:ext cx="1828800" cy="201168"/>
           </a:xfrm>
           <a:prstGeom prst="rect">
@@ -29138,7 +31602,7 @@
         </p:nvSpPr>
         <p:spPr>
           <a:xfrm>
-            <a:off x="5803392" y="2258568"/>
+            <a:off x="4370832" y="2258568"/>
             <a:ext cx="1828800" cy="292608"/>
           </a:xfrm>
           <a:prstGeom prst="rect">
@@ -29172,7 +31636,7 @@
         </p:nvSpPr>
         <p:spPr>
           <a:xfrm>
-            <a:off x="5803392" y="2258568"/>
+            <a:off x="4370832" y="2258568"/>
             <a:ext cx="1828800" cy="292608"/>
           </a:xfrm>
           <a:prstGeom prst="rect">
@@ -29197,7 +31661,7 @@
                 <a:ea typeface="Trebuchet MS" pitchFamily="34" charset="-122"/>
                 <a:cs typeface="Trebuchet MS" pitchFamily="34" charset="-120"/>
               </a:rPr>
-              <a:t>heat</a:t>
+              <a:t>cede</a:t>
             </a:r>
             <a:endParaRPr lang="en-US" sz="1300" dirty="0"/>
           </a:p>
@@ -29211,7 +31675,7 @@
         </p:nvSpPr>
         <p:spPr>
           <a:xfrm>
-            <a:off x="5803392" y="2569464"/>
+            <a:off x="4370832" y="2569464"/>
             <a:ext cx="1828800" cy="201168"/>
           </a:xfrm>
           <a:prstGeom prst="rect">
@@ -29236,7 +31700,7 @@
                 <a:ea typeface="Calibri" pitchFamily="34" charset="-122"/>
                 <a:cs typeface="Calibri" pitchFamily="34" charset="-120"/>
               </a:rPr>
-              <a:t>to make warm</a:t>
+              <a:t>go; yield</a:t>
             </a:r>
             <a:endParaRPr lang="en-US" sz="850" dirty="0"/>
           </a:p>
@@ -29245,6 +31709,118 @@
       <p:sp>
         <p:nvSpPr>
           <p:cNvPr id="22" name="Shape 20"/>
+          <p:cNvSpPr/>
+          <p:nvPr/>
+        </p:nvSpPr>
+        <p:spPr>
+          <a:xfrm>
+            <a:off x="6519672" y="2258568"/>
+            <a:ext cx="1828800" cy="292608"/>
+          </a:xfrm>
+          <a:prstGeom prst="rect">
+            <a:avLst>
+              <a:gd name="adj" fmla="val 25000"/>
+            </a:avLst>
+          </a:prstGeom>
+          <a:solidFill>
+            <a:srgbClr val="FCE7F3"/>
+          </a:solidFill>
+          <a:ln w="19050">
+            <a:solidFill>
+              <a:srgbClr val="DB2777"/>
+            </a:solidFill>
+            <a:prstDash val="solid"/>
+          </a:ln>
+          <a:effectLst>
+            <a:outerShdw sx="100000" sy="100000" kx="0" ky="0" algn="bl" rotWithShape="0" blurRad="101600" dist="38100" dir="8100000">
+              <a:srgbClr val="000000">
+                <a:alpha val="12000"/>
+              </a:srgbClr>
+            </a:outerShdw>
+          </a:effectLst>
+        </p:spPr>
+      </p:sp>
+      <p:sp>
+        <p:nvSpPr>
+          <p:cNvPr id="23" name="Text 21"/>
+          <p:cNvSpPr/>
+          <p:nvPr/>
+        </p:nvSpPr>
+        <p:spPr>
+          <a:xfrm>
+            <a:off x="6519672" y="2258568"/>
+            <a:ext cx="1828800" cy="292608"/>
+          </a:xfrm>
+          <a:prstGeom prst="rect">
+            <a:avLst/>
+          </a:prstGeom>
+          <a:noFill/>
+          <a:ln/>
+        </p:spPr>
+        <p:txBody>
+          <a:bodyPr wrap="square" lIns="0" tIns="0" rIns="0" bIns="0" rtlCol="0" anchor="ctr"/>
+          <a:lstStyle/>
+          <a:p>
+            <a:pPr algn="ctr" indent="0" marL="0">
+              <a:buNone/>
+            </a:pPr>
+            <a:r>
+              <a:rPr lang="en-US" sz="1300" b="1" dirty="0">
+                <a:solidFill>
+                  <a:srgbClr val="9D174D"/>
+                </a:solidFill>
+                <a:latin typeface="Trebuchet MS" pitchFamily="34" charset="0"/>
+                <a:ea typeface="Trebuchet MS" pitchFamily="34" charset="-122"/>
+                <a:cs typeface="Trebuchet MS" pitchFamily="34" charset="-120"/>
+              </a:rPr>
+              <a:t>ence</a:t>
+            </a:r>
+            <a:endParaRPr lang="en-US" sz="1300" dirty="0"/>
+          </a:p>
+        </p:txBody>
+      </p:sp>
+      <p:sp>
+        <p:nvSpPr>
+          <p:cNvPr id="24" name="Text 22"/>
+          <p:cNvSpPr/>
+          <p:nvPr/>
+        </p:nvSpPr>
+        <p:spPr>
+          <a:xfrm>
+            <a:off x="6519672" y="2569464"/>
+            <a:ext cx="1828800" cy="201168"/>
+          </a:xfrm>
+          <a:prstGeom prst="rect">
+            <a:avLst/>
+          </a:prstGeom>
+          <a:noFill/>
+          <a:ln/>
+        </p:spPr>
+        <p:txBody>
+          <a:bodyPr wrap="square" lIns="0" tIns="0" rIns="0" bIns="0" rtlCol="0" anchor="t"/>
+          <a:lstStyle/>
+          <a:p>
+            <a:pPr algn="ctr" indent="0" marL="0">
+              <a:buNone/>
+            </a:pPr>
+            <a:r>
+              <a:rPr lang="en-US" sz="850" dirty="0">
+                <a:solidFill>
+                  <a:srgbClr val="475569"/>
+                </a:solidFill>
+                <a:latin typeface="Calibri" pitchFamily="34" charset="0"/>
+                <a:ea typeface="Calibri" pitchFamily="34" charset="-122"/>
+                <a:cs typeface="Calibri" pitchFamily="34" charset="-120"/>
+              </a:rPr>
+              <a:t>state of</a:t>
+            </a:r>
+            <a:endParaRPr lang="en-US" sz="850" dirty="0"/>
+          </a:p>
+        </p:txBody>
+      </p:sp>
+      <p:sp>
+        <p:nvSpPr>
+          <p:cNvPr id="25" name="Shape 23"/>
           <p:cNvSpPr/>
           <p:nvPr/>
         </p:nvSpPr>
@@ -29271,7 +31847,7 @@
       </p:sp>
       <p:sp>
         <p:nvSpPr>
-          <p:cNvPr id="23" name="Text 21"/>
+          <p:cNvPr id="26" name="Text 24"/>
           <p:cNvSpPr/>
           <p:nvPr/>
         </p:nvSpPr>
@@ -29310,7 +31886,7 @@
       </p:sp>
       <p:sp>
         <p:nvSpPr>
-          <p:cNvPr id="24" name="Shape 22"/>
+          <p:cNvPr id="27" name="Shape 25"/>
           <p:cNvSpPr/>
           <p:nvPr/>
         </p:nvSpPr>
@@ -29337,13 +31913,13 @@
       </p:sp>
       <p:sp>
         <p:nvSpPr>
-          <p:cNvPr id="25" name="Shape 23"/>
-          <p:cNvSpPr/>
-          <p:nvPr/>
-        </p:nvSpPr>
-        <p:spPr>
-          <a:xfrm>
-            <a:off x="2999232" y="3364992"/>
+          <p:cNvPr id="28" name="Shape 26"/>
+          <p:cNvSpPr/>
+          <p:nvPr/>
+        </p:nvSpPr>
+        <p:spPr>
+          <a:xfrm>
+            <a:off x="2313432" y="3364992"/>
             <a:ext cx="1645920" cy="475488"/>
           </a:xfrm>
           <a:prstGeom prst="rect">
@@ -29364,13 +31940,13 @@
       </p:sp>
       <p:sp>
         <p:nvSpPr>
-          <p:cNvPr id="26" name="Text 24"/>
-          <p:cNvSpPr/>
-          <p:nvPr/>
-        </p:nvSpPr>
-        <p:spPr>
-          <a:xfrm>
-            <a:off x="2999232" y="3364992"/>
+          <p:cNvPr id="29" name="Text 27"/>
+          <p:cNvSpPr/>
+          <p:nvPr/>
+        </p:nvSpPr>
+        <p:spPr>
+          <a:xfrm>
+            <a:off x="2313432" y="3364992"/>
             <a:ext cx="1645920" cy="475488"/>
           </a:xfrm>
           <a:prstGeom prst="rect">
@@ -29395,7 +31971,7 @@
                 <a:ea typeface="Trebuchet MS" pitchFamily="34" charset="-122"/>
                 <a:cs typeface="Trebuchet MS" pitchFamily="34" charset="-120"/>
               </a:rPr>
-              <a:t>pre</a:t>
+              <a:t>prec</a:t>
             </a:r>
             <a:endParaRPr lang="en-US" sz="1400" dirty="0"/>
           </a:p>
@@ -29403,14 +31979,14 @@
       </p:sp>
       <p:sp>
         <p:nvSpPr>
-          <p:cNvPr id="27" name="Text 25"/>
-          <p:cNvSpPr/>
-          <p:nvPr/>
-        </p:nvSpPr>
-        <p:spPr>
-          <a:xfrm>
-            <a:off x="4645152" y="3364992"/>
-            <a:ext cx="1097280" cy="475488"/>
+          <p:cNvPr id="30" name="Text 28"/>
+          <p:cNvSpPr/>
+          <p:nvPr/>
+        </p:nvSpPr>
+        <p:spPr>
+          <a:xfrm>
+            <a:off x="3959352" y="3364992"/>
+            <a:ext cx="411480" cy="475488"/>
           </a:xfrm>
           <a:prstGeom prst="rect">
             <a:avLst/>
@@ -29442,13 +32018,13 @@
       </p:sp>
       <p:sp>
         <p:nvSpPr>
-          <p:cNvPr id="28" name="Shape 26"/>
-          <p:cNvSpPr/>
-          <p:nvPr/>
-        </p:nvSpPr>
-        <p:spPr>
-          <a:xfrm>
-            <a:off x="5742432" y="3364992"/>
+          <p:cNvPr id="31" name="Shape 29"/>
+          <p:cNvSpPr/>
+          <p:nvPr/>
+        </p:nvSpPr>
+        <p:spPr>
+          <a:xfrm>
+            <a:off x="4370832" y="3364992"/>
             <a:ext cx="1645920" cy="475488"/>
           </a:xfrm>
           <a:prstGeom prst="rect">
@@ -29469,13 +32045,13 @@
       </p:sp>
       <p:sp>
         <p:nvSpPr>
-          <p:cNvPr id="29" name="Text 27"/>
-          <p:cNvSpPr/>
-          <p:nvPr/>
-        </p:nvSpPr>
-        <p:spPr>
-          <a:xfrm>
-            <a:off x="5742432" y="3364992"/>
+          <p:cNvPr id="32" name="Text 30"/>
+          <p:cNvSpPr/>
+          <p:nvPr/>
+        </p:nvSpPr>
+        <p:spPr>
+          <a:xfrm>
+            <a:off x="4370832" y="3364992"/>
             <a:ext cx="1645920" cy="475488"/>
           </a:xfrm>
           <a:prstGeom prst="rect">
@@ -29500,7 +32076,7 @@
                 <a:ea typeface="Trebuchet MS" pitchFamily="34" charset="-122"/>
                 <a:cs typeface="Trebuchet MS" pitchFamily="34" charset="-120"/>
               </a:rPr>
-              <a:t>heat</a:t>
+              <a:t>e</a:t>
             </a:r>
             <a:endParaRPr lang="en-US" sz="1400" dirty="0"/>
           </a:p>
@@ -29508,7 +32084,112 @@
       </p:sp>
       <p:sp>
         <p:nvSpPr>
-          <p:cNvPr id="30" name="Shape 28"/>
+          <p:cNvPr id="33" name="Text 31"/>
+          <p:cNvSpPr/>
+          <p:nvPr/>
+        </p:nvSpPr>
+        <p:spPr>
+          <a:xfrm>
+            <a:off x="6016752" y="3364992"/>
+            <a:ext cx="411480" cy="475488"/>
+          </a:xfrm>
+          <a:prstGeom prst="rect">
+            <a:avLst/>
+          </a:prstGeom>
+          <a:noFill/>
+          <a:ln/>
+        </p:spPr>
+        <p:txBody>
+          <a:bodyPr wrap="square" lIns="0" tIns="0" rIns="0" bIns="0" rtlCol="0" anchor="ctr"/>
+          <a:lstStyle/>
+          <a:p>
+            <a:pPr algn="ctr" indent="0" marL="0">
+              <a:buNone/>
+            </a:pPr>
+            <a:r>
+              <a:rPr lang="en-US" sz="1600" b="1" dirty="0">
+                <a:solidFill>
+                  <a:srgbClr val="0D9488"/>
+                </a:solidFill>
+                <a:latin typeface="Trebuchet MS" pitchFamily="34" charset="0"/>
+                <a:ea typeface="Trebuchet MS" pitchFamily="34" charset="-122"/>
+                <a:cs typeface="Trebuchet MS" pitchFamily="34" charset="-120"/>
+              </a:rPr>
+              <a:t>·</a:t>
+            </a:r>
+            <a:endParaRPr lang="en-US" sz="1600" dirty="0"/>
+          </a:p>
+        </p:txBody>
+      </p:sp>
+      <p:sp>
+        <p:nvSpPr>
+          <p:cNvPr id="34" name="Shape 32"/>
+          <p:cNvSpPr/>
+          <p:nvPr/>
+        </p:nvSpPr>
+        <p:spPr>
+          <a:xfrm>
+            <a:off x="6428232" y="3364992"/>
+            <a:ext cx="1645920" cy="475488"/>
+          </a:xfrm>
+          <a:prstGeom prst="rect">
+            <a:avLst>
+              <a:gd name="adj" fmla="val 9615"/>
+            </a:avLst>
+          </a:prstGeom>
+          <a:solidFill>
+            <a:srgbClr val="FFFFFF"/>
+          </a:solidFill>
+          <a:ln w="12700">
+            <a:solidFill>
+              <a:srgbClr val="0D9488"/>
+            </a:solidFill>
+            <a:prstDash val="solid"/>
+          </a:ln>
+        </p:spPr>
+      </p:sp>
+      <p:sp>
+        <p:nvSpPr>
+          <p:cNvPr id="35" name="Text 33"/>
+          <p:cNvSpPr/>
+          <p:nvPr/>
+        </p:nvSpPr>
+        <p:spPr>
+          <a:xfrm>
+            <a:off x="6428232" y="3364992"/>
+            <a:ext cx="1645920" cy="475488"/>
+          </a:xfrm>
+          <a:prstGeom prst="rect">
+            <a:avLst/>
+          </a:prstGeom>
+          <a:noFill/>
+          <a:ln/>
+        </p:spPr>
+        <p:txBody>
+          <a:bodyPr wrap="square" lIns="0" tIns="0" rIns="0" bIns="0" rtlCol="0" anchor="ctr"/>
+          <a:lstStyle/>
+          <a:p>
+            <a:pPr algn="ctr" indent="0" marL="0">
+              <a:buNone/>
+            </a:pPr>
+            <a:r>
+              <a:rPr lang="en-US" sz="1400" b="1" dirty="0">
+                <a:solidFill>
+                  <a:srgbClr val="0D9488"/>
+                </a:solidFill>
+                <a:latin typeface="Trebuchet MS" pitchFamily="34" charset="0"/>
+                <a:ea typeface="Trebuchet MS" pitchFamily="34" charset="-122"/>
+                <a:cs typeface="Trebuchet MS" pitchFamily="34" charset="-120"/>
+              </a:rPr>
+              <a:t>dence</a:t>
+            </a:r>
+            <a:endParaRPr lang="en-US" sz="1400" dirty="0"/>
+          </a:p>
+        </p:txBody>
+      </p:sp>
+      <p:sp>
+        <p:nvSpPr>
+          <p:cNvPr id="36" name="Shape 34"/>
           <p:cNvSpPr/>
           <p:nvPr/>
         </p:nvSpPr>
@@ -29535,7 +32216,7 @@
       </p:sp>
       <p:sp>
         <p:nvSpPr>
-          <p:cNvPr id="31" name="Text 29"/>
+          <p:cNvPr id="37" name="Text 35"/>
           <p:cNvSpPr/>
           <p:nvPr/>
         </p:nvSpPr>
@@ -29574,7 +32255,7 @@
       </p:sp>
       <p:sp>
         <p:nvSpPr>
-          <p:cNvPr id="32" name="Shape 30"/>
+          <p:cNvPr id="38" name="Shape 36"/>
           <p:cNvSpPr/>
           <p:nvPr/>
         </p:nvSpPr>
@@ -29601,7 +32282,7 @@
       </p:sp>
       <p:sp>
         <p:nvSpPr>
-          <p:cNvPr id="33" name="Text 31"/>
+          <p:cNvPr id="39" name="Text 37"/>
           <p:cNvSpPr/>
           <p:nvPr/>
         </p:nvSpPr>
@@ -29924,7 +32605,7 @@
                 <a:ea typeface="Calibri" pitchFamily="34" charset="-122"/>
                 <a:cs typeface="Calibri" pitchFamily="34" charset="-120"/>
               </a:rPr>
-              <a:t>Word Labs  •  wordlabs.app  •  Prefix: 'pre-' = before, in advance</a:t>
+              <a:t>Word Labs  •  wordlabs.app  •  Prefix: 'pre-' = before</a:t>
             </a:r>
             <a:endParaRPr lang="en-US" sz="800" dirty="0"/>
           </a:p>
@@ -30063,7 +32744,7 @@
                 <a:ea typeface="Trebuchet MS" pitchFamily="34" charset="-122"/>
                 <a:cs typeface="Trebuchet MS" pitchFamily="34" charset="-120"/>
               </a:rPr>
-              <a:t>preheat</a:t>
+              <a:t>precedence</a:t>
             </a:r>
             <a:endParaRPr lang="en-US" sz="2800" dirty="0"/>
           </a:p>
@@ -30143,7 +32824,7 @@
         </p:nvSpPr>
         <p:spPr>
           <a:xfrm>
-            <a:off x="2938272" y="2258568"/>
+            <a:off x="2221992" y="2258568"/>
             <a:ext cx="1828800" cy="292608"/>
           </a:xfrm>
           <a:prstGeom prst="rect">
@@ -30177,7 +32858,7 @@
         </p:nvSpPr>
         <p:spPr>
           <a:xfrm>
-            <a:off x="2938272" y="2258568"/>
+            <a:off x="2221992" y="2258568"/>
             <a:ext cx="1828800" cy="292608"/>
           </a:xfrm>
           <a:prstGeom prst="rect">
@@ -30216,7 +32897,7 @@
         </p:nvSpPr>
         <p:spPr>
           <a:xfrm>
-            <a:off x="2938272" y="2569464"/>
+            <a:off x="2221992" y="2569464"/>
             <a:ext cx="1828800" cy="201168"/>
           </a:xfrm>
           <a:prstGeom prst="rect">
@@ -30255,7 +32936,7 @@
         </p:nvSpPr>
         <p:spPr>
           <a:xfrm>
-            <a:off x="5803392" y="2258568"/>
+            <a:off x="4370832" y="2258568"/>
             <a:ext cx="1828800" cy="292608"/>
           </a:xfrm>
           <a:prstGeom prst="rect">
@@ -30289,7 +32970,7 @@
         </p:nvSpPr>
         <p:spPr>
           <a:xfrm>
-            <a:off x="5803392" y="2258568"/>
+            <a:off x="4370832" y="2258568"/>
             <a:ext cx="1828800" cy="292608"/>
           </a:xfrm>
           <a:prstGeom prst="rect">
@@ -30314,7 +32995,7 @@
                 <a:ea typeface="Trebuchet MS" pitchFamily="34" charset="-122"/>
                 <a:cs typeface="Trebuchet MS" pitchFamily="34" charset="-120"/>
               </a:rPr>
-              <a:t>heat</a:t>
+              <a:t>cede</a:t>
             </a:r>
             <a:endParaRPr lang="en-US" sz="1300" dirty="0"/>
           </a:p>
@@ -30328,7 +33009,7 @@
         </p:nvSpPr>
         <p:spPr>
           <a:xfrm>
-            <a:off x="5803392" y="2569464"/>
+            <a:off x="4370832" y="2569464"/>
             <a:ext cx="1828800" cy="201168"/>
           </a:xfrm>
           <a:prstGeom prst="rect">
@@ -30353,7 +33034,7 @@
                 <a:ea typeface="Calibri" pitchFamily="34" charset="-122"/>
                 <a:cs typeface="Calibri" pitchFamily="34" charset="-120"/>
               </a:rPr>
-              <a:t>to make warm</a:t>
+              <a:t>go; yield</a:t>
             </a:r>
             <a:endParaRPr lang="en-US" sz="850" dirty="0"/>
           </a:p>
@@ -30362,6 +33043,118 @@
       <p:sp>
         <p:nvSpPr>
           <p:cNvPr id="22" name="Shape 20"/>
+          <p:cNvSpPr/>
+          <p:nvPr/>
+        </p:nvSpPr>
+        <p:spPr>
+          <a:xfrm>
+            <a:off x="6519672" y="2258568"/>
+            <a:ext cx="1828800" cy="292608"/>
+          </a:xfrm>
+          <a:prstGeom prst="rect">
+            <a:avLst>
+              <a:gd name="adj" fmla="val 25000"/>
+            </a:avLst>
+          </a:prstGeom>
+          <a:solidFill>
+            <a:srgbClr val="FCE7F3"/>
+          </a:solidFill>
+          <a:ln w="19050">
+            <a:solidFill>
+              <a:srgbClr val="DB2777"/>
+            </a:solidFill>
+            <a:prstDash val="solid"/>
+          </a:ln>
+          <a:effectLst>
+            <a:outerShdw sx="100000" sy="100000" kx="0" ky="0" algn="bl" rotWithShape="0" blurRad="101600" dist="38100" dir="8100000">
+              <a:srgbClr val="000000">
+                <a:alpha val="12000"/>
+              </a:srgbClr>
+            </a:outerShdw>
+          </a:effectLst>
+        </p:spPr>
+      </p:sp>
+      <p:sp>
+        <p:nvSpPr>
+          <p:cNvPr id="23" name="Text 21"/>
+          <p:cNvSpPr/>
+          <p:nvPr/>
+        </p:nvSpPr>
+        <p:spPr>
+          <a:xfrm>
+            <a:off x="6519672" y="2258568"/>
+            <a:ext cx="1828800" cy="292608"/>
+          </a:xfrm>
+          <a:prstGeom prst="rect">
+            <a:avLst/>
+          </a:prstGeom>
+          <a:noFill/>
+          <a:ln/>
+        </p:spPr>
+        <p:txBody>
+          <a:bodyPr wrap="square" lIns="0" tIns="0" rIns="0" bIns="0" rtlCol="0" anchor="ctr"/>
+          <a:lstStyle/>
+          <a:p>
+            <a:pPr algn="ctr" indent="0" marL="0">
+              <a:buNone/>
+            </a:pPr>
+            <a:r>
+              <a:rPr lang="en-US" sz="1300" b="1" dirty="0">
+                <a:solidFill>
+                  <a:srgbClr val="9D174D"/>
+                </a:solidFill>
+                <a:latin typeface="Trebuchet MS" pitchFamily="34" charset="0"/>
+                <a:ea typeface="Trebuchet MS" pitchFamily="34" charset="-122"/>
+                <a:cs typeface="Trebuchet MS" pitchFamily="34" charset="-120"/>
+              </a:rPr>
+              <a:t>ence</a:t>
+            </a:r>
+            <a:endParaRPr lang="en-US" sz="1300" dirty="0"/>
+          </a:p>
+        </p:txBody>
+      </p:sp>
+      <p:sp>
+        <p:nvSpPr>
+          <p:cNvPr id="24" name="Text 22"/>
+          <p:cNvSpPr/>
+          <p:nvPr/>
+        </p:nvSpPr>
+        <p:spPr>
+          <a:xfrm>
+            <a:off x="6519672" y="2569464"/>
+            <a:ext cx="1828800" cy="201168"/>
+          </a:xfrm>
+          <a:prstGeom prst="rect">
+            <a:avLst/>
+          </a:prstGeom>
+          <a:noFill/>
+          <a:ln/>
+        </p:spPr>
+        <p:txBody>
+          <a:bodyPr wrap="square" lIns="0" tIns="0" rIns="0" bIns="0" rtlCol="0" anchor="t"/>
+          <a:lstStyle/>
+          <a:p>
+            <a:pPr algn="ctr" indent="0" marL="0">
+              <a:buNone/>
+            </a:pPr>
+            <a:r>
+              <a:rPr lang="en-US" sz="850" dirty="0">
+                <a:solidFill>
+                  <a:srgbClr val="475569"/>
+                </a:solidFill>
+                <a:latin typeface="Calibri" pitchFamily="34" charset="0"/>
+                <a:ea typeface="Calibri" pitchFamily="34" charset="-122"/>
+                <a:cs typeface="Calibri" pitchFamily="34" charset="-120"/>
+              </a:rPr>
+              <a:t>state of</a:t>
+            </a:r>
+            <a:endParaRPr lang="en-US" sz="850" dirty="0"/>
+          </a:p>
+        </p:txBody>
+      </p:sp>
+      <p:sp>
+        <p:nvSpPr>
+          <p:cNvPr id="25" name="Shape 23"/>
           <p:cNvSpPr/>
           <p:nvPr/>
         </p:nvSpPr>
@@ -30388,7 +33181,7 @@
       </p:sp>
       <p:sp>
         <p:nvSpPr>
-          <p:cNvPr id="23" name="Text 21"/>
+          <p:cNvPr id="26" name="Text 24"/>
           <p:cNvSpPr/>
           <p:nvPr/>
         </p:nvSpPr>
@@ -30427,7 +33220,7 @@
       </p:sp>
       <p:sp>
         <p:nvSpPr>
-          <p:cNvPr id="24" name="Shape 22"/>
+          <p:cNvPr id="27" name="Shape 25"/>
           <p:cNvSpPr/>
           <p:nvPr/>
         </p:nvSpPr>
@@ -30454,13 +33247,13 @@
       </p:sp>
       <p:sp>
         <p:nvSpPr>
-          <p:cNvPr id="25" name="Shape 23"/>
-          <p:cNvSpPr/>
-          <p:nvPr/>
-        </p:nvSpPr>
-        <p:spPr>
-          <a:xfrm>
-            <a:off x="2999232" y="3364992"/>
+          <p:cNvPr id="28" name="Shape 26"/>
+          <p:cNvSpPr/>
+          <p:nvPr/>
+        </p:nvSpPr>
+        <p:spPr>
+          <a:xfrm>
+            <a:off x="2313432" y="3364992"/>
             <a:ext cx="1645920" cy="475488"/>
           </a:xfrm>
           <a:prstGeom prst="rect">
@@ -30481,13 +33274,13 @@
       </p:sp>
       <p:sp>
         <p:nvSpPr>
-          <p:cNvPr id="26" name="Text 24"/>
-          <p:cNvSpPr/>
-          <p:nvPr/>
-        </p:nvSpPr>
-        <p:spPr>
-          <a:xfrm>
-            <a:off x="2999232" y="3364992"/>
+          <p:cNvPr id="29" name="Text 27"/>
+          <p:cNvSpPr/>
+          <p:nvPr/>
+        </p:nvSpPr>
+        <p:spPr>
+          <a:xfrm>
+            <a:off x="2313432" y="3364992"/>
             <a:ext cx="1645920" cy="475488"/>
           </a:xfrm>
           <a:prstGeom prst="rect">
@@ -30512,7 +33305,7 @@
                 <a:ea typeface="Trebuchet MS" pitchFamily="34" charset="-122"/>
                 <a:cs typeface="Trebuchet MS" pitchFamily="34" charset="-120"/>
               </a:rPr>
-              <a:t>pre</a:t>
+              <a:t>prec</a:t>
             </a:r>
             <a:endParaRPr lang="en-US" sz="1400" dirty="0"/>
           </a:p>
@@ -30520,14 +33313,14 @@
       </p:sp>
       <p:sp>
         <p:nvSpPr>
-          <p:cNvPr id="27" name="Text 25"/>
-          <p:cNvSpPr/>
-          <p:nvPr/>
-        </p:nvSpPr>
-        <p:spPr>
-          <a:xfrm>
-            <a:off x="4645152" y="3364992"/>
-            <a:ext cx="1097280" cy="475488"/>
+          <p:cNvPr id="30" name="Text 28"/>
+          <p:cNvSpPr/>
+          <p:nvPr/>
+        </p:nvSpPr>
+        <p:spPr>
+          <a:xfrm>
+            <a:off x="3959352" y="3364992"/>
+            <a:ext cx="411480" cy="475488"/>
           </a:xfrm>
           <a:prstGeom prst="rect">
             <a:avLst/>
@@ -30559,13 +33352,13 @@
       </p:sp>
       <p:sp>
         <p:nvSpPr>
-          <p:cNvPr id="28" name="Shape 26"/>
-          <p:cNvSpPr/>
-          <p:nvPr/>
-        </p:nvSpPr>
-        <p:spPr>
-          <a:xfrm>
-            <a:off x="5742432" y="3364992"/>
+          <p:cNvPr id="31" name="Shape 29"/>
+          <p:cNvSpPr/>
+          <p:nvPr/>
+        </p:nvSpPr>
+        <p:spPr>
+          <a:xfrm>
+            <a:off x="4370832" y="3364992"/>
             <a:ext cx="1645920" cy="475488"/>
           </a:xfrm>
           <a:prstGeom prst="rect">
@@ -30586,13 +33379,13 @@
       </p:sp>
       <p:sp>
         <p:nvSpPr>
-          <p:cNvPr id="29" name="Text 27"/>
-          <p:cNvSpPr/>
-          <p:nvPr/>
-        </p:nvSpPr>
-        <p:spPr>
-          <a:xfrm>
-            <a:off x="5742432" y="3364992"/>
+          <p:cNvPr id="32" name="Text 30"/>
+          <p:cNvSpPr/>
+          <p:nvPr/>
+        </p:nvSpPr>
+        <p:spPr>
+          <a:xfrm>
+            <a:off x="4370832" y="3364992"/>
             <a:ext cx="1645920" cy="475488"/>
           </a:xfrm>
           <a:prstGeom prst="rect">
@@ -30617,7 +33410,7 @@
                 <a:ea typeface="Trebuchet MS" pitchFamily="34" charset="-122"/>
                 <a:cs typeface="Trebuchet MS" pitchFamily="34" charset="-120"/>
               </a:rPr>
-              <a:t>heat</a:t>
+              <a:t>e</a:t>
             </a:r>
             <a:endParaRPr lang="en-US" sz="1400" dirty="0"/>
           </a:p>
@@ -30625,7 +33418,112 @@
       </p:sp>
       <p:sp>
         <p:nvSpPr>
-          <p:cNvPr id="30" name="Shape 28"/>
+          <p:cNvPr id="33" name="Text 31"/>
+          <p:cNvSpPr/>
+          <p:nvPr/>
+        </p:nvSpPr>
+        <p:spPr>
+          <a:xfrm>
+            <a:off x="6016752" y="3364992"/>
+            <a:ext cx="411480" cy="475488"/>
+          </a:xfrm>
+          <a:prstGeom prst="rect">
+            <a:avLst/>
+          </a:prstGeom>
+          <a:noFill/>
+          <a:ln/>
+        </p:spPr>
+        <p:txBody>
+          <a:bodyPr wrap="square" lIns="0" tIns="0" rIns="0" bIns="0" rtlCol="0" anchor="ctr"/>
+          <a:lstStyle/>
+          <a:p>
+            <a:pPr algn="ctr" indent="0" marL="0">
+              <a:buNone/>
+            </a:pPr>
+            <a:r>
+              <a:rPr lang="en-US" sz="1600" b="1" dirty="0">
+                <a:solidFill>
+                  <a:srgbClr val="0D9488"/>
+                </a:solidFill>
+                <a:latin typeface="Trebuchet MS" pitchFamily="34" charset="0"/>
+                <a:ea typeface="Trebuchet MS" pitchFamily="34" charset="-122"/>
+                <a:cs typeface="Trebuchet MS" pitchFamily="34" charset="-120"/>
+              </a:rPr>
+              <a:t>·</a:t>
+            </a:r>
+            <a:endParaRPr lang="en-US" sz="1600" dirty="0"/>
+          </a:p>
+        </p:txBody>
+      </p:sp>
+      <p:sp>
+        <p:nvSpPr>
+          <p:cNvPr id="34" name="Shape 32"/>
+          <p:cNvSpPr/>
+          <p:nvPr/>
+        </p:nvSpPr>
+        <p:spPr>
+          <a:xfrm>
+            <a:off x="6428232" y="3364992"/>
+            <a:ext cx="1645920" cy="475488"/>
+          </a:xfrm>
+          <a:prstGeom prst="rect">
+            <a:avLst>
+              <a:gd name="adj" fmla="val 9615"/>
+            </a:avLst>
+          </a:prstGeom>
+          <a:solidFill>
+            <a:srgbClr val="FFFFFF"/>
+          </a:solidFill>
+          <a:ln w="12700">
+            <a:solidFill>
+              <a:srgbClr val="0D9488"/>
+            </a:solidFill>
+            <a:prstDash val="solid"/>
+          </a:ln>
+        </p:spPr>
+      </p:sp>
+      <p:sp>
+        <p:nvSpPr>
+          <p:cNvPr id="35" name="Text 33"/>
+          <p:cNvSpPr/>
+          <p:nvPr/>
+        </p:nvSpPr>
+        <p:spPr>
+          <a:xfrm>
+            <a:off x="6428232" y="3364992"/>
+            <a:ext cx="1645920" cy="475488"/>
+          </a:xfrm>
+          <a:prstGeom prst="rect">
+            <a:avLst/>
+          </a:prstGeom>
+          <a:noFill/>
+          <a:ln/>
+        </p:spPr>
+        <p:txBody>
+          <a:bodyPr wrap="square" lIns="0" tIns="0" rIns="0" bIns="0" rtlCol="0" anchor="ctr"/>
+          <a:lstStyle/>
+          <a:p>
+            <a:pPr algn="ctr" indent="0" marL="0">
+              <a:buNone/>
+            </a:pPr>
+            <a:r>
+              <a:rPr lang="en-US" sz="1400" b="1" dirty="0">
+                <a:solidFill>
+                  <a:srgbClr val="0D9488"/>
+                </a:solidFill>
+                <a:latin typeface="Trebuchet MS" pitchFamily="34" charset="0"/>
+                <a:ea typeface="Trebuchet MS" pitchFamily="34" charset="-122"/>
+                <a:cs typeface="Trebuchet MS" pitchFamily="34" charset="-120"/>
+              </a:rPr>
+              <a:t>dence</a:t>
+            </a:r>
+            <a:endParaRPr lang="en-US" sz="1400" dirty="0"/>
+          </a:p>
+        </p:txBody>
+      </p:sp>
+      <p:sp>
+        <p:nvSpPr>
+          <p:cNvPr id="36" name="Shape 34"/>
           <p:cNvSpPr/>
           <p:nvPr/>
         </p:nvSpPr>
@@ -30652,7 +33550,7 @@
       </p:sp>
       <p:sp>
         <p:nvSpPr>
-          <p:cNvPr id="31" name="Text 29"/>
+          <p:cNvPr id="37" name="Text 35"/>
           <p:cNvSpPr/>
           <p:nvPr/>
         </p:nvSpPr>
@@ -30691,18 +33589,18 @@
       </p:sp>
       <p:sp>
         <p:nvSpPr>
-          <p:cNvPr id="32" name="Shape 30"/>
+          <p:cNvPr id="38" name="Shape 36"/>
           <p:cNvSpPr/>
           <p:nvPr/>
         </p:nvSpPr>
         <p:spPr>
           <a:xfrm>
             <a:off x="1874520" y="4096512"/>
-            <a:ext cx="6903720" cy="804672"/>
+            <a:ext cx="6903720" cy="658368"/>
           </a:xfrm>
           <a:prstGeom prst="rect">
             <a:avLst>
-              <a:gd name="adj" fmla="val 6818"/>
+              <a:gd name="adj" fmla="val 8333"/>
             </a:avLst>
           </a:prstGeom>
           <a:solidFill>
@@ -30718,18 +33616,18 @@
       </p:sp>
       <p:sp>
         <p:nvSpPr>
-          <p:cNvPr id="33" name="Shape 31"/>
-          <p:cNvSpPr/>
-          <p:nvPr/>
-        </p:nvSpPr>
-        <p:spPr>
-          <a:xfrm>
-            <a:off x="2427732" y="4169664"/>
-            <a:ext cx="685800" cy="384048"/>
+          <p:cNvPr id="39" name="Shape 37"/>
+          <p:cNvSpPr/>
+          <p:nvPr/>
+        </p:nvSpPr>
+        <p:spPr>
+          <a:xfrm>
+            <a:off x="1951828" y="4169664"/>
+            <a:ext cx="603504" cy="475488"/>
           </a:xfrm>
           <a:prstGeom prst="rect">
             <a:avLst>
-              <a:gd name="adj" fmla="val 9524"/>
+              <a:gd name="adj" fmla="val 7692"/>
             </a:avLst>
           </a:prstGeom>
           <a:solidFill>
@@ -30745,14 +33643,14 @@
       </p:sp>
       <p:sp>
         <p:nvSpPr>
-          <p:cNvPr id="34" name="Text 32"/>
-          <p:cNvSpPr/>
-          <p:nvPr/>
-        </p:nvSpPr>
-        <p:spPr>
-          <a:xfrm>
-            <a:off x="2427732" y="4169664"/>
-            <a:ext cx="685800" cy="384048"/>
+          <p:cNvPr id="40" name="Text 38"/>
+          <p:cNvSpPr/>
+          <p:nvPr/>
+        </p:nvSpPr>
+        <p:spPr>
+          <a:xfrm>
+            <a:off x="1951828" y="4169664"/>
+            <a:ext cx="603504" cy="475488"/>
           </a:xfrm>
           <a:prstGeom prst="rect">
             <a:avLst/>
@@ -30776,7 +33674,7 @@
                 <a:ea typeface="Trebuchet MS" pitchFamily="34" charset="-122"/>
                 <a:cs typeface="Trebuchet MS" pitchFamily="34" charset="-120"/>
               </a:rPr>
-              <a:t>pr</a:t>
+              <a:t>p</a:t>
             </a:r>
             <a:endParaRPr lang="en-US" sz="900" dirty="0"/>
           </a:p>
@@ -30784,18 +33682,18 @@
       </p:sp>
       <p:sp>
         <p:nvSpPr>
-          <p:cNvPr id="35" name="Shape 33"/>
-          <p:cNvSpPr/>
-          <p:nvPr/>
-        </p:nvSpPr>
-        <p:spPr>
-          <a:xfrm>
-            <a:off x="3639312" y="4169664"/>
-            <a:ext cx="685800" cy="384048"/>
+          <p:cNvPr id="41" name="Shape 39"/>
+          <p:cNvSpPr/>
+          <p:nvPr/>
+        </p:nvSpPr>
+        <p:spPr>
+          <a:xfrm>
+            <a:off x="2605209" y="4169664"/>
+            <a:ext cx="603504" cy="475488"/>
           </a:xfrm>
           <a:prstGeom prst="rect">
             <a:avLst>
-              <a:gd name="adj" fmla="val 9524"/>
+              <a:gd name="adj" fmla="val 7692"/>
             </a:avLst>
           </a:prstGeom>
           <a:solidFill>
@@ -30811,14 +33709,14 @@
       </p:sp>
       <p:sp>
         <p:nvSpPr>
-          <p:cNvPr id="36" name="Text 34"/>
-          <p:cNvSpPr/>
-          <p:nvPr/>
-        </p:nvSpPr>
-        <p:spPr>
-          <a:xfrm>
-            <a:off x="3639312" y="4169664"/>
-            <a:ext cx="685800" cy="384048"/>
+          <p:cNvPr id="42" name="Text 40"/>
+          <p:cNvSpPr/>
+          <p:nvPr/>
+        </p:nvSpPr>
+        <p:spPr>
+          <a:xfrm>
+            <a:off x="2605209" y="4169664"/>
+            <a:ext cx="603504" cy="475488"/>
           </a:xfrm>
           <a:prstGeom prst="rect">
             <a:avLst/>
@@ -30842,7 +33740,7 @@
                 <a:ea typeface="Trebuchet MS" pitchFamily="34" charset="-122"/>
                 <a:cs typeface="Trebuchet MS" pitchFamily="34" charset="-120"/>
               </a:rPr>
-              <a:t>e</a:t>
+              <a:t>r</a:t>
             </a:r>
             <a:endParaRPr lang="en-US" sz="900" dirty="0"/>
           </a:p>
@@ -30850,18 +33748,18 @@
       </p:sp>
       <p:sp>
         <p:nvSpPr>
-          <p:cNvPr id="37" name="Shape 35"/>
-          <p:cNvSpPr/>
-          <p:nvPr/>
-        </p:nvSpPr>
-        <p:spPr>
-          <a:xfrm>
-            <a:off x="4850892" y="4169664"/>
-            <a:ext cx="685800" cy="384048"/>
+          <p:cNvPr id="43" name="Shape 41"/>
+          <p:cNvSpPr/>
+          <p:nvPr/>
+        </p:nvSpPr>
+        <p:spPr>
+          <a:xfrm>
+            <a:off x="3258589" y="4169664"/>
+            <a:ext cx="603504" cy="475488"/>
           </a:xfrm>
           <a:prstGeom prst="rect">
             <a:avLst>
-              <a:gd name="adj" fmla="val 9524"/>
+              <a:gd name="adj" fmla="val 7692"/>
             </a:avLst>
           </a:prstGeom>
           <a:solidFill>
@@ -30877,14 +33775,14 @@
       </p:sp>
       <p:sp>
         <p:nvSpPr>
-          <p:cNvPr id="38" name="Text 36"/>
-          <p:cNvSpPr/>
-          <p:nvPr/>
-        </p:nvSpPr>
-        <p:spPr>
-          <a:xfrm>
-            <a:off x="4850892" y="4169664"/>
-            <a:ext cx="685800" cy="384048"/>
+          <p:cNvPr id="44" name="Text 42"/>
+          <p:cNvSpPr/>
+          <p:nvPr/>
+        </p:nvSpPr>
+        <p:spPr>
+          <a:xfrm>
+            <a:off x="3258589" y="4169664"/>
+            <a:ext cx="603504" cy="475488"/>
           </a:xfrm>
           <a:prstGeom prst="rect">
             <a:avLst/>
@@ -30908,7 +33806,7 @@
                 <a:ea typeface="Trebuchet MS" pitchFamily="34" charset="-122"/>
                 <a:cs typeface="Trebuchet MS" pitchFamily="34" charset="-120"/>
               </a:rPr>
-              <a:t>h</a:t>
+              <a:t>e</a:t>
             </a:r>
             <a:endParaRPr lang="en-US" sz="900" dirty="0"/>
           </a:p>
@@ -30916,18 +33814,18 @@
       </p:sp>
       <p:sp>
         <p:nvSpPr>
-          <p:cNvPr id="39" name="Shape 37"/>
-          <p:cNvSpPr/>
-          <p:nvPr/>
-        </p:nvSpPr>
-        <p:spPr>
-          <a:xfrm>
-            <a:off x="6062472" y="4169664"/>
-            <a:ext cx="685800" cy="384048"/>
+          <p:cNvPr id="45" name="Shape 43"/>
+          <p:cNvSpPr/>
+          <p:nvPr/>
+        </p:nvSpPr>
+        <p:spPr>
+          <a:xfrm>
+            <a:off x="3911969" y="4169664"/>
+            <a:ext cx="603504" cy="475488"/>
           </a:xfrm>
           <a:prstGeom prst="rect">
             <a:avLst>
-              <a:gd name="adj" fmla="val 9524"/>
+              <a:gd name="adj" fmla="val 7692"/>
             </a:avLst>
           </a:prstGeom>
           <a:solidFill>
@@ -30943,14 +33841,14 @@
       </p:sp>
       <p:sp>
         <p:nvSpPr>
-          <p:cNvPr id="40" name="Text 38"/>
-          <p:cNvSpPr/>
-          <p:nvPr/>
-        </p:nvSpPr>
-        <p:spPr>
-          <a:xfrm>
-            <a:off x="6062472" y="4169664"/>
-            <a:ext cx="685800" cy="384048"/>
+          <p:cNvPr id="46" name="Text 44"/>
+          <p:cNvSpPr/>
+          <p:nvPr/>
+        </p:nvSpPr>
+        <p:spPr>
+          <a:xfrm>
+            <a:off x="3911969" y="4169664"/>
+            <a:ext cx="603504" cy="475488"/>
           </a:xfrm>
           <a:prstGeom prst="rect">
             <a:avLst/>
@@ -30974,7 +33872,7 @@
                 <a:ea typeface="Trebuchet MS" pitchFamily="34" charset="-122"/>
                 <a:cs typeface="Trebuchet MS" pitchFamily="34" charset="-120"/>
               </a:rPr>
-              <a:t>ea</a:t>
+              <a:t>c</a:t>
             </a:r>
             <a:endParaRPr lang="en-US" sz="900" dirty="0"/>
           </a:p>
@@ -30982,57 +33880,18 @@
       </p:sp>
       <p:sp>
         <p:nvSpPr>
-          <p:cNvPr id="41" name="Text 39"/>
-          <p:cNvSpPr/>
-          <p:nvPr/>
-        </p:nvSpPr>
-        <p:spPr>
-          <a:xfrm>
-            <a:off x="6062472" y="4572000"/>
-            <a:ext cx="685800" cy="219456"/>
-          </a:xfrm>
-          <a:prstGeom prst="rect">
-            <a:avLst/>
-          </a:prstGeom>
-          <a:noFill/>
-          <a:ln/>
-        </p:spPr>
-        <p:txBody>
-          <a:bodyPr wrap="square" lIns="0" tIns="0" rIns="0" bIns="0" rtlCol="0" anchor="t"/>
-          <a:lstStyle/>
-          <a:p>
-            <a:pPr algn="ctr" indent="0" marL="0">
-              <a:buNone/>
-            </a:pPr>
-            <a:r>
-              <a:rPr lang="en-US" sz="750" i="1" dirty="0">
-                <a:solidFill>
-                  <a:srgbClr val="94A3B8"/>
-                </a:solidFill>
-                <a:latin typeface="Calibri" pitchFamily="34" charset="0"/>
-                <a:ea typeface="Calibri" pitchFamily="34" charset="-122"/>
-                <a:cs typeface="Calibri" pitchFamily="34" charset="-120"/>
-              </a:rPr>
-              <a:t>/ee/</a:t>
-            </a:r>
-            <a:endParaRPr lang="en-US" sz="750" dirty="0"/>
-          </a:p>
-        </p:txBody>
-      </p:sp>
-      <p:sp>
-        <p:nvSpPr>
-          <p:cNvPr id="42" name="Shape 40"/>
-          <p:cNvSpPr/>
-          <p:nvPr/>
-        </p:nvSpPr>
-        <p:spPr>
-          <a:xfrm>
-            <a:off x="7274052" y="4169664"/>
-            <a:ext cx="685800" cy="384048"/>
+          <p:cNvPr id="47" name="Shape 45"/>
+          <p:cNvSpPr/>
+          <p:nvPr/>
+        </p:nvSpPr>
+        <p:spPr>
+          <a:xfrm>
+            <a:off x="4565350" y="4169664"/>
+            <a:ext cx="603504" cy="475488"/>
           </a:xfrm>
           <a:prstGeom prst="rect">
             <a:avLst>
-              <a:gd name="adj" fmla="val 9524"/>
+              <a:gd name="adj" fmla="val 7692"/>
             </a:avLst>
           </a:prstGeom>
           <a:solidFill>
@@ -31048,14 +33907,14 @@
       </p:sp>
       <p:sp>
         <p:nvSpPr>
-          <p:cNvPr id="43" name="Text 41"/>
-          <p:cNvSpPr/>
-          <p:nvPr/>
-        </p:nvSpPr>
-        <p:spPr>
-          <a:xfrm>
-            <a:off x="7274052" y="4169664"/>
-            <a:ext cx="685800" cy="384048"/>
+          <p:cNvPr id="48" name="Text 46"/>
+          <p:cNvSpPr/>
+          <p:nvPr/>
+        </p:nvSpPr>
+        <p:spPr>
+          <a:xfrm>
+            <a:off x="4565350" y="4169664"/>
+            <a:ext cx="603504" cy="475488"/>
           </a:xfrm>
           <a:prstGeom prst="rect">
             <a:avLst/>
@@ -31079,7 +33938,337 @@
                 <a:ea typeface="Trebuchet MS" pitchFamily="34" charset="-122"/>
                 <a:cs typeface="Trebuchet MS" pitchFamily="34" charset="-120"/>
               </a:rPr>
-              <a:t>t</a:t>
+              <a:t>e</a:t>
+            </a:r>
+            <a:endParaRPr lang="en-US" sz="900" dirty="0"/>
+          </a:p>
+        </p:txBody>
+      </p:sp>
+      <p:sp>
+        <p:nvSpPr>
+          <p:cNvPr id="49" name="Shape 47"/>
+          <p:cNvSpPr/>
+          <p:nvPr/>
+        </p:nvSpPr>
+        <p:spPr>
+          <a:xfrm>
+            <a:off x="5218730" y="4169664"/>
+            <a:ext cx="603504" cy="475488"/>
+          </a:xfrm>
+          <a:prstGeom prst="rect">
+            <a:avLst>
+              <a:gd name="adj" fmla="val 7692"/>
+            </a:avLst>
+          </a:prstGeom>
+          <a:solidFill>
+            <a:srgbClr val="FFFFFF"/>
+          </a:solidFill>
+          <a:ln w="12700">
+            <a:solidFill>
+              <a:srgbClr val="DB2777"/>
+            </a:solidFill>
+            <a:prstDash val="solid"/>
+          </a:ln>
+        </p:spPr>
+      </p:sp>
+      <p:sp>
+        <p:nvSpPr>
+          <p:cNvPr id="50" name="Text 48"/>
+          <p:cNvSpPr/>
+          <p:nvPr/>
+        </p:nvSpPr>
+        <p:spPr>
+          <a:xfrm>
+            <a:off x="5218730" y="4169664"/>
+            <a:ext cx="603504" cy="475488"/>
+          </a:xfrm>
+          <a:prstGeom prst="rect">
+            <a:avLst/>
+          </a:prstGeom>
+          <a:noFill/>
+          <a:ln/>
+        </p:spPr>
+        <p:txBody>
+          <a:bodyPr wrap="square" lIns="0" tIns="0" rIns="0" bIns="0" rtlCol="0" anchor="ctr"/>
+          <a:lstStyle/>
+          <a:p>
+            <a:pPr algn="ctr" indent="0" marL="0">
+              <a:buNone/>
+            </a:pPr>
+            <a:r>
+              <a:rPr lang="en-US" sz="900" b="1" dirty="0">
+                <a:solidFill>
+                  <a:srgbClr val="9D174D"/>
+                </a:solidFill>
+                <a:latin typeface="Trebuchet MS" pitchFamily="34" charset="0"/>
+                <a:ea typeface="Trebuchet MS" pitchFamily="34" charset="-122"/>
+                <a:cs typeface="Trebuchet MS" pitchFamily="34" charset="-120"/>
+              </a:rPr>
+              <a:t>d</a:t>
+            </a:r>
+            <a:endParaRPr lang="en-US" sz="900" dirty="0"/>
+          </a:p>
+        </p:txBody>
+      </p:sp>
+      <p:sp>
+        <p:nvSpPr>
+          <p:cNvPr id="51" name="Shape 49"/>
+          <p:cNvSpPr/>
+          <p:nvPr/>
+        </p:nvSpPr>
+        <p:spPr>
+          <a:xfrm>
+            <a:off x="5872111" y="4169664"/>
+            <a:ext cx="603504" cy="475488"/>
+          </a:xfrm>
+          <a:prstGeom prst="rect">
+            <a:avLst>
+              <a:gd name="adj" fmla="val 7692"/>
+            </a:avLst>
+          </a:prstGeom>
+          <a:solidFill>
+            <a:srgbClr val="FFFFFF"/>
+          </a:solidFill>
+          <a:ln w="12700">
+            <a:solidFill>
+              <a:srgbClr val="DB2777"/>
+            </a:solidFill>
+            <a:prstDash val="solid"/>
+          </a:ln>
+        </p:spPr>
+      </p:sp>
+      <p:sp>
+        <p:nvSpPr>
+          <p:cNvPr id="52" name="Text 50"/>
+          <p:cNvSpPr/>
+          <p:nvPr/>
+        </p:nvSpPr>
+        <p:spPr>
+          <a:xfrm>
+            <a:off x="5872111" y="4169664"/>
+            <a:ext cx="603504" cy="475488"/>
+          </a:xfrm>
+          <a:prstGeom prst="rect">
+            <a:avLst/>
+          </a:prstGeom>
+          <a:noFill/>
+          <a:ln/>
+        </p:spPr>
+        <p:txBody>
+          <a:bodyPr wrap="square" lIns="0" tIns="0" rIns="0" bIns="0" rtlCol="0" anchor="ctr"/>
+          <a:lstStyle/>
+          <a:p>
+            <a:pPr algn="ctr" indent="0" marL="0">
+              <a:buNone/>
+            </a:pPr>
+            <a:r>
+              <a:rPr lang="en-US" sz="900" b="1" dirty="0">
+                <a:solidFill>
+                  <a:srgbClr val="9D174D"/>
+                </a:solidFill>
+                <a:latin typeface="Trebuchet MS" pitchFamily="34" charset="0"/>
+                <a:ea typeface="Trebuchet MS" pitchFamily="34" charset="-122"/>
+                <a:cs typeface="Trebuchet MS" pitchFamily="34" charset="-120"/>
+              </a:rPr>
+              <a:t>e</a:t>
+            </a:r>
+            <a:endParaRPr lang="en-US" sz="900" dirty="0"/>
+          </a:p>
+        </p:txBody>
+      </p:sp>
+      <p:sp>
+        <p:nvSpPr>
+          <p:cNvPr id="53" name="Shape 51"/>
+          <p:cNvSpPr/>
+          <p:nvPr/>
+        </p:nvSpPr>
+        <p:spPr>
+          <a:xfrm>
+            <a:off x="6525491" y="4169664"/>
+            <a:ext cx="603504" cy="475488"/>
+          </a:xfrm>
+          <a:prstGeom prst="rect">
+            <a:avLst>
+              <a:gd name="adj" fmla="val 7692"/>
+            </a:avLst>
+          </a:prstGeom>
+          <a:solidFill>
+            <a:srgbClr val="FFFFFF"/>
+          </a:solidFill>
+          <a:ln w="12700">
+            <a:solidFill>
+              <a:srgbClr val="DB2777"/>
+            </a:solidFill>
+            <a:prstDash val="solid"/>
+          </a:ln>
+        </p:spPr>
+      </p:sp>
+      <p:sp>
+        <p:nvSpPr>
+          <p:cNvPr id="54" name="Text 52"/>
+          <p:cNvSpPr/>
+          <p:nvPr/>
+        </p:nvSpPr>
+        <p:spPr>
+          <a:xfrm>
+            <a:off x="6525491" y="4169664"/>
+            <a:ext cx="603504" cy="475488"/>
+          </a:xfrm>
+          <a:prstGeom prst="rect">
+            <a:avLst/>
+          </a:prstGeom>
+          <a:noFill/>
+          <a:ln/>
+        </p:spPr>
+        <p:txBody>
+          <a:bodyPr wrap="square" lIns="0" tIns="0" rIns="0" bIns="0" rtlCol="0" anchor="ctr"/>
+          <a:lstStyle/>
+          <a:p>
+            <a:pPr algn="ctr" indent="0" marL="0">
+              <a:buNone/>
+            </a:pPr>
+            <a:r>
+              <a:rPr lang="en-US" sz="900" b="1" dirty="0">
+                <a:solidFill>
+                  <a:srgbClr val="9D174D"/>
+                </a:solidFill>
+                <a:latin typeface="Trebuchet MS" pitchFamily="34" charset="0"/>
+                <a:ea typeface="Trebuchet MS" pitchFamily="34" charset="-122"/>
+                <a:cs typeface="Trebuchet MS" pitchFamily="34" charset="-120"/>
+              </a:rPr>
+              <a:t>n</a:t>
+            </a:r>
+            <a:endParaRPr lang="en-US" sz="900" dirty="0"/>
+          </a:p>
+        </p:txBody>
+      </p:sp>
+      <p:sp>
+        <p:nvSpPr>
+          <p:cNvPr id="55" name="Shape 53"/>
+          <p:cNvSpPr/>
+          <p:nvPr/>
+        </p:nvSpPr>
+        <p:spPr>
+          <a:xfrm>
+            <a:off x="7178871" y="4169664"/>
+            <a:ext cx="603504" cy="475488"/>
+          </a:xfrm>
+          <a:prstGeom prst="rect">
+            <a:avLst>
+              <a:gd name="adj" fmla="val 7692"/>
+            </a:avLst>
+          </a:prstGeom>
+          <a:solidFill>
+            <a:srgbClr val="FFFFFF"/>
+          </a:solidFill>
+          <a:ln w="12700">
+            <a:solidFill>
+              <a:srgbClr val="DB2777"/>
+            </a:solidFill>
+            <a:prstDash val="solid"/>
+          </a:ln>
+        </p:spPr>
+      </p:sp>
+      <p:sp>
+        <p:nvSpPr>
+          <p:cNvPr id="56" name="Text 54"/>
+          <p:cNvSpPr/>
+          <p:nvPr/>
+        </p:nvSpPr>
+        <p:spPr>
+          <a:xfrm>
+            <a:off x="7178871" y="4169664"/>
+            <a:ext cx="603504" cy="475488"/>
+          </a:xfrm>
+          <a:prstGeom prst="rect">
+            <a:avLst/>
+          </a:prstGeom>
+          <a:noFill/>
+          <a:ln/>
+        </p:spPr>
+        <p:txBody>
+          <a:bodyPr wrap="square" lIns="0" tIns="0" rIns="0" bIns="0" rtlCol="0" anchor="ctr"/>
+          <a:lstStyle/>
+          <a:p>
+            <a:pPr algn="ctr" indent="0" marL="0">
+              <a:buNone/>
+            </a:pPr>
+            <a:r>
+              <a:rPr lang="en-US" sz="900" b="1" dirty="0">
+                <a:solidFill>
+                  <a:srgbClr val="9D174D"/>
+                </a:solidFill>
+                <a:latin typeface="Trebuchet MS" pitchFamily="34" charset="0"/>
+                <a:ea typeface="Trebuchet MS" pitchFamily="34" charset="-122"/>
+                <a:cs typeface="Trebuchet MS" pitchFamily="34" charset="-120"/>
+              </a:rPr>
+              <a:t>c</a:t>
+            </a:r>
+            <a:endParaRPr lang="en-US" sz="900" dirty="0"/>
+          </a:p>
+        </p:txBody>
+      </p:sp>
+      <p:sp>
+        <p:nvSpPr>
+          <p:cNvPr id="57" name="Shape 55"/>
+          <p:cNvSpPr/>
+          <p:nvPr/>
+        </p:nvSpPr>
+        <p:spPr>
+          <a:xfrm>
+            <a:off x="7832252" y="4169664"/>
+            <a:ext cx="603504" cy="475488"/>
+          </a:xfrm>
+          <a:prstGeom prst="rect">
+            <a:avLst>
+              <a:gd name="adj" fmla="val 7692"/>
+            </a:avLst>
+          </a:prstGeom>
+          <a:solidFill>
+            <a:srgbClr val="FFFFFF"/>
+          </a:solidFill>
+          <a:ln w="12700">
+            <a:solidFill>
+              <a:srgbClr val="DB2777"/>
+            </a:solidFill>
+            <a:prstDash val="solid"/>
+          </a:ln>
+        </p:spPr>
+      </p:sp>
+      <p:sp>
+        <p:nvSpPr>
+          <p:cNvPr id="58" name="Text 56"/>
+          <p:cNvSpPr/>
+          <p:nvPr/>
+        </p:nvSpPr>
+        <p:spPr>
+          <a:xfrm>
+            <a:off x="7832252" y="4169664"/>
+            <a:ext cx="603504" cy="475488"/>
+          </a:xfrm>
+          <a:prstGeom prst="rect">
+            <a:avLst/>
+          </a:prstGeom>
+          <a:noFill/>
+          <a:ln/>
+        </p:spPr>
+        <p:txBody>
+          <a:bodyPr wrap="square" lIns="0" tIns="0" rIns="0" bIns="0" rtlCol="0" anchor="ctr"/>
+          <a:lstStyle/>
+          <a:p>
+            <a:pPr algn="ctr" indent="0" marL="0">
+              <a:buNone/>
+            </a:pPr>
+            <a:r>
+              <a:rPr lang="en-US" sz="900" b="1" dirty="0">
+                <a:solidFill>
+                  <a:srgbClr val="9D174D"/>
+                </a:solidFill>
+                <a:latin typeface="Trebuchet MS" pitchFamily="34" charset="0"/>
+                <a:ea typeface="Trebuchet MS" pitchFamily="34" charset="-122"/>
+                <a:cs typeface="Trebuchet MS" pitchFamily="34" charset="-120"/>
+              </a:rPr>
+              <a:t>e</a:t>
             </a:r>
             <a:endParaRPr lang="en-US" sz="900" dirty="0"/>
           </a:p>
@@ -31371,7 +34560,7 @@
                 <a:ea typeface="Calibri" pitchFamily="34" charset="-122"/>
                 <a:cs typeface="Calibri" pitchFamily="34" charset="-120"/>
               </a:rPr>
-              <a:t>Word Labs  •  wordlabs.app  •  Prefix: 'pre-' = before, in advance</a:t>
+              <a:t>Word Labs  •  wordlabs.app  •  Prefix: 'pre-' = before</a:t>
             </a:r>
             <a:endParaRPr lang="en-US" sz="800" dirty="0"/>
           </a:p>
@@ -32540,7 +35729,7 @@
                 <a:ea typeface="Calibri" pitchFamily="34" charset="-122"/>
                 <a:cs typeface="Calibri" pitchFamily="34" charset="-120"/>
               </a:rPr>
-              <a:t>Word Labs  •  wordlabs.app  •  Prefix: 'pre-' = before, in advance</a:t>
+              <a:t>Word Labs  •  wordlabs.app  •  Prefix: 'pre-' = before</a:t>
             </a:r>
             <a:endParaRPr lang="en-US" sz="800" dirty="0"/>
           </a:p>
@@ -32905,7 +36094,7 @@
                 <a:ea typeface="Trebuchet MS" pitchFamily="34" charset="-122"/>
                 <a:cs typeface="Trebuchet MS" pitchFamily="34" charset="-120"/>
               </a:rPr>
-              <a:t>view</a:t>
+              <a:t>cede</a:t>
             </a:r>
             <a:endParaRPr lang="en-US" sz="1300" dirty="0"/>
           </a:p>
@@ -33058,7 +36247,7 @@
                 <a:ea typeface="Trebuchet MS" pitchFamily="34" charset="-122"/>
                 <a:cs typeface="Trebuchet MS" pitchFamily="34" charset="-120"/>
               </a:rPr>
-              <a:t>heat</a:t>
+              <a:t>curs</a:t>
             </a:r>
             <a:endParaRPr lang="en-US" sz="1300" dirty="0"/>
           </a:p>
@@ -33122,7 +36311,7 @@
                 <a:ea typeface="Trebuchet MS" pitchFamily="34" charset="-122"/>
                 <a:cs typeface="Trebuchet MS" pitchFamily="34" charset="-120"/>
               </a:rPr>
-              <a:t>-ing</a:t>
+              <a:t>-ence</a:t>
             </a:r>
             <a:endParaRPr lang="en-US" sz="1300" dirty="0"/>
           </a:p>
@@ -33211,7 +36400,7 @@
                 <a:ea typeface="Trebuchet MS" pitchFamily="34" charset="-122"/>
                 <a:cs typeface="Trebuchet MS" pitchFamily="34" charset="-120"/>
               </a:rPr>
-              <a:t>pay</a:t>
+              <a:t>dic</a:t>
             </a:r>
             <a:endParaRPr lang="en-US" sz="1300" dirty="0"/>
           </a:p>
@@ -33275,7 +36464,7 @@
                 <a:ea typeface="Trebuchet MS" pitchFamily="34" charset="-122"/>
                 <a:cs typeface="Trebuchet MS" pitchFamily="34" charset="-120"/>
               </a:rPr>
-              <a:t>-ion</a:t>
+              <a:t>-ent</a:t>
             </a:r>
             <a:endParaRPr lang="en-US" sz="1300" dirty="0"/>
           </a:p>
@@ -33364,7 +36553,7 @@
                 <a:ea typeface="Trebuchet MS" pitchFamily="34" charset="-122"/>
                 <a:cs typeface="Trebuchet MS" pitchFamily="34" charset="-120"/>
               </a:rPr>
-              <a:t>school</a:t>
+              <a:t>fer</a:t>
             </a:r>
             <a:endParaRPr lang="en-US" sz="1300" dirty="0"/>
           </a:p>
@@ -33428,7 +36617,7 @@
                 <a:ea typeface="Trebuchet MS" pitchFamily="34" charset="-122"/>
                 <a:cs typeface="Trebuchet MS" pitchFamily="34" charset="-120"/>
               </a:rPr>
-              <a:t>-able</a:t>
+              <a:t>-ing</a:t>
             </a:r>
             <a:endParaRPr lang="en-US" sz="1300" dirty="0"/>
           </a:p>
@@ -33517,7 +36706,7 @@
                 <a:ea typeface="Trebuchet MS" pitchFamily="34" charset="-122"/>
                 <a:cs typeface="Trebuchet MS" pitchFamily="34" charset="-120"/>
               </a:rPr>
-              <a:t>dict</a:t>
+              <a:t>fix</a:t>
             </a:r>
             <a:endParaRPr lang="en-US" sz="1300" dirty="0"/>
           </a:p>
@@ -33581,7 +36770,7 @@
                 <a:ea typeface="Trebuchet MS" pitchFamily="34" charset="-122"/>
                 <a:cs typeface="Trebuchet MS" pitchFamily="34" charset="-120"/>
               </a:rPr>
-              <a:t>-tion</a:t>
+              <a:t>-or</a:t>
             </a:r>
             <a:endParaRPr lang="en-US" sz="1300" dirty="0"/>
           </a:p>
@@ -33589,37 +36778,190 @@
       </p:sp>
       <p:sp>
         <p:nvSpPr>
-          <p:cNvPr id="43" name="Text 41"/>
-          <p:cNvSpPr/>
-          <p:nvPr/>
-        </p:nvSpPr>
-        <p:spPr>
-          <a:xfrm>
-            <a:off x="365760" y="3611880"/>
-            <a:ext cx="1828800" cy="347472"/>
-          </a:xfrm>
-          <a:prstGeom prst="rect">
-            <a:avLst/>
-          </a:prstGeom>
-          <a:noFill/>
-          <a:ln/>
-        </p:spPr>
-        <p:txBody>
-          <a:bodyPr wrap="square" lIns="0" tIns="0" rIns="0" bIns="0" rtlCol="0" anchor="ctr"/>
-          <a:lstStyle/>
-          <a:p>
-            <a:pPr algn="l" indent="0" marL="0">
-              <a:buNone/>
-            </a:pPr>
-            <a:r>
-              <a:rPr lang="en-US" sz="1200" b="1" dirty="0">
-                <a:solidFill>
-                  <a:srgbClr val="0F172A"/>
+          <p:cNvPr id="43" name="Shape 41"/>
+          <p:cNvSpPr/>
+          <p:nvPr/>
+        </p:nvSpPr>
+        <p:spPr>
+          <a:xfrm>
+            <a:off x="365760" y="3666744"/>
+            <a:ext cx="2468880" cy="402336"/>
+          </a:xfrm>
+          <a:prstGeom prst="rect">
+            <a:avLst/>
+          </a:prstGeom>
+          <a:solidFill>
+            <a:srgbClr val="F1F5F9"/>
+          </a:solidFill>
+          <a:ln w="12700">
+            <a:solidFill>
+              <a:srgbClr val="E2E8F0"/>
+            </a:solidFill>
+            <a:prstDash val="solid"/>
+          </a:ln>
+        </p:spPr>
+      </p:sp>
+      <p:sp>
+        <p:nvSpPr>
+          <p:cNvPr id="44" name="Shape 42"/>
+          <p:cNvSpPr/>
+          <p:nvPr/>
+        </p:nvSpPr>
+        <p:spPr>
+          <a:xfrm>
+            <a:off x="2971800" y="3666744"/>
+            <a:ext cx="2834640" cy="402336"/>
+          </a:xfrm>
+          <a:prstGeom prst="rect">
+            <a:avLst/>
+          </a:prstGeom>
+          <a:solidFill>
+            <a:srgbClr val="CCFBF1"/>
+          </a:solidFill>
+          <a:ln w="12700">
+            <a:solidFill>
+              <a:srgbClr val="E2E8F0"/>
+            </a:solidFill>
+            <a:prstDash val="solid"/>
+          </a:ln>
+        </p:spPr>
+      </p:sp>
+      <p:sp>
+        <p:nvSpPr>
+          <p:cNvPr id="45" name="Text 43"/>
+          <p:cNvSpPr/>
+          <p:nvPr/>
+        </p:nvSpPr>
+        <p:spPr>
+          <a:xfrm>
+            <a:off x="2971800" y="3666744"/>
+            <a:ext cx="2834640" cy="402336"/>
+          </a:xfrm>
+          <a:prstGeom prst="rect">
+            <a:avLst/>
+          </a:prstGeom>
+          <a:noFill/>
+          <a:ln/>
+        </p:spPr>
+        <p:txBody>
+          <a:bodyPr wrap="square" lIns="0" tIns="0" rIns="0" bIns="0" rtlCol="0" anchor="ctr"/>
+          <a:lstStyle/>
+          <a:p>
+            <a:pPr algn="ctr" indent="0" marL="0">
+              <a:buNone/>
+            </a:pPr>
+            <a:r>
+              <a:rPr lang="en-US" sz="1300" b="1" dirty="0">
+                <a:solidFill>
+                  <a:srgbClr val="0F766E"/>
                 </a:solidFill>
                 <a:latin typeface="Trebuchet MS" pitchFamily="34" charset="0"/>
                 <a:ea typeface="Trebuchet MS" pitchFamily="34" charset="-122"/>
                 <a:cs typeface="Trebuchet MS" pitchFamily="34" charset="-120"/>
               </a:rPr>
+              <a:t>heat</a:t>
+            </a:r>
+            <a:endParaRPr lang="en-US" sz="1300" dirty="0"/>
+          </a:p>
+        </p:txBody>
+      </p:sp>
+      <p:sp>
+        <p:nvSpPr>
+          <p:cNvPr id="46" name="Shape 44"/>
+          <p:cNvSpPr/>
+          <p:nvPr/>
+        </p:nvSpPr>
+        <p:spPr>
+          <a:xfrm>
+            <a:off x="5943600" y="3666744"/>
+            <a:ext cx="2834640" cy="402336"/>
+          </a:xfrm>
+          <a:prstGeom prst="rect">
+            <a:avLst/>
+          </a:prstGeom>
+          <a:solidFill>
+            <a:srgbClr val="FCE7F3"/>
+          </a:solidFill>
+          <a:ln w="12700">
+            <a:solidFill>
+              <a:srgbClr val="E2E8F0"/>
+            </a:solidFill>
+            <a:prstDash val="solid"/>
+          </a:ln>
+        </p:spPr>
+      </p:sp>
+      <p:sp>
+        <p:nvSpPr>
+          <p:cNvPr id="47" name="Text 45"/>
+          <p:cNvSpPr/>
+          <p:nvPr/>
+        </p:nvSpPr>
+        <p:spPr>
+          <a:xfrm>
+            <a:off x="5943600" y="3666744"/>
+            <a:ext cx="2834640" cy="402336"/>
+          </a:xfrm>
+          <a:prstGeom prst="rect">
+            <a:avLst/>
+          </a:prstGeom>
+          <a:noFill/>
+          <a:ln/>
+        </p:spPr>
+        <p:txBody>
+          <a:bodyPr wrap="square" lIns="0" tIns="0" rIns="0" bIns="0" rtlCol="0" anchor="ctr"/>
+          <a:lstStyle/>
+          <a:p>
+            <a:pPr algn="ctr" indent="0" marL="0">
+              <a:buNone/>
+            </a:pPr>
+            <a:r>
+              <a:rPr lang="en-US" sz="1300" b="1" dirty="0">
+                <a:solidFill>
+                  <a:srgbClr val="9D174D"/>
+                </a:solidFill>
+                <a:latin typeface="Trebuchet MS" pitchFamily="34" charset="0"/>
+                <a:ea typeface="Trebuchet MS" pitchFamily="34" charset="-122"/>
+                <a:cs typeface="Trebuchet MS" pitchFamily="34" charset="-120"/>
+              </a:rPr>
+              <a:t>-ate</a:t>
+            </a:r>
+            <a:endParaRPr lang="en-US" sz="1300" dirty="0"/>
+          </a:p>
+        </p:txBody>
+      </p:sp>
+      <p:sp>
+        <p:nvSpPr>
+          <p:cNvPr id="48" name="Text 46"/>
+          <p:cNvSpPr/>
+          <p:nvPr/>
+        </p:nvSpPr>
+        <p:spPr>
+          <a:xfrm>
+            <a:off x="365760" y="3611880"/>
+            <a:ext cx="1828800" cy="347472"/>
+          </a:xfrm>
+          <a:prstGeom prst="rect">
+            <a:avLst/>
+          </a:prstGeom>
+          <a:noFill/>
+          <a:ln/>
+        </p:spPr>
+        <p:txBody>
+          <a:bodyPr wrap="square" lIns="0" tIns="0" rIns="0" bIns="0" rtlCol="0" anchor="ctr"/>
+          <a:lstStyle/>
+          <a:p>
+            <a:pPr algn="l" indent="0" marL="0">
+              <a:buNone/>
+            </a:pPr>
+            <a:r>
+              <a:rPr lang="en-US" sz="1200" b="1" dirty="0">
+                <a:solidFill>
+                  <a:srgbClr val="0F172A"/>
+                </a:solidFill>
+                <a:latin typeface="Trebuchet MS" pitchFamily="34" charset="0"/>
+                <a:ea typeface="Trebuchet MS" pitchFamily="34" charset="-122"/>
+                <a:cs typeface="Trebuchet MS" pitchFamily="34" charset="-120"/>
+              </a:rPr>
               <a:t>Sample words:</a:t>
             </a:r>
             <a:endParaRPr lang="en-US" sz="1200" dirty="0"/>
@@ -33628,7 +36970,7 @@
       </p:sp>
       <p:sp>
         <p:nvSpPr>
-          <p:cNvPr id="44" name="Shape 42"/>
+          <p:cNvPr id="49" name="Shape 47"/>
           <p:cNvSpPr/>
           <p:nvPr/>
         </p:nvSpPr>
@@ -33655,7 +36997,7 @@
       </p:sp>
       <p:sp>
         <p:nvSpPr>
-          <p:cNvPr id="45" name="Text 43"/>
+          <p:cNvPr id="50" name="Text 48"/>
           <p:cNvSpPr/>
           <p:nvPr/>
         </p:nvSpPr>
@@ -33686,7 +37028,7 @@
                 <a:ea typeface="Trebuchet MS" pitchFamily="34" charset="-122"/>
                 <a:cs typeface="Trebuchet MS" pitchFamily="34" charset="-120"/>
               </a:rPr>
-              <a:t>preview</a:t>
+              <a:t>prepay</a:t>
             </a:r>
             <a:endParaRPr lang="en-US" sz="1200" dirty="0"/>
           </a:p>
@@ -33694,7 +37036,7 @@
       </p:sp>
       <p:sp>
         <p:nvSpPr>
-          <p:cNvPr id="46" name="Shape 44"/>
+          <p:cNvPr id="51" name="Shape 49"/>
           <p:cNvSpPr/>
           <p:nvPr/>
         </p:nvSpPr>
@@ -33721,7 +37063,7 @@
       </p:sp>
       <p:sp>
         <p:nvSpPr>
-          <p:cNvPr id="47" name="Text 45"/>
+          <p:cNvPr id="52" name="Text 50"/>
           <p:cNvSpPr/>
           <p:nvPr/>
         </p:nvSpPr>
@@ -33752,7 +37094,7 @@
                 <a:ea typeface="Trebuchet MS" pitchFamily="34" charset="-122"/>
                 <a:cs typeface="Trebuchet MS" pitchFamily="34" charset="-120"/>
               </a:rPr>
-              <a:t>predict</a:t>
+              <a:t>preheat</a:t>
             </a:r>
             <a:endParaRPr lang="en-US" sz="1200" dirty="0"/>
           </a:p>
@@ -33760,7 +37102,7 @@
       </p:sp>
       <p:sp>
         <p:nvSpPr>
-          <p:cNvPr id="48" name="Shape 46"/>
+          <p:cNvPr id="53" name="Shape 51"/>
           <p:cNvSpPr/>
           <p:nvPr/>
         </p:nvSpPr>
@@ -33787,7 +37129,7 @@
       </p:sp>
       <p:sp>
         <p:nvSpPr>
-          <p:cNvPr id="49" name="Text 47"/>
+          <p:cNvPr id="54" name="Text 52"/>
           <p:cNvSpPr/>
           <p:nvPr/>
         </p:nvSpPr>
@@ -33818,7 +37160,7 @@
                 <a:ea typeface="Trebuchet MS" pitchFamily="34" charset="-122"/>
                 <a:cs typeface="Trebuchet MS" pitchFamily="34" charset="-120"/>
               </a:rPr>
-              <a:t>prepare</a:t>
+              <a:t>preplan</a:t>
             </a:r>
             <a:endParaRPr lang="en-US" sz="1200" dirty="0"/>
           </a:p>
@@ -33826,7 +37168,7 @@
       </p:sp>
       <p:sp>
         <p:nvSpPr>
-          <p:cNvPr id="50" name="Shape 48"/>
+          <p:cNvPr id="55" name="Shape 53"/>
           <p:cNvSpPr/>
           <p:nvPr/>
         </p:nvSpPr>
@@ -33853,7 +37195,7 @@
       </p:sp>
       <p:sp>
         <p:nvSpPr>
-          <p:cNvPr id="51" name="Text 49"/>
+          <p:cNvPr id="56" name="Text 54"/>
           <p:cNvSpPr/>
           <p:nvPr/>
         </p:nvSpPr>
@@ -33884,7 +37226,7 @@
                 <a:ea typeface="Trebuchet MS" pitchFamily="34" charset="-122"/>
                 <a:cs typeface="Trebuchet MS" pitchFamily="34" charset="-120"/>
               </a:rPr>
-              <a:t>preschool</a:t>
+              <a:t>pretest</a:t>
             </a:r>
             <a:endParaRPr lang="en-US" sz="1200" dirty="0"/>
           </a:p>
@@ -33892,7 +37234,7 @@
       </p:sp>
       <p:sp>
         <p:nvSpPr>
-          <p:cNvPr id="52" name="Shape 50"/>
+          <p:cNvPr id="57" name="Shape 55"/>
           <p:cNvSpPr/>
           <p:nvPr/>
         </p:nvSpPr>
@@ -33919,7 +37261,7 @@
       </p:sp>
       <p:sp>
         <p:nvSpPr>
-          <p:cNvPr id="53" name="Text 51"/>
+          <p:cNvPr id="58" name="Text 56"/>
           <p:cNvSpPr/>
           <p:nvPr/>
         </p:nvSpPr>
@@ -33950,7 +37292,7 @@
                 <a:ea typeface="Trebuchet MS" pitchFamily="34" charset="-122"/>
                 <a:cs typeface="Trebuchet MS" pitchFamily="34" charset="-120"/>
               </a:rPr>
-              <a:t>preheat</a:t>
+              <a:t>preview</a:t>
             </a:r>
             <a:endParaRPr lang="en-US" sz="1200" dirty="0"/>
           </a:p>
@@ -33958,7 +37300,7 @@
       </p:sp>
       <p:sp>
         <p:nvSpPr>
-          <p:cNvPr id="54" name="Shape 52"/>
+          <p:cNvPr id="59" name="Shape 57"/>
           <p:cNvSpPr/>
           <p:nvPr/>
         </p:nvSpPr>
@@ -33985,7 +37327,7 @@
       </p:sp>
       <p:sp>
         <p:nvSpPr>
-          <p:cNvPr id="55" name="Text 53"/>
+          <p:cNvPr id="60" name="Text 58"/>
           <p:cNvSpPr/>
           <p:nvPr/>
         </p:nvSpPr>
@@ -34016,7 +37358,7 @@
                 <a:ea typeface="Trebuchet MS" pitchFamily="34" charset="-122"/>
                 <a:cs typeface="Trebuchet MS" pitchFamily="34" charset="-120"/>
               </a:rPr>
-              <a:t>prepaid</a:t>
+              <a:t>prejudge</a:t>
             </a:r>
             <a:endParaRPr lang="en-US" sz="1200" dirty="0"/>
           </a:p>
@@ -34024,7 +37366,7 @@
       </p:sp>
       <p:sp>
         <p:nvSpPr>
-          <p:cNvPr id="56" name="Shape 54"/>
+          <p:cNvPr id="61" name="Shape 59"/>
           <p:cNvSpPr/>
           <p:nvPr/>
         </p:nvSpPr>
@@ -34051,7 +37393,7 @@
       </p:sp>
       <p:sp>
         <p:nvSpPr>
-          <p:cNvPr id="57" name="Text 55"/>
+          <p:cNvPr id="62" name="Text 60"/>
           <p:cNvSpPr/>
           <p:nvPr/>
         </p:nvSpPr>
@@ -34082,73 +37424,7 @@
                 <a:ea typeface="Trebuchet MS" pitchFamily="34" charset="-122"/>
                 <a:cs typeface="Trebuchet MS" pitchFamily="34" charset="-120"/>
               </a:rPr>
-              <a:t>prevent</a:t>
-            </a:r>
-            <a:endParaRPr lang="en-US" sz="1200" dirty="0"/>
-          </a:p>
-        </p:txBody>
-      </p:sp>
-      <p:sp>
-        <p:nvSpPr>
-          <p:cNvPr id="58" name="Shape 56"/>
-          <p:cNvSpPr/>
-          <p:nvPr/>
-        </p:nvSpPr>
-        <p:spPr>
-          <a:xfrm>
-            <a:off x="6894576" y="4498848"/>
-            <a:ext cx="2011680" cy="402336"/>
-          </a:xfrm>
-          <a:prstGeom prst="rect">
-            <a:avLst>
-              <a:gd name="adj" fmla="val 13636"/>
-            </a:avLst>
-          </a:prstGeom>
-          <a:solidFill>
-            <a:srgbClr val="EEF2FF"/>
-          </a:solidFill>
-          <a:ln w="12700">
-            <a:solidFill>
-              <a:srgbClr val="6366F1"/>
-            </a:solidFill>
-            <a:prstDash val="solid"/>
-          </a:ln>
-        </p:spPr>
-      </p:sp>
-      <p:sp>
-        <p:nvSpPr>
-          <p:cNvPr id="59" name="Text 57"/>
-          <p:cNvSpPr/>
-          <p:nvPr/>
-        </p:nvSpPr>
-        <p:spPr>
-          <a:xfrm>
-            <a:off x="6894576" y="4498848"/>
-            <a:ext cx="2011680" cy="402336"/>
-          </a:xfrm>
-          <a:prstGeom prst="rect">
-            <a:avLst/>
-          </a:prstGeom>
-          <a:noFill/>
-          <a:ln/>
-        </p:spPr>
-        <p:txBody>
-          <a:bodyPr wrap="square" lIns="0" tIns="0" rIns="0" bIns="0" rtlCol="0" anchor="ctr"/>
-          <a:lstStyle/>
-          <a:p>
-            <a:pPr algn="ctr" indent="0" marL="0">
-              <a:buNone/>
-            </a:pPr>
-            <a:r>
-              <a:rPr lang="en-US" sz="1200" b="1" dirty="0">
-                <a:solidFill>
-                  <a:srgbClr val="4338CA"/>
-                </a:solidFill>
-                <a:latin typeface="Trebuchet MS" pitchFamily="34" charset="0"/>
-                <a:ea typeface="Trebuchet MS" pitchFamily="34" charset="-122"/>
-                <a:cs typeface="Trebuchet MS" pitchFamily="34" charset="-120"/>
-              </a:rPr>
-              <a:t>precious</a:t>
+              <a:t>previews</a:t>
             </a:r>
             <a:endParaRPr lang="en-US" sz="1200" dirty="0"/>
           </a:p>
@@ -34440,7 +37716,7 @@
                 <a:ea typeface="Calibri" pitchFamily="34" charset="-122"/>
                 <a:cs typeface="Calibri" pitchFamily="34" charset="-120"/>
               </a:rPr>
-              <a:t>Word Labs  •  wordlabs.app  •  Prefix: 'pre-' = before, in advance</a:t>
+              <a:t>Word Labs  •  wordlabs.app  •  Prefix: 'pre-' = before</a:t>
             </a:r>
             <a:endParaRPr lang="en-US" sz="800" dirty="0"/>
           </a:p>
@@ -34604,7 +37880,7 @@
                 <a:ea typeface="Calibri" pitchFamily="34" charset="-122"/>
                 <a:cs typeface="Calibri" pitchFamily="34" charset="-120"/>
               </a:rPr>
-              <a:t>A meaningful word part added to the beginning of a root to change its meaning. The prefix 'pre-' means 'before, in advance'.</a:t>
+              <a:t>A meaningful word part added to the beginning of a root to change its meaning. The prefix 'pre-' means 'before'.</a:t>
             </a:r>
             <a:endParaRPr lang="en-US" sz="1350" dirty="0"/>
           </a:p>
@@ -34768,7 +38044,7 @@
                 <a:ea typeface="Calibri" pitchFamily="34" charset="-122"/>
                 <a:cs typeface="Calibri" pitchFamily="34" charset="-120"/>
               </a:rPr>
-              <a:t>The core part of a word carrying its basic meaning. In 'preview', the root is the part after the prefix 'pre-'.</a:t>
+              <a:t>The core part of a word carrying its basic meaning. In 'prepay', the root is the part after the prefix 'pre-'.</a:t>
             </a:r>
             <a:endParaRPr lang="en-US" sz="1350" dirty="0"/>
           </a:p>
@@ -35224,7 +38500,7 @@
                 <a:ea typeface="Calibri" pitchFamily="34" charset="-122"/>
                 <a:cs typeface="Calibri" pitchFamily="34" charset="-120"/>
               </a:rPr>
-              <a:t>Word Labs  •  wordlabs.app  •  Prefix: 'pre-' = before, in advance</a:t>
+              <a:t>Word Labs  •  wordlabs.app  •  Prefix: 'pre-' = before</a:t>
             </a:r>
             <a:endParaRPr lang="en-US" sz="800" dirty="0"/>
           </a:p>
@@ -35336,7 +38612,7 @@
                 <a:ea typeface="Calibri" pitchFamily="34" charset="-122"/>
                 <a:cs typeface="Calibri" pitchFamily="34" charset="-120"/>
               </a:rPr>
-              <a:t>1.  The prefix 'pre-' means before or in advance.</a:t>
+              <a:t>1.  'prepay' means 'to refuse payment completely'.</a:t>
             </a:r>
             <a:endParaRPr lang="en-US" sz="1300" dirty="0"/>
           </a:p>
@@ -35359,11 +38635,11 @@
             </a:avLst>
           </a:prstGeom>
           <a:solidFill>
-            <a:srgbClr val="DCFCE7"/>
-          </a:solidFill>
-          <a:ln w="12700">
-            <a:solidFill>
-              <a:srgbClr val="16A34A"/>
+            <a:srgbClr val="FEE2E2"/>
+          </a:solidFill>
+          <a:ln w="12700">
+            <a:solidFill>
+              <a:srgbClr val="DC2626"/>
             </a:solidFill>
             <a:prstDash val="solid"/>
           </a:ln>
@@ -35396,13 +38672,13 @@
             <a:r>
               <a:rPr lang="en-US" sz="1100" b="1" dirty="0">
                 <a:solidFill>
-                  <a:srgbClr val="16A34A"/>
+                  <a:srgbClr val="DC2626"/>
                 </a:solidFill>
                 <a:latin typeface="Trebuchet MS" pitchFamily="34" charset="0"/>
                 <a:ea typeface="Trebuchet MS" pitchFamily="34" charset="-122"/>
                 <a:cs typeface="Trebuchet MS" pitchFamily="34" charset="-120"/>
               </a:rPr>
-              <a:t>TRUE</a:t>
+              <a:t>FALSE</a:t>
             </a:r>
             <a:endParaRPr lang="en-US" sz="1100" dirty="0"/>
           </a:p>
@@ -35475,7 +38751,7 @@
                 <a:ea typeface="Calibri" pitchFamily="34" charset="-122"/>
                 <a:cs typeface="Calibri" pitchFamily="34" charset="-120"/>
               </a:rPr>
-              <a:t>2.  Adding 'pre-' to 'heat' makes the word 'preheat', meaning to heat something beforehand.</a:t>
+              <a:t>2.  'pre' means 'before'.</a:t>
             </a:r>
             <a:endParaRPr lang="en-US" sz="1300" dirty="0"/>
           </a:p>
@@ -35614,7 +38890,7 @@
                 <a:ea typeface="Calibri" pitchFamily="34" charset="-122"/>
                 <a:cs typeface="Calibri" pitchFamily="34" charset="-120"/>
               </a:rPr>
-              <a:t>3.  The prefix 'pre-' comes from the Latin word 'prae'.</a:t>
+              <a:t>3.  'preheat' means 'to cool something down quickly'.</a:t>
             </a:r>
             <a:endParaRPr lang="en-US" sz="1300" dirty="0"/>
           </a:p>
@@ -35637,11 +38913,11 @@
             </a:avLst>
           </a:prstGeom>
           <a:solidFill>
-            <a:srgbClr val="DCFCE7"/>
-          </a:solidFill>
-          <a:ln w="12700">
-            <a:solidFill>
-              <a:srgbClr val="16A34A"/>
+            <a:srgbClr val="FEE2E2"/>
+          </a:solidFill>
+          <a:ln w="12700">
+            <a:solidFill>
+              <a:srgbClr val="DC2626"/>
             </a:solidFill>
             <a:prstDash val="solid"/>
           </a:ln>
@@ -35674,13 +38950,13 @@
             <a:r>
               <a:rPr lang="en-US" sz="1100" b="1" dirty="0">
                 <a:solidFill>
-                  <a:srgbClr val="16A34A"/>
+                  <a:srgbClr val="DC2626"/>
                 </a:solidFill>
                 <a:latin typeface="Trebuchet MS" pitchFamily="34" charset="0"/>
                 <a:ea typeface="Trebuchet MS" pitchFamily="34" charset="-122"/>
                 <a:cs typeface="Trebuchet MS" pitchFamily="34" charset="-120"/>
               </a:rPr>
-              <a:t>TRUE</a:t>
+              <a:t>FALSE</a:t>
             </a:r>
             <a:endParaRPr lang="en-US" sz="1100" dirty="0"/>
           </a:p>
@@ -35753,7 +39029,7 @@
                 <a:ea typeface="Calibri" pitchFamily="34" charset="-122"/>
                 <a:cs typeface="Calibri" pitchFamily="34" charset="-120"/>
               </a:rPr>
-              <a:t>4.  The word 'present' always means a gift you give someone.</a:t>
+              <a:t>4.  'prepay' means 'to pay for something before receiving it'.</a:t>
             </a:r>
             <a:endParaRPr lang="en-US" sz="1300" dirty="0"/>
           </a:p>
@@ -35776,11 +39052,11 @@
             </a:avLst>
           </a:prstGeom>
           <a:solidFill>
-            <a:srgbClr val="FEE2E2"/>
-          </a:solidFill>
-          <a:ln w="12700">
-            <a:solidFill>
-              <a:srgbClr val="DC2626"/>
+            <a:srgbClr val="DCFCE7"/>
+          </a:solidFill>
+          <a:ln w="12700">
+            <a:solidFill>
+              <a:srgbClr val="16A34A"/>
             </a:solidFill>
             <a:prstDash val="solid"/>
           </a:ln>
@@ -35813,13 +39089,13 @@
             <a:r>
               <a:rPr lang="en-US" sz="1100" b="1" dirty="0">
                 <a:solidFill>
-                  <a:srgbClr val="DC2626"/>
+                  <a:srgbClr val="16A34A"/>
                 </a:solidFill>
                 <a:latin typeface="Trebuchet MS" pitchFamily="34" charset="0"/>
                 <a:ea typeface="Trebuchet MS" pitchFamily="34" charset="-122"/>
                 <a:cs typeface="Trebuchet MS" pitchFamily="34" charset="-120"/>
               </a:rPr>
-              <a:t>FALSE</a:t>
+              <a:t>TRUE</a:t>
             </a:r>
             <a:endParaRPr lang="en-US" sz="1100" dirty="0"/>
           </a:p>
@@ -35892,7 +39168,7 @@
                 <a:ea typeface="Calibri" pitchFamily="34" charset="-122"/>
                 <a:cs typeface="Calibri" pitchFamily="34" charset="-120"/>
               </a:rPr>
-              <a:t>5.  The prefix 'pre-' means after or following.</a:t>
+              <a:t>5.  'preheat' means 'to heat something, like an oven, before using it'.</a:t>
             </a:r>
             <a:endParaRPr lang="en-US" sz="1300" dirty="0"/>
           </a:p>
@@ -35915,11 +39191,11 @@
             </a:avLst>
           </a:prstGeom>
           <a:solidFill>
-            <a:srgbClr val="FEE2E2"/>
-          </a:solidFill>
-          <a:ln w="12700">
-            <a:solidFill>
-              <a:srgbClr val="DC2626"/>
+            <a:srgbClr val="DCFCE7"/>
+          </a:solidFill>
+          <a:ln w="12700">
+            <a:solidFill>
+              <a:srgbClr val="16A34A"/>
             </a:solidFill>
             <a:prstDash val="solid"/>
           </a:ln>
@@ -35952,13 +39228,13 @@
             <a:r>
               <a:rPr lang="en-US" sz="1100" b="1" dirty="0">
                 <a:solidFill>
-                  <a:srgbClr val="DC2626"/>
+                  <a:srgbClr val="16A34A"/>
                 </a:solidFill>
                 <a:latin typeface="Trebuchet MS" pitchFamily="34" charset="0"/>
                 <a:ea typeface="Trebuchet MS" pitchFamily="34" charset="-122"/>
                 <a:cs typeface="Trebuchet MS" pitchFamily="34" charset="-120"/>
               </a:rPr>
-              <a:t>FALSE</a:t>
+              <a:t>TRUE</a:t>
             </a:r>
             <a:endParaRPr lang="en-US" sz="1100" dirty="0"/>
           </a:p>
@@ -36250,7 +39526,7 @@
                 <a:ea typeface="Calibri" pitchFamily="34" charset="-122"/>
                 <a:cs typeface="Calibri" pitchFamily="34" charset="-120"/>
               </a:rPr>
-              <a:t>Word Labs  •  wordlabs.app  •  Prefix: 'pre-' = before, in advance</a:t>
+              <a:t>Word Labs  •  wordlabs.app  •  Prefix: 'pre-' = before</a:t>
             </a:r>
             <a:endParaRPr lang="en-US" sz="800" dirty="0"/>
           </a:p>
@@ -36387,7 +39663,7 @@
                 <a:ea typeface="Trebuchet MS" pitchFamily="34" charset="-122"/>
                 <a:cs typeface="Trebuchet MS" pitchFamily="34" charset="-120"/>
               </a:rPr>
-              <a:t>before, in advance</a:t>
+              <a:t>before</a:t>
             </a:r>
             <a:endParaRPr lang="en-US" sz="2000" dirty="0"/>
           </a:p>
@@ -36426,7 +39702,7 @@
                 <a:ea typeface="Calibri" pitchFamily="34" charset="-122"/>
                 <a:cs typeface="Calibri" pitchFamily="34" charset="-120"/>
               </a:rPr>
-              <a:t>Origin: Latin: prae</a:t>
+              <a:t>Origin: Prefix</a:t>
             </a:r>
             <a:endParaRPr lang="en-US" sz="1100" dirty="0"/>
           </a:p>
@@ -36531,7 +39807,7 @@
                 <a:ea typeface="Trebuchet MS" pitchFamily="34" charset="-122"/>
                 <a:cs typeface="Trebuchet MS" pitchFamily="34" charset="-120"/>
               </a:rPr>
-              <a:t>preview</a:t>
+              <a:t>prepay</a:t>
             </a:r>
             <a:endParaRPr lang="en-US" sz="1300" dirty="0"/>
           </a:p>
@@ -36597,7 +39873,7 @@
                 <a:ea typeface="Trebuchet MS" pitchFamily="34" charset="-122"/>
                 <a:cs typeface="Trebuchet MS" pitchFamily="34" charset="-120"/>
               </a:rPr>
-              <a:t>predict</a:t>
+              <a:t>preheat</a:t>
             </a:r>
             <a:endParaRPr lang="en-US" sz="1300" dirty="0"/>
           </a:p>
@@ -36663,7 +39939,7 @@
                 <a:ea typeface="Trebuchet MS" pitchFamily="34" charset="-122"/>
                 <a:cs typeface="Trebuchet MS" pitchFamily="34" charset="-120"/>
               </a:rPr>
-              <a:t>prepare</a:t>
+              <a:t>preplan</a:t>
             </a:r>
             <a:endParaRPr lang="en-US" sz="1300" dirty="0"/>
           </a:p>
@@ -36729,7 +40005,7 @@
                 <a:ea typeface="Trebuchet MS" pitchFamily="34" charset="-122"/>
                 <a:cs typeface="Trebuchet MS" pitchFamily="34" charset="-120"/>
               </a:rPr>
-              <a:t>preschool</a:t>
+              <a:t>pretest</a:t>
             </a:r>
             <a:endParaRPr lang="en-US" sz="1300" dirty="0"/>
           </a:p>
@@ -36795,7 +40071,7 @@
                 <a:ea typeface="Trebuchet MS" pitchFamily="34" charset="-122"/>
                 <a:cs typeface="Trebuchet MS" pitchFamily="34" charset="-120"/>
               </a:rPr>
-              <a:t>preheat</a:t>
+              <a:t>preview</a:t>
             </a:r>
             <a:endParaRPr lang="en-US" sz="1300" dirty="0"/>
           </a:p>
@@ -36861,7 +40137,7 @@
                 <a:ea typeface="Trebuchet MS" pitchFamily="34" charset="-122"/>
                 <a:cs typeface="Trebuchet MS" pitchFamily="34" charset="-120"/>
               </a:rPr>
-              <a:t>prepaid</a:t>
+              <a:t>prejudge</a:t>
             </a:r>
             <a:endParaRPr lang="en-US" sz="1300" dirty="0"/>
           </a:p>
@@ -36927,7 +40203,7 @@
                 <a:ea typeface="Trebuchet MS" pitchFamily="34" charset="-122"/>
                 <a:cs typeface="Trebuchet MS" pitchFamily="34" charset="-120"/>
               </a:rPr>
-              <a:t>prevent</a:t>
+              <a:t>previews</a:t>
             </a:r>
             <a:endParaRPr lang="en-US" sz="1300" dirty="0"/>
           </a:p>
@@ -37219,7 +40495,7 @@
                 <a:ea typeface="Calibri" pitchFamily="34" charset="-122"/>
                 <a:cs typeface="Calibri" pitchFamily="34" charset="-120"/>
               </a:rPr>
-              <a:t>Word Labs  •  wordlabs.app  •  Prefix: 'pre-' = before, in advance</a:t>
+              <a:t>Word Labs  •  wordlabs.app  •  Prefix: 'pre-' = before</a:t>
             </a:r>
             <a:endParaRPr lang="en-US" sz="800" dirty="0"/>
           </a:p>
@@ -37584,7 +40860,7 @@
                 <a:ea typeface="Trebuchet MS" pitchFamily="34" charset="-122"/>
                 <a:cs typeface="Trebuchet MS" pitchFamily="34" charset="-120"/>
               </a:rPr>
-              <a:t>view</a:t>
+              <a:t>cede</a:t>
             </a:r>
             <a:endParaRPr lang="en-US" sz="1300" dirty="0"/>
           </a:p>
@@ -37737,7 +41013,7 @@
                 <a:ea typeface="Trebuchet MS" pitchFamily="34" charset="-122"/>
                 <a:cs typeface="Trebuchet MS" pitchFamily="34" charset="-120"/>
               </a:rPr>
-              <a:t>heat</a:t>
+              <a:t>curs</a:t>
             </a:r>
             <a:endParaRPr lang="en-US" sz="1300" dirty="0"/>
           </a:p>
@@ -37801,7 +41077,7 @@
                 <a:ea typeface="Trebuchet MS" pitchFamily="34" charset="-122"/>
                 <a:cs typeface="Trebuchet MS" pitchFamily="34" charset="-120"/>
               </a:rPr>
-              <a:t>-ing</a:t>
+              <a:t>-ence</a:t>
             </a:r>
             <a:endParaRPr lang="en-US" sz="1300" dirty="0"/>
           </a:p>
@@ -37890,7 +41166,7 @@
                 <a:ea typeface="Trebuchet MS" pitchFamily="34" charset="-122"/>
                 <a:cs typeface="Trebuchet MS" pitchFamily="34" charset="-120"/>
               </a:rPr>
-              <a:t>pay</a:t>
+              <a:t>dic</a:t>
             </a:r>
             <a:endParaRPr lang="en-US" sz="1300" dirty="0"/>
           </a:p>
@@ -37954,7 +41230,7 @@
                 <a:ea typeface="Trebuchet MS" pitchFamily="34" charset="-122"/>
                 <a:cs typeface="Trebuchet MS" pitchFamily="34" charset="-120"/>
               </a:rPr>
-              <a:t>-ion</a:t>
+              <a:t>-ent</a:t>
             </a:r>
             <a:endParaRPr lang="en-US" sz="1300" dirty="0"/>
           </a:p>
@@ -38043,7 +41319,7 @@
                 <a:ea typeface="Trebuchet MS" pitchFamily="34" charset="-122"/>
                 <a:cs typeface="Trebuchet MS" pitchFamily="34" charset="-120"/>
               </a:rPr>
-              <a:t>school</a:t>
+              <a:t>fer</a:t>
             </a:r>
             <a:endParaRPr lang="en-US" sz="1300" dirty="0"/>
           </a:p>
@@ -38107,7 +41383,7 @@
                 <a:ea typeface="Trebuchet MS" pitchFamily="34" charset="-122"/>
                 <a:cs typeface="Trebuchet MS" pitchFamily="34" charset="-120"/>
               </a:rPr>
-              <a:t>-able</a:t>
+              <a:t>-ing</a:t>
             </a:r>
             <a:endParaRPr lang="en-US" sz="1300" dirty="0"/>
           </a:p>
@@ -38196,7 +41472,7 @@
                 <a:ea typeface="Trebuchet MS" pitchFamily="34" charset="-122"/>
                 <a:cs typeface="Trebuchet MS" pitchFamily="34" charset="-120"/>
               </a:rPr>
-              <a:t>dict</a:t>
+              <a:t>fix</a:t>
             </a:r>
             <a:endParaRPr lang="en-US" sz="1300" dirty="0"/>
           </a:p>
@@ -38260,7 +41536,7 @@
                 <a:ea typeface="Trebuchet MS" pitchFamily="34" charset="-122"/>
                 <a:cs typeface="Trebuchet MS" pitchFamily="34" charset="-120"/>
               </a:rPr>
-              <a:t>-tion</a:t>
+              <a:t>-or</a:t>
             </a:r>
             <a:endParaRPr lang="en-US" sz="1300" dirty="0"/>
           </a:p>
@@ -38268,13 +41544,166 @@
       </p:sp>
       <p:sp>
         <p:nvSpPr>
-          <p:cNvPr id="43" name="Text 41"/>
-          <p:cNvSpPr/>
-          <p:nvPr/>
-        </p:nvSpPr>
-        <p:spPr>
-          <a:xfrm>
-            <a:off x="365760" y="4178808"/>
+          <p:cNvPr id="43" name="Shape 41"/>
+          <p:cNvSpPr/>
+          <p:nvPr/>
+        </p:nvSpPr>
+        <p:spPr>
+          <a:xfrm>
+            <a:off x="640080" y="4041648"/>
+            <a:ext cx="1463040" cy="420624"/>
+          </a:xfrm>
+          <a:prstGeom prst="rect">
+            <a:avLst/>
+          </a:prstGeom>
+          <a:solidFill>
+            <a:srgbClr val="F1F5F9"/>
+          </a:solidFill>
+          <a:ln w="12700">
+            <a:solidFill>
+              <a:srgbClr val="E5E7EB"/>
+            </a:solidFill>
+            <a:prstDash val="solid"/>
+          </a:ln>
+        </p:spPr>
+      </p:sp>
+      <p:sp>
+        <p:nvSpPr>
+          <p:cNvPr id="44" name="Shape 42"/>
+          <p:cNvSpPr/>
+          <p:nvPr/>
+        </p:nvSpPr>
+        <p:spPr>
+          <a:xfrm>
+            <a:off x="3291840" y="4041648"/>
+            <a:ext cx="1645920" cy="420624"/>
+          </a:xfrm>
+          <a:prstGeom prst="rect">
+            <a:avLst/>
+          </a:prstGeom>
+          <a:solidFill>
+            <a:srgbClr val="CCFBF1"/>
+          </a:solidFill>
+          <a:ln w="12700">
+            <a:solidFill>
+              <a:srgbClr val="E5E7EB"/>
+            </a:solidFill>
+            <a:prstDash val="solid"/>
+          </a:ln>
+        </p:spPr>
+      </p:sp>
+      <p:sp>
+        <p:nvSpPr>
+          <p:cNvPr id="45" name="Text 43"/>
+          <p:cNvSpPr/>
+          <p:nvPr/>
+        </p:nvSpPr>
+        <p:spPr>
+          <a:xfrm>
+            <a:off x="3291840" y="4041648"/>
+            <a:ext cx="1645920" cy="420624"/>
+          </a:xfrm>
+          <a:prstGeom prst="rect">
+            <a:avLst/>
+          </a:prstGeom>
+          <a:noFill/>
+          <a:ln/>
+        </p:spPr>
+        <p:txBody>
+          <a:bodyPr wrap="square" lIns="0" tIns="0" rIns="0" bIns="0" rtlCol="0" anchor="ctr"/>
+          <a:lstStyle/>
+          <a:p>
+            <a:pPr algn="ctr" indent="0" marL="0">
+              <a:buNone/>
+            </a:pPr>
+            <a:r>
+              <a:rPr lang="en-US" sz="1300" b="1" dirty="0">
+                <a:solidFill>
+                  <a:srgbClr val="0F766E"/>
+                </a:solidFill>
+                <a:latin typeface="Trebuchet MS" pitchFamily="34" charset="0"/>
+                <a:ea typeface="Trebuchet MS" pitchFamily="34" charset="-122"/>
+                <a:cs typeface="Trebuchet MS" pitchFamily="34" charset="-120"/>
+              </a:rPr>
+              <a:t>heat</a:t>
+            </a:r>
+            <a:endParaRPr lang="en-US" sz="1300" dirty="0"/>
+          </a:p>
+        </p:txBody>
+      </p:sp>
+      <p:sp>
+        <p:nvSpPr>
+          <p:cNvPr id="46" name="Shape 44"/>
+          <p:cNvSpPr/>
+          <p:nvPr/>
+        </p:nvSpPr>
+        <p:spPr>
+          <a:xfrm>
+            <a:off x="5943600" y="4041648"/>
+            <a:ext cx="1463040" cy="420624"/>
+          </a:xfrm>
+          <a:prstGeom prst="rect">
+            <a:avLst/>
+          </a:prstGeom>
+          <a:solidFill>
+            <a:srgbClr val="FCE7F3"/>
+          </a:solidFill>
+          <a:ln w="12700">
+            <a:solidFill>
+              <a:srgbClr val="E5E7EB"/>
+            </a:solidFill>
+            <a:prstDash val="solid"/>
+          </a:ln>
+        </p:spPr>
+      </p:sp>
+      <p:sp>
+        <p:nvSpPr>
+          <p:cNvPr id="47" name="Text 45"/>
+          <p:cNvSpPr/>
+          <p:nvPr/>
+        </p:nvSpPr>
+        <p:spPr>
+          <a:xfrm>
+            <a:off x="5943600" y="4041648"/>
+            <a:ext cx="1463040" cy="420624"/>
+          </a:xfrm>
+          <a:prstGeom prst="rect">
+            <a:avLst/>
+          </a:prstGeom>
+          <a:noFill/>
+          <a:ln/>
+        </p:spPr>
+        <p:txBody>
+          <a:bodyPr wrap="square" lIns="0" tIns="0" rIns="0" bIns="0" rtlCol="0" anchor="ctr"/>
+          <a:lstStyle/>
+          <a:p>
+            <a:pPr algn="ctr" indent="0" marL="0">
+              <a:buNone/>
+            </a:pPr>
+            <a:r>
+              <a:rPr lang="en-US" sz="1300" b="1" dirty="0">
+                <a:solidFill>
+                  <a:srgbClr val="9D174D"/>
+                </a:solidFill>
+                <a:latin typeface="Trebuchet MS" pitchFamily="34" charset="0"/>
+                <a:ea typeface="Trebuchet MS" pitchFamily="34" charset="-122"/>
+                <a:cs typeface="Trebuchet MS" pitchFamily="34" charset="-120"/>
+              </a:rPr>
+              <a:t>-ate</a:t>
+            </a:r>
+            <a:endParaRPr lang="en-US" sz="1300" dirty="0"/>
+          </a:p>
+        </p:txBody>
+      </p:sp>
+      <p:sp>
+        <p:nvSpPr>
+          <p:cNvPr id="48" name="Text 46"/>
+          <p:cNvSpPr/>
+          <p:nvPr/>
+        </p:nvSpPr>
+        <p:spPr>
+          <a:xfrm>
+            <a:off x="365760" y="4636008"/>
             <a:ext cx="1097280" cy="420624"/>
           </a:xfrm>
           <a:prstGeom prst="rect">
@@ -38307,13 +41736,13 @@
       </p:sp>
       <p:sp>
         <p:nvSpPr>
-          <p:cNvPr id="44" name="Shape 42"/>
-          <p:cNvSpPr/>
-          <p:nvPr/>
-        </p:nvSpPr>
-        <p:spPr>
-          <a:xfrm>
-            <a:off x="1508760" y="4178808"/>
+          <p:cNvPr id="49" name="Shape 47"/>
+          <p:cNvSpPr/>
+          <p:nvPr/>
+        </p:nvSpPr>
+        <p:spPr>
+          <a:xfrm>
+            <a:off x="1508760" y="4636008"/>
             <a:ext cx="950976" cy="420624"/>
           </a:xfrm>
           <a:prstGeom prst="rect">
@@ -38341,13 +41770,13 @@
       </p:sp>
       <p:sp>
         <p:nvSpPr>
-          <p:cNvPr id="45" name="Text 43"/>
-          <p:cNvSpPr/>
-          <p:nvPr/>
-        </p:nvSpPr>
-        <p:spPr>
-          <a:xfrm>
-            <a:off x="1508760" y="4178808"/>
+          <p:cNvPr id="50" name="Text 48"/>
+          <p:cNvSpPr/>
+          <p:nvPr/>
+        </p:nvSpPr>
+        <p:spPr>
+          <a:xfrm>
+            <a:off x="1508760" y="4636008"/>
             <a:ext cx="950976" cy="420624"/>
           </a:xfrm>
           <a:prstGeom prst="rect">
@@ -38380,13 +41809,13 @@
       </p:sp>
       <p:sp>
         <p:nvSpPr>
-          <p:cNvPr id="46" name="Text 44"/>
-          <p:cNvSpPr/>
-          <p:nvPr/>
-        </p:nvSpPr>
-        <p:spPr>
-          <a:xfrm>
-            <a:off x="2487168" y="4178808"/>
+          <p:cNvPr id="51" name="Text 49"/>
+          <p:cNvSpPr/>
+          <p:nvPr/>
+        </p:nvSpPr>
+        <p:spPr>
+          <a:xfrm>
+            <a:off x="2487168" y="4636008"/>
             <a:ext cx="320040" cy="420624"/>
           </a:xfrm>
           <a:prstGeom prst="rect">
@@ -38419,13 +41848,13 @@
       </p:sp>
       <p:sp>
         <p:nvSpPr>
-          <p:cNvPr id="47" name="Shape 45"/>
-          <p:cNvSpPr/>
-          <p:nvPr/>
-        </p:nvSpPr>
-        <p:spPr>
-          <a:xfrm>
-            <a:off x="2834640" y="4178808"/>
+          <p:cNvPr id="52" name="Shape 50"/>
+          <p:cNvSpPr/>
+          <p:nvPr/>
+        </p:nvSpPr>
+        <p:spPr>
+          <a:xfrm>
+            <a:off x="2834640" y="4636008"/>
             <a:ext cx="950976" cy="420624"/>
           </a:xfrm>
           <a:prstGeom prst="rect">
@@ -38453,13 +41882,13 @@
       </p:sp>
       <p:sp>
         <p:nvSpPr>
-          <p:cNvPr id="48" name="Text 46"/>
-          <p:cNvSpPr/>
-          <p:nvPr/>
-        </p:nvSpPr>
-        <p:spPr>
-          <a:xfrm>
-            <a:off x="2834640" y="4178808"/>
+          <p:cNvPr id="53" name="Text 51"/>
+          <p:cNvSpPr/>
+          <p:nvPr/>
+        </p:nvSpPr>
+        <p:spPr>
+          <a:xfrm>
+            <a:off x="2834640" y="4636008"/>
             <a:ext cx="950976" cy="420624"/>
           </a:xfrm>
           <a:prstGeom prst="rect">
@@ -38484,7 +41913,7 @@
                 <a:ea typeface="Trebuchet MS" pitchFamily="34" charset="-122"/>
                 <a:cs typeface="Trebuchet MS" pitchFamily="34" charset="-120"/>
               </a:rPr>
-              <a:t>view</a:t>
+              <a:t>cede</a:t>
             </a:r>
             <a:endParaRPr lang="en-US" sz="1300" dirty="0"/>
           </a:p>
@@ -38492,13 +41921,13 @@
       </p:sp>
       <p:sp>
         <p:nvSpPr>
-          <p:cNvPr id="49" name="Text 47"/>
-          <p:cNvSpPr/>
-          <p:nvPr/>
-        </p:nvSpPr>
-        <p:spPr>
-          <a:xfrm>
-            <a:off x="3813048" y="4178808"/>
+          <p:cNvPr id="54" name="Text 52"/>
+          <p:cNvSpPr/>
+          <p:nvPr/>
+        </p:nvSpPr>
+        <p:spPr>
+          <a:xfrm>
+            <a:off x="3813048" y="4636008"/>
             <a:ext cx="320040" cy="420624"/>
           </a:xfrm>
           <a:prstGeom prst="rect">
@@ -38531,13 +41960,13 @@
       </p:sp>
       <p:sp>
         <p:nvSpPr>
-          <p:cNvPr id="50" name="Shape 48"/>
-          <p:cNvSpPr/>
-          <p:nvPr/>
-        </p:nvSpPr>
-        <p:spPr>
-          <a:xfrm>
-            <a:off x="4160520" y="4178808"/>
+          <p:cNvPr id="55" name="Shape 53"/>
+          <p:cNvSpPr/>
+          <p:nvPr/>
+        </p:nvSpPr>
+        <p:spPr>
+          <a:xfrm>
+            <a:off x="4160520" y="4636008"/>
             <a:ext cx="822960" cy="420624"/>
           </a:xfrm>
           <a:prstGeom prst="rect">
@@ -38565,13 +41994,13 @@
       </p:sp>
       <p:sp>
         <p:nvSpPr>
-          <p:cNvPr id="51" name="Text 49"/>
-          <p:cNvSpPr/>
-          <p:nvPr/>
-        </p:nvSpPr>
-        <p:spPr>
-          <a:xfrm>
-            <a:off x="4160520" y="4178808"/>
+          <p:cNvPr id="56" name="Text 54"/>
+          <p:cNvSpPr/>
+          <p:nvPr/>
+        </p:nvSpPr>
+        <p:spPr>
+          <a:xfrm>
+            <a:off x="4160520" y="4636008"/>
             <a:ext cx="822960" cy="420624"/>
           </a:xfrm>
           <a:prstGeom prst="rect">
@@ -38604,13 +42033,13 @@
       </p:sp>
       <p:sp>
         <p:nvSpPr>
-          <p:cNvPr id="52" name="Text 50"/>
-          <p:cNvSpPr/>
-          <p:nvPr/>
-        </p:nvSpPr>
-        <p:spPr>
-          <a:xfrm>
-            <a:off x="5056632" y="4178808"/>
+          <p:cNvPr id="57" name="Text 55"/>
+          <p:cNvSpPr/>
+          <p:nvPr/>
+        </p:nvSpPr>
+        <p:spPr>
+          <a:xfrm>
+            <a:off x="5056632" y="4636008"/>
             <a:ext cx="365760" cy="420624"/>
           </a:xfrm>
           <a:prstGeom prst="rect">
@@ -38643,13 +42072,13 @@
       </p:sp>
       <p:sp>
         <p:nvSpPr>
-          <p:cNvPr id="53" name="Shape 51"/>
-          <p:cNvSpPr/>
-          <p:nvPr/>
-        </p:nvSpPr>
-        <p:spPr>
-          <a:xfrm>
-            <a:off x="5468112" y="4178808"/>
+          <p:cNvPr id="58" name="Shape 56"/>
+          <p:cNvSpPr/>
+          <p:nvPr/>
+        </p:nvSpPr>
+        <p:spPr>
+          <a:xfrm>
+            <a:off x="5468112" y="4636008"/>
             <a:ext cx="2194560" cy="420624"/>
           </a:xfrm>
           <a:prstGeom prst="rect">
@@ -38670,13 +42099,13 @@
       </p:sp>
       <p:sp>
         <p:nvSpPr>
-          <p:cNvPr id="54" name="Text 52"/>
-          <p:cNvSpPr/>
-          <p:nvPr/>
-        </p:nvSpPr>
-        <p:spPr>
-          <a:xfrm>
-            <a:off x="5468112" y="4178808"/>
+          <p:cNvPr id="59" name="Text 57"/>
+          <p:cNvSpPr/>
+          <p:nvPr/>
+        </p:nvSpPr>
+        <p:spPr>
+          <a:xfrm>
+            <a:off x="5468112" y="4636008"/>
             <a:ext cx="2194560" cy="420624"/>
           </a:xfrm>
           <a:prstGeom prst="rect">
@@ -38701,7 +42130,7 @@
                 <a:ea typeface="Trebuchet MS" pitchFamily="34" charset="-122"/>
                 <a:cs typeface="Trebuchet MS" pitchFamily="34" charset="-120"/>
               </a:rPr>
-              <a:t>preview</a:t>
+              <a:t>prepay</a:t>
             </a:r>
             <a:endParaRPr lang="en-US" sz="1400" dirty="0"/>
           </a:p>
@@ -38993,7 +42422,7 @@
                 <a:ea typeface="Calibri" pitchFamily="34" charset="-122"/>
                 <a:cs typeface="Calibri" pitchFamily="34" charset="-120"/>
               </a:rPr>
-              <a:t>Word Labs  •  wordlabs.app  •  Prefix: 'pre-' = before, in advance</a:t>
+              <a:t>Word Labs  •  wordlabs.app  •  Prefix: 'pre-' = before</a:t>
             </a:r>
             <a:endParaRPr lang="en-US" sz="800" dirty="0"/>
           </a:p>
@@ -39105,7 +42534,7 @@
                 <a:ea typeface="Trebuchet MS" pitchFamily="34" charset="-122"/>
                 <a:cs typeface="Trebuchet MS" pitchFamily="34" charset="-120"/>
               </a:rPr>
-              <a:t>preview</a:t>
+              <a:t>prepay</a:t>
             </a:r>
             <a:endParaRPr lang="en-US" sz="1200" dirty="0"/>
           </a:p>
@@ -39171,7 +42600,7 @@
                 <a:ea typeface="Calibri" pitchFamily="34" charset="-122"/>
                 <a:cs typeface="Calibri" pitchFamily="34" charset="-120"/>
               </a:rPr>
-              <a:t>To get ready for something before it happens.</a:t>
+              <a:t>to plan something in advance</a:t>
             </a:r>
             <a:endParaRPr lang="en-US" sz="1200" dirty="0"/>
           </a:p>
@@ -39244,7 +42673,7 @@
                 <a:ea typeface="Trebuchet MS" pitchFamily="34" charset="-122"/>
                 <a:cs typeface="Trebuchet MS" pitchFamily="34" charset="-120"/>
               </a:rPr>
-              <a:t>predict</a:t>
+              <a:t>preheat</a:t>
             </a:r>
             <a:endParaRPr lang="en-US" sz="1200" dirty="0"/>
           </a:p>
@@ -39310,7 +42739,7 @@
                 <a:ea typeface="Calibri" pitchFamily="34" charset="-122"/>
                 <a:cs typeface="Calibri" pitchFamily="34" charset="-120"/>
               </a:rPr>
-              <a:t>To heat an oven to the right temperature before putting food in.</a:t>
+              <a:t>a look at something before it is officially shown or released</a:t>
             </a:r>
             <a:endParaRPr lang="en-US" sz="1200" dirty="0"/>
           </a:p>
@@ -39383,7 +42812,7 @@
                 <a:ea typeface="Trebuchet MS" pitchFamily="34" charset="-122"/>
                 <a:cs typeface="Trebuchet MS" pitchFamily="34" charset="-120"/>
               </a:rPr>
-              <a:t>prepare</a:t>
+              <a:t>preplan</a:t>
             </a:r>
             <a:endParaRPr lang="en-US" sz="1200" dirty="0"/>
           </a:p>
@@ -39449,7 +42878,7 @@
                 <a:ea typeface="Calibri" pitchFamily="34" charset="-122"/>
                 <a:cs typeface="Calibri" pitchFamily="34" charset="-120"/>
               </a:rPr>
-              <a:t>To look at or watch something before it is officially released or shown.</a:t>
+              <a:t>to pay for something before receiving it</a:t>
             </a:r>
             <a:endParaRPr lang="en-US" sz="1200" dirty="0"/>
           </a:p>
@@ -39522,7 +42951,7 @@
                 <a:ea typeface="Trebuchet MS" pitchFamily="34" charset="-122"/>
                 <a:cs typeface="Trebuchet MS" pitchFamily="34" charset="-120"/>
               </a:rPr>
-              <a:t>preschool</a:t>
+              <a:t>pretest</a:t>
             </a:r>
             <a:endParaRPr lang="en-US" sz="1200" dirty="0"/>
           </a:p>
@@ -39588,7 +43017,7 @@
                 <a:ea typeface="Calibri" pitchFamily="34" charset="-122"/>
                 <a:cs typeface="Calibri" pitchFamily="34" charset="-120"/>
               </a:rPr>
-              <a:t>Something that has already been paid for before it is used.</a:t>
+              <a:t>to form an opinion about someone or something before knowing the facts</a:t>
             </a:r>
             <a:endParaRPr lang="en-US" sz="1200" dirty="0"/>
           </a:p>
@@ -39661,7 +43090,7 @@
                 <a:ea typeface="Trebuchet MS" pitchFamily="34" charset="-122"/>
                 <a:cs typeface="Trebuchet MS" pitchFamily="34" charset="-120"/>
               </a:rPr>
-              <a:t>preheat</a:t>
+              <a:t>preview</a:t>
             </a:r>
             <a:endParaRPr lang="en-US" sz="1200" dirty="0"/>
           </a:p>
@@ -39727,7 +43156,7 @@
                 <a:ea typeface="Calibri" pitchFamily="34" charset="-122"/>
                 <a:cs typeface="Calibri" pitchFamily="34" charset="-120"/>
               </a:rPr>
-              <a:t>To stop something from happening before it occurs.</a:t>
+              <a:t>looks at something before its official release</a:t>
             </a:r>
             <a:endParaRPr lang="en-US" sz="1200" dirty="0"/>
           </a:p>
@@ -39800,7 +43229,7 @@
                 <a:ea typeface="Trebuchet MS" pitchFamily="34" charset="-122"/>
                 <a:cs typeface="Trebuchet MS" pitchFamily="34" charset="-120"/>
               </a:rPr>
-              <a:t>prepaid</a:t>
+              <a:t>prejudge</a:t>
             </a:r>
             <a:endParaRPr lang="en-US" sz="1200" dirty="0"/>
           </a:p>
@@ -39866,7 +43295,7 @@
                 <a:ea typeface="Calibri" pitchFamily="34" charset="-122"/>
                 <a:cs typeface="Calibri" pitchFamily="34" charset="-120"/>
               </a:rPr>
-              <a:t>A school or program for young children before they start primary school.</a:t>
+              <a:t>a test given before something to check what is already known</a:t>
             </a:r>
             <a:endParaRPr lang="en-US" sz="1200" dirty="0"/>
           </a:p>
@@ -39939,7 +43368,7 @@
                 <a:ea typeface="Trebuchet MS" pitchFamily="34" charset="-122"/>
                 <a:cs typeface="Trebuchet MS" pitchFamily="34" charset="-120"/>
               </a:rPr>
-              <a:t>prevent</a:t>
+              <a:t>previews</a:t>
             </a:r>
             <a:endParaRPr lang="en-US" sz="1200" dirty="0"/>
           </a:p>
@@ -40005,7 +43434,7 @@
                 <a:ea typeface="Calibri" pitchFamily="34" charset="-122"/>
                 <a:cs typeface="Calibri" pitchFamily="34" charset="-120"/>
               </a:rPr>
-              <a:t>To say what you think will happen in the future before it occurs.</a:t>
+              <a:t>to heat something, like an oven, before using it</a:t>
             </a:r>
             <a:endParaRPr lang="en-US" sz="1200" dirty="0"/>
           </a:p>
@@ -40297,7 +43726,7 @@
                 <a:ea typeface="Calibri" pitchFamily="34" charset="-122"/>
                 <a:cs typeface="Calibri" pitchFamily="34" charset="-120"/>
               </a:rPr>
-              <a:t>Word Labs  •  wordlabs.app  •  Prefix: 'pre-' = before, in advance</a:t>
+              <a:t>Word Labs  •  wordlabs.app  •  Prefix: 'pre-' = before</a:t>
             </a:r>
             <a:endParaRPr lang="en-US" sz="800" dirty="0"/>
           </a:p>
@@ -40500,7 +43929,7 @@
                 <a:ea typeface="Calibri" pitchFamily="34" charset="-122"/>
                 <a:cs typeface="Calibri" pitchFamily="34" charset="-120"/>
               </a:rPr>
-              <a:t>Mum asked me to preheat the oven before she started making the pizza.</a:t>
+              <a:t>You can prepay for your parking space online.</a:t>
             </a:r>
             <a:endParaRPr lang="en-US" sz="1500" dirty="0"/>
           </a:p>
@@ -40664,7 +44093,7 @@
                 <a:ea typeface="Calibri" pitchFamily="34" charset="-122"/>
                 <a:cs typeface="Calibri" pitchFamily="34" charset="-120"/>
               </a:rPr>
-              <a:t>The weather reporter tried to predict whether it would rain on the weekend.</a:t>
+              <a:t>Preheat the oven to 200 degrees before baking the cake.</a:t>
             </a:r>
             <a:endParaRPr lang="en-US" sz="1500" dirty="0"/>
           </a:p>
@@ -40828,7 +44257,7 @@
                 <a:ea typeface="Calibri" pitchFamily="34" charset="-122"/>
                 <a:cs typeface="Calibri" pitchFamily="34" charset="-120"/>
               </a:rPr>
-              <a:t>We got to watch a preview of the new movie at the cinema last Friday.</a:t>
+              <a:t>It's wise to preplan your route before a long journey.</a:t>
             </a:r>
             <a:endParaRPr lang="en-US" sz="1500" dirty="0"/>
           </a:p>
